--- a/docs/資料/中小企業助成金支援協会_資料請求資料.pptx
+++ b/docs/資料/中小企業助成金支援協会_資料請求資料.pptx
@@ -17,9 +17,10 @@
     <p:sldId id="265" r:id="rId11"/>
     <p:sldId id="266" r:id="rId12"/>
     <p:sldId id="267" r:id="rId13"/>
+    <p:sldId id="268" r:id="rId14"/>
   </p:sldIdLst>
   <p:notesMasterIdLst>
-    <p:notesMasterId r:id="rId14"/>
+    <p:notesMasterId r:id="rId15"/>
   </p:notesMasterIdLst>
   <p:sldSz cx="12192000" cy="6858000"/>
   <p:notesSz cx="6858000" cy="12192000"/>
@@ -801,6 +802,94 @@
             <a:fld id="{F7021451-1387-4CA6-816F-3879F97B5CBC}" type="slidenum">
               <a:rPr lang="en-US"/>
               <a:t>12</a:t>
+            </a:fld>
+            <a:endParaRPr lang="en-US"/>
+          </a:p>
+        </p:txBody>
+      </p:sp>
+    </p:spTree>
+    <p:extLst>
+      <p:ext uri="{BB962C8B-B14F-4D97-AF65-F5344CB8AC3E}">
+        <p14:creationId xmlns:p14="http://schemas.microsoft.com/office/powerpoint/2010/main" val="1024086991"/>
+      </p:ext>
+    </p:extLst>
+  </p:cSld>
+  <p:clrMapOvr>
+    <a:masterClrMapping/>
+  </p:clrMapOvr>
+</p:notes>
+</file>
+
+<file path=ppt/notesSlides/notesSlide13.xml><?xml version="1.0" encoding="utf-8"?>
+<p:notes xmlns:a="http://schemas.openxmlformats.org/drawingml/2006/main" xmlns:r="http://schemas.openxmlformats.org/officeDocument/2006/relationships" xmlns:p="http://schemas.openxmlformats.org/presentationml/2006/main">
+  <p:cSld>
+    <p:spTree>
+      <p:nvGrpSpPr>
+        <p:cNvPr id="1" name=""/>
+        <p:cNvGrpSpPr/>
+        <p:nvPr/>
+      </p:nvGrpSpPr>
+      <p:grpSpPr>
+        <a:xfrm>
+          <a:off x="0" y="0"/>
+          <a:ext cx="0" cy="0"/>
+          <a:chOff x="0" y="0"/>
+          <a:chExt cx="0" cy="0"/>
+        </a:xfrm>
+      </p:grpSpPr>
+      <p:sp>
+        <p:nvSpPr>
+          <p:cNvPr id="2" name="Slide Image Placeholder 1"/>
+          <p:cNvSpPr>
+            <a:spLocks noGrp="1" noRot="1" noChangeAspect="1"/>
+          </p:cNvSpPr>
+          <p:nvPr>
+            <p:ph type="sldImg"/>
+          </p:nvPr>
+        </p:nvSpPr>
+        <p:spPr/>
+      </p:sp>
+      <p:sp>
+        <p:nvSpPr>
+          <p:cNvPr id="3" name="Notes Placeholder 2"/>
+          <p:cNvSpPr>
+            <a:spLocks noGrp="1"/>
+          </p:cNvSpPr>
+          <p:nvPr>
+            <p:ph type="body" idx="1"/>
+          </p:nvPr>
+        </p:nvSpPr>
+        <p:spPr/>
+        <p:txBody>
+          <a:bodyPr/>
+          <a:lstStyle/>
+          <a:p>
+            <a:r>
+              <a:rPr lang="en-US" dirty="0"/>
+              <a:t/>
+            </a:r>
+            <a:endParaRPr lang="en-US" dirty="0"/>
+          </a:p>
+        </p:txBody>
+      </p:sp>
+      <p:sp>
+        <p:nvSpPr>
+          <p:cNvPr id="4" name="Slide Number Placeholder 3"/>
+          <p:cNvSpPr>
+            <a:spLocks noGrp="1"/>
+          </p:cNvSpPr>
+          <p:nvPr>
+            <p:ph type="sldNum" sz="quarter" idx="10"/>
+          </p:nvPr>
+        </p:nvSpPr>
+        <p:spPr/>
+        <p:txBody>
+          <a:bodyPr/>
+          <a:lstStyle/>
+          <a:p>
+            <a:fld id="{F7021451-1387-4CA6-816F-3879F97B5CBC}" type="slidenum">
+              <a:rPr lang="en-US"/>
+              <a:t>13</a:t>
             </a:fld>
             <a:endParaRPr lang="en-US"/>
           </a:p>
@@ -2454,7 +2543,7 @@
                 <a:ea typeface="Bookman Old Style" pitchFamily="34" charset="-122"/>
                 <a:cs typeface="Bookman Old Style" pitchFamily="34" charset="-120"/>
               </a:rPr>
-              <a:t>よくあるご質問</a:t>
+              <a:t>ご利用にあたって</a:t>
             </a:r>
             <a:endParaRPr lang="en-US" sz="2800" dirty="0"/>
           </a:p>
@@ -2462,19 +2551,78 @@
       </p:sp>
       <p:sp>
         <p:nvSpPr>
-          <p:cNvPr id="3" name="Shape 1"/>
-          <p:cNvSpPr/>
-          <p:nvPr/>
-        </p:nvSpPr>
-        <p:spPr>
-          <a:xfrm>
-            <a:off x="640080" y="1371600"/>
-            <a:ext cx="502920" cy="502920"/>
+          <p:cNvPr id="3" name="Text 1"/>
+          <p:cNvSpPr/>
+          <p:nvPr/>
+        </p:nvSpPr>
+        <p:spPr>
+          <a:xfrm>
+            <a:off x="640080" y="1051560"/>
+            <a:ext cx="10058400" cy="365760"/>
+          </a:xfrm>
+          <a:prstGeom prst="rect">
+            <a:avLst/>
+          </a:prstGeom>
+          <a:noFill/>
+          <a:ln/>
+        </p:spPr>
+        <p:txBody>
+          <a:bodyPr wrap="square" lIns="0" tIns="0" rIns="0" bIns="0" rtlCol="0" anchor="ctr"/>
+          <a:lstStyle/>
+          <a:p>
+            <a:pPr indent="0" marL="0">
+              <a:buNone/>
+            </a:pPr>
+            <a:r>
+              <a:rPr lang="en-US" sz="1300" dirty="0">
+                <a:solidFill>
+                  <a:srgbClr val="6B7280"/>
+                </a:solidFill>
+                <a:latin typeface="Calibri" pitchFamily="34" charset="0"/>
+                <a:ea typeface="Calibri" pitchFamily="34" charset="-122"/>
+                <a:cs typeface="Calibri" pitchFamily="34" charset="-120"/>
+              </a:rPr>
+              <a:t>安心してご相談いただくために</a:t>
+            </a:r>
+            <a:endParaRPr lang="en-US" sz="1300" dirty="0"/>
+          </a:p>
+        </p:txBody>
+      </p:sp>
+      <p:sp>
+        <p:nvSpPr>
+          <p:cNvPr id="4" name="Shape 2"/>
+          <p:cNvSpPr/>
+          <p:nvPr/>
+        </p:nvSpPr>
+        <p:spPr>
+          <a:xfrm>
+            <a:off x="640080" y="1737360"/>
+            <a:ext cx="5074920" cy="1783080"/>
           </a:xfrm>
           <a:prstGeom prst="roundRect">
             <a:avLst>
-              <a:gd name="adj" fmla="val 14545"/>
+              <a:gd name="adj" fmla="val 4103"/>
             </a:avLst>
+          </a:prstGeom>
+          <a:solidFill>
+            <a:srgbClr val="F2F7F4"/>
+          </a:solidFill>
+          <a:ln/>
+        </p:spPr>
+      </p:sp>
+      <p:sp>
+        <p:nvSpPr>
+          <p:cNvPr id="5" name="Shape 3"/>
+          <p:cNvSpPr/>
+          <p:nvPr/>
+        </p:nvSpPr>
+        <p:spPr>
+          <a:xfrm>
+            <a:off x="982980" y="2240280"/>
+            <a:ext cx="777240" cy="777240"/>
+          </a:xfrm>
+          <a:prstGeom prst="ellipse">
+            <a:avLst/>
           </a:prstGeom>
           <a:solidFill>
             <a:srgbClr val="1B4D3E"/>
@@ -2482,79 +2630,64 @@
           <a:ln/>
         </p:spPr>
       </p:sp>
-      <p:sp>
-        <p:nvSpPr>
-          <p:cNvPr id="4" name="Text 2"/>
-          <p:cNvSpPr/>
-          <p:nvPr/>
-        </p:nvSpPr>
-        <p:spPr>
-          <a:xfrm>
-            <a:off x="640080" y="1371600"/>
-            <a:ext cx="502920" cy="502920"/>
-          </a:xfrm>
-          <a:prstGeom prst="rect">
-            <a:avLst/>
-          </a:prstGeom>
-          <a:noFill/>
-          <a:ln/>
-        </p:spPr>
-        <p:txBody>
-          <a:bodyPr wrap="square" lIns="0" tIns="0" rIns="0" bIns="0" rtlCol="0" anchor="ctr"/>
-          <a:lstStyle/>
-          <a:p>
-            <a:pPr algn="ctr" indent="0" marL="0">
-              <a:buNone/>
-            </a:pPr>
-            <a:r>
-              <a:rPr lang="en-US" sz="1800" b="1" dirty="0">
-                <a:solidFill>
-                  <a:srgbClr val="F2A93B"/>
+      <p:pic>
+        <p:nvPicPr>
+          <p:cNvPr id="6" name="Image 0" descr="/tmp/claude-0/-home-user-DM-/98b145ee-d85d-5913-a881-95f99ca0c0f7/scratchpad/josei-pptx/icons/search_FFFFFF.png">    </p:cNvPr>
+          <p:cNvPicPr>
+            <a:picLocks noChangeAspect="1"/>
+          </p:cNvPicPr>
+          <p:nvPr/>
+        </p:nvPicPr>
+        <p:blipFill>
+          <a:blip r:embed="rId1"/>
+          <a:stretch>
+            <a:fillRect/>
+          </a:stretch>
+        </p:blipFill>
+        <p:spPr>
+          <a:xfrm>
+            <a:off x="1169518" y="2426818"/>
+            <a:ext cx="404165" cy="404165"/>
+          </a:xfrm>
+          <a:prstGeom prst="rect">
+            <a:avLst/>
+          </a:prstGeom>
+        </p:spPr>
+      </p:pic>
+      <p:sp>
+        <p:nvSpPr>
+          <p:cNvPr id="7" name="Text 4"/>
+          <p:cNvSpPr/>
+          <p:nvPr/>
+        </p:nvSpPr>
+        <p:spPr>
+          <a:xfrm>
+            <a:off x="1920240" y="2011680"/>
+            <a:ext cx="3520440" cy="411480"/>
+          </a:xfrm>
+          <a:prstGeom prst="rect">
+            <a:avLst/>
+          </a:prstGeom>
+          <a:noFill/>
+          <a:ln/>
+        </p:spPr>
+        <p:txBody>
+          <a:bodyPr wrap="square" lIns="0" tIns="0" rIns="0" bIns="0" rtlCol="0" anchor="ctr"/>
+          <a:lstStyle/>
+          <a:p>
+            <a:pPr indent="0" marL="0">
+              <a:buNone/>
+            </a:pPr>
+            <a:r>
+              <a:rPr lang="en-US" sz="1450" b="1" dirty="0">
+                <a:solidFill>
+                  <a:srgbClr val="1B4D3E"/>
                 </a:solidFill>
                 <a:latin typeface="Bookman Old Style" pitchFamily="34" charset="0"/>
                 <a:ea typeface="Bookman Old Style" pitchFamily="34" charset="-122"/>
                 <a:cs typeface="Bookman Old Style" pitchFamily="34" charset="-120"/>
               </a:rPr>
-              <a:t>Q</a:t>
-            </a:r>
-            <a:endParaRPr lang="en-US" sz="1800" dirty="0"/>
-          </a:p>
-        </p:txBody>
-      </p:sp>
-      <p:sp>
-        <p:nvSpPr>
-          <p:cNvPr id="5" name="Text 3"/>
-          <p:cNvSpPr/>
-          <p:nvPr/>
-        </p:nvSpPr>
-        <p:spPr>
-          <a:xfrm>
-            <a:off x="1325880" y="1371600"/>
-            <a:ext cx="10149840" cy="457200"/>
-          </a:xfrm>
-          <a:prstGeom prst="rect">
-            <a:avLst/>
-          </a:prstGeom>
-          <a:noFill/>
-          <a:ln/>
-        </p:spPr>
-        <p:txBody>
-          <a:bodyPr wrap="square" lIns="0" tIns="0" rIns="0" bIns="0" rtlCol="0" anchor="ctr"/>
-          <a:lstStyle/>
-          <a:p>
-            <a:pPr indent="0" marL="0">
-              <a:buNone/>
-            </a:pPr>
-            <a:r>
-              <a:rPr lang="en-US" sz="1450" b="1" dirty="0">
-                <a:solidFill>
-                  <a:srgbClr val="1B4D3E"/>
-                </a:solidFill>
-                <a:latin typeface="Bookman Old Style" pitchFamily="34" charset="0"/>
-                <a:ea typeface="Bookman Old Style" pitchFamily="34" charset="-122"/>
-                <a:cs typeface="Bookman Old Style" pitchFamily="34" charset="-120"/>
-              </a:rPr>
-              <a:t>本当に30〜50%も削減できますか？</a:t>
+              <a:t>初回相談</a:t>
             </a:r>
             <a:endParaRPr lang="en-US" sz="1450" dirty="0"/>
           </a:p>
@@ -2562,14 +2695,14 @@
       </p:sp>
       <p:sp>
         <p:nvSpPr>
-          <p:cNvPr id="6" name="Text 4"/>
-          <p:cNvSpPr/>
-          <p:nvPr/>
-        </p:nvSpPr>
-        <p:spPr>
-          <a:xfrm>
-            <a:off x="1325880" y="1828800"/>
-            <a:ext cx="10149840" cy="502920"/>
+          <p:cNvPr id="8" name="Text 5"/>
+          <p:cNvSpPr/>
+          <p:nvPr/>
+        </p:nvSpPr>
+        <p:spPr>
+          <a:xfrm>
+            <a:off x="1920240" y="2468880"/>
+            <a:ext cx="3520440" cy="822960"/>
           </a:xfrm>
           <a:prstGeom prst="rect">
             <a:avLst/>
@@ -2588,7 +2721,7 @@
               <a:buNone/>
             </a:pPr>
             <a:r>
-              <a:rPr lang="en-US" sz="1200" dirty="0">
+              <a:rPr lang="en-US" sz="1300" b="1" dirty="0">
                 <a:solidFill>
                   <a:srgbClr val="24272E"/>
                 </a:solidFill>
@@ -2596,27 +2729,47 @@
                 <a:ea typeface="Calibri" pitchFamily="34" charset="-122"/>
                 <a:cs typeface="Calibri" pitchFamily="34" charset="-120"/>
               </a:rPr>
-              <a:t>支援先の導入実績に基づく削減率です。建物条件・使用状況により効果は異なるため、無料相談で個別にご案内します。</a:t>
-            </a:r>
-            <a:endParaRPr lang="en-US" sz="1200" dirty="0"/>
-          </a:p>
-        </p:txBody>
-      </p:sp>
-      <p:sp>
-        <p:nvSpPr>
-          <p:cNvPr id="7" name="Shape 5"/>
-          <p:cNvSpPr/>
-          <p:nvPr/>
-        </p:nvSpPr>
-        <p:spPr>
-          <a:xfrm>
-            <a:off x="640080" y="2514600"/>
-            <a:ext cx="502920" cy="502920"/>
+              <a:t>無料</a:t>
+            </a:r>
+            <a:endParaRPr lang="en-US" sz="1300" dirty="0"/>
+          </a:p>
+        </p:txBody>
+      </p:sp>
+      <p:sp>
+        <p:nvSpPr>
+          <p:cNvPr id="9" name="Shape 6"/>
+          <p:cNvSpPr/>
+          <p:nvPr/>
+        </p:nvSpPr>
+        <p:spPr>
+          <a:xfrm>
+            <a:off x="6080760" y="1737360"/>
+            <a:ext cx="5074920" cy="1783080"/>
           </a:xfrm>
           <a:prstGeom prst="roundRect">
             <a:avLst>
-              <a:gd name="adj" fmla="val 14545"/>
+              <a:gd name="adj" fmla="val 4103"/>
             </a:avLst>
+          </a:prstGeom>
+          <a:solidFill>
+            <a:srgbClr val="F2F7F4"/>
+          </a:solidFill>
+          <a:ln/>
+        </p:spPr>
+      </p:sp>
+      <p:sp>
+        <p:nvSpPr>
+          <p:cNvPr id="10" name="Shape 7"/>
+          <p:cNvSpPr/>
+          <p:nvPr/>
+        </p:nvSpPr>
+        <p:spPr>
+          <a:xfrm>
+            <a:off x="6423660" y="2240280"/>
+            <a:ext cx="777240" cy="777240"/>
+          </a:xfrm>
+          <a:prstGeom prst="ellipse">
+            <a:avLst/>
           </a:prstGeom>
           <a:solidFill>
             <a:srgbClr val="1B4D3E"/>
@@ -2624,79 +2777,64 @@
           <a:ln/>
         </p:spPr>
       </p:sp>
-      <p:sp>
-        <p:nvSpPr>
-          <p:cNvPr id="8" name="Text 6"/>
-          <p:cNvSpPr/>
-          <p:nvPr/>
-        </p:nvSpPr>
-        <p:spPr>
-          <a:xfrm>
-            <a:off x="640080" y="2514600"/>
-            <a:ext cx="502920" cy="502920"/>
-          </a:xfrm>
-          <a:prstGeom prst="rect">
-            <a:avLst/>
-          </a:prstGeom>
-          <a:noFill/>
-          <a:ln/>
-        </p:spPr>
-        <p:txBody>
-          <a:bodyPr wrap="square" lIns="0" tIns="0" rIns="0" bIns="0" rtlCol="0" anchor="ctr"/>
-          <a:lstStyle/>
-          <a:p>
-            <a:pPr algn="ctr" indent="0" marL="0">
-              <a:buNone/>
-            </a:pPr>
-            <a:r>
-              <a:rPr lang="en-US" sz="1800" b="1" dirty="0">
-                <a:solidFill>
-                  <a:srgbClr val="F2A93B"/>
+      <p:pic>
+        <p:nvPicPr>
+          <p:cNvPr id="11" name="Image 1" descr="/tmp/claude-0/-home-user-DM-/98b145ee-d85d-5913-a881-95f99ca0c0f7/scratchpad/josei-pptx/icons/laptop_FFFFFF.png">    </p:cNvPr>
+          <p:cNvPicPr>
+            <a:picLocks noChangeAspect="1"/>
+          </p:cNvPicPr>
+          <p:nvPr/>
+        </p:nvPicPr>
+        <p:blipFill>
+          <a:blip r:embed="rId2"/>
+          <a:stretch>
+            <a:fillRect/>
+          </a:stretch>
+        </p:blipFill>
+        <p:spPr>
+          <a:xfrm>
+            <a:off x="6610198" y="2426818"/>
+            <a:ext cx="404165" cy="404165"/>
+          </a:xfrm>
+          <a:prstGeom prst="rect">
+            <a:avLst/>
+          </a:prstGeom>
+        </p:spPr>
+      </p:pic>
+      <p:sp>
+        <p:nvSpPr>
+          <p:cNvPr id="12" name="Text 8"/>
+          <p:cNvSpPr/>
+          <p:nvPr/>
+        </p:nvSpPr>
+        <p:spPr>
+          <a:xfrm>
+            <a:off x="7360920" y="2011680"/>
+            <a:ext cx="3520440" cy="411480"/>
+          </a:xfrm>
+          <a:prstGeom prst="rect">
+            <a:avLst/>
+          </a:prstGeom>
+          <a:noFill/>
+          <a:ln/>
+        </p:spPr>
+        <p:txBody>
+          <a:bodyPr wrap="square" lIns="0" tIns="0" rIns="0" bIns="0" rtlCol="0" anchor="ctr"/>
+          <a:lstStyle/>
+          <a:p>
+            <a:pPr indent="0" marL="0">
+              <a:buNone/>
+            </a:pPr>
+            <a:r>
+              <a:rPr lang="en-US" sz="1450" b="1" dirty="0">
+                <a:solidFill>
+                  <a:srgbClr val="1B4D3E"/>
                 </a:solidFill>
                 <a:latin typeface="Bookman Old Style" pitchFamily="34" charset="0"/>
                 <a:ea typeface="Bookman Old Style" pitchFamily="34" charset="-122"/>
                 <a:cs typeface="Bookman Old Style" pitchFamily="34" charset="-120"/>
               </a:rPr>
-              <a:t>Q</a:t>
-            </a:r>
-            <a:endParaRPr lang="en-US" sz="1800" dirty="0"/>
-          </a:p>
-        </p:txBody>
-      </p:sp>
-      <p:sp>
-        <p:nvSpPr>
-          <p:cNvPr id="9" name="Text 7"/>
-          <p:cNvSpPr/>
-          <p:nvPr/>
-        </p:nvSpPr>
-        <p:spPr>
-          <a:xfrm>
-            <a:off x="1325880" y="2514600"/>
-            <a:ext cx="10149840" cy="457200"/>
-          </a:xfrm>
-          <a:prstGeom prst="rect">
-            <a:avLst/>
-          </a:prstGeom>
-          <a:noFill/>
-          <a:ln/>
-        </p:spPr>
-        <p:txBody>
-          <a:bodyPr wrap="square" lIns="0" tIns="0" rIns="0" bIns="0" rtlCol="0" anchor="ctr"/>
-          <a:lstStyle/>
-          <a:p>
-            <a:pPr indent="0" marL="0">
-              <a:buNone/>
-            </a:pPr>
-            <a:r>
-              <a:rPr lang="en-US" sz="1450" b="1" dirty="0">
-                <a:solidFill>
-                  <a:srgbClr val="1B4D3E"/>
-                </a:solidFill>
-                <a:latin typeface="Bookman Old Style" pitchFamily="34" charset="0"/>
-                <a:ea typeface="Bookman Old Style" pitchFamily="34" charset="-122"/>
-                <a:cs typeface="Bookman Old Style" pitchFamily="34" charset="-120"/>
-              </a:rPr>
-              <a:t>初期費用はどのくらいかかりますか？</a:t>
+              <a:t>AI診断</a:t>
             </a:r>
             <a:endParaRPr lang="en-US" sz="1450" dirty="0"/>
           </a:p>
@@ -2704,14 +2842,14 @@
       </p:sp>
       <p:sp>
         <p:nvSpPr>
-          <p:cNvPr id="10" name="Text 8"/>
-          <p:cNvSpPr/>
-          <p:nvPr/>
-        </p:nvSpPr>
-        <p:spPr>
-          <a:xfrm>
-            <a:off x="1325880" y="2971800"/>
-            <a:ext cx="10149840" cy="502920"/>
+          <p:cNvPr id="13" name="Text 9"/>
+          <p:cNvSpPr/>
+          <p:nvPr/>
+        </p:nvSpPr>
+        <p:spPr>
+          <a:xfrm>
+            <a:off x="7360920" y="2468880"/>
+            <a:ext cx="3520440" cy="822960"/>
           </a:xfrm>
           <a:prstGeom prst="rect">
             <a:avLst/>
@@ -2730,7 +2868,7 @@
               <a:buNone/>
             </a:pPr>
             <a:r>
-              <a:rPr lang="en-US" sz="1200" dirty="0">
+              <a:rPr lang="en-US" sz="1300" b="1" dirty="0">
                 <a:solidFill>
                   <a:srgbClr val="24272E"/>
                 </a:solidFill>
@@ -2738,27 +2876,47 @@
                 <a:ea typeface="Calibri" pitchFamily="34" charset="-122"/>
                 <a:cs typeface="Calibri" pitchFamily="34" charset="-120"/>
               </a:rPr>
-              <a:t>設備・規模やご紹介する施工会社により異なります。補助金活用で自己負担を抑えられる場合もございます。</a:t>
-            </a:r>
-            <a:endParaRPr lang="en-US" sz="1200" dirty="0"/>
-          </a:p>
-        </p:txBody>
-      </p:sp>
-      <p:sp>
-        <p:nvSpPr>
-          <p:cNvPr id="11" name="Shape 9"/>
-          <p:cNvSpPr/>
-          <p:nvPr/>
-        </p:nvSpPr>
-        <p:spPr>
-          <a:xfrm>
-            <a:off x="640080" y="3657600"/>
-            <a:ext cx="502920" cy="502920"/>
+              <a:t>無料</a:t>
+            </a:r>
+            <a:endParaRPr lang="en-US" sz="1300" dirty="0"/>
+          </a:p>
+        </p:txBody>
+      </p:sp>
+      <p:sp>
+        <p:nvSpPr>
+          <p:cNvPr id="14" name="Shape 10"/>
+          <p:cNvSpPr/>
+          <p:nvPr/>
+        </p:nvSpPr>
+        <p:spPr>
+          <a:xfrm>
+            <a:off x="640080" y="3794760"/>
+            <a:ext cx="5074920" cy="1783080"/>
           </a:xfrm>
           <a:prstGeom prst="roundRect">
             <a:avLst>
-              <a:gd name="adj" fmla="val 14545"/>
+              <a:gd name="adj" fmla="val 4103"/>
             </a:avLst>
+          </a:prstGeom>
+          <a:solidFill>
+            <a:srgbClr val="F2F7F4"/>
+          </a:solidFill>
+          <a:ln/>
+        </p:spPr>
+      </p:sp>
+      <p:sp>
+        <p:nvSpPr>
+          <p:cNvPr id="15" name="Shape 11"/>
+          <p:cNvSpPr/>
+          <p:nvPr/>
+        </p:nvSpPr>
+        <p:spPr>
+          <a:xfrm>
+            <a:off x="982980" y="4297680"/>
+            <a:ext cx="777240" cy="777240"/>
+          </a:xfrm>
+          <a:prstGeom prst="ellipse">
+            <a:avLst/>
           </a:prstGeom>
           <a:solidFill>
             <a:srgbClr val="1B4D3E"/>
@@ -2766,79 +2924,64 @@
           <a:ln/>
         </p:spPr>
       </p:sp>
-      <p:sp>
-        <p:nvSpPr>
-          <p:cNvPr id="12" name="Text 10"/>
-          <p:cNvSpPr/>
-          <p:nvPr/>
-        </p:nvSpPr>
-        <p:spPr>
-          <a:xfrm>
-            <a:off x="640080" y="3657600"/>
-            <a:ext cx="502920" cy="502920"/>
-          </a:xfrm>
-          <a:prstGeom prst="rect">
-            <a:avLst/>
-          </a:prstGeom>
-          <a:noFill/>
-          <a:ln/>
-        </p:spPr>
-        <p:txBody>
-          <a:bodyPr wrap="square" lIns="0" tIns="0" rIns="0" bIns="0" rtlCol="0" anchor="ctr"/>
-          <a:lstStyle/>
-          <a:p>
-            <a:pPr algn="ctr" indent="0" marL="0">
-              <a:buNone/>
-            </a:pPr>
-            <a:r>
-              <a:rPr lang="en-US" sz="1800" b="1" dirty="0">
-                <a:solidFill>
-                  <a:srgbClr val="F2A93B"/>
+      <p:pic>
+        <p:nvPicPr>
+          <p:cNvPr id="16" name="Image 2" descr="/tmp/claude-0/-home-user-DM-/98b145ee-d85d-5913-a881-95f99ca0c0f7/scratchpad/josei-pptx/icons/shield_FFFFFF.png">    </p:cNvPr>
+          <p:cNvPicPr>
+            <a:picLocks noChangeAspect="1"/>
+          </p:cNvPicPr>
+          <p:nvPr/>
+        </p:nvPicPr>
+        <p:blipFill>
+          <a:blip r:embed="rId3"/>
+          <a:stretch>
+            <a:fillRect/>
+          </a:stretch>
+        </p:blipFill>
+        <p:spPr>
+          <a:xfrm>
+            <a:off x="1169518" y="4484218"/>
+            <a:ext cx="404165" cy="404165"/>
+          </a:xfrm>
+          <a:prstGeom prst="rect">
+            <a:avLst/>
+          </a:prstGeom>
+        </p:spPr>
+      </p:pic>
+      <p:sp>
+        <p:nvSpPr>
+          <p:cNvPr id="17" name="Text 12"/>
+          <p:cNvSpPr/>
+          <p:nvPr/>
+        </p:nvSpPr>
+        <p:spPr>
+          <a:xfrm>
+            <a:off x="1920240" y="4069080"/>
+            <a:ext cx="3520440" cy="411480"/>
+          </a:xfrm>
+          <a:prstGeom prst="rect">
+            <a:avLst/>
+          </a:prstGeom>
+          <a:noFill/>
+          <a:ln/>
+        </p:spPr>
+        <p:txBody>
+          <a:bodyPr wrap="square" lIns="0" tIns="0" rIns="0" bIns="0" rtlCol="0" anchor="ctr"/>
+          <a:lstStyle/>
+          <a:p>
+            <a:pPr indent="0" marL="0">
+              <a:buNone/>
+            </a:pPr>
+            <a:r>
+              <a:rPr lang="en-US" sz="1450" b="1" dirty="0">
+                <a:solidFill>
+                  <a:srgbClr val="1B4D3E"/>
                 </a:solidFill>
                 <a:latin typeface="Bookman Old Style" pitchFamily="34" charset="0"/>
                 <a:ea typeface="Bookman Old Style" pitchFamily="34" charset="-122"/>
                 <a:cs typeface="Bookman Old Style" pitchFamily="34" charset="-120"/>
               </a:rPr>
-              <a:t>Q</a:t>
-            </a:r>
-            <a:endParaRPr lang="en-US" sz="1800" dirty="0"/>
-          </a:p>
-        </p:txBody>
-      </p:sp>
-      <p:sp>
-        <p:nvSpPr>
-          <p:cNvPr id="13" name="Text 11"/>
-          <p:cNvSpPr/>
-          <p:nvPr/>
-        </p:nvSpPr>
-        <p:spPr>
-          <a:xfrm>
-            <a:off x="1325880" y="3657600"/>
-            <a:ext cx="10149840" cy="457200"/>
-          </a:xfrm>
-          <a:prstGeom prst="rect">
-            <a:avLst/>
-          </a:prstGeom>
-          <a:noFill/>
-          <a:ln/>
-        </p:spPr>
-        <p:txBody>
-          <a:bodyPr wrap="square" lIns="0" tIns="0" rIns="0" bIns="0" rtlCol="0" anchor="ctr"/>
-          <a:lstStyle/>
-          <a:p>
-            <a:pPr indent="0" marL="0">
-              <a:buNone/>
-            </a:pPr>
-            <a:r>
-              <a:rPr lang="en-US" sz="1450" b="1" dirty="0">
-                <a:solidFill>
-                  <a:srgbClr val="1B4D3E"/>
-                </a:solidFill>
-                <a:latin typeface="Bookman Old Style" pitchFamily="34" charset="0"/>
-                <a:ea typeface="Bookman Old Style" pitchFamily="34" charset="-122"/>
-                <a:cs typeface="Bookman Old Style" pitchFamily="34" charset="-120"/>
-              </a:rPr>
-              <a:t>特定の施工業者に誘導されませんか？</a:t>
+              <a:t>勧誘方針</a:t>
             </a:r>
             <a:endParaRPr lang="en-US" sz="1450" dirty="0"/>
           </a:p>
@@ -2846,14 +2989,14 @@
       </p:sp>
       <p:sp>
         <p:nvSpPr>
-          <p:cNvPr id="14" name="Text 12"/>
-          <p:cNvSpPr/>
-          <p:nvPr/>
-        </p:nvSpPr>
-        <p:spPr>
-          <a:xfrm>
-            <a:off x="1325880" y="4114800"/>
-            <a:ext cx="10149840" cy="502920"/>
+          <p:cNvPr id="18" name="Text 13"/>
+          <p:cNvSpPr/>
+          <p:nvPr/>
+        </p:nvSpPr>
+        <p:spPr>
+          <a:xfrm>
+            <a:off x="1920240" y="4526280"/>
+            <a:ext cx="3520440" cy="822960"/>
           </a:xfrm>
           <a:prstGeom prst="rect">
             <a:avLst/>
@@ -2872,7 +3015,7 @@
               <a:buNone/>
             </a:pPr>
             <a:r>
-              <a:rPr lang="en-US" sz="1200" dirty="0">
+              <a:rPr lang="en-US" sz="1300" b="1" dirty="0">
                 <a:solidFill>
                   <a:srgbClr val="24272E"/>
                 </a:solidFill>
@@ -2880,27 +3023,47 @@
                 <a:ea typeface="Calibri" pitchFamily="34" charset="-122"/>
                 <a:cs typeface="Calibri" pitchFamily="34" charset="-120"/>
               </a:rPr>
-              <a:t>当協会は特定業者に偏らない中立な立場です。実績のある地域の施工会社を複数の選択肢としてご紹介します。</a:t>
-            </a:r>
-            <a:endParaRPr lang="en-US" sz="1200" dirty="0"/>
-          </a:p>
-        </p:txBody>
-      </p:sp>
-      <p:sp>
-        <p:nvSpPr>
-          <p:cNvPr id="15" name="Shape 13"/>
-          <p:cNvSpPr/>
-          <p:nvPr/>
-        </p:nvSpPr>
-        <p:spPr>
-          <a:xfrm>
-            <a:off x="640080" y="4800600"/>
-            <a:ext cx="502920" cy="502920"/>
+              <a:t>無理な勧誘は行いません</a:t>
+            </a:r>
+            <a:endParaRPr lang="en-US" sz="1300" dirty="0"/>
+          </a:p>
+        </p:txBody>
+      </p:sp>
+      <p:sp>
+        <p:nvSpPr>
+          <p:cNvPr id="19" name="Shape 14"/>
+          <p:cNvSpPr/>
+          <p:nvPr/>
+        </p:nvSpPr>
+        <p:spPr>
+          <a:xfrm>
+            <a:off x="6080760" y="3794760"/>
+            <a:ext cx="5074920" cy="1783080"/>
           </a:xfrm>
           <a:prstGeom prst="roundRect">
             <a:avLst>
-              <a:gd name="adj" fmla="val 14545"/>
+              <a:gd name="adj" fmla="val 4103"/>
             </a:avLst>
+          </a:prstGeom>
+          <a:solidFill>
+            <a:srgbClr val="F2F7F4"/>
+          </a:solidFill>
+          <a:ln/>
+        </p:spPr>
+      </p:sp>
+      <p:sp>
+        <p:nvSpPr>
+          <p:cNvPr id="20" name="Shape 15"/>
+          <p:cNvSpPr/>
+          <p:nvPr/>
+        </p:nvSpPr>
+        <p:spPr>
+          <a:xfrm>
+            <a:off x="6423660" y="4297680"/>
+            <a:ext cx="777240" cy="777240"/>
+          </a:xfrm>
+          <a:prstGeom prst="ellipse">
+            <a:avLst/>
           </a:prstGeom>
           <a:solidFill>
             <a:srgbClr val="1B4D3E"/>
@@ -2908,79 +3071,64 @@
           <a:ln/>
         </p:spPr>
       </p:sp>
-      <p:sp>
-        <p:nvSpPr>
-          <p:cNvPr id="16" name="Text 14"/>
-          <p:cNvSpPr/>
-          <p:nvPr/>
-        </p:nvSpPr>
-        <p:spPr>
-          <a:xfrm>
-            <a:off x="640080" y="4800600"/>
-            <a:ext cx="502920" cy="502920"/>
-          </a:xfrm>
-          <a:prstGeom prst="rect">
-            <a:avLst/>
-          </a:prstGeom>
-          <a:noFill/>
-          <a:ln/>
-        </p:spPr>
-        <p:txBody>
-          <a:bodyPr wrap="square" lIns="0" tIns="0" rIns="0" bIns="0" rtlCol="0" anchor="ctr"/>
-          <a:lstStyle/>
-          <a:p>
-            <a:pPr algn="ctr" indent="0" marL="0">
-              <a:buNone/>
-            </a:pPr>
-            <a:r>
-              <a:rPr lang="en-US" sz="1800" b="1" dirty="0">
-                <a:solidFill>
-                  <a:srgbClr val="F2A93B"/>
+      <p:pic>
+        <p:nvPicPr>
+          <p:cNvPr id="21" name="Image 3" descr="/tmp/claude-0/-home-user-DM-/98b145ee-d85d-5913-a881-95f99ca0c0f7/scratchpad/josei-pptx/icons/handshake_FFFFFF.png">    </p:cNvPr>
+          <p:cNvPicPr>
+            <a:picLocks noChangeAspect="1"/>
+          </p:cNvPicPr>
+          <p:nvPr/>
+        </p:nvPicPr>
+        <p:blipFill>
+          <a:blip r:embed="rId4"/>
+          <a:stretch>
+            <a:fillRect/>
+          </a:stretch>
+        </p:blipFill>
+        <p:spPr>
+          <a:xfrm>
+            <a:off x="6610198" y="4484218"/>
+            <a:ext cx="404165" cy="404165"/>
+          </a:xfrm>
+          <a:prstGeom prst="rect">
+            <a:avLst/>
+          </a:prstGeom>
+        </p:spPr>
+      </p:pic>
+      <p:sp>
+        <p:nvSpPr>
+          <p:cNvPr id="22" name="Text 16"/>
+          <p:cNvSpPr/>
+          <p:nvPr/>
+        </p:nvSpPr>
+        <p:spPr>
+          <a:xfrm>
+            <a:off x="7360920" y="4069080"/>
+            <a:ext cx="3520440" cy="411480"/>
+          </a:xfrm>
+          <a:prstGeom prst="rect">
+            <a:avLst/>
+          </a:prstGeom>
+          <a:noFill/>
+          <a:ln/>
+        </p:spPr>
+        <p:txBody>
+          <a:bodyPr wrap="square" lIns="0" tIns="0" rIns="0" bIns="0" rtlCol="0" anchor="ctr"/>
+          <a:lstStyle/>
+          <a:p>
+            <a:pPr indent="0" marL="0">
+              <a:buNone/>
+            </a:pPr>
+            <a:r>
+              <a:rPr lang="en-US" sz="1450" b="1" dirty="0">
+                <a:solidFill>
+                  <a:srgbClr val="1B4D3E"/>
                 </a:solidFill>
                 <a:latin typeface="Bookman Old Style" pitchFamily="34" charset="0"/>
                 <a:ea typeface="Bookman Old Style" pitchFamily="34" charset="-122"/>
                 <a:cs typeface="Bookman Old Style" pitchFamily="34" charset="-120"/>
               </a:rPr>
-              <a:t>Q</a:t>
-            </a:r>
-            <a:endParaRPr lang="en-US" sz="1800" dirty="0"/>
-          </a:p>
-        </p:txBody>
-      </p:sp>
-      <p:sp>
-        <p:nvSpPr>
-          <p:cNvPr id="17" name="Text 15"/>
-          <p:cNvSpPr/>
-          <p:nvPr/>
-        </p:nvSpPr>
-        <p:spPr>
-          <a:xfrm>
-            <a:off x="1325880" y="4800600"/>
-            <a:ext cx="10149840" cy="457200"/>
-          </a:xfrm>
-          <a:prstGeom prst="rect">
-            <a:avLst/>
-          </a:prstGeom>
-          <a:noFill/>
-          <a:ln/>
-        </p:spPr>
-        <p:txBody>
-          <a:bodyPr wrap="square" lIns="0" tIns="0" rIns="0" bIns="0" rtlCol="0" anchor="ctr"/>
-          <a:lstStyle/>
-          <a:p>
-            <a:pPr indent="0" marL="0">
-              <a:buNone/>
-            </a:pPr>
-            <a:r>
-              <a:rPr lang="en-US" sz="1450" b="1" dirty="0">
-                <a:solidFill>
-                  <a:srgbClr val="1B4D3E"/>
-                </a:solidFill>
-                <a:latin typeface="Bookman Old Style" pitchFamily="34" charset="0"/>
-                <a:ea typeface="Bookman Old Style" pitchFamily="34" charset="-122"/>
-                <a:cs typeface="Bookman Old Style" pitchFamily="34" charset="-120"/>
-              </a:rPr>
-              <a:t>しつこい営業はありませんか？</a:t>
+              <a:t>施工・工事費用</a:t>
             </a:r>
             <a:endParaRPr lang="en-US" sz="1450" dirty="0"/>
           </a:p>
@@ -2988,14 +3136,14 @@
       </p:sp>
       <p:sp>
         <p:nvSpPr>
-          <p:cNvPr id="18" name="Text 16"/>
-          <p:cNvSpPr/>
-          <p:nvPr/>
-        </p:nvSpPr>
-        <p:spPr>
-          <a:xfrm>
-            <a:off x="1325880" y="5257800"/>
-            <a:ext cx="10149840" cy="502920"/>
+          <p:cNvPr id="23" name="Text 17"/>
+          <p:cNvSpPr/>
+          <p:nvPr/>
+        </p:nvSpPr>
+        <p:spPr>
+          <a:xfrm>
+            <a:off x="7360920" y="4526280"/>
+            <a:ext cx="3520440" cy="822960"/>
           </a:xfrm>
           <a:prstGeom prst="rect">
             <a:avLst/>
@@ -3014,7 +3162,7 @@
               <a:buNone/>
             </a:pPr>
             <a:r>
-              <a:rPr lang="en-US" sz="1200" dirty="0">
+              <a:rPr lang="en-US" sz="1300" b="1" dirty="0">
                 <a:solidFill>
                   <a:srgbClr val="24272E"/>
                 </a:solidFill>
@@ -3022,45 +3170,65 @@
                 <a:ea typeface="Calibri" pitchFamily="34" charset="-122"/>
                 <a:cs typeface="Calibri" pitchFamily="34" charset="-120"/>
               </a:rPr>
-              <a:t>無理な勧誘は行っておりません。限られた時間で動く中小企業の現場を前提に、無理のない進め方をご提案します。</a:t>
-            </a:r>
-            <a:endParaRPr lang="en-US" sz="1200" dirty="0"/>
-          </a:p>
-        </p:txBody>
-      </p:sp>
-      <p:sp>
-        <p:nvSpPr>
-          <p:cNvPr id="19" name="Text 17"/>
-          <p:cNvSpPr/>
-          <p:nvPr/>
-        </p:nvSpPr>
-        <p:spPr>
-          <a:xfrm>
-            <a:off x="457200" y="6537960"/>
-            <a:ext cx="7315200" cy="274320"/>
-          </a:xfrm>
-          <a:prstGeom prst="rect">
-            <a:avLst/>
-          </a:prstGeom>
-          <a:noFill/>
-          <a:ln/>
-        </p:spPr>
-        <p:txBody>
-          <a:bodyPr wrap="square" lIns="0" tIns="0" rIns="0" bIns="0" rtlCol="0" anchor="ctr"/>
-          <a:lstStyle/>
+              <a:t>ご紹介する地域の施工会社との</a:t>
+            </a:r>
+            <a:endParaRPr lang="en-US" sz="1300" dirty="0"/>
+          </a:p>
           <a:p>
             <a:pPr indent="0" marL="0">
-              <a:buNone/>
-            </a:pPr>
-            <a:r>
-              <a:rPr lang="en-US" sz="900" dirty="0">
-                <a:solidFill>
-                  <a:srgbClr val="6B7280"/>
+              <a:lnSpc>
+                <a:spcPts val="1600"/>
+              </a:lnSpc>
+              <a:buNone/>
+            </a:pPr>
+            <a:r>
+              <a:rPr lang="en-US" sz="1300" b="1" dirty="0">
+                <a:solidFill>
+                  <a:srgbClr val="24272E"/>
                 </a:solidFill>
                 <a:latin typeface="Calibri" pitchFamily="34" charset="0"/>
                 <a:ea typeface="Calibri" pitchFamily="34" charset="-122"/>
                 <a:cs typeface="Calibri" pitchFamily="34" charset="-120"/>
               </a:rPr>
+              <a:t>個別のお見積りによります</a:t>
+            </a:r>
+            <a:endParaRPr lang="en-US" sz="1300" dirty="0"/>
+          </a:p>
+        </p:txBody>
+      </p:sp>
+      <p:sp>
+        <p:nvSpPr>
+          <p:cNvPr id="24" name="Text 18"/>
+          <p:cNvSpPr/>
+          <p:nvPr/>
+        </p:nvSpPr>
+        <p:spPr>
+          <a:xfrm>
+            <a:off x="457200" y="6537960"/>
+            <a:ext cx="7315200" cy="274320"/>
+          </a:xfrm>
+          <a:prstGeom prst="rect">
+            <a:avLst/>
+          </a:prstGeom>
+          <a:noFill/>
+          <a:ln/>
+        </p:spPr>
+        <p:txBody>
+          <a:bodyPr wrap="square" lIns="0" tIns="0" rIns="0" bIns="0" rtlCol="0" anchor="ctr"/>
+          <a:lstStyle/>
+          <a:p>
+            <a:pPr indent="0" marL="0">
+              <a:buNone/>
+            </a:pPr>
+            <a:r>
+              <a:rPr lang="en-US" sz="900" dirty="0">
+                <a:solidFill>
+                  <a:srgbClr val="6B7280"/>
+                </a:solidFill>
+                <a:latin typeface="Calibri" pitchFamily="34" charset="0"/>
+                <a:ea typeface="Calibri" pitchFamily="34" charset="-122"/>
+                <a:cs typeface="Calibri" pitchFamily="34" charset="-120"/>
+              </a:rPr>
               <a:t>一般社団法人 中小企業助成金支援協会　資料請求資料</a:t>
             </a:r>
             <a:endParaRPr lang="en-US" sz="900" dirty="0"/>
@@ -3069,7 +3237,7 @@
       </p:sp>
       <p:sp>
         <p:nvSpPr>
-          <p:cNvPr id="20" name="Text 18"/>
+          <p:cNvPr id="25" name="Text 19"/>
           <p:cNvSpPr/>
           <p:nvPr/>
         </p:nvSpPr>
@@ -3171,6 +3339,723 @@
                 <a:ea typeface="Bookman Old Style" pitchFamily="34" charset="-122"/>
                 <a:cs typeface="Bookman Old Style" pitchFamily="34" charset="-120"/>
               </a:rPr>
+              <a:t>よくあるご質問</a:t>
+            </a:r>
+            <a:endParaRPr lang="en-US" sz="2800" dirty="0"/>
+          </a:p>
+        </p:txBody>
+      </p:sp>
+      <p:sp>
+        <p:nvSpPr>
+          <p:cNvPr id="3" name="Shape 1"/>
+          <p:cNvSpPr/>
+          <p:nvPr/>
+        </p:nvSpPr>
+        <p:spPr>
+          <a:xfrm>
+            <a:off x="640080" y="1371600"/>
+            <a:ext cx="502920" cy="502920"/>
+          </a:xfrm>
+          <a:prstGeom prst="roundRect">
+            <a:avLst>
+              <a:gd name="adj" fmla="val 14545"/>
+            </a:avLst>
+          </a:prstGeom>
+          <a:solidFill>
+            <a:srgbClr val="1B4D3E"/>
+          </a:solidFill>
+          <a:ln/>
+        </p:spPr>
+      </p:sp>
+      <p:sp>
+        <p:nvSpPr>
+          <p:cNvPr id="4" name="Text 2"/>
+          <p:cNvSpPr/>
+          <p:nvPr/>
+        </p:nvSpPr>
+        <p:spPr>
+          <a:xfrm>
+            <a:off x="640080" y="1371600"/>
+            <a:ext cx="502920" cy="502920"/>
+          </a:xfrm>
+          <a:prstGeom prst="rect">
+            <a:avLst/>
+          </a:prstGeom>
+          <a:noFill/>
+          <a:ln/>
+        </p:spPr>
+        <p:txBody>
+          <a:bodyPr wrap="square" lIns="0" tIns="0" rIns="0" bIns="0" rtlCol="0" anchor="ctr"/>
+          <a:lstStyle/>
+          <a:p>
+            <a:pPr algn="ctr" indent="0" marL="0">
+              <a:buNone/>
+            </a:pPr>
+            <a:r>
+              <a:rPr lang="en-US" sz="1800" b="1" dirty="0">
+                <a:solidFill>
+                  <a:srgbClr val="F2A93B"/>
+                </a:solidFill>
+                <a:latin typeface="Bookman Old Style" pitchFamily="34" charset="0"/>
+                <a:ea typeface="Bookman Old Style" pitchFamily="34" charset="-122"/>
+                <a:cs typeface="Bookman Old Style" pitchFamily="34" charset="-120"/>
+              </a:rPr>
+              <a:t>Q</a:t>
+            </a:r>
+            <a:endParaRPr lang="en-US" sz="1800" dirty="0"/>
+          </a:p>
+        </p:txBody>
+      </p:sp>
+      <p:sp>
+        <p:nvSpPr>
+          <p:cNvPr id="5" name="Text 3"/>
+          <p:cNvSpPr/>
+          <p:nvPr/>
+        </p:nvSpPr>
+        <p:spPr>
+          <a:xfrm>
+            <a:off x="1325880" y="1371600"/>
+            <a:ext cx="10149840" cy="457200"/>
+          </a:xfrm>
+          <a:prstGeom prst="rect">
+            <a:avLst/>
+          </a:prstGeom>
+          <a:noFill/>
+          <a:ln/>
+        </p:spPr>
+        <p:txBody>
+          <a:bodyPr wrap="square" lIns="0" tIns="0" rIns="0" bIns="0" rtlCol="0" anchor="ctr"/>
+          <a:lstStyle/>
+          <a:p>
+            <a:pPr indent="0" marL="0">
+              <a:buNone/>
+            </a:pPr>
+            <a:r>
+              <a:rPr lang="en-US" sz="1450" b="1" dirty="0">
+                <a:solidFill>
+                  <a:srgbClr val="1B4D3E"/>
+                </a:solidFill>
+                <a:latin typeface="Bookman Old Style" pitchFamily="34" charset="0"/>
+                <a:ea typeface="Bookman Old Style" pitchFamily="34" charset="-122"/>
+                <a:cs typeface="Bookman Old Style" pitchFamily="34" charset="-120"/>
+              </a:rPr>
+              <a:t>本当に30〜50%も削減できますか？</a:t>
+            </a:r>
+            <a:endParaRPr lang="en-US" sz="1450" dirty="0"/>
+          </a:p>
+        </p:txBody>
+      </p:sp>
+      <p:sp>
+        <p:nvSpPr>
+          <p:cNvPr id="6" name="Text 4"/>
+          <p:cNvSpPr/>
+          <p:nvPr/>
+        </p:nvSpPr>
+        <p:spPr>
+          <a:xfrm>
+            <a:off x="1325880" y="1828800"/>
+            <a:ext cx="10149840" cy="502920"/>
+          </a:xfrm>
+          <a:prstGeom prst="rect">
+            <a:avLst/>
+          </a:prstGeom>
+          <a:noFill/>
+          <a:ln/>
+        </p:spPr>
+        <p:txBody>
+          <a:bodyPr wrap="square" lIns="0" tIns="0" rIns="0" bIns="0" rtlCol="0" anchor="ctr"/>
+          <a:lstStyle/>
+          <a:p>
+            <a:pPr indent="0" marL="0">
+              <a:lnSpc>
+                <a:spcPts val="1600"/>
+              </a:lnSpc>
+              <a:buNone/>
+            </a:pPr>
+            <a:r>
+              <a:rPr lang="en-US" sz="1200" dirty="0">
+                <a:solidFill>
+                  <a:srgbClr val="24272E"/>
+                </a:solidFill>
+                <a:latin typeface="Calibri" pitchFamily="34" charset="0"/>
+                <a:ea typeface="Calibri" pitchFamily="34" charset="-122"/>
+                <a:cs typeface="Calibri" pitchFamily="34" charset="-120"/>
+              </a:rPr>
+              <a:t>支援先の導入実績に基づく削減率です。建物条件・使用状況により効果は異なるため、無料相談で個別にご案内します。</a:t>
+            </a:r>
+            <a:endParaRPr lang="en-US" sz="1200" dirty="0"/>
+          </a:p>
+        </p:txBody>
+      </p:sp>
+      <p:sp>
+        <p:nvSpPr>
+          <p:cNvPr id="7" name="Shape 5"/>
+          <p:cNvSpPr/>
+          <p:nvPr/>
+        </p:nvSpPr>
+        <p:spPr>
+          <a:xfrm>
+            <a:off x="640080" y="2514600"/>
+            <a:ext cx="502920" cy="502920"/>
+          </a:xfrm>
+          <a:prstGeom prst="roundRect">
+            <a:avLst>
+              <a:gd name="adj" fmla="val 14545"/>
+            </a:avLst>
+          </a:prstGeom>
+          <a:solidFill>
+            <a:srgbClr val="1B4D3E"/>
+          </a:solidFill>
+          <a:ln/>
+        </p:spPr>
+      </p:sp>
+      <p:sp>
+        <p:nvSpPr>
+          <p:cNvPr id="8" name="Text 6"/>
+          <p:cNvSpPr/>
+          <p:nvPr/>
+        </p:nvSpPr>
+        <p:spPr>
+          <a:xfrm>
+            <a:off x="640080" y="2514600"/>
+            <a:ext cx="502920" cy="502920"/>
+          </a:xfrm>
+          <a:prstGeom prst="rect">
+            <a:avLst/>
+          </a:prstGeom>
+          <a:noFill/>
+          <a:ln/>
+        </p:spPr>
+        <p:txBody>
+          <a:bodyPr wrap="square" lIns="0" tIns="0" rIns="0" bIns="0" rtlCol="0" anchor="ctr"/>
+          <a:lstStyle/>
+          <a:p>
+            <a:pPr algn="ctr" indent="0" marL="0">
+              <a:buNone/>
+            </a:pPr>
+            <a:r>
+              <a:rPr lang="en-US" sz="1800" b="1" dirty="0">
+                <a:solidFill>
+                  <a:srgbClr val="F2A93B"/>
+                </a:solidFill>
+                <a:latin typeface="Bookman Old Style" pitchFamily="34" charset="0"/>
+                <a:ea typeface="Bookman Old Style" pitchFamily="34" charset="-122"/>
+                <a:cs typeface="Bookman Old Style" pitchFamily="34" charset="-120"/>
+              </a:rPr>
+              <a:t>Q</a:t>
+            </a:r>
+            <a:endParaRPr lang="en-US" sz="1800" dirty="0"/>
+          </a:p>
+        </p:txBody>
+      </p:sp>
+      <p:sp>
+        <p:nvSpPr>
+          <p:cNvPr id="9" name="Text 7"/>
+          <p:cNvSpPr/>
+          <p:nvPr/>
+        </p:nvSpPr>
+        <p:spPr>
+          <a:xfrm>
+            <a:off x="1325880" y="2514600"/>
+            <a:ext cx="10149840" cy="457200"/>
+          </a:xfrm>
+          <a:prstGeom prst="rect">
+            <a:avLst/>
+          </a:prstGeom>
+          <a:noFill/>
+          <a:ln/>
+        </p:spPr>
+        <p:txBody>
+          <a:bodyPr wrap="square" lIns="0" tIns="0" rIns="0" bIns="0" rtlCol="0" anchor="ctr"/>
+          <a:lstStyle/>
+          <a:p>
+            <a:pPr indent="0" marL="0">
+              <a:buNone/>
+            </a:pPr>
+            <a:r>
+              <a:rPr lang="en-US" sz="1450" b="1" dirty="0">
+                <a:solidFill>
+                  <a:srgbClr val="1B4D3E"/>
+                </a:solidFill>
+                <a:latin typeface="Bookman Old Style" pitchFamily="34" charset="0"/>
+                <a:ea typeface="Bookman Old Style" pitchFamily="34" charset="-122"/>
+                <a:cs typeface="Bookman Old Style" pitchFamily="34" charset="-120"/>
+              </a:rPr>
+              <a:t>初期費用はどのくらいかかりますか？</a:t>
+            </a:r>
+            <a:endParaRPr lang="en-US" sz="1450" dirty="0"/>
+          </a:p>
+        </p:txBody>
+      </p:sp>
+      <p:sp>
+        <p:nvSpPr>
+          <p:cNvPr id="10" name="Text 8"/>
+          <p:cNvSpPr/>
+          <p:nvPr/>
+        </p:nvSpPr>
+        <p:spPr>
+          <a:xfrm>
+            <a:off x="1325880" y="2971800"/>
+            <a:ext cx="10149840" cy="502920"/>
+          </a:xfrm>
+          <a:prstGeom prst="rect">
+            <a:avLst/>
+          </a:prstGeom>
+          <a:noFill/>
+          <a:ln/>
+        </p:spPr>
+        <p:txBody>
+          <a:bodyPr wrap="square" lIns="0" tIns="0" rIns="0" bIns="0" rtlCol="0" anchor="ctr"/>
+          <a:lstStyle/>
+          <a:p>
+            <a:pPr indent="0" marL="0">
+              <a:lnSpc>
+                <a:spcPts val="1600"/>
+              </a:lnSpc>
+              <a:buNone/>
+            </a:pPr>
+            <a:r>
+              <a:rPr lang="en-US" sz="1200" dirty="0">
+                <a:solidFill>
+                  <a:srgbClr val="24272E"/>
+                </a:solidFill>
+                <a:latin typeface="Calibri" pitchFamily="34" charset="0"/>
+                <a:ea typeface="Calibri" pitchFamily="34" charset="-122"/>
+                <a:cs typeface="Calibri" pitchFamily="34" charset="-120"/>
+              </a:rPr>
+              <a:t>設備・規模やご紹介する施工会社により異なります。補助金活用で自己負担を抑えられる場合もございます。</a:t>
+            </a:r>
+            <a:endParaRPr lang="en-US" sz="1200" dirty="0"/>
+          </a:p>
+        </p:txBody>
+      </p:sp>
+      <p:sp>
+        <p:nvSpPr>
+          <p:cNvPr id="11" name="Shape 9"/>
+          <p:cNvSpPr/>
+          <p:nvPr/>
+        </p:nvSpPr>
+        <p:spPr>
+          <a:xfrm>
+            <a:off x="640080" y="3657600"/>
+            <a:ext cx="502920" cy="502920"/>
+          </a:xfrm>
+          <a:prstGeom prst="roundRect">
+            <a:avLst>
+              <a:gd name="adj" fmla="val 14545"/>
+            </a:avLst>
+          </a:prstGeom>
+          <a:solidFill>
+            <a:srgbClr val="1B4D3E"/>
+          </a:solidFill>
+          <a:ln/>
+        </p:spPr>
+      </p:sp>
+      <p:sp>
+        <p:nvSpPr>
+          <p:cNvPr id="12" name="Text 10"/>
+          <p:cNvSpPr/>
+          <p:nvPr/>
+        </p:nvSpPr>
+        <p:spPr>
+          <a:xfrm>
+            <a:off x="640080" y="3657600"/>
+            <a:ext cx="502920" cy="502920"/>
+          </a:xfrm>
+          <a:prstGeom prst="rect">
+            <a:avLst/>
+          </a:prstGeom>
+          <a:noFill/>
+          <a:ln/>
+        </p:spPr>
+        <p:txBody>
+          <a:bodyPr wrap="square" lIns="0" tIns="0" rIns="0" bIns="0" rtlCol="0" anchor="ctr"/>
+          <a:lstStyle/>
+          <a:p>
+            <a:pPr algn="ctr" indent="0" marL="0">
+              <a:buNone/>
+            </a:pPr>
+            <a:r>
+              <a:rPr lang="en-US" sz="1800" b="1" dirty="0">
+                <a:solidFill>
+                  <a:srgbClr val="F2A93B"/>
+                </a:solidFill>
+                <a:latin typeface="Bookman Old Style" pitchFamily="34" charset="0"/>
+                <a:ea typeface="Bookman Old Style" pitchFamily="34" charset="-122"/>
+                <a:cs typeface="Bookman Old Style" pitchFamily="34" charset="-120"/>
+              </a:rPr>
+              <a:t>Q</a:t>
+            </a:r>
+            <a:endParaRPr lang="en-US" sz="1800" dirty="0"/>
+          </a:p>
+        </p:txBody>
+      </p:sp>
+      <p:sp>
+        <p:nvSpPr>
+          <p:cNvPr id="13" name="Text 11"/>
+          <p:cNvSpPr/>
+          <p:nvPr/>
+        </p:nvSpPr>
+        <p:spPr>
+          <a:xfrm>
+            <a:off x="1325880" y="3657600"/>
+            <a:ext cx="10149840" cy="457200"/>
+          </a:xfrm>
+          <a:prstGeom prst="rect">
+            <a:avLst/>
+          </a:prstGeom>
+          <a:noFill/>
+          <a:ln/>
+        </p:spPr>
+        <p:txBody>
+          <a:bodyPr wrap="square" lIns="0" tIns="0" rIns="0" bIns="0" rtlCol="0" anchor="ctr"/>
+          <a:lstStyle/>
+          <a:p>
+            <a:pPr indent="0" marL="0">
+              <a:buNone/>
+            </a:pPr>
+            <a:r>
+              <a:rPr lang="en-US" sz="1450" b="1" dirty="0">
+                <a:solidFill>
+                  <a:srgbClr val="1B4D3E"/>
+                </a:solidFill>
+                <a:latin typeface="Bookman Old Style" pitchFamily="34" charset="0"/>
+                <a:ea typeface="Bookman Old Style" pitchFamily="34" charset="-122"/>
+                <a:cs typeface="Bookman Old Style" pitchFamily="34" charset="-120"/>
+              </a:rPr>
+              <a:t>特定の施工業者に誘導されませんか？</a:t>
+            </a:r>
+            <a:endParaRPr lang="en-US" sz="1450" dirty="0"/>
+          </a:p>
+        </p:txBody>
+      </p:sp>
+      <p:sp>
+        <p:nvSpPr>
+          <p:cNvPr id="14" name="Text 12"/>
+          <p:cNvSpPr/>
+          <p:nvPr/>
+        </p:nvSpPr>
+        <p:spPr>
+          <a:xfrm>
+            <a:off x="1325880" y="4114800"/>
+            <a:ext cx="10149840" cy="502920"/>
+          </a:xfrm>
+          <a:prstGeom prst="rect">
+            <a:avLst/>
+          </a:prstGeom>
+          <a:noFill/>
+          <a:ln/>
+        </p:spPr>
+        <p:txBody>
+          <a:bodyPr wrap="square" lIns="0" tIns="0" rIns="0" bIns="0" rtlCol="0" anchor="ctr"/>
+          <a:lstStyle/>
+          <a:p>
+            <a:pPr indent="0" marL="0">
+              <a:lnSpc>
+                <a:spcPts val="1600"/>
+              </a:lnSpc>
+              <a:buNone/>
+            </a:pPr>
+            <a:r>
+              <a:rPr lang="en-US" sz="1200" dirty="0">
+                <a:solidFill>
+                  <a:srgbClr val="24272E"/>
+                </a:solidFill>
+                <a:latin typeface="Calibri" pitchFamily="34" charset="0"/>
+                <a:ea typeface="Calibri" pitchFamily="34" charset="-122"/>
+                <a:cs typeface="Calibri" pitchFamily="34" charset="-120"/>
+              </a:rPr>
+              <a:t>当協会は特定業者に偏らない中立な立場です。実績のある地域の施工会社を複数の選択肢としてご紹介します。</a:t>
+            </a:r>
+            <a:endParaRPr lang="en-US" sz="1200" dirty="0"/>
+          </a:p>
+        </p:txBody>
+      </p:sp>
+      <p:sp>
+        <p:nvSpPr>
+          <p:cNvPr id="15" name="Shape 13"/>
+          <p:cNvSpPr/>
+          <p:nvPr/>
+        </p:nvSpPr>
+        <p:spPr>
+          <a:xfrm>
+            <a:off x="640080" y="4800600"/>
+            <a:ext cx="502920" cy="502920"/>
+          </a:xfrm>
+          <a:prstGeom prst="roundRect">
+            <a:avLst>
+              <a:gd name="adj" fmla="val 14545"/>
+            </a:avLst>
+          </a:prstGeom>
+          <a:solidFill>
+            <a:srgbClr val="1B4D3E"/>
+          </a:solidFill>
+          <a:ln/>
+        </p:spPr>
+      </p:sp>
+      <p:sp>
+        <p:nvSpPr>
+          <p:cNvPr id="16" name="Text 14"/>
+          <p:cNvSpPr/>
+          <p:nvPr/>
+        </p:nvSpPr>
+        <p:spPr>
+          <a:xfrm>
+            <a:off x="640080" y="4800600"/>
+            <a:ext cx="502920" cy="502920"/>
+          </a:xfrm>
+          <a:prstGeom prst="rect">
+            <a:avLst/>
+          </a:prstGeom>
+          <a:noFill/>
+          <a:ln/>
+        </p:spPr>
+        <p:txBody>
+          <a:bodyPr wrap="square" lIns="0" tIns="0" rIns="0" bIns="0" rtlCol="0" anchor="ctr"/>
+          <a:lstStyle/>
+          <a:p>
+            <a:pPr algn="ctr" indent="0" marL="0">
+              <a:buNone/>
+            </a:pPr>
+            <a:r>
+              <a:rPr lang="en-US" sz="1800" b="1" dirty="0">
+                <a:solidFill>
+                  <a:srgbClr val="F2A93B"/>
+                </a:solidFill>
+                <a:latin typeface="Bookman Old Style" pitchFamily="34" charset="0"/>
+                <a:ea typeface="Bookman Old Style" pitchFamily="34" charset="-122"/>
+                <a:cs typeface="Bookman Old Style" pitchFamily="34" charset="-120"/>
+              </a:rPr>
+              <a:t>Q</a:t>
+            </a:r>
+            <a:endParaRPr lang="en-US" sz="1800" dirty="0"/>
+          </a:p>
+        </p:txBody>
+      </p:sp>
+      <p:sp>
+        <p:nvSpPr>
+          <p:cNvPr id="17" name="Text 15"/>
+          <p:cNvSpPr/>
+          <p:nvPr/>
+        </p:nvSpPr>
+        <p:spPr>
+          <a:xfrm>
+            <a:off x="1325880" y="4800600"/>
+            <a:ext cx="10149840" cy="457200"/>
+          </a:xfrm>
+          <a:prstGeom prst="rect">
+            <a:avLst/>
+          </a:prstGeom>
+          <a:noFill/>
+          <a:ln/>
+        </p:spPr>
+        <p:txBody>
+          <a:bodyPr wrap="square" lIns="0" tIns="0" rIns="0" bIns="0" rtlCol="0" anchor="ctr"/>
+          <a:lstStyle/>
+          <a:p>
+            <a:pPr indent="0" marL="0">
+              <a:buNone/>
+            </a:pPr>
+            <a:r>
+              <a:rPr lang="en-US" sz="1450" b="1" dirty="0">
+                <a:solidFill>
+                  <a:srgbClr val="1B4D3E"/>
+                </a:solidFill>
+                <a:latin typeface="Bookman Old Style" pitchFamily="34" charset="0"/>
+                <a:ea typeface="Bookman Old Style" pitchFamily="34" charset="-122"/>
+                <a:cs typeface="Bookman Old Style" pitchFamily="34" charset="-120"/>
+              </a:rPr>
+              <a:t>しつこい営業はありませんか？</a:t>
+            </a:r>
+            <a:endParaRPr lang="en-US" sz="1450" dirty="0"/>
+          </a:p>
+        </p:txBody>
+      </p:sp>
+      <p:sp>
+        <p:nvSpPr>
+          <p:cNvPr id="18" name="Text 16"/>
+          <p:cNvSpPr/>
+          <p:nvPr/>
+        </p:nvSpPr>
+        <p:spPr>
+          <a:xfrm>
+            <a:off x="1325880" y="5257800"/>
+            <a:ext cx="10149840" cy="502920"/>
+          </a:xfrm>
+          <a:prstGeom prst="rect">
+            <a:avLst/>
+          </a:prstGeom>
+          <a:noFill/>
+          <a:ln/>
+        </p:spPr>
+        <p:txBody>
+          <a:bodyPr wrap="square" lIns="0" tIns="0" rIns="0" bIns="0" rtlCol="0" anchor="ctr"/>
+          <a:lstStyle/>
+          <a:p>
+            <a:pPr indent="0" marL="0">
+              <a:lnSpc>
+                <a:spcPts val="1600"/>
+              </a:lnSpc>
+              <a:buNone/>
+            </a:pPr>
+            <a:r>
+              <a:rPr lang="en-US" sz="1200" dirty="0">
+                <a:solidFill>
+                  <a:srgbClr val="24272E"/>
+                </a:solidFill>
+                <a:latin typeface="Calibri" pitchFamily="34" charset="0"/>
+                <a:ea typeface="Calibri" pitchFamily="34" charset="-122"/>
+                <a:cs typeface="Calibri" pitchFamily="34" charset="-120"/>
+              </a:rPr>
+              <a:t>無理な勧誘は行っておりません。限られた時間で動く中小企業の現場を前提に、無理のない進め方をご提案します。</a:t>
+            </a:r>
+            <a:endParaRPr lang="en-US" sz="1200" dirty="0"/>
+          </a:p>
+        </p:txBody>
+      </p:sp>
+      <p:sp>
+        <p:nvSpPr>
+          <p:cNvPr id="19" name="Text 17"/>
+          <p:cNvSpPr/>
+          <p:nvPr/>
+        </p:nvSpPr>
+        <p:spPr>
+          <a:xfrm>
+            <a:off x="457200" y="6537960"/>
+            <a:ext cx="7315200" cy="274320"/>
+          </a:xfrm>
+          <a:prstGeom prst="rect">
+            <a:avLst/>
+          </a:prstGeom>
+          <a:noFill/>
+          <a:ln/>
+        </p:spPr>
+        <p:txBody>
+          <a:bodyPr wrap="square" lIns="0" tIns="0" rIns="0" bIns="0" rtlCol="0" anchor="ctr"/>
+          <a:lstStyle/>
+          <a:p>
+            <a:pPr indent="0" marL="0">
+              <a:buNone/>
+            </a:pPr>
+            <a:r>
+              <a:rPr lang="en-US" sz="900" dirty="0">
+                <a:solidFill>
+                  <a:srgbClr val="6B7280"/>
+                </a:solidFill>
+                <a:latin typeface="Calibri" pitchFamily="34" charset="0"/>
+                <a:ea typeface="Calibri" pitchFamily="34" charset="-122"/>
+                <a:cs typeface="Calibri" pitchFamily="34" charset="-120"/>
+              </a:rPr>
+              <a:t>一般社団法人 中小企業助成金支援協会　資料請求資料</a:t>
+            </a:r>
+            <a:endParaRPr lang="en-US" sz="900" dirty="0"/>
+          </a:p>
+        </p:txBody>
+      </p:sp>
+      <p:sp>
+        <p:nvSpPr>
+          <p:cNvPr id="20" name="Text 18"/>
+          <p:cNvSpPr/>
+          <p:nvPr/>
+        </p:nvSpPr>
+        <p:spPr>
+          <a:xfrm>
+            <a:off x="11247120" y="6537960"/>
+            <a:ext cx="548640" cy="274320"/>
+          </a:xfrm>
+          <a:prstGeom prst="rect">
+            <a:avLst/>
+          </a:prstGeom>
+          <a:noFill/>
+          <a:ln/>
+        </p:spPr>
+        <p:txBody>
+          <a:bodyPr wrap="square" lIns="0" tIns="0" rIns="0" bIns="0" rtlCol="0" anchor="ctr"/>
+          <a:lstStyle/>
+          <a:p>
+            <a:pPr algn="r" indent="0" marL="0">
+              <a:buNone/>
+            </a:pPr>
+            <a:r>
+              <a:rPr lang="en-US" sz="900" dirty="0">
+                <a:solidFill>
+                  <a:srgbClr val="6B7280"/>
+                </a:solidFill>
+                <a:latin typeface="Calibri" pitchFamily="34" charset="0"/>
+                <a:ea typeface="Calibri" pitchFamily="34" charset="-122"/>
+                <a:cs typeface="Calibri" pitchFamily="34" charset="-120"/>
+              </a:rPr>
+              <a:t>11</a:t>
+            </a:r>
+            <a:endParaRPr lang="en-US" sz="900" dirty="0"/>
+          </a:p>
+        </p:txBody>
+      </p:sp>
+    </p:spTree>
+  </p:cSld>
+  <p:clrMapOvr>
+    <a:masterClrMapping/>
+  </p:clrMapOvr>
+</p:sld>
+</file>
+
+<file path=ppt/slides/slide12.xml><?xml version="1.0" encoding="utf-8"?>
+<p:sld xmlns:a="http://schemas.openxmlformats.org/drawingml/2006/main" xmlns:r="http://schemas.openxmlformats.org/officeDocument/2006/relationships" xmlns:p="http://schemas.openxmlformats.org/presentationml/2006/main">
+  <p:cSld name="Slide 12">
+    <p:bg>
+      <p:bgPr>
+        <a:solidFill>
+          <a:srgbClr val="FFFFFF"/>
+        </a:solidFill>
+      </p:bgPr>
+    </p:bg>
+    <p:spTree>
+      <p:nvGrpSpPr>
+        <p:cNvPr id="1" name=""/>
+        <p:cNvGrpSpPr/>
+        <p:nvPr/>
+      </p:nvGrpSpPr>
+      <p:grpSpPr>
+        <a:xfrm>
+          <a:off x="0" y="0"/>
+          <a:ext cx="0" cy="0"/>
+          <a:chOff x="0" y="0"/>
+          <a:chExt cx="0" cy="0"/>
+        </a:xfrm>
+      </p:grpSpPr>
+      <p:sp>
+        <p:nvSpPr>
+          <p:cNvPr id="2" name="Text 0"/>
+          <p:cNvSpPr/>
+          <p:nvPr/>
+        </p:nvSpPr>
+        <p:spPr>
+          <a:xfrm>
+            <a:off x="640080" y="457200"/>
+            <a:ext cx="7315200" cy="548640"/>
+          </a:xfrm>
+          <a:prstGeom prst="rect">
+            <a:avLst/>
+          </a:prstGeom>
+          <a:noFill/>
+          <a:ln/>
+        </p:spPr>
+        <p:txBody>
+          <a:bodyPr wrap="square" lIns="0" tIns="0" rIns="0" bIns="0" rtlCol="0" anchor="ctr"/>
+          <a:lstStyle/>
+          <a:p>
+            <a:pPr indent="0" marL="0">
+              <a:buNone/>
+            </a:pPr>
+            <a:r>
+              <a:rPr lang="en-US" sz="2800" b="1" dirty="0">
+                <a:solidFill>
+                  <a:srgbClr val="1B4D3E"/>
+                </a:solidFill>
+                <a:latin typeface="Bookman Old Style" pitchFamily="34" charset="0"/>
+                <a:ea typeface="Bookman Old Style" pitchFamily="34" charset="-122"/>
+                <a:cs typeface="Bookman Old Style" pitchFamily="34" charset="-120"/>
+              </a:rPr>
               <a:t>会社概要</a:t>
             </a:r>
             <a:endParaRPr lang="en-US" sz="2800" dirty="0"/>
@@ -3179,7 +4064,7 @@
       </p:sp>
       <p:graphicFrame>
         <p:nvGraphicFramePr>
-          <p:cNvPr id="12" name="Table 0"/>
+          <p:cNvPr id="13" name="Table 0"/>
           <p:cNvGraphicFramePr>
             <a:graphicFrameLocks noGrp="1"/>
           </p:cNvGraphicFramePr>
@@ -4455,7 +5340,7 @@
                 <a:ea typeface="Calibri" pitchFamily="34" charset="-122"/>
                 <a:cs typeface="Calibri" pitchFamily="34" charset="-120"/>
               </a:rPr>
-              <a:t>11</a:t>
+              <a:t>12</a:t>
             </a:r>
             <a:endParaRPr lang="en-US" sz="900" dirty="0"/>
           </a:p>
@@ -4469,9 +5354,9 @@
 </p:sld>
 </file>
 
-<file path=ppt/slides/slide12.xml><?xml version="1.0" encoding="utf-8"?>
+<file path=ppt/slides/slide13.xml><?xml version="1.0" encoding="utf-8"?>
 <p:sld xmlns:a="http://schemas.openxmlformats.org/drawingml/2006/main" xmlns:r="http://schemas.openxmlformats.org/officeDocument/2006/relationships" xmlns:p="http://schemas.openxmlformats.org/presentationml/2006/main">
-  <p:cSld name="Slide 12">
+  <p:cSld name="Slide 13">
     <p:bg>
       <p:bgPr>
         <a:solidFill>
@@ -4901,7 +5786,7 @@
         <p:spPr>
           <a:xfrm>
             <a:off x="640080" y="457200"/>
-            <a:ext cx="9144000" cy="548640"/>
+            <a:ext cx="10515600" cy="548640"/>
           </a:xfrm>
           <a:prstGeom prst="rect">
             <a:avLst/>
@@ -4917,7 +5802,7 @@
               <a:buNone/>
             </a:pPr>
             <a:r>
-              <a:rPr lang="en-US" sz="2800" b="1" dirty="0">
+              <a:rPr lang="en-US" sz="2600" b="1" dirty="0">
                 <a:solidFill>
                   <a:srgbClr val="1B4D3E"/>
                 </a:solidFill>
@@ -4925,9 +5810,9 @@
                 <a:ea typeface="Bookman Old Style" pitchFamily="34" charset="-122"/>
                 <a:cs typeface="Bookman Old Style" pitchFamily="34" charset="-120"/>
               </a:rPr>
-              <a:t>こんなお悩み、ありませんか？</a:t>
-            </a:r>
-            <a:endParaRPr lang="en-US" sz="2800" dirty="0"/>
+              <a:t>資料請求される方の多くが、こう感じています</a:t>
+            </a:r>
+            <a:endParaRPr lang="en-US" sz="2600" dirty="0"/>
           </a:p>
         </p:txBody>
       </p:sp>
@@ -4964,7 +5849,7 @@
                 <a:ea typeface="Calibri" pitchFamily="34" charset="-122"/>
                 <a:cs typeface="Calibri" pitchFamily="34" charset="-120"/>
               </a:rPr>
-              <a:t>電気料金の高騰が続くいま、固定費としての重さを実感する経営者が増えています</a:t>
+              <a:t>電気代や助成金について、こんなお悩みはありませんか？</a:t>
             </a:r>
             <a:endParaRPr lang="en-US" sz="1300" dirty="0"/>
           </a:p>
@@ -4979,11 +5864,11 @@
         <p:spPr>
           <a:xfrm>
             <a:off x="640080" y="1691640"/>
-            <a:ext cx="5074920" cy="2148840"/>
+            <a:ext cx="3520440" cy="3657600"/>
           </a:xfrm>
           <a:prstGeom prst="roundRect">
             <a:avLst>
-              <a:gd name="adj" fmla="val 3404"/>
+              <a:gd name="adj" fmla="val 2078"/>
             </a:avLst>
           </a:prstGeom>
           <a:solidFill>
@@ -5000,8 +5885,8 @@
         </p:nvSpPr>
         <p:spPr>
           <a:xfrm>
-            <a:off x="982980" y="2331720"/>
-            <a:ext cx="868680" cy="868680"/>
+            <a:off x="1874520" y="2217420"/>
+            <a:ext cx="1051560" cy="1051560"/>
           </a:xfrm>
           <a:prstGeom prst="ellipse">
             <a:avLst/>
@@ -5014,7 +5899,7 @@
       </p:sp>
       <p:pic>
         <p:nvPicPr>
-          <p:cNvPr id="6" name="Image 0" descr="/tmp/claude-0/-home-user-DM-/98b145ee-d85d-5913-a881-95f99ca0c0f7/scratchpad/josei-pptx/icons/bolt_FFFFFF.png">    </p:cNvPr>
+          <p:cNvPr id="6" name="Image 0" descr="/tmp/claude-0/-home-user-DM-/98b145ee-d85d-5913-a881-95f99ca0c0f7/scratchpad/josei-pptx/icons/question_FFFFFF.png">    </p:cNvPr>
           <p:cNvPicPr>
             <a:picLocks noChangeAspect="1"/>
           </p:cNvPicPr>
@@ -5028,8 +5913,8 @@
         </p:blipFill>
         <p:spPr>
           <a:xfrm>
-            <a:off x="1191463" y="2540203"/>
-            <a:ext cx="451714" cy="451714"/>
+            <a:off x="2126894" y="2469794"/>
+            <a:ext cx="546811" cy="546811"/>
           </a:xfrm>
           <a:prstGeom prst="rect">
             <a:avLst/>
@@ -5038,67 +5923,89 @@
       </p:pic>
       <p:sp>
         <p:nvSpPr>
-          <p:cNvPr id="7" name="Text 4"/>
-          <p:cNvSpPr/>
-          <p:nvPr/>
-        </p:nvSpPr>
-        <p:spPr>
-          <a:xfrm>
-            <a:off x="2011680" y="2011680"/>
-            <a:ext cx="3429000" cy="457200"/>
-          </a:xfrm>
-          <a:prstGeom prst="rect">
-            <a:avLst/>
-          </a:prstGeom>
-          <a:noFill/>
-          <a:ln/>
-        </p:spPr>
-        <p:txBody>
-          <a:bodyPr wrap="square" lIns="0" tIns="0" rIns="0" bIns="0" rtlCol="0" anchor="ctr"/>
-          <a:lstStyle/>
-          <a:p>
-            <a:pPr indent="0" marL="0">
-              <a:buNone/>
-            </a:pPr>
-            <a:r>
-              <a:rPr lang="en-US" sz="1600" b="1" dirty="0">
-                <a:solidFill>
-                  <a:srgbClr val="1B4D3E"/>
+          <p:cNvPr id="7" name="Shape 4"/>
+          <p:cNvSpPr/>
+          <p:nvPr/>
+        </p:nvSpPr>
+        <p:spPr>
+          <a:xfrm>
+            <a:off x="1531620" y="3566160"/>
+            <a:ext cx="1737360" cy="457200"/>
+          </a:xfrm>
+          <a:prstGeom prst="roundRect">
+            <a:avLst>
+              <a:gd name="adj" fmla="val 44000"/>
+            </a:avLst>
+          </a:prstGeom>
+          <a:solidFill>
+            <a:srgbClr val="1B4D3E"/>
+          </a:solidFill>
+          <a:ln/>
+        </p:spPr>
+      </p:sp>
+      <p:sp>
+        <p:nvSpPr>
+          <p:cNvPr id="8" name="Text 5"/>
+          <p:cNvSpPr/>
+          <p:nvPr/>
+        </p:nvSpPr>
+        <p:spPr>
+          <a:xfrm>
+            <a:off x="1531620" y="3566160"/>
+            <a:ext cx="1737360" cy="457200"/>
+          </a:xfrm>
+          <a:prstGeom prst="rect">
+            <a:avLst/>
+          </a:prstGeom>
+          <a:noFill/>
+          <a:ln/>
+        </p:spPr>
+        <p:txBody>
+          <a:bodyPr wrap="square" lIns="0" tIns="0" rIns="0" bIns="0" rtlCol="0" anchor="ctr"/>
+          <a:lstStyle/>
+          <a:p>
+            <a:pPr algn="ctr" indent="0" marL="0">
+              <a:buNone/>
+            </a:pPr>
+            <a:r>
+              <a:rPr lang="en-US" sz="1400" b="1" dirty="0">
+                <a:solidFill>
+                  <a:srgbClr val="FFFFFF"/>
                 </a:solidFill>
                 <a:latin typeface="Bookman Old Style" pitchFamily="34" charset="0"/>
                 <a:ea typeface="Bookman Old Style" pitchFamily="34" charset="-122"/>
                 <a:cs typeface="Bookman Old Style" pitchFamily="34" charset="-120"/>
               </a:rPr>
-              <a:t>電気代の高騰</a:t>
-            </a:r>
-            <a:endParaRPr lang="en-US" sz="1600" dirty="0"/>
-          </a:p>
-        </p:txBody>
-      </p:sp>
-      <p:sp>
-        <p:nvSpPr>
-          <p:cNvPr id="8" name="Text 5"/>
-          <p:cNvSpPr/>
-          <p:nvPr/>
-        </p:nvSpPr>
-        <p:spPr>
-          <a:xfrm>
-            <a:off x="2011680" y="2514600"/>
-            <a:ext cx="3429000" cy="1097280"/>
-          </a:xfrm>
-          <a:prstGeom prst="rect">
-            <a:avLst/>
-          </a:prstGeom>
-          <a:noFill/>
-          <a:ln/>
-        </p:spPr>
-        <p:txBody>
-          <a:bodyPr wrap="square" lIns="0" tIns="0" rIns="0" bIns="0" rtlCol="0" anchor="ctr"/>
-          <a:lstStyle/>
-          <a:p>
-            <a:pPr indent="0" marL="0">
+              <a:t>「わからない」</a:t>
+            </a:r>
+            <a:endParaRPr lang="en-US" sz="1400" dirty="0"/>
+          </a:p>
+        </p:txBody>
+      </p:sp>
+      <p:sp>
+        <p:nvSpPr>
+          <p:cNvPr id="9" name="Text 6"/>
+          <p:cNvSpPr/>
+          <p:nvPr/>
+        </p:nvSpPr>
+        <p:spPr>
+          <a:xfrm>
+            <a:off x="914400" y="4206240"/>
+            <a:ext cx="2971800" cy="1005840"/>
+          </a:xfrm>
+          <a:prstGeom prst="rect">
+            <a:avLst/>
+          </a:prstGeom>
+          <a:noFill/>
+          <a:ln/>
+        </p:spPr>
+        <p:txBody>
+          <a:bodyPr wrap="square" lIns="0" tIns="0" rIns="0" bIns="0" rtlCol="0" anchor="ctr"/>
+          <a:lstStyle/>
+          <a:p>
+            <a:pPr algn="ctr" indent="0" marL="0">
               <a:lnSpc>
-                <a:spcPts val="1800"/>
+                <a:spcPts val="1700"/>
               </a:lnSpc>
               <a:buNone/>
             </a:pPr>
@@ -5111,14 +6018,14 @@
                 <a:ea typeface="Calibri" pitchFamily="34" charset="-122"/>
                 <a:cs typeface="Calibri" pitchFamily="34" charset="-120"/>
               </a:rPr>
-              <a:t>電力単価の上昇で、購入する</a:t>
+              <a:t>制度が複雑で、自社がどの</a:t>
             </a:r>
             <a:endParaRPr lang="en-US" sz="1200" dirty="0"/>
           </a:p>
           <a:p>
-            <a:pPr indent="0" marL="0">
+            <a:pPr algn="ctr" indent="0" marL="0">
               <a:lnSpc>
-                <a:spcPts val="1800"/>
+                <a:spcPts val="1700"/>
               </a:lnSpc>
               <a:buNone/>
             </a:pPr>
@@ -5131,7 +6038,7 @@
                 <a:ea typeface="Calibri" pitchFamily="34" charset="-122"/>
                 <a:cs typeface="Calibri" pitchFamily="34" charset="-120"/>
               </a:rPr>
-              <a:t>電気のコストが年々増加している</a:t>
+              <a:t>助成金の対象か判断できない</a:t>
             </a:r>
             <a:endParaRPr lang="en-US" sz="1200" dirty="0"/>
           </a:p>
@@ -5139,18 +6046,18 @@
       </p:sp>
       <p:sp>
         <p:nvSpPr>
-          <p:cNvPr id="9" name="Shape 6"/>
-          <p:cNvSpPr/>
-          <p:nvPr/>
-        </p:nvSpPr>
-        <p:spPr>
-          <a:xfrm>
-            <a:off x="6080760" y="1691640"/>
-            <a:ext cx="5074920" cy="2148840"/>
+          <p:cNvPr id="10" name="Shape 7"/>
+          <p:cNvSpPr/>
+          <p:nvPr/>
+        </p:nvSpPr>
+        <p:spPr>
+          <a:xfrm>
+            <a:off x="4434840" y="1691640"/>
+            <a:ext cx="3520440" cy="3657600"/>
           </a:xfrm>
           <a:prstGeom prst="roundRect">
             <a:avLst>
-              <a:gd name="adj" fmla="val 3404"/>
+              <a:gd name="adj" fmla="val 2078"/>
             </a:avLst>
           </a:prstGeom>
           <a:solidFill>
@@ -5161,14 +6068,14 @@
       </p:sp>
       <p:sp>
         <p:nvSpPr>
-          <p:cNvPr id="10" name="Shape 7"/>
-          <p:cNvSpPr/>
-          <p:nvPr/>
-        </p:nvSpPr>
-        <p:spPr>
-          <a:xfrm>
-            <a:off x="6423660" y="2331720"/>
-            <a:ext cx="868680" cy="868680"/>
+          <p:cNvPr id="11" name="Shape 8"/>
+          <p:cNvSpPr/>
+          <p:nvPr/>
+        </p:nvSpPr>
+        <p:spPr>
+          <a:xfrm>
+            <a:off x="5669280" y="2217420"/>
+            <a:ext cx="1051560" cy="1051560"/>
           </a:xfrm>
           <a:prstGeom prst="ellipse">
             <a:avLst/>
@@ -5181,7 +6088,7 @@
       </p:sp>
       <p:pic>
         <p:nvPicPr>
-          <p:cNvPr id="11" name="Image 1" descr="/tmp/claude-0/-home-user-DM-/98b145ee-d85d-5913-a881-95f99ca0c0f7/scratchpad/josei-pptx/icons/industry_FFFFFF.png">    </p:cNvPr>
+          <p:cNvPr id="12" name="Image 1" descr="/tmp/claude-0/-home-user-DM-/98b145ee-d85d-5913-a881-95f99ca0c0f7/scratchpad/josei-pptx/icons/clock_FFFFFF.png">    </p:cNvPr>
           <p:cNvPicPr>
             <a:picLocks noChangeAspect="1"/>
           </p:cNvPicPr>
@@ -5195,8 +6102,8 @@
         </p:blipFill>
         <p:spPr>
           <a:xfrm>
-            <a:off x="6632143" y="2540203"/>
-            <a:ext cx="451714" cy="451714"/>
+            <a:off x="5921654" y="2469794"/>
+            <a:ext cx="546811" cy="546811"/>
           </a:xfrm>
           <a:prstGeom prst="rect">
             <a:avLst/>
@@ -5205,67 +6112,89 @@
       </p:pic>
       <p:sp>
         <p:nvSpPr>
-          <p:cNvPr id="12" name="Text 8"/>
-          <p:cNvSpPr/>
-          <p:nvPr/>
-        </p:nvSpPr>
-        <p:spPr>
-          <a:xfrm>
-            <a:off x="7452360" y="2011680"/>
-            <a:ext cx="3429000" cy="457200"/>
-          </a:xfrm>
-          <a:prstGeom prst="rect">
-            <a:avLst/>
-          </a:prstGeom>
-          <a:noFill/>
-          <a:ln/>
-        </p:spPr>
-        <p:txBody>
-          <a:bodyPr wrap="square" lIns="0" tIns="0" rIns="0" bIns="0" rtlCol="0" anchor="ctr"/>
-          <a:lstStyle/>
-          <a:p>
-            <a:pPr indent="0" marL="0">
-              <a:buNone/>
-            </a:pPr>
-            <a:r>
-              <a:rPr lang="en-US" sz="1600" b="1" dirty="0">
-                <a:solidFill>
-                  <a:srgbClr val="1B4D3E"/>
+          <p:cNvPr id="13" name="Shape 9"/>
+          <p:cNvSpPr/>
+          <p:nvPr/>
+        </p:nvSpPr>
+        <p:spPr>
+          <a:xfrm>
+            <a:off x="5326380" y="3566160"/>
+            <a:ext cx="1737360" cy="457200"/>
+          </a:xfrm>
+          <a:prstGeom prst="roundRect">
+            <a:avLst>
+              <a:gd name="adj" fmla="val 44000"/>
+            </a:avLst>
+          </a:prstGeom>
+          <a:solidFill>
+            <a:srgbClr val="1B4D3E"/>
+          </a:solidFill>
+          <a:ln/>
+        </p:spPr>
+      </p:sp>
+      <p:sp>
+        <p:nvSpPr>
+          <p:cNvPr id="14" name="Text 10"/>
+          <p:cNvSpPr/>
+          <p:nvPr/>
+        </p:nvSpPr>
+        <p:spPr>
+          <a:xfrm>
+            <a:off x="5326380" y="3566160"/>
+            <a:ext cx="1737360" cy="457200"/>
+          </a:xfrm>
+          <a:prstGeom prst="rect">
+            <a:avLst/>
+          </a:prstGeom>
+          <a:noFill/>
+          <a:ln/>
+        </p:spPr>
+        <p:txBody>
+          <a:bodyPr wrap="square" lIns="0" tIns="0" rIns="0" bIns="0" rtlCol="0" anchor="ctr"/>
+          <a:lstStyle/>
+          <a:p>
+            <a:pPr algn="ctr" indent="0" marL="0">
+              <a:buNone/>
+            </a:pPr>
+            <a:r>
+              <a:rPr lang="en-US" sz="1400" b="1" dirty="0">
+                <a:solidFill>
+                  <a:srgbClr val="FFFFFF"/>
                 </a:solidFill>
                 <a:latin typeface="Bookman Old Style" pitchFamily="34" charset="0"/>
                 <a:ea typeface="Bookman Old Style" pitchFamily="34" charset="-122"/>
                 <a:cs typeface="Bookman Old Style" pitchFamily="34" charset="-120"/>
               </a:rPr>
-              <a:t>固定費としての重さ</a:t>
-            </a:r>
-            <a:endParaRPr lang="en-US" sz="1600" dirty="0"/>
-          </a:p>
-        </p:txBody>
-      </p:sp>
-      <p:sp>
-        <p:nvSpPr>
-          <p:cNvPr id="13" name="Text 9"/>
-          <p:cNvSpPr/>
-          <p:nvPr/>
-        </p:nvSpPr>
-        <p:spPr>
-          <a:xfrm>
-            <a:off x="7452360" y="2514600"/>
-            <a:ext cx="3429000" cy="1097280"/>
-          </a:xfrm>
-          <a:prstGeom prst="rect">
-            <a:avLst/>
-          </a:prstGeom>
-          <a:noFill/>
-          <a:ln/>
-        </p:spPr>
-        <p:txBody>
-          <a:bodyPr wrap="square" lIns="0" tIns="0" rIns="0" bIns="0" rtlCol="0" anchor="ctr"/>
-          <a:lstStyle/>
-          <a:p>
-            <a:pPr indent="0" marL="0">
+              <a:t>「めんどくさい」</a:t>
+            </a:r>
+            <a:endParaRPr lang="en-US" sz="1400" dirty="0"/>
+          </a:p>
+        </p:txBody>
+      </p:sp>
+      <p:sp>
+        <p:nvSpPr>
+          <p:cNvPr id="15" name="Text 11"/>
+          <p:cNvSpPr/>
+          <p:nvPr/>
+        </p:nvSpPr>
+        <p:spPr>
+          <a:xfrm>
+            <a:off x="4709160" y="4206240"/>
+            <a:ext cx="2971800" cy="1005840"/>
+          </a:xfrm>
+          <a:prstGeom prst="rect">
+            <a:avLst/>
+          </a:prstGeom>
+          <a:noFill/>
+          <a:ln/>
+        </p:spPr>
+        <p:txBody>
+          <a:bodyPr wrap="square" lIns="0" tIns="0" rIns="0" bIns="0" rtlCol="0" anchor="ctr"/>
+          <a:lstStyle/>
+          <a:p>
+            <a:pPr algn="ctr" indent="0" marL="0">
               <a:lnSpc>
-                <a:spcPts val="1800"/>
+                <a:spcPts val="1700"/>
               </a:lnSpc>
               <a:buNone/>
             </a:pPr>
@@ -5278,14 +6207,14 @@
                 <a:ea typeface="Calibri" pitchFamily="34" charset="-122"/>
                 <a:cs typeface="Calibri" pitchFamily="34" charset="-120"/>
               </a:rPr>
-              <a:t>毎月確実に発生し、</a:t>
+              <a:t>公募要領を読み込み、書類を揃えて</a:t>
             </a:r>
             <a:endParaRPr lang="en-US" sz="1200" dirty="0"/>
           </a:p>
           <a:p>
-            <a:pPr indent="0" marL="0">
+            <a:pPr algn="ctr" indent="0" marL="0">
               <a:lnSpc>
-                <a:spcPts val="1800"/>
+                <a:spcPts val="1700"/>
               </a:lnSpc>
               <a:buNone/>
             </a:pPr>
@@ -5298,7 +6227,7 @@
                 <a:ea typeface="Calibri" pitchFamily="34" charset="-122"/>
                 <a:cs typeface="Calibri" pitchFamily="34" charset="-120"/>
               </a:rPr>
-              <a:t>利益を圧迫し続けている</a:t>
+              <a:t>申請するだけの時間も余裕もない</a:t>
             </a:r>
             <a:endParaRPr lang="en-US" sz="1200" dirty="0"/>
           </a:p>
@@ -5306,18 +6235,18 @@
       </p:sp>
       <p:sp>
         <p:nvSpPr>
-          <p:cNvPr id="14" name="Shape 10"/>
-          <p:cNvSpPr/>
-          <p:nvPr/>
-        </p:nvSpPr>
-        <p:spPr>
-          <a:xfrm>
-            <a:off x="640080" y="4160520"/>
-            <a:ext cx="5074920" cy="2148840"/>
+          <p:cNvPr id="16" name="Shape 12"/>
+          <p:cNvSpPr/>
+          <p:nvPr/>
+        </p:nvSpPr>
+        <p:spPr>
+          <a:xfrm>
+            <a:off x="8229600" y="1691640"/>
+            <a:ext cx="3520440" cy="3657600"/>
           </a:xfrm>
           <a:prstGeom prst="roundRect">
             <a:avLst>
-              <a:gd name="adj" fmla="val 3404"/>
+              <a:gd name="adj" fmla="val 2078"/>
             </a:avLst>
           </a:prstGeom>
           <a:solidFill>
@@ -5328,14 +6257,14 @@
       </p:sp>
       <p:sp>
         <p:nvSpPr>
-          <p:cNvPr id="15" name="Shape 11"/>
-          <p:cNvSpPr/>
-          <p:nvPr/>
-        </p:nvSpPr>
-        <p:spPr>
-          <a:xfrm>
-            <a:off x="982980" y="4800600"/>
-            <a:ext cx="868680" cy="868680"/>
+          <p:cNvPr id="17" name="Shape 13"/>
+          <p:cNvSpPr/>
+          <p:nvPr/>
+        </p:nvSpPr>
+        <p:spPr>
+          <a:xfrm>
+            <a:off x="9464040" y="2217420"/>
+            <a:ext cx="1051560" cy="1051560"/>
           </a:xfrm>
           <a:prstGeom prst="ellipse">
             <a:avLst/>
@@ -5348,7 +6277,7 @@
       </p:sp>
       <p:pic>
         <p:nvPicPr>
-          <p:cNvPr id="16" name="Image 2" descr="/tmp/claude-0/-home-user-DM-/98b145ee-d85d-5913-a881-95f99ca0c0f7/scratchpad/josei-pptx/icons/comments_FFFFFF.png">    </p:cNvPr>
+          <p:cNvPr id="18" name="Image 2" descr="/tmp/claude-0/-home-user-DM-/98b145ee-d85d-5913-a881-95f99ca0c0f7/scratchpad/josei-pptx/icons/search_FFFFFF.png">    </p:cNvPr>
           <p:cNvPicPr>
             <a:picLocks noChangeAspect="1"/>
           </p:cNvPicPr>
@@ -5362,8 +6291,8 @@
         </p:blipFill>
         <p:spPr>
           <a:xfrm>
-            <a:off x="1191463" y="5009083"/>
-            <a:ext cx="451714" cy="451714"/>
+            <a:off x="9716414" y="2469794"/>
+            <a:ext cx="546811" cy="546811"/>
           </a:xfrm>
           <a:prstGeom prst="rect">
             <a:avLst/>
@@ -5372,67 +6301,89 @@
       </p:pic>
       <p:sp>
         <p:nvSpPr>
-          <p:cNvPr id="17" name="Text 12"/>
-          <p:cNvSpPr/>
-          <p:nvPr/>
-        </p:nvSpPr>
-        <p:spPr>
-          <a:xfrm>
-            <a:off x="2011680" y="4480560"/>
-            <a:ext cx="3429000" cy="457200"/>
-          </a:xfrm>
-          <a:prstGeom prst="rect">
-            <a:avLst/>
-          </a:prstGeom>
-          <a:noFill/>
-          <a:ln/>
-        </p:spPr>
-        <p:txBody>
-          <a:bodyPr wrap="square" lIns="0" tIns="0" rIns="0" bIns="0" rtlCol="0" anchor="ctr"/>
-          <a:lstStyle/>
-          <a:p>
-            <a:pPr indent="0" marL="0">
-              <a:buNone/>
-            </a:pPr>
-            <a:r>
-              <a:rPr lang="en-US" sz="1600" b="1" dirty="0">
-                <a:solidFill>
-                  <a:srgbClr val="1B4D3E"/>
+          <p:cNvPr id="19" name="Shape 14"/>
+          <p:cNvSpPr/>
+          <p:nvPr/>
+        </p:nvSpPr>
+        <p:spPr>
+          <a:xfrm>
+            <a:off x="9121140" y="3566160"/>
+            <a:ext cx="1737360" cy="457200"/>
+          </a:xfrm>
+          <a:prstGeom prst="roundRect">
+            <a:avLst>
+              <a:gd name="adj" fmla="val 44000"/>
+            </a:avLst>
+          </a:prstGeom>
+          <a:solidFill>
+            <a:srgbClr val="1B4D3E"/>
+          </a:solidFill>
+          <a:ln/>
+        </p:spPr>
+      </p:sp>
+      <p:sp>
+        <p:nvSpPr>
+          <p:cNvPr id="20" name="Text 15"/>
+          <p:cNvSpPr/>
+          <p:nvPr/>
+        </p:nvSpPr>
+        <p:spPr>
+          <a:xfrm>
+            <a:off x="9121140" y="3566160"/>
+            <a:ext cx="1737360" cy="457200"/>
+          </a:xfrm>
+          <a:prstGeom prst="rect">
+            <a:avLst/>
+          </a:prstGeom>
+          <a:noFill/>
+          <a:ln/>
+        </p:spPr>
+        <p:txBody>
+          <a:bodyPr wrap="square" lIns="0" tIns="0" rIns="0" bIns="0" rtlCol="0" anchor="ctr"/>
+          <a:lstStyle/>
+          <a:p>
+            <a:pPr algn="ctr" indent="0" marL="0">
+              <a:buNone/>
+            </a:pPr>
+            <a:r>
+              <a:rPr lang="en-US" sz="1400" b="1" dirty="0">
+                <a:solidFill>
+                  <a:srgbClr val="FFFFFF"/>
                 </a:solidFill>
                 <a:latin typeface="Bookman Old Style" pitchFamily="34" charset="0"/>
                 <a:ea typeface="Bookman Old Style" pitchFamily="34" charset="-122"/>
                 <a:cs typeface="Bookman Old Style" pitchFamily="34" charset="-120"/>
               </a:rPr>
-              <a:t>使える制度を知らない</a:t>
-            </a:r>
-            <a:endParaRPr lang="en-US" sz="1600" dirty="0"/>
-          </a:p>
-        </p:txBody>
-      </p:sp>
-      <p:sp>
-        <p:nvSpPr>
-          <p:cNvPr id="18" name="Text 13"/>
-          <p:cNvSpPr/>
-          <p:nvPr/>
-        </p:nvSpPr>
-        <p:spPr>
-          <a:xfrm>
-            <a:off x="2011680" y="4983480"/>
-            <a:ext cx="3429000" cy="1097280"/>
-          </a:xfrm>
-          <a:prstGeom prst="rect">
-            <a:avLst/>
-          </a:prstGeom>
-          <a:noFill/>
-          <a:ln/>
-        </p:spPr>
-        <p:txBody>
-          <a:bodyPr wrap="square" lIns="0" tIns="0" rIns="0" bIns="0" rtlCol="0" anchor="ctr"/>
-          <a:lstStyle/>
-          <a:p>
-            <a:pPr indent="0" marL="0">
+              <a:t>「この先が見えない」</a:t>
+            </a:r>
+            <a:endParaRPr lang="en-US" sz="1400" dirty="0"/>
+          </a:p>
+        </p:txBody>
+      </p:sp>
+      <p:sp>
+        <p:nvSpPr>
+          <p:cNvPr id="21" name="Text 16"/>
+          <p:cNvSpPr/>
+          <p:nvPr/>
+        </p:nvSpPr>
+        <p:spPr>
+          <a:xfrm>
+            <a:off x="8503920" y="4206240"/>
+            <a:ext cx="2971800" cy="1005840"/>
+          </a:xfrm>
+          <a:prstGeom prst="rect">
+            <a:avLst/>
+          </a:prstGeom>
+          <a:noFill/>
+          <a:ln/>
+        </p:spPr>
+        <p:txBody>
+          <a:bodyPr wrap="square" lIns="0" tIns="0" rIns="0" bIns="0" rtlCol="0" anchor="ctr"/>
+          <a:lstStyle/>
+          <a:p>
+            <a:pPr algn="ctr" indent="0" marL="0">
               <a:lnSpc>
-                <a:spcPts val="1800"/>
+                <a:spcPts val="1700"/>
               </a:lnSpc>
               <a:buNone/>
             </a:pPr>
@@ -5445,14 +6396,14 @@
                 <a:ea typeface="Calibri" pitchFamily="34" charset="-122"/>
                 <a:cs typeface="Calibri" pitchFamily="34" charset="-120"/>
               </a:rPr>
-              <a:t>申請していないだけで</a:t>
+              <a:t>活用したら実際どうなるのか、</a:t>
             </a:r>
             <a:endParaRPr lang="en-US" sz="1200" dirty="0"/>
           </a:p>
           <a:p>
-            <a:pPr indent="0" marL="0">
+            <a:pPr algn="ctr" indent="0" marL="0">
               <a:lnSpc>
-                <a:spcPts val="1800"/>
+                <a:spcPts val="1700"/>
               </a:lnSpc>
               <a:buNone/>
             </a:pPr>
@@ -5465,7 +6416,7 @@
                 <a:ea typeface="Calibri" pitchFamily="34" charset="-122"/>
                 <a:cs typeface="Calibri" pitchFamily="34" charset="-120"/>
               </a:rPr>
-              <a:t>使える助成金・補助金があるかもしれない</a:t>
+              <a:t>イメージが湧かず一歩を踏み出せない</a:t>
             </a:r>
             <a:endParaRPr lang="en-US" sz="1200" dirty="0"/>
           </a:p>
@@ -5473,80 +6424,14 @@
       </p:sp>
       <p:sp>
         <p:nvSpPr>
-          <p:cNvPr id="19" name="Shape 14"/>
-          <p:cNvSpPr/>
-          <p:nvPr/>
-        </p:nvSpPr>
-        <p:spPr>
-          <a:xfrm>
-            <a:off x="6080760" y="4160520"/>
-            <a:ext cx="5074920" cy="2148840"/>
-          </a:xfrm>
-          <a:prstGeom prst="roundRect">
-            <a:avLst>
-              <a:gd name="adj" fmla="val 3404"/>
-            </a:avLst>
-          </a:prstGeom>
-          <a:solidFill>
-            <a:srgbClr val="F2F7F4"/>
-          </a:solidFill>
-          <a:ln/>
-        </p:spPr>
-      </p:sp>
-      <p:sp>
-        <p:nvSpPr>
-          <p:cNvPr id="20" name="Shape 15"/>
-          <p:cNvSpPr/>
-          <p:nvPr/>
-        </p:nvSpPr>
-        <p:spPr>
-          <a:xfrm>
-            <a:off x="6423660" y="4800600"/>
-            <a:ext cx="868680" cy="868680"/>
-          </a:xfrm>
-          <a:prstGeom prst="ellipse">
-            <a:avLst/>
-          </a:prstGeom>
-          <a:solidFill>
-            <a:srgbClr val="1B4D3E"/>
-          </a:solidFill>
-          <a:ln/>
-        </p:spPr>
-      </p:sp>
-      <p:pic>
-        <p:nvPicPr>
-          <p:cNvPr id="21" name="Image 3" descr="/tmp/claude-0/-home-user-DM-/98b145ee-d85d-5913-a881-95f99ca0c0f7/scratchpad/josei-pptx/icons/shield_FFFFFF.png">    </p:cNvPr>
-          <p:cNvPicPr>
-            <a:picLocks noChangeAspect="1"/>
-          </p:cNvPicPr>
-          <p:nvPr/>
-        </p:nvPicPr>
-        <p:blipFill>
-          <a:blip r:embed="rId4"/>
-          <a:stretch>
-            <a:fillRect/>
-          </a:stretch>
-        </p:blipFill>
-        <p:spPr>
-          <a:xfrm>
-            <a:off x="6632143" y="5009083"/>
-            <a:ext cx="451714" cy="451714"/>
-          </a:xfrm>
-          <a:prstGeom prst="rect">
-            <a:avLst/>
-          </a:prstGeom>
-        </p:spPr>
-      </p:pic>
-      <p:sp>
-        <p:nvSpPr>
-          <p:cNvPr id="22" name="Text 16"/>
-          <p:cNvSpPr/>
-          <p:nvPr/>
-        </p:nvSpPr>
-        <p:spPr>
-          <a:xfrm>
-            <a:off x="7452360" y="4480560"/>
-            <a:ext cx="3429000" cy="457200"/>
+          <p:cNvPr id="22" name="Text 17"/>
+          <p:cNvSpPr/>
+          <p:nvPr/>
+        </p:nvSpPr>
+        <p:spPr>
+          <a:xfrm>
+            <a:off x="457200" y="6537960"/>
+            <a:ext cx="7315200" cy="274320"/>
           </a:xfrm>
           <a:prstGeom prst="rect">
             <a:avLst/>
@@ -5562,115 +6447,14 @@
               <a:buNone/>
             </a:pPr>
             <a:r>
-              <a:rPr lang="en-US" sz="1600" b="1" dirty="0">
-                <a:solidFill>
-                  <a:srgbClr val="1B4D3E"/>
-                </a:solidFill>
-                <a:latin typeface="Bookman Old Style" pitchFamily="34" charset="0"/>
-                <a:ea typeface="Bookman Old Style" pitchFamily="34" charset="-122"/>
-                <a:cs typeface="Bookman Old Style" pitchFamily="34" charset="-120"/>
-              </a:rPr>
-              <a:t>特定業者への誘導が不安</a:t>
-            </a:r>
-            <a:endParaRPr lang="en-US" sz="1600" dirty="0"/>
-          </a:p>
-        </p:txBody>
-      </p:sp>
-      <p:sp>
-        <p:nvSpPr>
-          <p:cNvPr id="23" name="Text 17"/>
-          <p:cNvSpPr/>
-          <p:nvPr/>
-        </p:nvSpPr>
-        <p:spPr>
-          <a:xfrm>
-            <a:off x="7452360" y="4983480"/>
-            <a:ext cx="3429000" cy="1097280"/>
-          </a:xfrm>
-          <a:prstGeom prst="rect">
-            <a:avLst/>
-          </a:prstGeom>
-          <a:noFill/>
-          <a:ln/>
-        </p:spPr>
-        <p:txBody>
-          <a:bodyPr wrap="square" lIns="0" tIns="0" rIns="0" bIns="0" rtlCol="0" anchor="ctr"/>
-          <a:lstStyle/>
-          <a:p>
-            <a:pPr indent="0" marL="0">
-              <a:lnSpc>
-                <a:spcPts val="1800"/>
-              </a:lnSpc>
-              <a:buNone/>
-            </a:pPr>
-            <a:r>
-              <a:rPr lang="en-US" sz="1200" dirty="0">
-                <a:solidFill>
-                  <a:srgbClr val="24272E"/>
+              <a:rPr lang="en-US" sz="900" dirty="0">
+                <a:solidFill>
+                  <a:srgbClr val="6B7280"/>
                 </a:solidFill>
                 <a:latin typeface="Calibri" pitchFamily="34" charset="0"/>
                 <a:ea typeface="Calibri" pitchFamily="34" charset="-122"/>
                 <a:cs typeface="Calibri" pitchFamily="34" charset="-120"/>
               </a:rPr>
-              <a:t>施工業者主導の営業ではなく、</a:t>
-            </a:r>
-            <a:endParaRPr lang="en-US" sz="1200" dirty="0"/>
-          </a:p>
-          <a:p>
-            <a:pPr indent="0" marL="0">
-              <a:lnSpc>
-                <a:spcPts val="1800"/>
-              </a:lnSpc>
-              <a:buNone/>
-            </a:pPr>
-            <a:r>
-              <a:rPr lang="en-US" sz="1200" dirty="0">
-                <a:solidFill>
-                  <a:srgbClr val="24272E"/>
-                </a:solidFill>
-                <a:latin typeface="Calibri" pitchFamily="34" charset="0"/>
-                <a:ea typeface="Calibri" pitchFamily="34" charset="-122"/>
-                <a:cs typeface="Calibri" pitchFamily="34" charset="-120"/>
-              </a:rPr>
-              <a:t>中立な立場の相談先を探している</a:t>
-            </a:r>
-            <a:endParaRPr lang="en-US" sz="1200" dirty="0"/>
-          </a:p>
-        </p:txBody>
-      </p:sp>
-      <p:sp>
-        <p:nvSpPr>
-          <p:cNvPr id="24" name="Text 18"/>
-          <p:cNvSpPr/>
-          <p:nvPr/>
-        </p:nvSpPr>
-        <p:spPr>
-          <a:xfrm>
-            <a:off x="457200" y="6537960"/>
-            <a:ext cx="7315200" cy="274320"/>
-          </a:xfrm>
-          <a:prstGeom prst="rect">
-            <a:avLst/>
-          </a:prstGeom>
-          <a:noFill/>
-          <a:ln/>
-        </p:spPr>
-        <p:txBody>
-          <a:bodyPr wrap="square" lIns="0" tIns="0" rIns="0" bIns="0" rtlCol="0" anchor="ctr"/>
-          <a:lstStyle/>
-          <a:p>
-            <a:pPr indent="0" marL="0">
-              <a:buNone/>
-            </a:pPr>
-            <a:r>
-              <a:rPr lang="en-US" sz="900" dirty="0">
-                <a:solidFill>
-                  <a:srgbClr val="6B7280"/>
-                </a:solidFill>
-                <a:latin typeface="Calibri" pitchFamily="34" charset="0"/>
-                <a:ea typeface="Calibri" pitchFamily="34" charset="-122"/>
-                <a:cs typeface="Calibri" pitchFamily="34" charset="-120"/>
-              </a:rPr>
               <a:t>一般社団法人 中小企業助成金支援協会　資料請求資料</a:t>
             </a:r>
             <a:endParaRPr lang="en-US" sz="900" dirty="0"/>
@@ -5679,7 +6463,7 @@
       </p:sp>
       <p:sp>
         <p:nvSpPr>
-          <p:cNvPr id="25" name="Text 19"/>
+          <p:cNvPr id="23" name="Text 18"/>
           <p:cNvSpPr/>
           <p:nvPr/>
         </p:nvSpPr>
@@ -5773,7 +6557,7 @@
               <a:buNone/>
             </a:pPr>
             <a:r>
-              <a:rPr lang="en-US" sz="2500" b="1" dirty="0">
+              <a:rPr lang="en-US" sz="2600" b="1" dirty="0">
                 <a:solidFill>
                   <a:srgbClr val="1B4D3E"/>
                 </a:solidFill>
@@ -5781,9 +6565,9 @@
                 <a:ea typeface="Bookman Old Style" pitchFamily="34" charset="-122"/>
                 <a:cs typeface="Bookman Old Style" pitchFamily="34" charset="-120"/>
               </a:rPr>
-              <a:t>私たちにできること　－　4つの支援内容</a:t>
-            </a:r>
-            <a:endParaRPr lang="en-US" sz="2500" dirty="0"/>
+              <a:t>ご支援を受けると、こう変わります</a:t>
+            </a:r>
+            <a:endParaRPr lang="en-US" sz="2600" dirty="0"/>
           </a:p>
         </p:txBody>
       </p:sp>
@@ -5820,7 +6604,7 @@
                 <a:ea typeface="Calibri" pitchFamily="34" charset="-122"/>
                 <a:cs typeface="Calibri" pitchFamily="34" charset="-120"/>
               </a:rPr>
-              <a:t>特定の施工業者に偏らない、中立・透明な立場でご相談に応じます</a:t>
+              <a:t>「わからない・めんどくさい」を専門家に任せることで、見える景色が変わります</a:t>
             </a:r>
             <a:endParaRPr lang="en-US" sz="1300" dirty="0"/>
           </a:p>
@@ -5834,12 +6618,12 @@
         </p:nvSpPr>
         <p:spPr>
           <a:xfrm>
-            <a:off x="640080" y="1645920"/>
-            <a:ext cx="5074920" cy="1783080"/>
+            <a:off x="640080" y="1691640"/>
+            <a:ext cx="4846320" cy="3977640"/>
           </a:xfrm>
           <a:prstGeom prst="roundRect">
             <a:avLst>
-              <a:gd name="adj" fmla="val 4103"/>
+              <a:gd name="adj" fmla="val 1839"/>
             </a:avLst>
           </a:prstGeom>
           <a:solidFill>
@@ -5850,27 +6634,66 @@
       </p:sp>
       <p:sp>
         <p:nvSpPr>
-          <p:cNvPr id="5" name="Shape 3"/>
-          <p:cNvSpPr/>
-          <p:nvPr/>
-        </p:nvSpPr>
-        <p:spPr>
-          <a:xfrm>
-            <a:off x="982980" y="2148840"/>
-            <a:ext cx="777240" cy="777240"/>
+          <p:cNvPr id="5" name="Text 3"/>
+          <p:cNvSpPr/>
+          <p:nvPr/>
+        </p:nvSpPr>
+        <p:spPr>
+          <a:xfrm>
+            <a:off x="960120" y="1965960"/>
+            <a:ext cx="4206240" cy="457200"/>
+          </a:xfrm>
+          <a:prstGeom prst="rect">
+            <a:avLst/>
+          </a:prstGeom>
+          <a:noFill/>
+          <a:ln/>
+        </p:spPr>
+        <p:txBody>
+          <a:bodyPr wrap="square" lIns="0" tIns="0" rIns="0" bIns="0" rtlCol="0" anchor="ctr"/>
+          <a:lstStyle/>
+          <a:p>
+            <a:pPr indent="0" marL="0">
+              <a:buNone/>
+            </a:pPr>
+            <a:r>
+              <a:rPr lang="en-US" sz="1600" b="1" dirty="0">
+                <a:solidFill>
+                  <a:srgbClr val="6B7280"/>
+                </a:solidFill>
+                <a:latin typeface="Bookman Old Style" pitchFamily="34" charset="0"/>
+                <a:ea typeface="Bookman Old Style" pitchFamily="34" charset="-122"/>
+                <a:cs typeface="Bookman Old Style" pitchFamily="34" charset="-120"/>
+              </a:rPr>
+              <a:t>これまで</a:t>
+            </a:r>
+            <a:endParaRPr lang="en-US" sz="1600" dirty="0"/>
+          </a:p>
+        </p:txBody>
+      </p:sp>
+      <p:sp>
+        <p:nvSpPr>
+          <p:cNvPr id="6" name="Shape 4"/>
+          <p:cNvSpPr/>
+          <p:nvPr/>
+        </p:nvSpPr>
+        <p:spPr>
+          <a:xfrm>
+            <a:off x="868680" y="2651760"/>
+            <a:ext cx="548640" cy="548640"/>
           </a:xfrm>
           <a:prstGeom prst="ellipse">
             <a:avLst/>
           </a:prstGeom>
           <a:solidFill>
-            <a:srgbClr val="1B4D3E"/>
+            <a:srgbClr val="B0B8B3"/>
           </a:solidFill>
           <a:ln/>
         </p:spPr>
       </p:sp>
       <p:pic>
         <p:nvPicPr>
-          <p:cNvPr id="6" name="Image 0" descr="/tmp/claude-0/-home-user-DM-/98b145ee-d85d-5913-a881-95f99ca0c0f7/scratchpad/josei-pptx/icons/comments_FFFFFF.png">    </p:cNvPr>
+          <p:cNvPr id="7" name="Image 0" descr="/tmp/claude-0/-home-user-DM-/98b145ee-d85d-5913-a881-95f99ca0c0f7/scratchpad/josei-pptx/icons/times_FFFFFF.png">    </p:cNvPr>
           <p:cNvPicPr>
             <a:picLocks noChangeAspect="1"/>
           </p:cNvPicPr>
@@ -5884,8 +6707,8 @@
         </p:blipFill>
         <p:spPr>
           <a:xfrm>
-            <a:off x="1169518" y="2335378"/>
-            <a:ext cx="404165" cy="404165"/>
+            <a:off x="1000354" y="2783434"/>
+            <a:ext cx="285293" cy="285293"/>
           </a:xfrm>
           <a:prstGeom prst="rect">
             <a:avLst/>
@@ -5894,53 +6717,14 @@
       </p:pic>
       <p:sp>
         <p:nvSpPr>
-          <p:cNvPr id="7" name="Text 4"/>
-          <p:cNvSpPr/>
-          <p:nvPr/>
-        </p:nvSpPr>
-        <p:spPr>
-          <a:xfrm>
-            <a:off x="1920240" y="1874520"/>
-            <a:ext cx="3520440" cy="411480"/>
-          </a:xfrm>
-          <a:prstGeom prst="rect">
-            <a:avLst/>
-          </a:prstGeom>
-          <a:noFill/>
-          <a:ln/>
-        </p:spPr>
-        <p:txBody>
-          <a:bodyPr wrap="square" lIns="0" tIns="0" rIns="0" bIns="0" rtlCol="0" anchor="ctr"/>
-          <a:lstStyle/>
-          <a:p>
-            <a:pPr indent="0" marL="0">
-              <a:buNone/>
-            </a:pPr>
-            <a:r>
-              <a:rPr lang="en-US" sz="1450" b="1" dirty="0">
-                <a:solidFill>
-                  <a:srgbClr val="1B4D3E"/>
-                </a:solidFill>
-                <a:latin typeface="Bookman Old Style" pitchFamily="34" charset="0"/>
-                <a:ea typeface="Bookman Old Style" pitchFamily="34" charset="-122"/>
-                <a:cs typeface="Bookman Old Style" pitchFamily="34" charset="-120"/>
-              </a:rPr>
-              <a:t>補助金情報の透明提供</a:t>
-            </a:r>
-            <a:endParaRPr lang="en-US" sz="1450" dirty="0"/>
-          </a:p>
-        </p:txBody>
-      </p:sp>
-      <p:sp>
-        <p:nvSpPr>
           <p:cNvPr id="8" name="Text 5"/>
           <p:cNvSpPr/>
           <p:nvPr/>
         </p:nvSpPr>
         <p:spPr>
           <a:xfrm>
-            <a:off x="1920240" y="2304288"/>
-            <a:ext cx="3520440" cy="914400"/>
+            <a:off x="1554480" y="2606040"/>
+            <a:ext cx="3657600" cy="822960"/>
           </a:xfrm>
           <a:prstGeom prst="rect">
             <a:avLst/>
@@ -5959,7 +6743,7 @@
               <a:buNone/>
             </a:pPr>
             <a:r>
-              <a:rPr lang="en-US" sz="1100" dirty="0">
+              <a:rPr lang="en-US" sz="1200" dirty="0">
                 <a:solidFill>
                   <a:srgbClr val="24272E"/>
                 </a:solidFill>
@@ -5967,9 +6751,9 @@
                 <a:ea typeface="Calibri" pitchFamily="34" charset="-122"/>
                 <a:cs typeface="Calibri" pitchFamily="34" charset="-120"/>
               </a:rPr>
-              <a:t>省エネ関連の補助金・助成金について、</a:t>
-            </a:r>
-            <a:endParaRPr lang="en-US" sz="1100" dirty="0"/>
+              <a:t>制度が複雑でわからないまま、</a:t>
+            </a:r>
+            <a:endParaRPr lang="en-US" sz="1200" dirty="0"/>
           </a:p>
           <a:p>
             <a:pPr indent="0" marL="0">
@@ -5979,7 +6763,7 @@
               <a:buNone/>
             </a:pPr>
             <a:r>
-              <a:rPr lang="en-US" sz="1100" dirty="0">
+              <a:rPr lang="en-US" sz="1200" dirty="0">
                 <a:solidFill>
                   <a:srgbClr val="24272E"/>
                 </a:solidFill>
@@ -5987,9 +6771,9 @@
                 <a:ea typeface="Calibri" pitchFamily="34" charset="-122"/>
                 <a:cs typeface="Calibri" pitchFamily="34" charset="-120"/>
               </a:rPr>
-              <a:t>要件や対象を分かりやすく整理してお届け</a:t>
-            </a:r>
-            <a:endParaRPr lang="en-US" sz="1100" dirty="0"/>
+              <a:t>毎年なんとなく過ぎていく</a:t>
+            </a:r>
+            <a:endParaRPr lang="en-US" sz="1200" dirty="0"/>
           </a:p>
         </p:txBody>
       </p:sp>
@@ -6001,43 +6785,21 @@
         </p:nvSpPr>
         <p:spPr>
           <a:xfrm>
-            <a:off x="6080760" y="1645920"/>
-            <a:ext cx="5074920" cy="1783080"/>
-          </a:xfrm>
-          <a:prstGeom prst="roundRect">
-            <a:avLst>
-              <a:gd name="adj" fmla="val 4103"/>
-            </a:avLst>
+            <a:off x="868680" y="3611880"/>
+            <a:ext cx="548640" cy="548640"/>
+          </a:xfrm>
+          <a:prstGeom prst="ellipse">
+            <a:avLst/>
           </a:prstGeom>
           <a:solidFill>
-            <a:srgbClr val="F2F7F4"/>
-          </a:solidFill>
-          <a:ln/>
-        </p:spPr>
-      </p:sp>
-      <p:sp>
-        <p:nvSpPr>
-          <p:cNvPr id="10" name="Shape 7"/>
-          <p:cNvSpPr/>
-          <p:nvPr/>
-        </p:nvSpPr>
-        <p:spPr>
-          <a:xfrm>
-            <a:off x="6423660" y="2148840"/>
-            <a:ext cx="777240" cy="777240"/>
-          </a:xfrm>
-          <a:prstGeom prst="ellipse">
-            <a:avLst/>
-          </a:prstGeom>
-          <a:solidFill>
-            <a:srgbClr val="1B4D3E"/>
+            <a:srgbClr val="B0B8B3"/>
           </a:solidFill>
           <a:ln/>
         </p:spPr>
       </p:sp>
       <p:pic>
         <p:nvPicPr>
-          <p:cNvPr id="11" name="Image 1" descr="/tmp/claude-0/-home-user-DM-/98b145ee-d85d-5913-a881-95f99ca0c0f7/scratchpad/josei-pptx/icons/search_FFFFFF.png">    </p:cNvPr>
+          <p:cNvPr id="10" name="Image 1" descr="/tmp/claude-0/-home-user-DM-/98b145ee-d85d-5913-a881-95f99ca0c0f7/scratchpad/josei-pptx/icons/times_FFFFFF.png">    </p:cNvPr>
           <p:cNvPicPr>
             <a:picLocks noChangeAspect="1"/>
           </p:cNvPicPr>
@@ -6051,8 +6813,8 @@
         </p:blipFill>
         <p:spPr>
           <a:xfrm>
-            <a:off x="6610198" y="2335378"/>
-            <a:ext cx="404165" cy="404165"/>
+            <a:off x="1000354" y="3743554"/>
+            <a:ext cx="285293" cy="285293"/>
           </a:xfrm>
           <a:prstGeom prst="rect">
             <a:avLst/>
@@ -6061,53 +6823,14 @@
       </p:pic>
       <p:sp>
         <p:nvSpPr>
-          <p:cNvPr id="12" name="Text 8"/>
-          <p:cNvSpPr/>
-          <p:nvPr/>
-        </p:nvSpPr>
-        <p:spPr>
-          <a:xfrm>
-            <a:off x="7360920" y="1874520"/>
-            <a:ext cx="3520440" cy="411480"/>
-          </a:xfrm>
-          <a:prstGeom prst="rect">
-            <a:avLst/>
-          </a:prstGeom>
-          <a:noFill/>
-          <a:ln/>
-        </p:spPr>
-        <p:txBody>
-          <a:bodyPr wrap="square" lIns="0" tIns="0" rIns="0" bIns="0" rtlCol="0" anchor="ctr"/>
-          <a:lstStyle/>
-          <a:p>
-            <a:pPr indent="0" marL="0">
-              <a:buNone/>
-            </a:pPr>
-            <a:r>
-              <a:rPr lang="en-US" sz="1450" b="1" dirty="0">
-                <a:solidFill>
-                  <a:srgbClr val="1B4D3E"/>
-                </a:solidFill>
-                <a:latin typeface="Bookman Old Style" pitchFamily="34" charset="0"/>
-                <a:ea typeface="Bookman Old Style" pitchFamily="34" charset="-122"/>
-                <a:cs typeface="Bookman Old Style" pitchFamily="34" charset="-120"/>
-              </a:rPr>
-              <a:t>地域ごとの制度整理</a:t>
-            </a:r>
-            <a:endParaRPr lang="en-US" sz="1450" dirty="0"/>
-          </a:p>
-        </p:txBody>
-      </p:sp>
-      <p:sp>
-        <p:nvSpPr>
-          <p:cNvPr id="13" name="Text 9"/>
-          <p:cNvSpPr/>
-          <p:nvPr/>
-        </p:nvSpPr>
-        <p:spPr>
-          <a:xfrm>
-            <a:off x="7360920" y="2304288"/>
-            <a:ext cx="3520440" cy="914400"/>
+          <p:cNvPr id="11" name="Text 7"/>
+          <p:cNvSpPr/>
+          <p:nvPr/>
+        </p:nvSpPr>
+        <p:spPr>
+          <a:xfrm>
+            <a:off x="1554480" y="3566160"/>
+            <a:ext cx="3657600" cy="822960"/>
           </a:xfrm>
           <a:prstGeom prst="rect">
             <a:avLst/>
@@ -6126,7 +6849,7 @@
               <a:buNone/>
             </a:pPr>
             <a:r>
-              <a:rPr lang="en-US" sz="1100" dirty="0">
+              <a:rPr lang="en-US" sz="1200" dirty="0">
                 <a:solidFill>
                   <a:srgbClr val="24272E"/>
                 </a:solidFill>
@@ -6134,9 +6857,9 @@
                 <a:ea typeface="Calibri" pitchFamily="34" charset="-122"/>
                 <a:cs typeface="Calibri" pitchFamily="34" charset="-120"/>
               </a:rPr>
-              <a:t>地域ごとに異なる制度を、公開されている</a:t>
-            </a:r>
-            <a:endParaRPr lang="en-US" sz="1100" dirty="0"/>
+              <a:t>書類準備が面倒で、</a:t>
+            </a:r>
+            <a:endParaRPr lang="en-US" sz="1200" dirty="0"/>
           </a:p>
           <a:p>
             <a:pPr indent="0" marL="0">
@@ -6146,7 +6869,7 @@
               <a:buNone/>
             </a:pPr>
             <a:r>
-              <a:rPr lang="en-US" sz="1100" dirty="0">
+              <a:rPr lang="en-US" sz="1200" dirty="0">
                 <a:solidFill>
                   <a:srgbClr val="24272E"/>
                 </a:solidFill>
@@ -6154,57 +6877,35 @@
                 <a:ea typeface="Calibri" pitchFamily="34" charset="-122"/>
                 <a:cs typeface="Calibri" pitchFamily="34" charset="-120"/>
               </a:rPr>
-              <a:t>公募要領をもとに整理してご案内</a:t>
-            </a:r>
-            <a:endParaRPr lang="en-US" sz="1100" dirty="0"/>
-          </a:p>
-        </p:txBody>
-      </p:sp>
-      <p:sp>
-        <p:nvSpPr>
-          <p:cNvPr id="14" name="Shape 10"/>
-          <p:cNvSpPr/>
-          <p:nvPr/>
-        </p:nvSpPr>
-        <p:spPr>
-          <a:xfrm>
-            <a:off x="640080" y="3657600"/>
-            <a:ext cx="5074920" cy="1783080"/>
-          </a:xfrm>
-          <a:prstGeom prst="roundRect">
-            <a:avLst>
-              <a:gd name="adj" fmla="val 4103"/>
-            </a:avLst>
+              <a:t>申請を後回しにしてしまう</a:t>
+            </a:r>
+            <a:endParaRPr lang="en-US" sz="1200" dirty="0"/>
+          </a:p>
+        </p:txBody>
+      </p:sp>
+      <p:sp>
+        <p:nvSpPr>
+          <p:cNvPr id="12" name="Shape 8"/>
+          <p:cNvSpPr/>
+          <p:nvPr/>
+        </p:nvSpPr>
+        <p:spPr>
+          <a:xfrm>
+            <a:off x="868680" y="4572000"/>
+            <a:ext cx="548640" cy="548640"/>
+          </a:xfrm>
+          <a:prstGeom prst="ellipse">
+            <a:avLst/>
           </a:prstGeom>
           <a:solidFill>
-            <a:srgbClr val="F2F7F4"/>
-          </a:solidFill>
-          <a:ln/>
-        </p:spPr>
-      </p:sp>
-      <p:sp>
-        <p:nvSpPr>
-          <p:cNvPr id="15" name="Shape 11"/>
-          <p:cNvSpPr/>
-          <p:nvPr/>
-        </p:nvSpPr>
-        <p:spPr>
-          <a:xfrm>
-            <a:off x="982980" y="4160520"/>
-            <a:ext cx="777240" cy="777240"/>
-          </a:xfrm>
-          <a:prstGeom prst="ellipse">
-            <a:avLst/>
-          </a:prstGeom>
-          <a:solidFill>
-            <a:srgbClr val="1B4D3E"/>
+            <a:srgbClr val="B0B8B3"/>
           </a:solidFill>
           <a:ln/>
         </p:spPr>
       </p:sp>
       <p:pic>
         <p:nvPicPr>
-          <p:cNvPr id="16" name="Image 2" descr="/tmp/claude-0/-home-user-DM-/98b145ee-d85d-5913-a881-95f99ca0c0f7/scratchpad/josei-pptx/icons/handshake_FFFFFF.png">    </p:cNvPr>
+          <p:cNvPr id="13" name="Image 2" descr="/tmp/claude-0/-home-user-DM-/98b145ee-d85d-5913-a881-95f99ca0c0f7/scratchpad/josei-pptx/icons/times_FFFFFF.png">    </p:cNvPr>
           <p:cNvPicPr>
             <a:picLocks noChangeAspect="1"/>
           </p:cNvPicPr>
@@ -6218,8 +6919,8 @@
         </p:blipFill>
         <p:spPr>
           <a:xfrm>
-            <a:off x="1169518" y="4347058"/>
-            <a:ext cx="404165" cy="404165"/>
+            <a:off x="1000354" y="4703674"/>
+            <a:ext cx="285293" cy="285293"/>
           </a:xfrm>
           <a:prstGeom prst="rect">
             <a:avLst/>
@@ -6228,53 +6929,14 @@
       </p:pic>
       <p:sp>
         <p:nvSpPr>
-          <p:cNvPr id="17" name="Text 12"/>
-          <p:cNvSpPr/>
-          <p:nvPr/>
-        </p:nvSpPr>
-        <p:spPr>
-          <a:xfrm>
-            <a:off x="1920240" y="3886200"/>
-            <a:ext cx="3520440" cy="411480"/>
-          </a:xfrm>
-          <a:prstGeom prst="rect">
-            <a:avLst/>
-          </a:prstGeom>
-          <a:noFill/>
-          <a:ln/>
-        </p:spPr>
-        <p:txBody>
-          <a:bodyPr wrap="square" lIns="0" tIns="0" rIns="0" bIns="0" rtlCol="0" anchor="ctr"/>
-          <a:lstStyle/>
-          <a:p>
-            <a:pPr indent="0" marL="0">
-              <a:buNone/>
-            </a:pPr>
-            <a:r>
-              <a:rPr lang="en-US" sz="1450" b="1" dirty="0">
-                <a:solidFill>
-                  <a:srgbClr val="1B4D3E"/>
-                </a:solidFill>
-                <a:latin typeface="Bookman Old Style" pitchFamily="34" charset="0"/>
-                <a:ea typeface="Bookman Old Style" pitchFamily="34" charset="-122"/>
-                <a:cs typeface="Bookman Old Style" pitchFamily="34" charset="-120"/>
-              </a:rPr>
-              <a:t>地域の施工会社紹介</a:t>
-            </a:r>
-            <a:endParaRPr lang="en-US" sz="1450" dirty="0"/>
-          </a:p>
-        </p:txBody>
-      </p:sp>
-      <p:sp>
-        <p:nvSpPr>
-          <p:cNvPr id="18" name="Text 13"/>
-          <p:cNvSpPr/>
-          <p:nvPr/>
-        </p:nvSpPr>
-        <p:spPr>
-          <a:xfrm>
-            <a:off x="1920240" y="4315968"/>
-            <a:ext cx="3520440" cy="914400"/>
+          <p:cNvPr id="14" name="Text 9"/>
+          <p:cNvSpPr/>
+          <p:nvPr/>
+        </p:nvSpPr>
+        <p:spPr>
+          <a:xfrm>
+            <a:off x="1554480" y="4526280"/>
+            <a:ext cx="3657600" cy="822960"/>
           </a:xfrm>
           <a:prstGeom prst="rect">
             <a:avLst/>
@@ -6293,7 +6955,7 @@
               <a:buNone/>
             </a:pPr>
             <a:r>
-              <a:rPr lang="en-US" sz="1100" dirty="0">
+              <a:rPr lang="en-US" sz="1200" dirty="0">
                 <a:solidFill>
                   <a:srgbClr val="24272E"/>
                 </a:solidFill>
@@ -6301,9 +6963,9 @@
                 <a:ea typeface="Calibri" pitchFamily="34" charset="-122"/>
                 <a:cs typeface="Calibri" pitchFamily="34" charset="-120"/>
               </a:rPr>
-              <a:t>実績のある地域の担当施工会社を</a:t>
-            </a:r>
-            <a:endParaRPr lang="en-US" sz="1100" dirty="0"/>
+              <a:t>電気代の負担がそのまま重く</a:t>
+            </a:r>
+            <a:endParaRPr lang="en-US" sz="1200" dirty="0"/>
           </a:p>
           <a:p>
             <a:pPr indent="0" marL="0">
@@ -6313,7 +6975,7 @@
               <a:buNone/>
             </a:pPr>
             <a:r>
-              <a:rPr lang="en-US" sz="1100" dirty="0">
+              <a:rPr lang="en-US" sz="1200" dirty="0">
                 <a:solidFill>
                   <a:srgbClr val="24272E"/>
                 </a:solidFill>
@@ -6321,47 +6983,47 @@
                 <a:ea typeface="Calibri" pitchFamily="34" charset="-122"/>
                 <a:cs typeface="Calibri" pitchFamily="34" charset="-120"/>
               </a:rPr>
-              <a:t>お繋ぎします</a:t>
-            </a:r>
-            <a:endParaRPr lang="en-US" sz="1100" dirty="0"/>
-          </a:p>
-        </p:txBody>
-      </p:sp>
-      <p:sp>
-        <p:nvSpPr>
-          <p:cNvPr id="19" name="Shape 14"/>
-          <p:cNvSpPr/>
-          <p:nvPr/>
-        </p:nvSpPr>
-        <p:spPr>
-          <a:xfrm>
-            <a:off x="6080760" y="3657600"/>
-            <a:ext cx="5074920" cy="1783080"/>
+              <a:t>のしかかり続ける</a:t>
+            </a:r>
+            <a:endParaRPr lang="en-US" sz="1200" dirty="0"/>
+          </a:p>
+        </p:txBody>
+      </p:sp>
+      <p:sp>
+        <p:nvSpPr>
+          <p:cNvPr id="15" name="Shape 10"/>
+          <p:cNvSpPr/>
+          <p:nvPr/>
+        </p:nvSpPr>
+        <p:spPr>
+          <a:xfrm rot="5400000">
+            <a:off x="5632704" y="3479292"/>
+            <a:ext cx="402336" cy="402336"/>
+          </a:xfrm>
+          <a:prstGeom prst="triangle">
+            <a:avLst/>
+          </a:prstGeom>
+          <a:solidFill>
+            <a:srgbClr val="F2A93B"/>
+          </a:solidFill>
+          <a:ln/>
+        </p:spPr>
+      </p:sp>
+      <p:sp>
+        <p:nvSpPr>
+          <p:cNvPr id="16" name="Shape 11"/>
+          <p:cNvSpPr/>
+          <p:nvPr/>
+        </p:nvSpPr>
+        <p:spPr>
+          <a:xfrm>
+            <a:off x="6675120" y="1691640"/>
+            <a:ext cx="4846320" cy="3977640"/>
           </a:xfrm>
           <a:prstGeom prst="roundRect">
             <a:avLst>
-              <a:gd name="adj" fmla="val 4103"/>
+              <a:gd name="adj" fmla="val 1839"/>
             </a:avLst>
-          </a:prstGeom>
-          <a:solidFill>
-            <a:srgbClr val="F2F7F4"/>
-          </a:solidFill>
-          <a:ln/>
-        </p:spPr>
-      </p:sp>
-      <p:sp>
-        <p:nvSpPr>
-          <p:cNvPr id="20" name="Shape 15"/>
-          <p:cNvSpPr/>
-          <p:nvPr/>
-        </p:nvSpPr>
-        <p:spPr>
-          <a:xfrm>
-            <a:off x="6423660" y="4160520"/>
-            <a:ext cx="777240" cy="777240"/>
-          </a:xfrm>
-          <a:prstGeom prst="ellipse">
-            <a:avLst/>
           </a:prstGeom>
           <a:solidFill>
             <a:srgbClr val="1B4D3E"/>
@@ -6369,9 +7031,68 @@
           <a:ln/>
         </p:spPr>
       </p:sp>
+      <p:sp>
+        <p:nvSpPr>
+          <p:cNvPr id="17" name="Text 12"/>
+          <p:cNvSpPr/>
+          <p:nvPr/>
+        </p:nvSpPr>
+        <p:spPr>
+          <a:xfrm>
+            <a:off x="6995160" y="1965960"/>
+            <a:ext cx="4206240" cy="457200"/>
+          </a:xfrm>
+          <a:prstGeom prst="rect">
+            <a:avLst/>
+          </a:prstGeom>
+          <a:noFill/>
+          <a:ln/>
+        </p:spPr>
+        <p:txBody>
+          <a:bodyPr wrap="square" lIns="0" tIns="0" rIns="0" bIns="0" rtlCol="0" anchor="ctr"/>
+          <a:lstStyle/>
+          <a:p>
+            <a:pPr indent="0" marL="0">
+              <a:buNone/>
+            </a:pPr>
+            <a:r>
+              <a:rPr lang="en-US" sz="1600" b="1" dirty="0">
+                <a:solidFill>
+                  <a:srgbClr val="F2A93B"/>
+                </a:solidFill>
+                <a:latin typeface="Bookman Old Style" pitchFamily="34" charset="0"/>
+                <a:ea typeface="Bookman Old Style" pitchFamily="34" charset="-122"/>
+                <a:cs typeface="Bookman Old Style" pitchFamily="34" charset="-120"/>
+              </a:rPr>
+              <a:t>ご支援を受けると</a:t>
+            </a:r>
+            <a:endParaRPr lang="en-US" sz="1600" dirty="0"/>
+          </a:p>
+        </p:txBody>
+      </p:sp>
+      <p:sp>
+        <p:nvSpPr>
+          <p:cNvPr id="18" name="Shape 13"/>
+          <p:cNvSpPr/>
+          <p:nvPr/>
+        </p:nvSpPr>
+        <p:spPr>
+          <a:xfrm>
+            <a:off x="6903720" y="2651760"/>
+            <a:ext cx="548640" cy="548640"/>
+          </a:xfrm>
+          <a:prstGeom prst="ellipse">
+            <a:avLst/>
+          </a:prstGeom>
+          <a:solidFill>
+            <a:srgbClr val="F2A93B"/>
+          </a:solidFill>
+          <a:ln/>
+        </p:spPr>
+      </p:sp>
       <p:pic>
         <p:nvPicPr>
-          <p:cNvPr id="21" name="Image 3" descr="/tmp/claude-0/-home-user-DM-/98b145ee-d85d-5913-a881-95f99ca0c0f7/scratchpad/josei-pptx/icons/shield_FFFFFF.png">    </p:cNvPr>
+          <p:cNvPr id="19" name="Image 3" descr="/tmp/claude-0/-home-user-DM-/98b145ee-d85d-5913-a881-95f99ca0c0f7/scratchpad/josei-pptx/icons/check_1B4D3E.png">    </p:cNvPr>
           <p:cNvPicPr>
             <a:picLocks noChangeAspect="1"/>
           </p:cNvPicPr>
@@ -6385,8 +7106,8 @@
         </p:blipFill>
         <p:spPr>
           <a:xfrm>
-            <a:off x="6610198" y="4347058"/>
-            <a:ext cx="404165" cy="404165"/>
+            <a:off x="7035394" y="2783434"/>
+            <a:ext cx="285293" cy="285293"/>
           </a:xfrm>
           <a:prstGeom prst="rect">
             <a:avLst/>
@@ -6395,53 +7116,14 @@
       </p:pic>
       <p:sp>
         <p:nvSpPr>
-          <p:cNvPr id="22" name="Text 16"/>
-          <p:cNvSpPr/>
-          <p:nvPr/>
-        </p:nvSpPr>
-        <p:spPr>
-          <a:xfrm>
-            <a:off x="7360920" y="3886200"/>
-            <a:ext cx="3520440" cy="411480"/>
-          </a:xfrm>
-          <a:prstGeom prst="rect">
-            <a:avLst/>
-          </a:prstGeom>
-          <a:noFill/>
-          <a:ln/>
-        </p:spPr>
-        <p:txBody>
-          <a:bodyPr wrap="square" lIns="0" tIns="0" rIns="0" bIns="0" rtlCol="0" anchor="ctr"/>
-          <a:lstStyle/>
-          <a:p>
-            <a:pPr indent="0" marL="0">
-              <a:buNone/>
-            </a:pPr>
-            <a:r>
-              <a:rPr lang="en-US" sz="1450" b="1" dirty="0">
-                <a:solidFill>
-                  <a:srgbClr val="1B4D3E"/>
-                </a:solidFill>
-                <a:latin typeface="Bookman Old Style" pitchFamily="34" charset="0"/>
-                <a:ea typeface="Bookman Old Style" pitchFamily="34" charset="-122"/>
-                <a:cs typeface="Bookman Old Style" pitchFamily="34" charset="-120"/>
-              </a:rPr>
-              <a:t>省エネ設備導入相談</a:t>
-            </a:r>
-            <a:endParaRPr lang="en-US" sz="1450" dirty="0"/>
-          </a:p>
-        </p:txBody>
-      </p:sp>
-      <p:sp>
-        <p:nvSpPr>
-          <p:cNvPr id="23" name="Text 17"/>
-          <p:cNvSpPr/>
-          <p:nvPr/>
-        </p:nvSpPr>
-        <p:spPr>
-          <a:xfrm>
-            <a:off x="7360920" y="4315968"/>
-            <a:ext cx="3520440" cy="914400"/>
+          <p:cNvPr id="20" name="Text 14"/>
+          <p:cNvSpPr/>
+          <p:nvPr/>
+        </p:nvSpPr>
+        <p:spPr>
+          <a:xfrm>
+            <a:off x="7589520" y="2606040"/>
+            <a:ext cx="3657600" cy="822960"/>
           </a:xfrm>
           <a:prstGeom prst="rect">
             <a:avLst/>
@@ -6460,17 +7142,17 @@
               <a:buNone/>
             </a:pPr>
             <a:r>
-              <a:rPr lang="en-US" sz="1100" dirty="0">
-                <a:solidFill>
-                  <a:srgbClr val="24272E"/>
+              <a:rPr lang="en-US" sz="1200" b="1" dirty="0">
+                <a:solidFill>
+                  <a:srgbClr val="FFFFFF"/>
                 </a:solidFill>
                 <a:latin typeface="Calibri" pitchFamily="34" charset="0"/>
                 <a:ea typeface="Calibri" pitchFamily="34" charset="-122"/>
                 <a:cs typeface="Calibri" pitchFamily="34" charset="-120"/>
               </a:rPr>
-              <a:t>LED・空調・太陽光・蓄電池など、</a:t>
-            </a:r>
-            <a:endParaRPr lang="en-US" sz="1100" dirty="0"/>
+              <a:t>AI診断で、対象となりうる</a:t>
+            </a:r>
+            <a:endParaRPr lang="en-US" sz="1200" dirty="0"/>
           </a:p>
           <a:p>
             <a:pPr indent="0" marL="0">
@@ -6480,52 +7162,30 @@
               <a:buNone/>
             </a:pPr>
             <a:r>
-              <a:rPr lang="en-US" sz="1100" dirty="0">
-                <a:solidFill>
-                  <a:srgbClr val="24272E"/>
+              <a:rPr lang="en-US" sz="1200" b="1" dirty="0">
+                <a:solidFill>
+                  <a:srgbClr val="FFFFFF"/>
                 </a:solidFill>
                 <a:latin typeface="Calibri" pitchFamily="34" charset="0"/>
                 <a:ea typeface="Calibri" pitchFamily="34" charset="-122"/>
                 <a:cs typeface="Calibri" pitchFamily="34" charset="-120"/>
               </a:rPr>
-              <a:t>中立の立場で設備更新をご相談</a:t>
-            </a:r>
-            <a:endParaRPr lang="en-US" sz="1100" dirty="0"/>
-          </a:p>
-        </p:txBody>
-      </p:sp>
-      <p:sp>
-        <p:nvSpPr>
-          <p:cNvPr id="24" name="Shape 18"/>
-          <p:cNvSpPr/>
-          <p:nvPr/>
-        </p:nvSpPr>
-        <p:spPr>
-          <a:xfrm>
-            <a:off x="640080" y="5577840"/>
-            <a:ext cx="10881360" cy="777240"/>
-          </a:xfrm>
-          <a:prstGeom prst="roundRect">
-            <a:avLst>
-              <a:gd name="adj" fmla="val 9412"/>
-            </a:avLst>
-          </a:prstGeom>
-          <a:solidFill>
-            <a:srgbClr val="12362B"/>
-          </a:solidFill>
-          <a:ln/>
-        </p:spPr>
-      </p:sp>
-      <p:sp>
-        <p:nvSpPr>
-          <p:cNvPr id="25" name="Shape 19"/>
-          <p:cNvSpPr/>
-          <p:nvPr/>
-        </p:nvSpPr>
-        <p:spPr>
-          <a:xfrm>
-            <a:off x="891540" y="5628132"/>
-            <a:ext cx="685800" cy="685800"/>
+              <a:t>制度が一目でわかる</a:t>
+            </a:r>
+            <a:endParaRPr lang="en-US" sz="1200" dirty="0"/>
+          </a:p>
+        </p:txBody>
+      </p:sp>
+      <p:sp>
+        <p:nvSpPr>
+          <p:cNvPr id="21" name="Shape 15"/>
+          <p:cNvSpPr/>
+          <p:nvPr/>
+        </p:nvSpPr>
+        <p:spPr>
+          <a:xfrm>
+            <a:off x="6903720" y="3611880"/>
+            <a:ext cx="548640" cy="548640"/>
           </a:xfrm>
           <a:prstGeom prst="ellipse">
             <a:avLst/>
@@ -6538,7 +7198,7 @@
       </p:sp>
       <p:pic>
         <p:nvPicPr>
-          <p:cNvPr id="26" name="Image 4" descr="/tmp/claude-0/-home-user-DM-/98b145ee-d85d-5913-a881-95f99ca0c0f7/scratchpad/josei-pptx/icons/laptop_12362B.png">    </p:cNvPr>
+          <p:cNvPr id="22" name="Image 4" descr="/tmp/claude-0/-home-user-DM-/98b145ee-d85d-5913-a881-95f99ca0c0f7/scratchpad/josei-pptx/icons/check_1B4D3E.png">    </p:cNvPr>
           <p:cNvPicPr>
             <a:picLocks noChangeAspect="1"/>
           </p:cNvPicPr>
@@ -6552,8 +7212,8 @@
         </p:blipFill>
         <p:spPr>
           <a:xfrm>
-            <a:off x="1056132" y="5792724"/>
-            <a:ext cx="356616" cy="356616"/>
+            <a:off x="7035394" y="3743554"/>
+            <a:ext cx="285293" cy="285293"/>
           </a:xfrm>
           <a:prstGeom prst="rect">
             <a:avLst/>
@@ -6562,14 +7222,14 @@
       </p:pic>
       <p:sp>
         <p:nvSpPr>
-          <p:cNvPr id="27" name="Text 20"/>
-          <p:cNvSpPr/>
-          <p:nvPr/>
-        </p:nvSpPr>
-        <p:spPr>
-          <a:xfrm>
-            <a:off x="1737360" y="5577840"/>
-            <a:ext cx="9601200" cy="777240"/>
+          <p:cNvPr id="23" name="Text 16"/>
+          <p:cNvSpPr/>
+          <p:nvPr/>
+        </p:nvSpPr>
+        <p:spPr>
+          <a:xfrm>
+            <a:off x="7589520" y="3566160"/>
+            <a:ext cx="3657600" cy="822960"/>
           </a:xfrm>
           <a:prstGeom prst="rect">
             <a:avLst/>
@@ -6582,10 +7242,13 @@
           <a:lstStyle/>
           <a:p>
             <a:pPr indent="0" marL="0">
-              <a:buNone/>
-            </a:pPr>
-            <a:r>
-              <a:rPr lang="en-US" sz="1300" b="1" dirty="0">
+              <a:lnSpc>
+                <a:spcPts val="1600"/>
+              </a:lnSpc>
+              <a:buNone/>
+            </a:pPr>
+            <a:r>
+              <a:rPr lang="en-US" sz="1200" b="1" dirty="0">
                 <a:solidFill>
                   <a:srgbClr val="FFFFFF"/>
                 </a:solidFill>
@@ -6593,45 +7256,210 @@
                 <a:ea typeface="Calibri" pitchFamily="34" charset="-122"/>
                 <a:cs typeface="Calibri" pitchFamily="34" charset="-120"/>
               </a:rPr>
-              <a:t>自社開発のAI診断ツールで、業種・設備・規模から対象となりうる補助金・助成金を無料診断できます</a:t>
-            </a:r>
-            <a:endParaRPr lang="en-US" sz="1300" dirty="0"/>
-          </a:p>
-        </p:txBody>
-      </p:sp>
-      <p:sp>
-        <p:nvSpPr>
-          <p:cNvPr id="28" name="Text 21"/>
-          <p:cNvSpPr/>
-          <p:nvPr/>
-        </p:nvSpPr>
-        <p:spPr>
-          <a:xfrm>
-            <a:off x="457200" y="6537960"/>
-            <a:ext cx="7315200" cy="274320"/>
-          </a:xfrm>
-          <a:prstGeom prst="rect">
-            <a:avLst/>
-          </a:prstGeom>
-          <a:noFill/>
-          <a:ln/>
-        </p:spPr>
-        <p:txBody>
-          <a:bodyPr wrap="square" lIns="0" tIns="0" rIns="0" bIns="0" rtlCol="0" anchor="ctr"/>
-          <a:lstStyle/>
+              <a:t>書類作成・行政対応も</a:t>
+            </a:r>
+            <a:endParaRPr lang="en-US" sz="1200" dirty="0"/>
+          </a:p>
           <a:p>
             <a:pPr indent="0" marL="0">
-              <a:buNone/>
-            </a:pPr>
-            <a:r>
-              <a:rPr lang="en-US" sz="900" dirty="0">
-                <a:solidFill>
-                  <a:srgbClr val="6B7280"/>
+              <a:lnSpc>
+                <a:spcPts val="1600"/>
+              </a:lnSpc>
+              <a:buNone/>
+            </a:pPr>
+            <a:r>
+              <a:rPr lang="en-US" sz="1200" b="1" dirty="0">
+                <a:solidFill>
+                  <a:srgbClr val="FFFFFF"/>
                 </a:solidFill>
                 <a:latin typeface="Calibri" pitchFamily="34" charset="0"/>
                 <a:ea typeface="Calibri" pitchFamily="34" charset="-122"/>
                 <a:cs typeface="Calibri" pitchFamily="34" charset="-120"/>
               </a:rPr>
+              <a:t>専門家が伴走サポート</a:t>
+            </a:r>
+            <a:endParaRPr lang="en-US" sz="1200" dirty="0"/>
+          </a:p>
+        </p:txBody>
+      </p:sp>
+      <p:sp>
+        <p:nvSpPr>
+          <p:cNvPr id="24" name="Shape 17"/>
+          <p:cNvSpPr/>
+          <p:nvPr/>
+        </p:nvSpPr>
+        <p:spPr>
+          <a:xfrm>
+            <a:off x="6903720" y="4572000"/>
+            <a:ext cx="548640" cy="548640"/>
+          </a:xfrm>
+          <a:prstGeom prst="ellipse">
+            <a:avLst/>
+          </a:prstGeom>
+          <a:solidFill>
+            <a:srgbClr val="F2A93B"/>
+          </a:solidFill>
+          <a:ln/>
+        </p:spPr>
+      </p:sp>
+      <p:pic>
+        <p:nvPicPr>
+          <p:cNvPr id="25" name="Image 5" descr="/tmp/claude-0/-home-user-DM-/98b145ee-d85d-5913-a881-95f99ca0c0f7/scratchpad/josei-pptx/icons/check_1B4D3E.png">    </p:cNvPr>
+          <p:cNvPicPr>
+            <a:picLocks noChangeAspect="1"/>
+          </p:cNvPicPr>
+          <p:nvPr/>
+        </p:nvPicPr>
+        <p:blipFill>
+          <a:blip r:embed="rId6"/>
+          <a:stretch>
+            <a:fillRect/>
+          </a:stretch>
+        </p:blipFill>
+        <p:spPr>
+          <a:xfrm>
+            <a:off x="7035394" y="4703674"/>
+            <a:ext cx="285293" cy="285293"/>
+          </a:xfrm>
+          <a:prstGeom prst="rect">
+            <a:avLst/>
+          </a:prstGeom>
+        </p:spPr>
+      </p:pic>
+      <p:sp>
+        <p:nvSpPr>
+          <p:cNvPr id="26" name="Text 18"/>
+          <p:cNvSpPr/>
+          <p:nvPr/>
+        </p:nvSpPr>
+        <p:spPr>
+          <a:xfrm>
+            <a:off x="7589520" y="4526280"/>
+            <a:ext cx="3657600" cy="822960"/>
+          </a:xfrm>
+          <a:prstGeom prst="rect">
+            <a:avLst/>
+          </a:prstGeom>
+          <a:noFill/>
+          <a:ln/>
+        </p:spPr>
+        <p:txBody>
+          <a:bodyPr wrap="square" lIns="0" tIns="0" rIns="0" bIns="0" rtlCol="0" anchor="ctr"/>
+          <a:lstStyle/>
+          <a:p>
+            <a:pPr indent="0" marL="0">
+              <a:lnSpc>
+                <a:spcPts val="1600"/>
+              </a:lnSpc>
+              <a:buNone/>
+            </a:pPr>
+            <a:r>
+              <a:rPr lang="en-US" sz="1200" b="1" dirty="0">
+                <a:solidFill>
+                  <a:srgbClr val="FFFFFF"/>
+                </a:solidFill>
+                <a:latin typeface="Calibri" pitchFamily="34" charset="0"/>
+                <a:ea typeface="Calibri" pitchFamily="34" charset="-122"/>
+                <a:cs typeface="Calibri" pitchFamily="34" charset="-120"/>
+              </a:rPr>
+              <a:t>電気代の負担が軽くなり、</a:t>
+            </a:r>
+            <a:endParaRPr lang="en-US" sz="1200" dirty="0"/>
+          </a:p>
+          <a:p>
+            <a:pPr indent="0" marL="0">
+              <a:lnSpc>
+                <a:spcPts val="1600"/>
+              </a:lnSpc>
+              <a:buNone/>
+            </a:pPr>
+            <a:r>
+              <a:rPr lang="en-US" sz="1200" b="1" dirty="0">
+                <a:solidFill>
+                  <a:srgbClr val="FFFFFF"/>
+                </a:solidFill>
+                <a:latin typeface="Calibri" pitchFamily="34" charset="0"/>
+                <a:ea typeface="Calibri" pitchFamily="34" charset="-122"/>
+                <a:cs typeface="Calibri" pitchFamily="34" charset="-120"/>
+              </a:rPr>
+              <a:t>浮いた資金を次の一手に使える</a:t>
+            </a:r>
+            <a:endParaRPr lang="en-US" sz="1200" dirty="0"/>
+          </a:p>
+        </p:txBody>
+      </p:sp>
+      <p:sp>
+        <p:nvSpPr>
+          <p:cNvPr id="27" name="Text 19"/>
+          <p:cNvSpPr/>
+          <p:nvPr/>
+        </p:nvSpPr>
+        <p:spPr>
+          <a:xfrm>
+            <a:off x="640080" y="5806440"/>
+            <a:ext cx="10881360" cy="457200"/>
+          </a:xfrm>
+          <a:prstGeom prst="rect">
+            <a:avLst/>
+          </a:prstGeom>
+          <a:noFill/>
+          <a:ln/>
+        </p:spPr>
+        <p:txBody>
+          <a:bodyPr wrap="square" lIns="0" tIns="0" rIns="0" bIns="0" rtlCol="0" anchor="ctr"/>
+          <a:lstStyle/>
+          <a:p>
+            <a:pPr indent="0" marL="0">
+              <a:buNone/>
+            </a:pPr>
+            <a:r>
+              <a:rPr lang="en-US" sz="1200" b="1" i="1" dirty="0">
+                <a:solidFill>
+                  <a:srgbClr val="1B4D3E"/>
+                </a:solidFill>
+                <a:latin typeface="Calibri" pitchFamily="34" charset="0"/>
+                <a:ea typeface="Calibri" pitchFamily="34" charset="-122"/>
+                <a:cs typeface="Calibri" pitchFamily="34" charset="-120"/>
+              </a:rPr>
+              <a:t>「わからない」を「わかる」に、「めんどくさい」を「おまかせ」に。使えば使うほど、経営に余白が生まれます。</a:t>
+            </a:r>
+            <a:endParaRPr lang="en-US" sz="1200" dirty="0"/>
+          </a:p>
+        </p:txBody>
+      </p:sp>
+      <p:sp>
+        <p:nvSpPr>
+          <p:cNvPr id="28" name="Text 20"/>
+          <p:cNvSpPr/>
+          <p:nvPr/>
+        </p:nvSpPr>
+        <p:spPr>
+          <a:xfrm>
+            <a:off x="457200" y="6537960"/>
+            <a:ext cx="7315200" cy="274320"/>
+          </a:xfrm>
+          <a:prstGeom prst="rect">
+            <a:avLst/>
+          </a:prstGeom>
+          <a:noFill/>
+          <a:ln/>
+        </p:spPr>
+        <p:txBody>
+          <a:bodyPr wrap="square" lIns="0" tIns="0" rIns="0" bIns="0" rtlCol="0" anchor="ctr"/>
+          <a:lstStyle/>
+          <a:p>
+            <a:pPr indent="0" marL="0">
+              <a:buNone/>
+            </a:pPr>
+            <a:r>
+              <a:rPr lang="en-US" sz="900" dirty="0">
+                <a:solidFill>
+                  <a:srgbClr val="6B7280"/>
+                </a:solidFill>
+                <a:latin typeface="Calibri" pitchFamily="34" charset="0"/>
+                <a:ea typeface="Calibri" pitchFamily="34" charset="-122"/>
+                <a:cs typeface="Calibri" pitchFamily="34" charset="-120"/>
+              </a:rPr>
               <a:t>一般社団法人 中小企業助成金支援協会　資料請求資料</a:t>
             </a:r>
             <a:endParaRPr lang="en-US" sz="900" dirty="0"/>
@@ -6640,7 +7468,7 @@
       </p:sp>
       <p:sp>
         <p:nvSpPr>
-          <p:cNvPr id="29" name="Text 22"/>
+          <p:cNvPr id="29" name="Text 21"/>
           <p:cNvSpPr/>
           <p:nvPr/>
         </p:nvSpPr>
@@ -6734,7 +7562,7 @@
               <a:buNone/>
             </a:pPr>
             <a:r>
-              <a:rPr lang="en-US" sz="2400" b="1" dirty="0">
+              <a:rPr lang="en-US" sz="2500" b="1" dirty="0">
                 <a:solidFill>
                   <a:srgbClr val="1B4D3E"/>
                 </a:solidFill>
@@ -6742,9 +7570,9 @@
                 <a:ea typeface="Bookman Old Style" pitchFamily="34" charset="-122"/>
                 <a:cs typeface="Bookman Old Style" pitchFamily="34" charset="-120"/>
               </a:rPr>
-              <a:t>電気代・設備導入に使える助成金・補助金</a:t>
-            </a:r>
-            <a:endParaRPr lang="en-US" sz="2400" dirty="0"/>
+              <a:t>私たちにできること　－　4つの支援内容</a:t>
+            </a:r>
+            <a:endParaRPr lang="en-US" sz="2500" dirty="0"/>
           </a:p>
         </p:txBody>
       </p:sp>
@@ -6781,6 +7609,967 @@
                 <a:ea typeface="Calibri" pitchFamily="34" charset="-122"/>
                 <a:cs typeface="Calibri" pitchFamily="34" charset="-120"/>
               </a:rPr>
+              <a:t>特定の施工業者に偏らない、中立・透明な立場でご相談に応じます</a:t>
+            </a:r>
+            <a:endParaRPr lang="en-US" sz="1300" dirty="0"/>
+          </a:p>
+        </p:txBody>
+      </p:sp>
+      <p:sp>
+        <p:nvSpPr>
+          <p:cNvPr id="4" name="Shape 2"/>
+          <p:cNvSpPr/>
+          <p:nvPr/>
+        </p:nvSpPr>
+        <p:spPr>
+          <a:xfrm>
+            <a:off x="640080" y="1645920"/>
+            <a:ext cx="5074920" cy="1783080"/>
+          </a:xfrm>
+          <a:prstGeom prst="roundRect">
+            <a:avLst>
+              <a:gd name="adj" fmla="val 4103"/>
+            </a:avLst>
+          </a:prstGeom>
+          <a:solidFill>
+            <a:srgbClr val="F2F7F4"/>
+          </a:solidFill>
+          <a:ln/>
+        </p:spPr>
+      </p:sp>
+      <p:sp>
+        <p:nvSpPr>
+          <p:cNvPr id="5" name="Shape 3"/>
+          <p:cNvSpPr/>
+          <p:nvPr/>
+        </p:nvSpPr>
+        <p:spPr>
+          <a:xfrm>
+            <a:off x="982980" y="2148840"/>
+            <a:ext cx="777240" cy="777240"/>
+          </a:xfrm>
+          <a:prstGeom prst="ellipse">
+            <a:avLst/>
+          </a:prstGeom>
+          <a:solidFill>
+            <a:srgbClr val="1B4D3E"/>
+          </a:solidFill>
+          <a:ln/>
+        </p:spPr>
+      </p:sp>
+      <p:pic>
+        <p:nvPicPr>
+          <p:cNvPr id="6" name="Image 0" descr="/tmp/claude-0/-home-user-DM-/98b145ee-d85d-5913-a881-95f99ca0c0f7/scratchpad/josei-pptx/icons/comments_FFFFFF.png">    </p:cNvPr>
+          <p:cNvPicPr>
+            <a:picLocks noChangeAspect="1"/>
+          </p:cNvPicPr>
+          <p:nvPr/>
+        </p:nvPicPr>
+        <p:blipFill>
+          <a:blip r:embed="rId1"/>
+          <a:stretch>
+            <a:fillRect/>
+          </a:stretch>
+        </p:blipFill>
+        <p:spPr>
+          <a:xfrm>
+            <a:off x="1169518" y="2335378"/>
+            <a:ext cx="404165" cy="404165"/>
+          </a:xfrm>
+          <a:prstGeom prst="rect">
+            <a:avLst/>
+          </a:prstGeom>
+        </p:spPr>
+      </p:pic>
+      <p:sp>
+        <p:nvSpPr>
+          <p:cNvPr id="7" name="Text 4"/>
+          <p:cNvSpPr/>
+          <p:nvPr/>
+        </p:nvSpPr>
+        <p:spPr>
+          <a:xfrm>
+            <a:off x="1920240" y="1874520"/>
+            <a:ext cx="3520440" cy="411480"/>
+          </a:xfrm>
+          <a:prstGeom prst="rect">
+            <a:avLst/>
+          </a:prstGeom>
+          <a:noFill/>
+          <a:ln/>
+        </p:spPr>
+        <p:txBody>
+          <a:bodyPr wrap="square" lIns="0" tIns="0" rIns="0" bIns="0" rtlCol="0" anchor="ctr"/>
+          <a:lstStyle/>
+          <a:p>
+            <a:pPr indent="0" marL="0">
+              <a:buNone/>
+            </a:pPr>
+            <a:r>
+              <a:rPr lang="en-US" sz="1450" b="1" dirty="0">
+                <a:solidFill>
+                  <a:srgbClr val="1B4D3E"/>
+                </a:solidFill>
+                <a:latin typeface="Bookman Old Style" pitchFamily="34" charset="0"/>
+                <a:ea typeface="Bookman Old Style" pitchFamily="34" charset="-122"/>
+                <a:cs typeface="Bookman Old Style" pitchFamily="34" charset="-120"/>
+              </a:rPr>
+              <a:t>補助金情報の透明提供</a:t>
+            </a:r>
+            <a:endParaRPr lang="en-US" sz="1450" dirty="0"/>
+          </a:p>
+        </p:txBody>
+      </p:sp>
+      <p:sp>
+        <p:nvSpPr>
+          <p:cNvPr id="8" name="Text 5"/>
+          <p:cNvSpPr/>
+          <p:nvPr/>
+        </p:nvSpPr>
+        <p:spPr>
+          <a:xfrm>
+            <a:off x="1920240" y="2304288"/>
+            <a:ext cx="3520440" cy="914400"/>
+          </a:xfrm>
+          <a:prstGeom prst="rect">
+            <a:avLst/>
+          </a:prstGeom>
+          <a:noFill/>
+          <a:ln/>
+        </p:spPr>
+        <p:txBody>
+          <a:bodyPr wrap="square" lIns="0" tIns="0" rIns="0" bIns="0" rtlCol="0" anchor="ctr"/>
+          <a:lstStyle/>
+          <a:p>
+            <a:pPr indent="0" marL="0">
+              <a:lnSpc>
+                <a:spcPts val="1600"/>
+              </a:lnSpc>
+              <a:buNone/>
+            </a:pPr>
+            <a:r>
+              <a:rPr lang="en-US" sz="1100" dirty="0">
+                <a:solidFill>
+                  <a:srgbClr val="24272E"/>
+                </a:solidFill>
+                <a:latin typeface="Calibri" pitchFamily="34" charset="0"/>
+                <a:ea typeface="Calibri" pitchFamily="34" charset="-122"/>
+                <a:cs typeface="Calibri" pitchFamily="34" charset="-120"/>
+              </a:rPr>
+              <a:t>省エネ関連の補助金・助成金について、</a:t>
+            </a:r>
+            <a:endParaRPr lang="en-US" sz="1100" dirty="0"/>
+          </a:p>
+          <a:p>
+            <a:pPr indent="0" marL="0">
+              <a:lnSpc>
+                <a:spcPts val="1600"/>
+              </a:lnSpc>
+              <a:buNone/>
+            </a:pPr>
+            <a:r>
+              <a:rPr lang="en-US" sz="1100" dirty="0">
+                <a:solidFill>
+                  <a:srgbClr val="24272E"/>
+                </a:solidFill>
+                <a:latin typeface="Calibri" pitchFamily="34" charset="0"/>
+                <a:ea typeface="Calibri" pitchFamily="34" charset="-122"/>
+                <a:cs typeface="Calibri" pitchFamily="34" charset="-120"/>
+              </a:rPr>
+              <a:t>要件や対象を分かりやすく整理してお届け</a:t>
+            </a:r>
+            <a:endParaRPr lang="en-US" sz="1100" dirty="0"/>
+          </a:p>
+        </p:txBody>
+      </p:sp>
+      <p:sp>
+        <p:nvSpPr>
+          <p:cNvPr id="9" name="Shape 6"/>
+          <p:cNvSpPr/>
+          <p:nvPr/>
+        </p:nvSpPr>
+        <p:spPr>
+          <a:xfrm>
+            <a:off x="6080760" y="1645920"/>
+            <a:ext cx="5074920" cy="1783080"/>
+          </a:xfrm>
+          <a:prstGeom prst="roundRect">
+            <a:avLst>
+              <a:gd name="adj" fmla="val 4103"/>
+            </a:avLst>
+          </a:prstGeom>
+          <a:solidFill>
+            <a:srgbClr val="F2F7F4"/>
+          </a:solidFill>
+          <a:ln/>
+        </p:spPr>
+      </p:sp>
+      <p:sp>
+        <p:nvSpPr>
+          <p:cNvPr id="10" name="Shape 7"/>
+          <p:cNvSpPr/>
+          <p:nvPr/>
+        </p:nvSpPr>
+        <p:spPr>
+          <a:xfrm>
+            <a:off x="6423660" y="2148840"/>
+            <a:ext cx="777240" cy="777240"/>
+          </a:xfrm>
+          <a:prstGeom prst="ellipse">
+            <a:avLst/>
+          </a:prstGeom>
+          <a:solidFill>
+            <a:srgbClr val="1B4D3E"/>
+          </a:solidFill>
+          <a:ln/>
+        </p:spPr>
+      </p:sp>
+      <p:pic>
+        <p:nvPicPr>
+          <p:cNvPr id="11" name="Image 1" descr="/tmp/claude-0/-home-user-DM-/98b145ee-d85d-5913-a881-95f99ca0c0f7/scratchpad/josei-pptx/icons/search_FFFFFF.png">    </p:cNvPr>
+          <p:cNvPicPr>
+            <a:picLocks noChangeAspect="1"/>
+          </p:cNvPicPr>
+          <p:nvPr/>
+        </p:nvPicPr>
+        <p:blipFill>
+          <a:blip r:embed="rId2"/>
+          <a:stretch>
+            <a:fillRect/>
+          </a:stretch>
+        </p:blipFill>
+        <p:spPr>
+          <a:xfrm>
+            <a:off x="6610198" y="2335378"/>
+            <a:ext cx="404165" cy="404165"/>
+          </a:xfrm>
+          <a:prstGeom prst="rect">
+            <a:avLst/>
+          </a:prstGeom>
+        </p:spPr>
+      </p:pic>
+      <p:sp>
+        <p:nvSpPr>
+          <p:cNvPr id="12" name="Text 8"/>
+          <p:cNvSpPr/>
+          <p:nvPr/>
+        </p:nvSpPr>
+        <p:spPr>
+          <a:xfrm>
+            <a:off x="7360920" y="1874520"/>
+            <a:ext cx="3520440" cy="411480"/>
+          </a:xfrm>
+          <a:prstGeom prst="rect">
+            <a:avLst/>
+          </a:prstGeom>
+          <a:noFill/>
+          <a:ln/>
+        </p:spPr>
+        <p:txBody>
+          <a:bodyPr wrap="square" lIns="0" tIns="0" rIns="0" bIns="0" rtlCol="0" anchor="ctr"/>
+          <a:lstStyle/>
+          <a:p>
+            <a:pPr indent="0" marL="0">
+              <a:buNone/>
+            </a:pPr>
+            <a:r>
+              <a:rPr lang="en-US" sz="1450" b="1" dirty="0">
+                <a:solidFill>
+                  <a:srgbClr val="1B4D3E"/>
+                </a:solidFill>
+                <a:latin typeface="Bookman Old Style" pitchFamily="34" charset="0"/>
+                <a:ea typeface="Bookman Old Style" pitchFamily="34" charset="-122"/>
+                <a:cs typeface="Bookman Old Style" pitchFamily="34" charset="-120"/>
+              </a:rPr>
+              <a:t>地域ごとの制度整理</a:t>
+            </a:r>
+            <a:endParaRPr lang="en-US" sz="1450" dirty="0"/>
+          </a:p>
+        </p:txBody>
+      </p:sp>
+      <p:sp>
+        <p:nvSpPr>
+          <p:cNvPr id="13" name="Text 9"/>
+          <p:cNvSpPr/>
+          <p:nvPr/>
+        </p:nvSpPr>
+        <p:spPr>
+          <a:xfrm>
+            <a:off x="7360920" y="2304288"/>
+            <a:ext cx="3520440" cy="914400"/>
+          </a:xfrm>
+          <a:prstGeom prst="rect">
+            <a:avLst/>
+          </a:prstGeom>
+          <a:noFill/>
+          <a:ln/>
+        </p:spPr>
+        <p:txBody>
+          <a:bodyPr wrap="square" lIns="0" tIns="0" rIns="0" bIns="0" rtlCol="0" anchor="ctr"/>
+          <a:lstStyle/>
+          <a:p>
+            <a:pPr indent="0" marL="0">
+              <a:lnSpc>
+                <a:spcPts val="1600"/>
+              </a:lnSpc>
+              <a:buNone/>
+            </a:pPr>
+            <a:r>
+              <a:rPr lang="en-US" sz="1100" dirty="0">
+                <a:solidFill>
+                  <a:srgbClr val="24272E"/>
+                </a:solidFill>
+                <a:latin typeface="Calibri" pitchFamily="34" charset="0"/>
+                <a:ea typeface="Calibri" pitchFamily="34" charset="-122"/>
+                <a:cs typeface="Calibri" pitchFamily="34" charset="-120"/>
+              </a:rPr>
+              <a:t>地域ごとに異なる制度を、公開されている</a:t>
+            </a:r>
+            <a:endParaRPr lang="en-US" sz="1100" dirty="0"/>
+          </a:p>
+          <a:p>
+            <a:pPr indent="0" marL="0">
+              <a:lnSpc>
+                <a:spcPts val="1600"/>
+              </a:lnSpc>
+              <a:buNone/>
+            </a:pPr>
+            <a:r>
+              <a:rPr lang="en-US" sz="1100" dirty="0">
+                <a:solidFill>
+                  <a:srgbClr val="24272E"/>
+                </a:solidFill>
+                <a:latin typeface="Calibri" pitchFamily="34" charset="0"/>
+                <a:ea typeface="Calibri" pitchFamily="34" charset="-122"/>
+                <a:cs typeface="Calibri" pitchFamily="34" charset="-120"/>
+              </a:rPr>
+              <a:t>公募要領をもとに整理してご案内</a:t>
+            </a:r>
+            <a:endParaRPr lang="en-US" sz="1100" dirty="0"/>
+          </a:p>
+        </p:txBody>
+      </p:sp>
+      <p:sp>
+        <p:nvSpPr>
+          <p:cNvPr id="14" name="Shape 10"/>
+          <p:cNvSpPr/>
+          <p:nvPr/>
+        </p:nvSpPr>
+        <p:spPr>
+          <a:xfrm>
+            <a:off x="640080" y="3657600"/>
+            <a:ext cx="5074920" cy="1783080"/>
+          </a:xfrm>
+          <a:prstGeom prst="roundRect">
+            <a:avLst>
+              <a:gd name="adj" fmla="val 4103"/>
+            </a:avLst>
+          </a:prstGeom>
+          <a:solidFill>
+            <a:srgbClr val="F2F7F4"/>
+          </a:solidFill>
+          <a:ln/>
+        </p:spPr>
+      </p:sp>
+      <p:sp>
+        <p:nvSpPr>
+          <p:cNvPr id="15" name="Shape 11"/>
+          <p:cNvSpPr/>
+          <p:nvPr/>
+        </p:nvSpPr>
+        <p:spPr>
+          <a:xfrm>
+            <a:off x="982980" y="4160520"/>
+            <a:ext cx="777240" cy="777240"/>
+          </a:xfrm>
+          <a:prstGeom prst="ellipse">
+            <a:avLst/>
+          </a:prstGeom>
+          <a:solidFill>
+            <a:srgbClr val="1B4D3E"/>
+          </a:solidFill>
+          <a:ln/>
+        </p:spPr>
+      </p:sp>
+      <p:pic>
+        <p:nvPicPr>
+          <p:cNvPr id="16" name="Image 2" descr="/tmp/claude-0/-home-user-DM-/98b145ee-d85d-5913-a881-95f99ca0c0f7/scratchpad/josei-pptx/icons/handshake_FFFFFF.png">    </p:cNvPr>
+          <p:cNvPicPr>
+            <a:picLocks noChangeAspect="1"/>
+          </p:cNvPicPr>
+          <p:nvPr/>
+        </p:nvPicPr>
+        <p:blipFill>
+          <a:blip r:embed="rId3"/>
+          <a:stretch>
+            <a:fillRect/>
+          </a:stretch>
+        </p:blipFill>
+        <p:spPr>
+          <a:xfrm>
+            <a:off x="1169518" y="4347058"/>
+            <a:ext cx="404165" cy="404165"/>
+          </a:xfrm>
+          <a:prstGeom prst="rect">
+            <a:avLst/>
+          </a:prstGeom>
+        </p:spPr>
+      </p:pic>
+      <p:sp>
+        <p:nvSpPr>
+          <p:cNvPr id="17" name="Text 12"/>
+          <p:cNvSpPr/>
+          <p:nvPr/>
+        </p:nvSpPr>
+        <p:spPr>
+          <a:xfrm>
+            <a:off x="1920240" y="3886200"/>
+            <a:ext cx="3520440" cy="411480"/>
+          </a:xfrm>
+          <a:prstGeom prst="rect">
+            <a:avLst/>
+          </a:prstGeom>
+          <a:noFill/>
+          <a:ln/>
+        </p:spPr>
+        <p:txBody>
+          <a:bodyPr wrap="square" lIns="0" tIns="0" rIns="0" bIns="0" rtlCol="0" anchor="ctr"/>
+          <a:lstStyle/>
+          <a:p>
+            <a:pPr indent="0" marL="0">
+              <a:buNone/>
+            </a:pPr>
+            <a:r>
+              <a:rPr lang="en-US" sz="1450" b="1" dirty="0">
+                <a:solidFill>
+                  <a:srgbClr val="1B4D3E"/>
+                </a:solidFill>
+                <a:latin typeface="Bookman Old Style" pitchFamily="34" charset="0"/>
+                <a:ea typeface="Bookman Old Style" pitchFamily="34" charset="-122"/>
+                <a:cs typeface="Bookman Old Style" pitchFamily="34" charset="-120"/>
+              </a:rPr>
+              <a:t>地域の施工会社紹介</a:t>
+            </a:r>
+            <a:endParaRPr lang="en-US" sz="1450" dirty="0"/>
+          </a:p>
+        </p:txBody>
+      </p:sp>
+      <p:sp>
+        <p:nvSpPr>
+          <p:cNvPr id="18" name="Text 13"/>
+          <p:cNvSpPr/>
+          <p:nvPr/>
+        </p:nvSpPr>
+        <p:spPr>
+          <a:xfrm>
+            <a:off x="1920240" y="4315968"/>
+            <a:ext cx="3520440" cy="914400"/>
+          </a:xfrm>
+          <a:prstGeom prst="rect">
+            <a:avLst/>
+          </a:prstGeom>
+          <a:noFill/>
+          <a:ln/>
+        </p:spPr>
+        <p:txBody>
+          <a:bodyPr wrap="square" lIns="0" tIns="0" rIns="0" bIns="0" rtlCol="0" anchor="ctr"/>
+          <a:lstStyle/>
+          <a:p>
+            <a:pPr indent="0" marL="0">
+              <a:lnSpc>
+                <a:spcPts val="1600"/>
+              </a:lnSpc>
+              <a:buNone/>
+            </a:pPr>
+            <a:r>
+              <a:rPr lang="en-US" sz="1100" dirty="0">
+                <a:solidFill>
+                  <a:srgbClr val="24272E"/>
+                </a:solidFill>
+                <a:latin typeface="Calibri" pitchFamily="34" charset="0"/>
+                <a:ea typeface="Calibri" pitchFamily="34" charset="-122"/>
+                <a:cs typeface="Calibri" pitchFamily="34" charset="-120"/>
+              </a:rPr>
+              <a:t>実績のある地域の担当施工会社を</a:t>
+            </a:r>
+            <a:endParaRPr lang="en-US" sz="1100" dirty="0"/>
+          </a:p>
+          <a:p>
+            <a:pPr indent="0" marL="0">
+              <a:lnSpc>
+                <a:spcPts val="1600"/>
+              </a:lnSpc>
+              <a:buNone/>
+            </a:pPr>
+            <a:r>
+              <a:rPr lang="en-US" sz="1100" dirty="0">
+                <a:solidFill>
+                  <a:srgbClr val="24272E"/>
+                </a:solidFill>
+                <a:latin typeface="Calibri" pitchFamily="34" charset="0"/>
+                <a:ea typeface="Calibri" pitchFamily="34" charset="-122"/>
+                <a:cs typeface="Calibri" pitchFamily="34" charset="-120"/>
+              </a:rPr>
+              <a:t>お繋ぎします</a:t>
+            </a:r>
+            <a:endParaRPr lang="en-US" sz="1100" dirty="0"/>
+          </a:p>
+        </p:txBody>
+      </p:sp>
+      <p:sp>
+        <p:nvSpPr>
+          <p:cNvPr id="19" name="Shape 14"/>
+          <p:cNvSpPr/>
+          <p:nvPr/>
+        </p:nvSpPr>
+        <p:spPr>
+          <a:xfrm>
+            <a:off x="6080760" y="3657600"/>
+            <a:ext cx="5074920" cy="1783080"/>
+          </a:xfrm>
+          <a:prstGeom prst="roundRect">
+            <a:avLst>
+              <a:gd name="adj" fmla="val 4103"/>
+            </a:avLst>
+          </a:prstGeom>
+          <a:solidFill>
+            <a:srgbClr val="F2F7F4"/>
+          </a:solidFill>
+          <a:ln/>
+        </p:spPr>
+      </p:sp>
+      <p:sp>
+        <p:nvSpPr>
+          <p:cNvPr id="20" name="Shape 15"/>
+          <p:cNvSpPr/>
+          <p:nvPr/>
+        </p:nvSpPr>
+        <p:spPr>
+          <a:xfrm>
+            <a:off x="6423660" y="4160520"/>
+            <a:ext cx="777240" cy="777240"/>
+          </a:xfrm>
+          <a:prstGeom prst="ellipse">
+            <a:avLst/>
+          </a:prstGeom>
+          <a:solidFill>
+            <a:srgbClr val="1B4D3E"/>
+          </a:solidFill>
+          <a:ln/>
+        </p:spPr>
+      </p:sp>
+      <p:pic>
+        <p:nvPicPr>
+          <p:cNvPr id="21" name="Image 3" descr="/tmp/claude-0/-home-user-DM-/98b145ee-d85d-5913-a881-95f99ca0c0f7/scratchpad/josei-pptx/icons/shield_FFFFFF.png">    </p:cNvPr>
+          <p:cNvPicPr>
+            <a:picLocks noChangeAspect="1"/>
+          </p:cNvPicPr>
+          <p:nvPr/>
+        </p:nvPicPr>
+        <p:blipFill>
+          <a:blip r:embed="rId4"/>
+          <a:stretch>
+            <a:fillRect/>
+          </a:stretch>
+        </p:blipFill>
+        <p:spPr>
+          <a:xfrm>
+            <a:off x="6610198" y="4347058"/>
+            <a:ext cx="404165" cy="404165"/>
+          </a:xfrm>
+          <a:prstGeom prst="rect">
+            <a:avLst/>
+          </a:prstGeom>
+        </p:spPr>
+      </p:pic>
+      <p:sp>
+        <p:nvSpPr>
+          <p:cNvPr id="22" name="Text 16"/>
+          <p:cNvSpPr/>
+          <p:nvPr/>
+        </p:nvSpPr>
+        <p:spPr>
+          <a:xfrm>
+            <a:off x="7360920" y="3886200"/>
+            <a:ext cx="3520440" cy="411480"/>
+          </a:xfrm>
+          <a:prstGeom prst="rect">
+            <a:avLst/>
+          </a:prstGeom>
+          <a:noFill/>
+          <a:ln/>
+        </p:spPr>
+        <p:txBody>
+          <a:bodyPr wrap="square" lIns="0" tIns="0" rIns="0" bIns="0" rtlCol="0" anchor="ctr"/>
+          <a:lstStyle/>
+          <a:p>
+            <a:pPr indent="0" marL="0">
+              <a:buNone/>
+            </a:pPr>
+            <a:r>
+              <a:rPr lang="en-US" sz="1450" b="1" dirty="0">
+                <a:solidFill>
+                  <a:srgbClr val="1B4D3E"/>
+                </a:solidFill>
+                <a:latin typeface="Bookman Old Style" pitchFamily="34" charset="0"/>
+                <a:ea typeface="Bookman Old Style" pitchFamily="34" charset="-122"/>
+                <a:cs typeface="Bookman Old Style" pitchFamily="34" charset="-120"/>
+              </a:rPr>
+              <a:t>省エネ設備導入相談</a:t>
+            </a:r>
+            <a:endParaRPr lang="en-US" sz="1450" dirty="0"/>
+          </a:p>
+        </p:txBody>
+      </p:sp>
+      <p:sp>
+        <p:nvSpPr>
+          <p:cNvPr id="23" name="Text 17"/>
+          <p:cNvSpPr/>
+          <p:nvPr/>
+        </p:nvSpPr>
+        <p:spPr>
+          <a:xfrm>
+            <a:off x="7360920" y="4315968"/>
+            <a:ext cx="3520440" cy="914400"/>
+          </a:xfrm>
+          <a:prstGeom prst="rect">
+            <a:avLst/>
+          </a:prstGeom>
+          <a:noFill/>
+          <a:ln/>
+        </p:spPr>
+        <p:txBody>
+          <a:bodyPr wrap="square" lIns="0" tIns="0" rIns="0" bIns="0" rtlCol="0" anchor="ctr"/>
+          <a:lstStyle/>
+          <a:p>
+            <a:pPr indent="0" marL="0">
+              <a:lnSpc>
+                <a:spcPts val="1600"/>
+              </a:lnSpc>
+              <a:buNone/>
+            </a:pPr>
+            <a:r>
+              <a:rPr lang="en-US" sz="1100" dirty="0">
+                <a:solidFill>
+                  <a:srgbClr val="24272E"/>
+                </a:solidFill>
+                <a:latin typeface="Calibri" pitchFamily="34" charset="0"/>
+                <a:ea typeface="Calibri" pitchFamily="34" charset="-122"/>
+                <a:cs typeface="Calibri" pitchFamily="34" charset="-120"/>
+              </a:rPr>
+              <a:t>LED・空調・太陽光・蓄電池など、</a:t>
+            </a:r>
+            <a:endParaRPr lang="en-US" sz="1100" dirty="0"/>
+          </a:p>
+          <a:p>
+            <a:pPr indent="0" marL="0">
+              <a:lnSpc>
+                <a:spcPts val="1600"/>
+              </a:lnSpc>
+              <a:buNone/>
+            </a:pPr>
+            <a:r>
+              <a:rPr lang="en-US" sz="1100" dirty="0">
+                <a:solidFill>
+                  <a:srgbClr val="24272E"/>
+                </a:solidFill>
+                <a:latin typeface="Calibri" pitchFamily="34" charset="0"/>
+                <a:ea typeface="Calibri" pitchFamily="34" charset="-122"/>
+                <a:cs typeface="Calibri" pitchFamily="34" charset="-120"/>
+              </a:rPr>
+              <a:t>中立の立場で設備更新をご相談</a:t>
+            </a:r>
+            <a:endParaRPr lang="en-US" sz="1100" dirty="0"/>
+          </a:p>
+        </p:txBody>
+      </p:sp>
+      <p:sp>
+        <p:nvSpPr>
+          <p:cNvPr id="24" name="Shape 18"/>
+          <p:cNvSpPr/>
+          <p:nvPr/>
+        </p:nvSpPr>
+        <p:spPr>
+          <a:xfrm>
+            <a:off x="640080" y="5577840"/>
+            <a:ext cx="10881360" cy="777240"/>
+          </a:xfrm>
+          <a:prstGeom prst="roundRect">
+            <a:avLst>
+              <a:gd name="adj" fmla="val 9412"/>
+            </a:avLst>
+          </a:prstGeom>
+          <a:solidFill>
+            <a:srgbClr val="12362B"/>
+          </a:solidFill>
+          <a:ln/>
+        </p:spPr>
+      </p:sp>
+      <p:sp>
+        <p:nvSpPr>
+          <p:cNvPr id="25" name="Shape 19"/>
+          <p:cNvSpPr/>
+          <p:nvPr/>
+        </p:nvSpPr>
+        <p:spPr>
+          <a:xfrm>
+            <a:off x="891540" y="5628132"/>
+            <a:ext cx="685800" cy="685800"/>
+          </a:xfrm>
+          <a:prstGeom prst="ellipse">
+            <a:avLst/>
+          </a:prstGeom>
+          <a:solidFill>
+            <a:srgbClr val="F2A93B"/>
+          </a:solidFill>
+          <a:ln/>
+        </p:spPr>
+      </p:sp>
+      <p:pic>
+        <p:nvPicPr>
+          <p:cNvPr id="26" name="Image 4" descr="/tmp/claude-0/-home-user-DM-/98b145ee-d85d-5913-a881-95f99ca0c0f7/scratchpad/josei-pptx/icons/laptop_12362B.png">    </p:cNvPr>
+          <p:cNvPicPr>
+            <a:picLocks noChangeAspect="1"/>
+          </p:cNvPicPr>
+          <p:nvPr/>
+        </p:nvPicPr>
+        <p:blipFill>
+          <a:blip r:embed="rId5"/>
+          <a:stretch>
+            <a:fillRect/>
+          </a:stretch>
+        </p:blipFill>
+        <p:spPr>
+          <a:xfrm>
+            <a:off x="1056132" y="5792724"/>
+            <a:ext cx="356616" cy="356616"/>
+          </a:xfrm>
+          <a:prstGeom prst="rect">
+            <a:avLst/>
+          </a:prstGeom>
+        </p:spPr>
+      </p:pic>
+      <p:sp>
+        <p:nvSpPr>
+          <p:cNvPr id="27" name="Text 20"/>
+          <p:cNvSpPr/>
+          <p:nvPr/>
+        </p:nvSpPr>
+        <p:spPr>
+          <a:xfrm>
+            <a:off x="1737360" y="5577840"/>
+            <a:ext cx="9601200" cy="777240"/>
+          </a:xfrm>
+          <a:prstGeom prst="rect">
+            <a:avLst/>
+          </a:prstGeom>
+          <a:noFill/>
+          <a:ln/>
+        </p:spPr>
+        <p:txBody>
+          <a:bodyPr wrap="square" lIns="0" tIns="0" rIns="0" bIns="0" rtlCol="0" anchor="ctr"/>
+          <a:lstStyle/>
+          <a:p>
+            <a:pPr indent="0" marL="0">
+              <a:buNone/>
+            </a:pPr>
+            <a:r>
+              <a:rPr lang="en-US" sz="1300" b="1" dirty="0">
+                <a:solidFill>
+                  <a:srgbClr val="FFFFFF"/>
+                </a:solidFill>
+                <a:latin typeface="Calibri" pitchFamily="34" charset="0"/>
+                <a:ea typeface="Calibri" pitchFamily="34" charset="-122"/>
+                <a:cs typeface="Calibri" pitchFamily="34" charset="-120"/>
+              </a:rPr>
+              <a:t>自社開発のAI診断ツールで、業種・設備・規模から対象となりうる補助金・助成金を無料診断できます</a:t>
+            </a:r>
+            <a:endParaRPr lang="en-US" sz="1300" dirty="0"/>
+          </a:p>
+        </p:txBody>
+      </p:sp>
+      <p:sp>
+        <p:nvSpPr>
+          <p:cNvPr id="28" name="Text 21"/>
+          <p:cNvSpPr/>
+          <p:nvPr/>
+        </p:nvSpPr>
+        <p:spPr>
+          <a:xfrm>
+            <a:off x="457200" y="6537960"/>
+            <a:ext cx="7315200" cy="274320"/>
+          </a:xfrm>
+          <a:prstGeom prst="rect">
+            <a:avLst/>
+          </a:prstGeom>
+          <a:noFill/>
+          <a:ln/>
+        </p:spPr>
+        <p:txBody>
+          <a:bodyPr wrap="square" lIns="0" tIns="0" rIns="0" bIns="0" rtlCol="0" anchor="ctr"/>
+          <a:lstStyle/>
+          <a:p>
+            <a:pPr indent="0" marL="0">
+              <a:buNone/>
+            </a:pPr>
+            <a:r>
+              <a:rPr lang="en-US" sz="900" dirty="0">
+                <a:solidFill>
+                  <a:srgbClr val="6B7280"/>
+                </a:solidFill>
+                <a:latin typeface="Calibri" pitchFamily="34" charset="0"/>
+                <a:ea typeface="Calibri" pitchFamily="34" charset="-122"/>
+                <a:cs typeface="Calibri" pitchFamily="34" charset="-120"/>
+              </a:rPr>
+              <a:t>一般社団法人 中小企業助成金支援協会　資料請求資料</a:t>
+            </a:r>
+            <a:endParaRPr lang="en-US" sz="900" dirty="0"/>
+          </a:p>
+        </p:txBody>
+      </p:sp>
+      <p:sp>
+        <p:nvSpPr>
+          <p:cNvPr id="29" name="Text 22"/>
+          <p:cNvSpPr/>
+          <p:nvPr/>
+        </p:nvSpPr>
+        <p:spPr>
+          <a:xfrm>
+            <a:off x="11247120" y="6537960"/>
+            <a:ext cx="548640" cy="274320"/>
+          </a:xfrm>
+          <a:prstGeom prst="rect">
+            <a:avLst/>
+          </a:prstGeom>
+          <a:noFill/>
+          <a:ln/>
+        </p:spPr>
+        <p:txBody>
+          <a:bodyPr wrap="square" lIns="0" tIns="0" rIns="0" bIns="0" rtlCol="0" anchor="ctr"/>
+          <a:lstStyle/>
+          <a:p>
+            <a:pPr algn="r" indent="0" marL="0">
+              <a:buNone/>
+            </a:pPr>
+            <a:r>
+              <a:rPr lang="en-US" sz="900" dirty="0">
+                <a:solidFill>
+                  <a:srgbClr val="6B7280"/>
+                </a:solidFill>
+                <a:latin typeface="Calibri" pitchFamily="34" charset="0"/>
+                <a:ea typeface="Calibri" pitchFamily="34" charset="-122"/>
+                <a:cs typeface="Calibri" pitchFamily="34" charset="-120"/>
+              </a:rPr>
+              <a:t>04</a:t>
+            </a:r>
+            <a:endParaRPr lang="en-US" sz="900" dirty="0"/>
+          </a:p>
+        </p:txBody>
+      </p:sp>
+    </p:spTree>
+  </p:cSld>
+  <p:clrMapOvr>
+    <a:masterClrMapping/>
+  </p:clrMapOvr>
+</p:sld>
+</file>
+
+<file path=ppt/slides/slide5.xml><?xml version="1.0" encoding="utf-8"?>
+<p:sld xmlns:a="http://schemas.openxmlformats.org/drawingml/2006/main" xmlns:r="http://schemas.openxmlformats.org/officeDocument/2006/relationships" xmlns:p="http://schemas.openxmlformats.org/presentationml/2006/main">
+  <p:cSld name="Slide 5">
+    <p:bg>
+      <p:bgPr>
+        <a:solidFill>
+          <a:srgbClr val="FFFFFF"/>
+        </a:solidFill>
+      </p:bgPr>
+    </p:bg>
+    <p:spTree>
+      <p:nvGrpSpPr>
+        <p:cNvPr id="1" name=""/>
+        <p:cNvGrpSpPr/>
+        <p:nvPr/>
+      </p:nvGrpSpPr>
+      <p:grpSpPr>
+        <a:xfrm>
+          <a:off x="0" y="0"/>
+          <a:ext cx="0" cy="0"/>
+          <a:chOff x="0" y="0"/>
+          <a:chExt cx="0" cy="0"/>
+        </a:xfrm>
+      </p:grpSpPr>
+      <p:sp>
+        <p:nvSpPr>
+          <p:cNvPr id="2" name="Text 0"/>
+          <p:cNvSpPr/>
+          <p:nvPr/>
+        </p:nvSpPr>
+        <p:spPr>
+          <a:xfrm>
+            <a:off x="640080" y="457200"/>
+            <a:ext cx="10515600" cy="548640"/>
+          </a:xfrm>
+          <a:prstGeom prst="rect">
+            <a:avLst/>
+          </a:prstGeom>
+          <a:noFill/>
+          <a:ln/>
+        </p:spPr>
+        <p:txBody>
+          <a:bodyPr wrap="square" lIns="0" tIns="0" rIns="0" bIns="0" rtlCol="0" anchor="ctr"/>
+          <a:lstStyle/>
+          <a:p>
+            <a:pPr indent="0" marL="0">
+              <a:buNone/>
+            </a:pPr>
+            <a:r>
+              <a:rPr lang="en-US" sz="2400" b="1" dirty="0">
+                <a:solidFill>
+                  <a:srgbClr val="1B4D3E"/>
+                </a:solidFill>
+                <a:latin typeface="Bookman Old Style" pitchFamily="34" charset="0"/>
+                <a:ea typeface="Bookman Old Style" pitchFamily="34" charset="-122"/>
+                <a:cs typeface="Bookman Old Style" pitchFamily="34" charset="-120"/>
+              </a:rPr>
+              <a:t>電気代・設備導入に使える助成金・補助金</a:t>
+            </a:r>
+            <a:endParaRPr lang="en-US" sz="2400" dirty="0"/>
+          </a:p>
+        </p:txBody>
+      </p:sp>
+      <p:sp>
+        <p:nvSpPr>
+          <p:cNvPr id="3" name="Text 1"/>
+          <p:cNvSpPr/>
+          <p:nvPr/>
+        </p:nvSpPr>
+        <p:spPr>
+          <a:xfrm>
+            <a:off x="640080" y="1051560"/>
+            <a:ext cx="10515600" cy="365760"/>
+          </a:xfrm>
+          <a:prstGeom prst="rect">
+            <a:avLst/>
+          </a:prstGeom>
+          <a:noFill/>
+          <a:ln/>
+        </p:spPr>
+        <p:txBody>
+          <a:bodyPr wrap="square" lIns="0" tIns="0" rIns="0" bIns="0" rtlCol="0" anchor="ctr"/>
+          <a:lstStyle/>
+          <a:p>
+            <a:pPr indent="0" marL="0">
+              <a:buNone/>
+            </a:pPr>
+            <a:r>
+              <a:rPr lang="en-US" sz="1300" dirty="0">
+                <a:solidFill>
+                  <a:srgbClr val="6B7280"/>
+                </a:solidFill>
+                <a:latin typeface="Calibri" pitchFamily="34" charset="0"/>
+                <a:ea typeface="Calibri" pitchFamily="34" charset="-122"/>
+                <a:cs typeface="Calibri" pitchFamily="34" charset="-120"/>
+              </a:rPr>
               <a:t>電気代の削減や設備導入は、国や自治体の補助金・優遇制度の対象になる場合があります</a:t>
             </a:r>
             <a:endParaRPr lang="en-US" sz="1300" dirty="0"/>
@@ -6789,7 +8578,7 @@
       </p:sp>
       <p:graphicFrame>
         <p:nvGraphicFramePr>
-          <p:cNvPr id="5" name="Table 0"/>
+          <p:cNvPr id="6" name="Table 0"/>
           <p:cNvGraphicFramePr>
             <a:graphicFrameLocks noGrp="1"/>
           </p:cNvGraphicFramePr>
@@ -8165,7 +9954,7 @@
                 <a:ea typeface="Calibri" pitchFamily="34" charset="-122"/>
                 <a:cs typeface="Calibri" pitchFamily="34" charset="-120"/>
               </a:rPr>
-              <a:t>04</a:t>
+              <a:t>05</a:t>
             </a:r>
             <a:endParaRPr lang="en-US" sz="900" dirty="0"/>
           </a:p>
@@ -8179,9 +9968,9 @@
 </p:sld>
 </file>
 
-<file path=ppt/slides/slide5.xml><?xml version="1.0" encoding="utf-8"?>
+<file path=ppt/slides/slide6.xml><?xml version="1.0" encoding="utf-8"?>
 <p:sld xmlns:a="http://schemas.openxmlformats.org/drawingml/2006/main" xmlns:r="http://schemas.openxmlformats.org/officeDocument/2006/relationships" xmlns:p="http://schemas.openxmlformats.org/presentationml/2006/main">
-  <p:cSld name="Slide 5">
+  <p:cSld name="Slide 6">
     <p:bg>
       <p:bgPr>
         <a:solidFill>
@@ -8820,7 +10609,7 @@
                 <a:ea typeface="Calibri" pitchFamily="34" charset="-122"/>
                 <a:cs typeface="Calibri" pitchFamily="34" charset="-120"/>
               </a:rPr>
-              <a:t>05</a:t>
+              <a:t>06</a:t>
             </a:r>
             <a:endParaRPr lang="en-US" sz="900" dirty="0"/>
           </a:p>
@@ -8834,9 +10623,9 @@
 </p:sld>
 </file>
 
-<file path=ppt/slides/slide6.xml><?xml version="1.0" encoding="utf-8"?>
+<file path=ppt/slides/slide7.xml><?xml version="1.0" encoding="utf-8"?>
 <p:sld xmlns:a="http://schemas.openxmlformats.org/drawingml/2006/main" xmlns:r="http://schemas.openxmlformats.org/officeDocument/2006/relationships" xmlns:p="http://schemas.openxmlformats.org/presentationml/2006/main">
-  <p:cSld name="Slide 6">
+  <p:cSld name="Slide 7">
     <p:bg>
       <p:bgPr>
         <a:solidFill>
@@ -9607,1205 +11396,6 @@
       <p:sp>
         <p:nvSpPr>
           <p:cNvPr id="24" name="Text 18"/>
-          <p:cNvSpPr/>
-          <p:nvPr/>
-        </p:nvSpPr>
-        <p:spPr>
-          <a:xfrm>
-            <a:off x="11247120" y="6537960"/>
-            <a:ext cx="548640" cy="274320"/>
-          </a:xfrm>
-          <a:prstGeom prst="rect">
-            <a:avLst/>
-          </a:prstGeom>
-          <a:noFill/>
-          <a:ln/>
-        </p:spPr>
-        <p:txBody>
-          <a:bodyPr wrap="square" lIns="0" tIns="0" rIns="0" bIns="0" rtlCol="0" anchor="ctr"/>
-          <a:lstStyle/>
-          <a:p>
-            <a:pPr algn="r" indent="0" marL="0">
-              <a:buNone/>
-            </a:pPr>
-            <a:r>
-              <a:rPr lang="en-US" sz="900" dirty="0">
-                <a:solidFill>
-                  <a:srgbClr val="6B7280"/>
-                </a:solidFill>
-                <a:latin typeface="Calibri" pitchFamily="34" charset="0"/>
-                <a:ea typeface="Calibri" pitchFamily="34" charset="-122"/>
-                <a:cs typeface="Calibri" pitchFamily="34" charset="-120"/>
-              </a:rPr>
-              <a:t>06</a:t>
-            </a:r>
-            <a:endParaRPr lang="en-US" sz="900" dirty="0"/>
-          </a:p>
-        </p:txBody>
-      </p:sp>
-    </p:spTree>
-  </p:cSld>
-  <p:clrMapOvr>
-    <a:masterClrMapping/>
-  </p:clrMapOvr>
-</p:sld>
-</file>
-
-<file path=ppt/slides/slide7.xml><?xml version="1.0" encoding="utf-8"?>
-<p:sld xmlns:a="http://schemas.openxmlformats.org/drawingml/2006/main" xmlns:r="http://schemas.openxmlformats.org/officeDocument/2006/relationships" xmlns:p="http://schemas.openxmlformats.org/presentationml/2006/main">
-  <p:cSld name="Slide 7">
-    <p:bg>
-      <p:bgPr>
-        <a:solidFill>
-          <a:srgbClr val="FFFFFF"/>
-        </a:solidFill>
-      </p:bgPr>
-    </p:bg>
-    <p:spTree>
-      <p:nvGrpSpPr>
-        <p:cNvPr id="1" name=""/>
-        <p:cNvGrpSpPr/>
-        <p:nvPr/>
-      </p:nvGrpSpPr>
-      <p:grpSpPr>
-        <a:xfrm>
-          <a:off x="0" y="0"/>
-          <a:ext cx="0" cy="0"/>
-          <a:chOff x="0" y="0"/>
-          <a:chExt cx="0" cy="0"/>
-        </a:xfrm>
-      </p:grpSpPr>
-      <p:sp>
-        <p:nvSpPr>
-          <p:cNvPr id="2" name="Text 0"/>
-          <p:cNvSpPr/>
-          <p:nvPr/>
-        </p:nvSpPr>
-        <p:spPr>
-          <a:xfrm>
-            <a:off x="640080" y="457200"/>
-            <a:ext cx="7315200" cy="548640"/>
-          </a:xfrm>
-          <a:prstGeom prst="rect">
-            <a:avLst/>
-          </a:prstGeom>
-          <a:noFill/>
-          <a:ln/>
-        </p:spPr>
-        <p:txBody>
-          <a:bodyPr wrap="square" lIns="0" tIns="0" rIns="0" bIns="0" rtlCol="0" anchor="ctr"/>
-          <a:lstStyle/>
-          <a:p>
-            <a:pPr indent="0" marL="0">
-              <a:buNone/>
-            </a:pPr>
-            <a:r>
-              <a:rPr lang="en-US" sz="2600" b="1" dirty="0">
-                <a:solidFill>
-                  <a:srgbClr val="1B4D3E"/>
-                </a:solidFill>
-                <a:latin typeface="Bookman Old Style" pitchFamily="34" charset="0"/>
-                <a:ea typeface="Bookman Old Style" pitchFamily="34" charset="-122"/>
-                <a:cs typeface="Bookman Old Style" pitchFamily="34" charset="-120"/>
-              </a:rPr>
-              <a:t>支援実績（一部抜粋）</a:t>
-            </a:r>
-            <a:endParaRPr lang="en-US" sz="2600" dirty="0"/>
-          </a:p>
-        </p:txBody>
-      </p:sp>
-      <p:sp>
-        <p:nvSpPr>
-          <p:cNvPr id="3" name="Shape 1"/>
-          <p:cNvSpPr/>
-          <p:nvPr/>
-        </p:nvSpPr>
-        <p:spPr>
-          <a:xfrm>
-            <a:off x="640080" y="1554480"/>
-            <a:ext cx="3520440" cy="4206240"/>
-          </a:xfrm>
-          <a:prstGeom prst="roundRect">
-            <a:avLst>
-              <a:gd name="adj" fmla="val 2078"/>
-            </a:avLst>
-          </a:prstGeom>
-          <a:solidFill>
-            <a:srgbClr val="F2F7F4"/>
-          </a:solidFill>
-          <a:ln/>
-        </p:spPr>
-      </p:sp>
-      <p:sp>
-        <p:nvSpPr>
-          <p:cNvPr id="4" name="Shape 2"/>
-          <p:cNvSpPr/>
-          <p:nvPr/>
-        </p:nvSpPr>
-        <p:spPr>
-          <a:xfrm>
-            <a:off x="914400" y="1828800"/>
-            <a:ext cx="2971800" cy="640080"/>
-          </a:xfrm>
-          <a:prstGeom prst="roundRect">
-            <a:avLst>
-              <a:gd name="adj" fmla="val 8571"/>
-            </a:avLst>
-          </a:prstGeom>
-          <a:solidFill>
-            <a:srgbClr val="1B4D3E"/>
-          </a:solidFill>
-          <a:ln/>
-        </p:spPr>
-      </p:sp>
-      <p:sp>
-        <p:nvSpPr>
-          <p:cNvPr id="5" name="Text 3"/>
-          <p:cNvSpPr/>
-          <p:nvPr/>
-        </p:nvSpPr>
-        <p:spPr>
-          <a:xfrm>
-            <a:off x="914400" y="1828800"/>
-            <a:ext cx="2971800" cy="640080"/>
-          </a:xfrm>
-          <a:prstGeom prst="rect">
-            <a:avLst/>
-          </a:prstGeom>
-          <a:noFill/>
-          <a:ln/>
-        </p:spPr>
-        <p:txBody>
-          <a:bodyPr wrap="square" lIns="0" tIns="0" rIns="0" bIns="0" rtlCol="0" anchor="ctr"/>
-          <a:lstStyle/>
-          <a:p>
-            <a:pPr algn="ctr" indent="0" marL="0">
-              <a:buNone/>
-            </a:pPr>
-            <a:r>
-              <a:rPr lang="en-US" sz="1250" b="1" dirty="0">
-                <a:solidFill>
-                  <a:srgbClr val="FFFFFF"/>
-                </a:solidFill>
-                <a:latin typeface="Calibri" pitchFamily="34" charset="0"/>
-                <a:ea typeface="Calibri" pitchFamily="34" charset="-122"/>
-                <a:cs typeface="Calibri" pitchFamily="34" charset="-120"/>
-              </a:rPr>
-              <a:t>愛知県・製造業（B社様）</a:t>
-            </a:r>
-            <a:endParaRPr lang="en-US" sz="1250" dirty="0"/>
-          </a:p>
-        </p:txBody>
-      </p:sp>
-      <p:sp>
-        <p:nvSpPr>
-          <p:cNvPr id="6" name="Text 4"/>
-          <p:cNvSpPr/>
-          <p:nvPr/>
-        </p:nvSpPr>
-        <p:spPr>
-          <a:xfrm>
-            <a:off x="914400" y="2651760"/>
-            <a:ext cx="2971800" cy="274320"/>
-          </a:xfrm>
-          <a:prstGeom prst="rect">
-            <a:avLst/>
-          </a:prstGeom>
-          <a:noFill/>
-          <a:ln/>
-        </p:spPr>
-        <p:txBody>
-          <a:bodyPr wrap="square" lIns="0" tIns="0" rIns="0" bIns="0" rtlCol="0" anchor="ctr"/>
-          <a:lstStyle/>
-          <a:p>
-            <a:pPr indent="0" marL="0">
-              <a:buNone/>
-            </a:pPr>
-            <a:r>
-              <a:rPr lang="en-US" sz="1000" b="1" dirty="0">
-                <a:solidFill>
-                  <a:srgbClr val="F2A93B"/>
-                </a:solidFill>
-                <a:latin typeface="Calibri" pitchFamily="34" charset="0"/>
-                <a:ea typeface="Calibri" pitchFamily="34" charset="-122"/>
-                <a:cs typeface="Calibri" pitchFamily="34" charset="-120"/>
-              </a:rPr>
-              <a:t>課題</a:t>
-            </a:r>
-            <a:endParaRPr lang="en-US" sz="1000" dirty="0"/>
-          </a:p>
-        </p:txBody>
-      </p:sp>
-      <p:sp>
-        <p:nvSpPr>
-          <p:cNvPr id="7" name="Text 5"/>
-          <p:cNvSpPr/>
-          <p:nvPr/>
-        </p:nvSpPr>
-        <p:spPr>
-          <a:xfrm>
-            <a:off x="914400" y="2926080"/>
-            <a:ext cx="2971800" cy="548640"/>
-          </a:xfrm>
-          <a:prstGeom prst="rect">
-            <a:avLst/>
-          </a:prstGeom>
-          <a:noFill/>
-          <a:ln/>
-        </p:spPr>
-        <p:txBody>
-          <a:bodyPr wrap="square" lIns="0" tIns="0" rIns="0" bIns="0" rtlCol="0" anchor="ctr"/>
-          <a:lstStyle/>
-          <a:p>
-            <a:pPr indent="0" marL="0">
-              <a:lnSpc>
-                <a:spcPts val="1500"/>
-              </a:lnSpc>
-              <a:buNone/>
-            </a:pPr>
-            <a:r>
-              <a:rPr lang="en-US" sz="1150" dirty="0">
-                <a:solidFill>
-                  <a:srgbClr val="24272E"/>
-                </a:solidFill>
-                <a:latin typeface="Calibri" pitchFamily="34" charset="0"/>
-                <a:ea typeface="Calibri" pitchFamily="34" charset="-122"/>
-                <a:cs typeface="Calibri" pitchFamily="34" charset="-120"/>
-              </a:rPr>
-              <a:t>使える補助金があることを知らなかった</a:t>
-            </a:r>
-            <a:endParaRPr lang="en-US" sz="1150" dirty="0"/>
-          </a:p>
-        </p:txBody>
-      </p:sp>
-      <p:sp>
-        <p:nvSpPr>
-          <p:cNvPr id="8" name="Text 6"/>
-          <p:cNvSpPr/>
-          <p:nvPr/>
-        </p:nvSpPr>
-        <p:spPr>
-          <a:xfrm>
-            <a:off x="914400" y="3520440"/>
-            <a:ext cx="2971800" cy="274320"/>
-          </a:xfrm>
-          <a:prstGeom prst="rect">
-            <a:avLst/>
-          </a:prstGeom>
-          <a:noFill/>
-          <a:ln/>
-        </p:spPr>
-        <p:txBody>
-          <a:bodyPr wrap="square" lIns="0" tIns="0" rIns="0" bIns="0" rtlCol="0" anchor="ctr"/>
-          <a:lstStyle/>
-          <a:p>
-            <a:pPr indent="0" marL="0">
-              <a:buNone/>
-            </a:pPr>
-            <a:r>
-              <a:rPr lang="en-US" sz="1000" b="1" dirty="0">
-                <a:solidFill>
-                  <a:srgbClr val="F2A93B"/>
-                </a:solidFill>
-                <a:latin typeface="Calibri" pitchFamily="34" charset="0"/>
-                <a:ea typeface="Calibri" pitchFamily="34" charset="-122"/>
-                <a:cs typeface="Calibri" pitchFamily="34" charset="-120"/>
-              </a:rPr>
-              <a:t>導入設備</a:t>
-            </a:r>
-            <a:endParaRPr lang="en-US" sz="1000" dirty="0"/>
-          </a:p>
-        </p:txBody>
-      </p:sp>
-      <p:sp>
-        <p:nvSpPr>
-          <p:cNvPr id="9" name="Text 7"/>
-          <p:cNvSpPr/>
-          <p:nvPr/>
-        </p:nvSpPr>
-        <p:spPr>
-          <a:xfrm>
-            <a:off x="914400" y="3794760"/>
-            <a:ext cx="2971800" cy="548640"/>
-          </a:xfrm>
-          <a:prstGeom prst="rect">
-            <a:avLst/>
-          </a:prstGeom>
-          <a:noFill/>
-          <a:ln/>
-        </p:spPr>
-        <p:txBody>
-          <a:bodyPr wrap="square" lIns="0" tIns="0" rIns="0" bIns="0" rtlCol="0" anchor="ctr"/>
-          <a:lstStyle/>
-          <a:p>
-            <a:pPr indent="0" marL="0">
-              <a:lnSpc>
-                <a:spcPts val="1500"/>
-              </a:lnSpc>
-              <a:buNone/>
-            </a:pPr>
-            <a:r>
-              <a:rPr lang="en-US" sz="1150" dirty="0">
-                <a:solidFill>
-                  <a:srgbClr val="24272E"/>
-                </a:solidFill>
-                <a:latin typeface="Calibri" pitchFamily="34" charset="0"/>
-                <a:ea typeface="Calibri" pitchFamily="34" charset="-122"/>
-                <a:cs typeface="Calibri" pitchFamily="34" charset="-120"/>
-              </a:rPr>
-              <a:t>太陽光発電・空調設備の入れ替え</a:t>
-            </a:r>
-            <a:endParaRPr lang="en-US" sz="1150" dirty="0"/>
-          </a:p>
-        </p:txBody>
-      </p:sp>
-      <p:sp>
-        <p:nvSpPr>
-          <p:cNvPr id="10" name="Shape 8"/>
-          <p:cNvSpPr/>
-          <p:nvPr/>
-        </p:nvSpPr>
-        <p:spPr>
-          <a:xfrm>
-            <a:off x="914400" y="4434840"/>
-            <a:ext cx="2971800" cy="0"/>
-          </a:xfrm>
-          <a:prstGeom prst="line">
-            <a:avLst/>
-          </a:prstGeom>
-          <a:noFill/>
-          <a:ln w="12700">
-            <a:solidFill>
-              <a:srgbClr val="CFE2D8"/>
-            </a:solidFill>
-            <a:prstDash val="solid"/>
-          </a:ln>
-        </p:spPr>
-      </p:sp>
-      <p:sp>
-        <p:nvSpPr>
-          <p:cNvPr id="11" name="Text 9"/>
-          <p:cNvSpPr/>
-          <p:nvPr/>
-        </p:nvSpPr>
-        <p:spPr>
-          <a:xfrm>
-            <a:off x="914400" y="4572000"/>
-            <a:ext cx="2971800" cy="1051560"/>
-          </a:xfrm>
-          <a:prstGeom prst="rect">
-            <a:avLst/>
-          </a:prstGeom>
-          <a:noFill/>
-          <a:ln/>
-        </p:spPr>
-        <p:txBody>
-          <a:bodyPr wrap="square" lIns="0" tIns="0" rIns="0" bIns="0" rtlCol="0" anchor="ctr"/>
-          <a:lstStyle/>
-          <a:p>
-            <a:pPr indent="0" marL="0">
-              <a:lnSpc>
-                <a:spcPts val="1800"/>
-              </a:lnSpc>
-              <a:buNone/>
-            </a:pPr>
-            <a:r>
-              <a:rPr lang="en-US" sz="1250" b="1" i="1" dirty="0">
-                <a:solidFill>
-                  <a:srgbClr val="1B4D3E"/>
-                </a:solidFill>
-                <a:latin typeface="Calibri" pitchFamily="34" charset="0"/>
-                <a:ea typeface="Calibri" pitchFamily="34" charset="-122"/>
-                <a:cs typeface="Calibri" pitchFamily="34" charset="-120"/>
-              </a:rPr>
-              <a:t>「意外と、申請していない</a:t>
-            </a:r>
-            <a:endParaRPr lang="en-US" sz="1250" dirty="0"/>
-          </a:p>
-          <a:p>
-            <a:pPr indent="0" marL="0">
-              <a:lnSpc>
-                <a:spcPts val="1800"/>
-              </a:lnSpc>
-              <a:buNone/>
-            </a:pPr>
-            <a:r>
-              <a:rPr lang="en-US" sz="1250" b="1" i="1" dirty="0">
-                <a:solidFill>
-                  <a:srgbClr val="1B4D3E"/>
-                </a:solidFill>
-                <a:latin typeface="Calibri" pitchFamily="34" charset="0"/>
-                <a:ea typeface="Calibri" pitchFamily="34" charset="-122"/>
-                <a:cs typeface="Calibri" pitchFamily="34" charset="-120"/>
-              </a:rPr>
-              <a:t>だけで使える制度は</a:t>
-            </a:r>
-            <a:endParaRPr lang="en-US" sz="1250" dirty="0"/>
-          </a:p>
-          <a:p>
-            <a:pPr indent="0" marL="0">
-              <a:lnSpc>
-                <a:spcPts val="1800"/>
-              </a:lnSpc>
-              <a:buNone/>
-            </a:pPr>
-            <a:r>
-              <a:rPr lang="en-US" sz="1250" b="1" i="1" dirty="0">
-                <a:solidFill>
-                  <a:srgbClr val="1B4D3E"/>
-                </a:solidFill>
-                <a:latin typeface="Calibri" pitchFamily="34" charset="0"/>
-                <a:ea typeface="Calibri" pitchFamily="34" charset="-122"/>
-                <a:cs typeface="Calibri" pitchFamily="34" charset="-120"/>
-              </a:rPr>
-              <a:t>いろいろあるものですね」</a:t>
-            </a:r>
-            <a:endParaRPr lang="en-US" sz="1250" dirty="0"/>
-          </a:p>
-        </p:txBody>
-      </p:sp>
-      <p:sp>
-        <p:nvSpPr>
-          <p:cNvPr id="12" name="Shape 10"/>
-          <p:cNvSpPr/>
-          <p:nvPr/>
-        </p:nvSpPr>
-        <p:spPr>
-          <a:xfrm>
-            <a:off x="4434840" y="1554480"/>
-            <a:ext cx="3520440" cy="4206240"/>
-          </a:xfrm>
-          <a:prstGeom prst="roundRect">
-            <a:avLst>
-              <a:gd name="adj" fmla="val 2078"/>
-            </a:avLst>
-          </a:prstGeom>
-          <a:solidFill>
-            <a:srgbClr val="F2F7F4"/>
-          </a:solidFill>
-          <a:ln/>
-        </p:spPr>
-      </p:sp>
-      <p:sp>
-        <p:nvSpPr>
-          <p:cNvPr id="13" name="Shape 11"/>
-          <p:cNvSpPr/>
-          <p:nvPr/>
-        </p:nvSpPr>
-        <p:spPr>
-          <a:xfrm>
-            <a:off x="4709160" y="1828800"/>
-            <a:ext cx="2971800" cy="640080"/>
-          </a:xfrm>
-          <a:prstGeom prst="roundRect">
-            <a:avLst>
-              <a:gd name="adj" fmla="val 8571"/>
-            </a:avLst>
-          </a:prstGeom>
-          <a:solidFill>
-            <a:srgbClr val="1B4D3E"/>
-          </a:solidFill>
-          <a:ln/>
-        </p:spPr>
-      </p:sp>
-      <p:sp>
-        <p:nvSpPr>
-          <p:cNvPr id="14" name="Text 12"/>
-          <p:cNvSpPr/>
-          <p:nvPr/>
-        </p:nvSpPr>
-        <p:spPr>
-          <a:xfrm>
-            <a:off x="4709160" y="1828800"/>
-            <a:ext cx="2971800" cy="640080"/>
-          </a:xfrm>
-          <a:prstGeom prst="rect">
-            <a:avLst/>
-          </a:prstGeom>
-          <a:noFill/>
-          <a:ln/>
-        </p:spPr>
-        <p:txBody>
-          <a:bodyPr wrap="square" lIns="0" tIns="0" rIns="0" bIns="0" rtlCol="0" anchor="ctr"/>
-          <a:lstStyle/>
-          <a:p>
-            <a:pPr algn="ctr" indent="0" marL="0">
-              <a:buNone/>
-            </a:pPr>
-            <a:r>
-              <a:rPr lang="en-US" sz="1250" b="1" dirty="0">
-                <a:solidFill>
-                  <a:srgbClr val="FFFFFF"/>
-                </a:solidFill>
-                <a:latin typeface="Calibri" pitchFamily="34" charset="0"/>
-                <a:ea typeface="Calibri" pitchFamily="34" charset="-122"/>
-                <a:cs typeface="Calibri" pitchFamily="34" charset="-120"/>
-              </a:rPr>
-              <a:t>大阪府・製造業</a:t>
-            </a:r>
-            <a:endParaRPr lang="en-US" sz="1250" dirty="0"/>
-          </a:p>
-        </p:txBody>
-      </p:sp>
-      <p:sp>
-        <p:nvSpPr>
-          <p:cNvPr id="15" name="Text 13"/>
-          <p:cNvSpPr/>
-          <p:nvPr/>
-        </p:nvSpPr>
-        <p:spPr>
-          <a:xfrm>
-            <a:off x="4709160" y="2651760"/>
-            <a:ext cx="2971800" cy="274320"/>
-          </a:xfrm>
-          <a:prstGeom prst="rect">
-            <a:avLst/>
-          </a:prstGeom>
-          <a:noFill/>
-          <a:ln/>
-        </p:spPr>
-        <p:txBody>
-          <a:bodyPr wrap="square" lIns="0" tIns="0" rIns="0" bIns="0" rtlCol="0" anchor="ctr"/>
-          <a:lstStyle/>
-          <a:p>
-            <a:pPr indent="0" marL="0">
-              <a:buNone/>
-            </a:pPr>
-            <a:r>
-              <a:rPr lang="en-US" sz="1000" b="1" dirty="0">
-                <a:solidFill>
-                  <a:srgbClr val="F2A93B"/>
-                </a:solidFill>
-                <a:latin typeface="Calibri" pitchFamily="34" charset="0"/>
-                <a:ea typeface="Calibri" pitchFamily="34" charset="-122"/>
-                <a:cs typeface="Calibri" pitchFamily="34" charset="-120"/>
-              </a:rPr>
-              <a:t>課題</a:t>
-            </a:r>
-            <a:endParaRPr lang="en-US" sz="1000" dirty="0"/>
-          </a:p>
-        </p:txBody>
-      </p:sp>
-      <p:sp>
-        <p:nvSpPr>
-          <p:cNvPr id="16" name="Text 14"/>
-          <p:cNvSpPr/>
-          <p:nvPr/>
-        </p:nvSpPr>
-        <p:spPr>
-          <a:xfrm>
-            <a:off x="4709160" y="2926080"/>
-            <a:ext cx="2971800" cy="548640"/>
-          </a:xfrm>
-          <a:prstGeom prst="rect">
-            <a:avLst/>
-          </a:prstGeom>
-          <a:noFill/>
-          <a:ln/>
-        </p:spPr>
-        <p:txBody>
-          <a:bodyPr wrap="square" lIns="0" tIns="0" rIns="0" bIns="0" rtlCol="0" anchor="ctr"/>
-          <a:lstStyle/>
-          <a:p>
-            <a:pPr indent="0" marL="0">
-              <a:lnSpc>
-                <a:spcPts val="1500"/>
-              </a:lnSpc>
-              <a:buNone/>
-            </a:pPr>
-            <a:r>
-              <a:rPr lang="en-US" sz="1150" dirty="0">
-                <a:solidFill>
-                  <a:srgbClr val="24272E"/>
-                </a:solidFill>
-                <a:latin typeface="Calibri" pitchFamily="34" charset="0"/>
-                <a:ea typeface="Calibri" pitchFamily="34" charset="-122"/>
-                <a:cs typeface="Calibri" pitchFamily="34" charset="-120"/>
-              </a:rPr>
-              <a:t>工場の電気代の高さが課題</a:t>
-            </a:r>
-            <a:endParaRPr lang="en-US" sz="1150" dirty="0"/>
-          </a:p>
-        </p:txBody>
-      </p:sp>
-      <p:sp>
-        <p:nvSpPr>
-          <p:cNvPr id="17" name="Text 15"/>
-          <p:cNvSpPr/>
-          <p:nvPr/>
-        </p:nvSpPr>
-        <p:spPr>
-          <a:xfrm>
-            <a:off x="4709160" y="3520440"/>
-            <a:ext cx="2971800" cy="274320"/>
-          </a:xfrm>
-          <a:prstGeom prst="rect">
-            <a:avLst/>
-          </a:prstGeom>
-          <a:noFill/>
-          <a:ln/>
-        </p:spPr>
-        <p:txBody>
-          <a:bodyPr wrap="square" lIns="0" tIns="0" rIns="0" bIns="0" rtlCol="0" anchor="ctr"/>
-          <a:lstStyle/>
-          <a:p>
-            <a:pPr indent="0" marL="0">
-              <a:buNone/>
-            </a:pPr>
-            <a:r>
-              <a:rPr lang="en-US" sz="1000" b="1" dirty="0">
-                <a:solidFill>
-                  <a:srgbClr val="F2A93B"/>
-                </a:solidFill>
-                <a:latin typeface="Calibri" pitchFamily="34" charset="0"/>
-                <a:ea typeface="Calibri" pitchFamily="34" charset="-122"/>
-                <a:cs typeface="Calibri" pitchFamily="34" charset="-120"/>
-              </a:rPr>
-              <a:t>導入設備</a:t>
-            </a:r>
-            <a:endParaRPr lang="en-US" sz="1000" dirty="0"/>
-          </a:p>
-        </p:txBody>
-      </p:sp>
-      <p:sp>
-        <p:nvSpPr>
-          <p:cNvPr id="18" name="Text 16"/>
-          <p:cNvSpPr/>
-          <p:nvPr/>
-        </p:nvSpPr>
-        <p:spPr>
-          <a:xfrm>
-            <a:off x="4709160" y="3794760"/>
-            <a:ext cx="2971800" cy="548640"/>
-          </a:xfrm>
-          <a:prstGeom prst="rect">
-            <a:avLst/>
-          </a:prstGeom>
-          <a:noFill/>
-          <a:ln/>
-        </p:spPr>
-        <p:txBody>
-          <a:bodyPr wrap="square" lIns="0" tIns="0" rIns="0" bIns="0" rtlCol="0" anchor="ctr"/>
-          <a:lstStyle/>
-          <a:p>
-            <a:pPr indent="0" marL="0">
-              <a:lnSpc>
-                <a:spcPts val="1500"/>
-              </a:lnSpc>
-              <a:buNone/>
-            </a:pPr>
-            <a:r>
-              <a:rPr lang="en-US" sz="1150" dirty="0">
-                <a:solidFill>
-                  <a:srgbClr val="24272E"/>
-                </a:solidFill>
-                <a:latin typeface="Calibri" pitchFamily="34" charset="0"/>
-                <a:ea typeface="Calibri" pitchFamily="34" charset="-122"/>
-                <a:cs typeface="Calibri" pitchFamily="34" charset="-120"/>
-              </a:rPr>
-              <a:t>省エネ設備の導入（補助金活用）</a:t>
-            </a:r>
-            <a:endParaRPr lang="en-US" sz="1150" dirty="0"/>
-          </a:p>
-        </p:txBody>
-      </p:sp>
-      <p:sp>
-        <p:nvSpPr>
-          <p:cNvPr id="19" name="Shape 17"/>
-          <p:cNvSpPr/>
-          <p:nvPr/>
-        </p:nvSpPr>
-        <p:spPr>
-          <a:xfrm>
-            <a:off x="4709160" y="4434840"/>
-            <a:ext cx="2971800" cy="0"/>
-          </a:xfrm>
-          <a:prstGeom prst="line">
-            <a:avLst/>
-          </a:prstGeom>
-          <a:noFill/>
-          <a:ln w="12700">
-            <a:solidFill>
-              <a:srgbClr val="CFE2D8"/>
-            </a:solidFill>
-            <a:prstDash val="solid"/>
-          </a:ln>
-        </p:spPr>
-      </p:sp>
-      <p:sp>
-        <p:nvSpPr>
-          <p:cNvPr id="20" name="Text 18"/>
-          <p:cNvSpPr/>
-          <p:nvPr/>
-        </p:nvSpPr>
-        <p:spPr>
-          <a:xfrm>
-            <a:off x="4709160" y="4572000"/>
-            <a:ext cx="2971800" cy="1051560"/>
-          </a:xfrm>
-          <a:prstGeom prst="rect">
-            <a:avLst/>
-          </a:prstGeom>
-          <a:noFill/>
-          <a:ln/>
-        </p:spPr>
-        <p:txBody>
-          <a:bodyPr wrap="square" lIns="0" tIns="0" rIns="0" bIns="0" rtlCol="0" anchor="ctr"/>
-          <a:lstStyle/>
-          <a:p>
-            <a:pPr indent="0" marL="0">
-              <a:lnSpc>
-                <a:spcPts val="1800"/>
-              </a:lnSpc>
-              <a:buNone/>
-            </a:pPr>
-            <a:r>
-              <a:rPr lang="en-US" sz="1250" b="1" i="1" dirty="0">
-                <a:solidFill>
-                  <a:srgbClr val="1B4D3E"/>
-                </a:solidFill>
-                <a:latin typeface="Calibri" pitchFamily="34" charset="0"/>
-                <a:ea typeface="Calibri" pitchFamily="34" charset="-122"/>
-                <a:cs typeface="Calibri" pitchFamily="34" charset="-120"/>
-              </a:rPr>
-              <a:t>「電気代が半分ほどに</a:t>
-            </a:r>
-            <a:endParaRPr lang="en-US" sz="1250" dirty="0"/>
-          </a:p>
-          <a:p>
-            <a:pPr indent="0" marL="0">
-              <a:lnSpc>
-                <a:spcPts val="1800"/>
-              </a:lnSpc>
-              <a:buNone/>
-            </a:pPr>
-            <a:r>
-              <a:rPr lang="en-US" sz="1250" b="1" i="1" dirty="0">
-                <a:solidFill>
-                  <a:srgbClr val="1B4D3E"/>
-                </a:solidFill>
-                <a:latin typeface="Calibri" pitchFamily="34" charset="0"/>
-                <a:ea typeface="Calibri" pitchFamily="34" charset="-122"/>
-                <a:cs typeface="Calibri" pitchFamily="34" charset="-120"/>
-              </a:rPr>
-              <a:t>なり、本当に</a:t>
-            </a:r>
-            <a:endParaRPr lang="en-US" sz="1250" dirty="0"/>
-          </a:p>
-          <a:p>
-            <a:pPr indent="0" marL="0">
-              <a:lnSpc>
-                <a:spcPts val="1800"/>
-              </a:lnSpc>
-              <a:buNone/>
-            </a:pPr>
-            <a:r>
-              <a:rPr lang="en-US" sz="1250" b="1" i="1" dirty="0">
-                <a:solidFill>
-                  <a:srgbClr val="1B4D3E"/>
-                </a:solidFill>
-                <a:latin typeface="Calibri" pitchFamily="34" charset="0"/>
-                <a:ea typeface="Calibri" pitchFamily="34" charset="-122"/>
-                <a:cs typeface="Calibri" pitchFamily="34" charset="-120"/>
-              </a:rPr>
-              <a:t>助かりました」</a:t>
-            </a:r>
-            <a:endParaRPr lang="en-US" sz="1250" dirty="0"/>
-          </a:p>
-        </p:txBody>
-      </p:sp>
-      <p:sp>
-        <p:nvSpPr>
-          <p:cNvPr id="21" name="Shape 19"/>
-          <p:cNvSpPr/>
-          <p:nvPr/>
-        </p:nvSpPr>
-        <p:spPr>
-          <a:xfrm>
-            <a:off x="8229600" y="1554480"/>
-            <a:ext cx="3520440" cy="4206240"/>
-          </a:xfrm>
-          <a:prstGeom prst="roundRect">
-            <a:avLst>
-              <a:gd name="adj" fmla="val 2078"/>
-            </a:avLst>
-          </a:prstGeom>
-          <a:solidFill>
-            <a:srgbClr val="F2F7F4"/>
-          </a:solidFill>
-          <a:ln/>
-        </p:spPr>
-      </p:sp>
-      <p:sp>
-        <p:nvSpPr>
-          <p:cNvPr id="22" name="Shape 20"/>
-          <p:cNvSpPr/>
-          <p:nvPr/>
-        </p:nvSpPr>
-        <p:spPr>
-          <a:xfrm>
-            <a:off x="8503920" y="1828800"/>
-            <a:ext cx="2971800" cy="640080"/>
-          </a:xfrm>
-          <a:prstGeom prst="roundRect">
-            <a:avLst>
-              <a:gd name="adj" fmla="val 8571"/>
-            </a:avLst>
-          </a:prstGeom>
-          <a:solidFill>
-            <a:srgbClr val="1B4D3E"/>
-          </a:solidFill>
-          <a:ln/>
-        </p:spPr>
-      </p:sp>
-      <p:sp>
-        <p:nvSpPr>
-          <p:cNvPr id="23" name="Text 21"/>
-          <p:cNvSpPr/>
-          <p:nvPr/>
-        </p:nvSpPr>
-        <p:spPr>
-          <a:xfrm>
-            <a:off x="8503920" y="1828800"/>
-            <a:ext cx="2971800" cy="640080"/>
-          </a:xfrm>
-          <a:prstGeom prst="rect">
-            <a:avLst/>
-          </a:prstGeom>
-          <a:noFill/>
-          <a:ln/>
-        </p:spPr>
-        <p:txBody>
-          <a:bodyPr wrap="square" lIns="0" tIns="0" rIns="0" bIns="0" rtlCol="0" anchor="ctr"/>
-          <a:lstStyle/>
-          <a:p>
-            <a:pPr algn="ctr" indent="0" marL="0">
-              <a:buNone/>
-            </a:pPr>
-            <a:r>
-              <a:rPr lang="en-US" sz="1250" b="1" dirty="0">
-                <a:solidFill>
-                  <a:srgbClr val="FFFFFF"/>
-                </a:solidFill>
-                <a:latin typeface="Calibri" pitchFamily="34" charset="0"/>
-                <a:ea typeface="Calibri" pitchFamily="34" charset="-122"/>
-                <a:cs typeface="Calibri" pitchFamily="34" charset="-120"/>
-              </a:rPr>
-              <a:t>東京都・飲食店</a:t>
-            </a:r>
-            <a:endParaRPr lang="en-US" sz="1250" dirty="0"/>
-          </a:p>
-        </p:txBody>
-      </p:sp>
-      <p:sp>
-        <p:nvSpPr>
-          <p:cNvPr id="24" name="Text 22"/>
-          <p:cNvSpPr/>
-          <p:nvPr/>
-        </p:nvSpPr>
-        <p:spPr>
-          <a:xfrm>
-            <a:off x="8503920" y="2651760"/>
-            <a:ext cx="2971800" cy="274320"/>
-          </a:xfrm>
-          <a:prstGeom prst="rect">
-            <a:avLst/>
-          </a:prstGeom>
-          <a:noFill/>
-          <a:ln/>
-        </p:spPr>
-        <p:txBody>
-          <a:bodyPr wrap="square" lIns="0" tIns="0" rIns="0" bIns="0" rtlCol="0" anchor="ctr"/>
-          <a:lstStyle/>
-          <a:p>
-            <a:pPr indent="0" marL="0">
-              <a:buNone/>
-            </a:pPr>
-            <a:r>
-              <a:rPr lang="en-US" sz="1000" b="1" dirty="0">
-                <a:solidFill>
-                  <a:srgbClr val="F2A93B"/>
-                </a:solidFill>
-                <a:latin typeface="Calibri" pitchFamily="34" charset="0"/>
-                <a:ea typeface="Calibri" pitchFamily="34" charset="-122"/>
-                <a:cs typeface="Calibri" pitchFamily="34" charset="-120"/>
-              </a:rPr>
-              <a:t>課題</a:t>
-            </a:r>
-            <a:endParaRPr lang="en-US" sz="1000" dirty="0"/>
-          </a:p>
-        </p:txBody>
-      </p:sp>
-      <p:sp>
-        <p:nvSpPr>
-          <p:cNvPr id="25" name="Text 23"/>
-          <p:cNvSpPr/>
-          <p:nvPr/>
-        </p:nvSpPr>
-        <p:spPr>
-          <a:xfrm>
-            <a:off x="8503920" y="2926080"/>
-            <a:ext cx="2971800" cy="548640"/>
-          </a:xfrm>
-          <a:prstGeom prst="rect">
-            <a:avLst/>
-          </a:prstGeom>
-          <a:noFill/>
-          <a:ln/>
-        </p:spPr>
-        <p:txBody>
-          <a:bodyPr wrap="square" lIns="0" tIns="0" rIns="0" bIns="0" rtlCol="0" anchor="ctr"/>
-          <a:lstStyle/>
-          <a:p>
-            <a:pPr indent="0" marL="0">
-              <a:lnSpc>
-                <a:spcPts val="1500"/>
-              </a:lnSpc>
-              <a:buNone/>
-            </a:pPr>
-            <a:r>
-              <a:rPr lang="en-US" sz="1150" dirty="0">
-                <a:solidFill>
-                  <a:srgbClr val="24272E"/>
-                </a:solidFill>
-                <a:latin typeface="Calibri" pitchFamily="34" charset="0"/>
-                <a:ea typeface="Calibri" pitchFamily="34" charset="-122"/>
-                <a:cs typeface="Calibri" pitchFamily="34" charset="-120"/>
-              </a:rPr>
-              <a:t>太陽光導入の初期費用が不安</a:t>
-            </a:r>
-            <a:endParaRPr lang="en-US" sz="1150" dirty="0"/>
-          </a:p>
-        </p:txBody>
-      </p:sp>
-      <p:sp>
-        <p:nvSpPr>
-          <p:cNvPr id="26" name="Text 24"/>
-          <p:cNvSpPr/>
-          <p:nvPr/>
-        </p:nvSpPr>
-        <p:spPr>
-          <a:xfrm>
-            <a:off x="8503920" y="3520440"/>
-            <a:ext cx="2971800" cy="274320"/>
-          </a:xfrm>
-          <a:prstGeom prst="rect">
-            <a:avLst/>
-          </a:prstGeom>
-          <a:noFill/>
-          <a:ln/>
-        </p:spPr>
-        <p:txBody>
-          <a:bodyPr wrap="square" lIns="0" tIns="0" rIns="0" bIns="0" rtlCol="0" anchor="ctr"/>
-          <a:lstStyle/>
-          <a:p>
-            <a:pPr indent="0" marL="0">
-              <a:buNone/>
-            </a:pPr>
-            <a:r>
-              <a:rPr lang="en-US" sz="1000" b="1" dirty="0">
-                <a:solidFill>
-                  <a:srgbClr val="F2A93B"/>
-                </a:solidFill>
-                <a:latin typeface="Calibri" pitchFamily="34" charset="0"/>
-                <a:ea typeface="Calibri" pitchFamily="34" charset="-122"/>
-                <a:cs typeface="Calibri" pitchFamily="34" charset="-120"/>
-              </a:rPr>
-              <a:t>導入設備</a:t>
-            </a:r>
-            <a:endParaRPr lang="en-US" sz="1000" dirty="0"/>
-          </a:p>
-        </p:txBody>
-      </p:sp>
-      <p:sp>
-        <p:nvSpPr>
-          <p:cNvPr id="27" name="Text 25"/>
-          <p:cNvSpPr/>
-          <p:nvPr/>
-        </p:nvSpPr>
-        <p:spPr>
-          <a:xfrm>
-            <a:off x="8503920" y="3794760"/>
-            <a:ext cx="2971800" cy="548640"/>
-          </a:xfrm>
-          <a:prstGeom prst="rect">
-            <a:avLst/>
-          </a:prstGeom>
-          <a:noFill/>
-          <a:ln/>
-        </p:spPr>
-        <p:txBody>
-          <a:bodyPr wrap="square" lIns="0" tIns="0" rIns="0" bIns="0" rtlCol="0" anchor="ctr"/>
-          <a:lstStyle/>
-          <a:p>
-            <a:pPr indent="0" marL="0">
-              <a:lnSpc>
-                <a:spcPts val="1500"/>
-              </a:lnSpc>
-              <a:buNone/>
-            </a:pPr>
-            <a:r>
-              <a:rPr lang="en-US" sz="1150" dirty="0">
-                <a:solidFill>
-                  <a:srgbClr val="24272E"/>
-                </a:solidFill>
-                <a:latin typeface="Calibri" pitchFamily="34" charset="0"/>
-                <a:ea typeface="Calibri" pitchFamily="34" charset="-122"/>
-                <a:cs typeface="Calibri" pitchFamily="34" charset="-120"/>
-              </a:rPr>
-              <a:t>太陽光発電（クールネット東京の補助金）</a:t>
-            </a:r>
-            <a:endParaRPr lang="en-US" sz="1150" dirty="0"/>
-          </a:p>
-        </p:txBody>
-      </p:sp>
-      <p:sp>
-        <p:nvSpPr>
-          <p:cNvPr id="28" name="Shape 26"/>
-          <p:cNvSpPr/>
-          <p:nvPr/>
-        </p:nvSpPr>
-        <p:spPr>
-          <a:xfrm>
-            <a:off x="8503920" y="4434840"/>
-            <a:ext cx="2971800" cy="0"/>
-          </a:xfrm>
-          <a:prstGeom prst="line">
-            <a:avLst/>
-          </a:prstGeom>
-          <a:noFill/>
-          <a:ln w="12700">
-            <a:solidFill>
-              <a:srgbClr val="CFE2D8"/>
-            </a:solidFill>
-            <a:prstDash val="solid"/>
-          </a:ln>
-        </p:spPr>
-      </p:sp>
-      <p:sp>
-        <p:nvSpPr>
-          <p:cNvPr id="29" name="Text 27"/>
-          <p:cNvSpPr/>
-          <p:nvPr/>
-        </p:nvSpPr>
-        <p:spPr>
-          <a:xfrm>
-            <a:off x="8503920" y="4572000"/>
-            <a:ext cx="2971800" cy="1051560"/>
-          </a:xfrm>
-          <a:prstGeom prst="rect">
-            <a:avLst/>
-          </a:prstGeom>
-          <a:noFill/>
-          <a:ln/>
-        </p:spPr>
-        <p:txBody>
-          <a:bodyPr wrap="square" lIns="0" tIns="0" rIns="0" bIns="0" rtlCol="0" anchor="ctr"/>
-          <a:lstStyle/>
-          <a:p>
-            <a:pPr indent="0" marL="0">
-              <a:lnSpc>
-                <a:spcPts val="1800"/>
-              </a:lnSpc>
-              <a:buNone/>
-            </a:pPr>
-            <a:r>
-              <a:rPr lang="en-US" sz="1250" b="1" i="1" dirty="0">
-                <a:solidFill>
-                  <a:srgbClr val="1B4D3E"/>
-                </a:solidFill>
-                <a:latin typeface="Calibri" pitchFamily="34" charset="0"/>
-                <a:ea typeface="Calibri" pitchFamily="34" charset="-122"/>
-                <a:cs typeface="Calibri" pitchFamily="34" charset="-120"/>
-              </a:rPr>
-              <a:t>「補助金を活用して</a:t>
-            </a:r>
-            <a:endParaRPr lang="en-US" sz="1250" dirty="0"/>
-          </a:p>
-          <a:p>
-            <a:pPr indent="0" marL="0">
-              <a:lnSpc>
-                <a:spcPts val="1800"/>
-              </a:lnSpc>
-              <a:buNone/>
-            </a:pPr>
-            <a:r>
-              <a:rPr lang="en-US" sz="1250" b="1" i="1" dirty="0">
-                <a:solidFill>
-                  <a:srgbClr val="1B4D3E"/>
-                </a:solidFill>
-                <a:latin typeface="Calibri" pitchFamily="34" charset="0"/>
-                <a:ea typeface="Calibri" pitchFamily="34" charset="-122"/>
-                <a:cs typeface="Calibri" pitchFamily="34" charset="-120"/>
-              </a:rPr>
-              <a:t>実質ほぼ自己負担なく</a:t>
-            </a:r>
-            <a:endParaRPr lang="en-US" sz="1250" dirty="0"/>
-          </a:p>
-          <a:p>
-            <a:pPr indent="0" marL="0">
-              <a:lnSpc>
-                <a:spcPts val="1800"/>
-              </a:lnSpc>
-              <a:buNone/>
-            </a:pPr>
-            <a:r>
-              <a:rPr lang="en-US" sz="1250" b="1" i="1" dirty="0">
-                <a:solidFill>
-                  <a:srgbClr val="1B4D3E"/>
-                </a:solidFill>
-                <a:latin typeface="Calibri" pitchFamily="34" charset="0"/>
-                <a:ea typeface="Calibri" pitchFamily="34" charset="-122"/>
-                <a:cs typeface="Calibri" pitchFamily="34" charset="-120"/>
-              </a:rPr>
-              <a:t>導入できました」</a:t>
-            </a:r>
-            <a:endParaRPr lang="en-US" sz="1250" dirty="0"/>
-          </a:p>
-        </p:txBody>
-      </p:sp>
-      <p:sp>
-        <p:nvSpPr>
-          <p:cNvPr id="30" name="Text 28"/>
-          <p:cNvSpPr/>
-          <p:nvPr/>
-        </p:nvSpPr>
-        <p:spPr>
-          <a:xfrm>
-            <a:off x="457200" y="6537960"/>
-            <a:ext cx="7315200" cy="274320"/>
-          </a:xfrm>
-          <a:prstGeom prst="rect">
-            <a:avLst/>
-          </a:prstGeom>
-          <a:noFill/>
-          <a:ln/>
-        </p:spPr>
-        <p:txBody>
-          <a:bodyPr wrap="square" lIns="0" tIns="0" rIns="0" bIns="0" rtlCol="0" anchor="ctr"/>
-          <a:lstStyle/>
-          <a:p>
-            <a:pPr indent="0" marL="0">
-              <a:buNone/>
-            </a:pPr>
-            <a:r>
-              <a:rPr lang="en-US" sz="900" dirty="0">
-                <a:solidFill>
-                  <a:srgbClr val="6B7280"/>
-                </a:solidFill>
-                <a:latin typeface="Calibri" pitchFamily="34" charset="0"/>
-                <a:ea typeface="Calibri" pitchFamily="34" charset="-122"/>
-                <a:cs typeface="Calibri" pitchFamily="34" charset="-120"/>
-              </a:rPr>
-              <a:t>一般社団法人 中小企業助成金支援協会　資料請求資料</a:t>
-            </a:r>
-            <a:endParaRPr lang="en-US" sz="900" dirty="0"/>
-          </a:p>
-        </p:txBody>
-      </p:sp>
-      <p:sp>
-        <p:nvSpPr>
-          <p:cNvPr id="31" name="Text 29"/>
           <p:cNvSpPr/>
           <p:nvPr/>
         </p:nvSpPr>
@@ -10899,7 +11489,7 @@
               <a:buNone/>
             </a:pPr>
             <a:r>
-              <a:rPr lang="en-US" sz="2800" b="1" dirty="0">
+              <a:rPr lang="en-US" sz="2600" b="1" dirty="0">
                 <a:solidFill>
                   <a:srgbClr val="1B4D3E"/>
                 </a:solidFill>
@@ -10907,64 +11497,399 @@
                 <a:ea typeface="Bookman Old Style" pitchFamily="34" charset="-122"/>
                 <a:cs typeface="Bookman Old Style" pitchFamily="34" charset="-120"/>
               </a:rPr>
-              <a:t>ご利用の流れ</a:t>
-            </a:r>
-            <a:endParaRPr lang="en-US" sz="2800" dirty="0"/>
-          </a:p>
-        </p:txBody>
-      </p:sp>
-      <p:sp>
-        <p:nvSpPr>
-          <p:cNvPr id="3" name="Text 1"/>
-          <p:cNvSpPr/>
-          <p:nvPr/>
-        </p:nvSpPr>
-        <p:spPr>
-          <a:xfrm>
-            <a:off x="640080" y="1051560"/>
-            <a:ext cx="10058400" cy="365760"/>
-          </a:xfrm>
-          <a:prstGeom prst="rect">
-            <a:avLst/>
-          </a:prstGeom>
-          <a:noFill/>
-          <a:ln/>
-        </p:spPr>
-        <p:txBody>
-          <a:bodyPr wrap="square" lIns="0" tIns="0" rIns="0" bIns="0" rtlCol="0" anchor="ctr"/>
-          <a:lstStyle/>
-          <a:p>
-            <a:pPr indent="0" marL="0">
-              <a:buNone/>
-            </a:pPr>
-            <a:r>
-              <a:rPr lang="en-US" sz="1300" dirty="0">
-                <a:solidFill>
-                  <a:srgbClr val="6B7280"/>
+              <a:t>支援実績（一部抜粋）</a:t>
+            </a:r>
+            <a:endParaRPr lang="en-US" sz="2600" dirty="0"/>
+          </a:p>
+        </p:txBody>
+      </p:sp>
+      <p:sp>
+        <p:nvSpPr>
+          <p:cNvPr id="3" name="Shape 1"/>
+          <p:cNvSpPr/>
+          <p:nvPr/>
+        </p:nvSpPr>
+        <p:spPr>
+          <a:xfrm>
+            <a:off x="640080" y="1554480"/>
+            <a:ext cx="3520440" cy="4206240"/>
+          </a:xfrm>
+          <a:prstGeom prst="roundRect">
+            <a:avLst>
+              <a:gd name="adj" fmla="val 2078"/>
+            </a:avLst>
+          </a:prstGeom>
+          <a:solidFill>
+            <a:srgbClr val="F2F7F4"/>
+          </a:solidFill>
+          <a:ln/>
+        </p:spPr>
+      </p:sp>
+      <p:sp>
+        <p:nvSpPr>
+          <p:cNvPr id="4" name="Shape 2"/>
+          <p:cNvSpPr/>
+          <p:nvPr/>
+        </p:nvSpPr>
+        <p:spPr>
+          <a:xfrm>
+            <a:off x="914400" y="1828800"/>
+            <a:ext cx="2971800" cy="640080"/>
+          </a:xfrm>
+          <a:prstGeom prst="roundRect">
+            <a:avLst>
+              <a:gd name="adj" fmla="val 8571"/>
+            </a:avLst>
+          </a:prstGeom>
+          <a:solidFill>
+            <a:srgbClr val="1B4D3E"/>
+          </a:solidFill>
+          <a:ln/>
+        </p:spPr>
+      </p:sp>
+      <p:sp>
+        <p:nvSpPr>
+          <p:cNvPr id="5" name="Text 3"/>
+          <p:cNvSpPr/>
+          <p:nvPr/>
+        </p:nvSpPr>
+        <p:spPr>
+          <a:xfrm>
+            <a:off x="914400" y="1828800"/>
+            <a:ext cx="2971800" cy="640080"/>
+          </a:xfrm>
+          <a:prstGeom prst="rect">
+            <a:avLst/>
+          </a:prstGeom>
+          <a:noFill/>
+          <a:ln/>
+        </p:spPr>
+        <p:txBody>
+          <a:bodyPr wrap="square" lIns="0" tIns="0" rIns="0" bIns="0" rtlCol="0" anchor="ctr"/>
+          <a:lstStyle/>
+          <a:p>
+            <a:pPr algn="ctr" indent="0" marL="0">
+              <a:buNone/>
+            </a:pPr>
+            <a:r>
+              <a:rPr lang="en-US" sz="1250" b="1" dirty="0">
+                <a:solidFill>
+                  <a:srgbClr val="FFFFFF"/>
                 </a:solidFill>
                 <a:latin typeface="Calibri" pitchFamily="34" charset="0"/>
                 <a:ea typeface="Calibri" pitchFamily="34" charset="-122"/>
                 <a:cs typeface="Calibri" pitchFamily="34" charset="-120"/>
               </a:rPr>
-              <a:t>無料相談から導入後のフォローまで、専門スタッフが一貫してサポートします</a:t>
-            </a:r>
-            <a:endParaRPr lang="en-US" sz="1300" dirty="0"/>
-          </a:p>
-        </p:txBody>
-      </p:sp>
-      <p:sp>
-        <p:nvSpPr>
-          <p:cNvPr id="4" name="Shape 2"/>
-          <p:cNvSpPr/>
-          <p:nvPr/>
-        </p:nvSpPr>
-        <p:spPr>
-          <a:xfrm>
-            <a:off x="937260" y="2057400"/>
-            <a:ext cx="1280160" cy="1280160"/>
-          </a:xfrm>
-          <a:prstGeom prst="ellipse">
-            <a:avLst/>
+              <a:t>愛知県・製造業（B社様）</a:t>
+            </a:r>
+            <a:endParaRPr lang="en-US" sz="1250" dirty="0"/>
+          </a:p>
+        </p:txBody>
+      </p:sp>
+      <p:sp>
+        <p:nvSpPr>
+          <p:cNvPr id="6" name="Text 4"/>
+          <p:cNvSpPr/>
+          <p:nvPr/>
+        </p:nvSpPr>
+        <p:spPr>
+          <a:xfrm>
+            <a:off x="914400" y="2651760"/>
+            <a:ext cx="2971800" cy="274320"/>
+          </a:xfrm>
+          <a:prstGeom prst="rect">
+            <a:avLst/>
+          </a:prstGeom>
+          <a:noFill/>
+          <a:ln/>
+        </p:spPr>
+        <p:txBody>
+          <a:bodyPr wrap="square" lIns="0" tIns="0" rIns="0" bIns="0" rtlCol="0" anchor="ctr"/>
+          <a:lstStyle/>
+          <a:p>
+            <a:pPr indent="0" marL="0">
+              <a:buNone/>
+            </a:pPr>
+            <a:r>
+              <a:rPr lang="en-US" sz="1000" b="1" dirty="0">
+                <a:solidFill>
+                  <a:srgbClr val="F2A93B"/>
+                </a:solidFill>
+                <a:latin typeface="Calibri" pitchFamily="34" charset="0"/>
+                <a:ea typeface="Calibri" pitchFamily="34" charset="-122"/>
+                <a:cs typeface="Calibri" pitchFamily="34" charset="-120"/>
+              </a:rPr>
+              <a:t>課題</a:t>
+            </a:r>
+            <a:endParaRPr lang="en-US" sz="1000" dirty="0"/>
+          </a:p>
+        </p:txBody>
+      </p:sp>
+      <p:sp>
+        <p:nvSpPr>
+          <p:cNvPr id="7" name="Text 5"/>
+          <p:cNvSpPr/>
+          <p:nvPr/>
+        </p:nvSpPr>
+        <p:spPr>
+          <a:xfrm>
+            <a:off x="914400" y="2926080"/>
+            <a:ext cx="2971800" cy="548640"/>
+          </a:xfrm>
+          <a:prstGeom prst="rect">
+            <a:avLst/>
+          </a:prstGeom>
+          <a:noFill/>
+          <a:ln/>
+        </p:spPr>
+        <p:txBody>
+          <a:bodyPr wrap="square" lIns="0" tIns="0" rIns="0" bIns="0" rtlCol="0" anchor="ctr"/>
+          <a:lstStyle/>
+          <a:p>
+            <a:pPr indent="0" marL="0">
+              <a:lnSpc>
+                <a:spcPts val="1500"/>
+              </a:lnSpc>
+              <a:buNone/>
+            </a:pPr>
+            <a:r>
+              <a:rPr lang="en-US" sz="1150" dirty="0">
+                <a:solidFill>
+                  <a:srgbClr val="24272E"/>
+                </a:solidFill>
+                <a:latin typeface="Calibri" pitchFamily="34" charset="0"/>
+                <a:ea typeface="Calibri" pitchFamily="34" charset="-122"/>
+                <a:cs typeface="Calibri" pitchFamily="34" charset="-120"/>
+              </a:rPr>
+              <a:t>使える補助金があることを知らなかった</a:t>
+            </a:r>
+            <a:endParaRPr lang="en-US" sz="1150" dirty="0"/>
+          </a:p>
+        </p:txBody>
+      </p:sp>
+      <p:sp>
+        <p:nvSpPr>
+          <p:cNvPr id="8" name="Text 6"/>
+          <p:cNvSpPr/>
+          <p:nvPr/>
+        </p:nvSpPr>
+        <p:spPr>
+          <a:xfrm>
+            <a:off x="914400" y="3520440"/>
+            <a:ext cx="2971800" cy="274320"/>
+          </a:xfrm>
+          <a:prstGeom prst="rect">
+            <a:avLst/>
+          </a:prstGeom>
+          <a:noFill/>
+          <a:ln/>
+        </p:spPr>
+        <p:txBody>
+          <a:bodyPr wrap="square" lIns="0" tIns="0" rIns="0" bIns="0" rtlCol="0" anchor="ctr"/>
+          <a:lstStyle/>
+          <a:p>
+            <a:pPr indent="0" marL="0">
+              <a:buNone/>
+            </a:pPr>
+            <a:r>
+              <a:rPr lang="en-US" sz="1000" b="1" dirty="0">
+                <a:solidFill>
+                  <a:srgbClr val="F2A93B"/>
+                </a:solidFill>
+                <a:latin typeface="Calibri" pitchFamily="34" charset="0"/>
+                <a:ea typeface="Calibri" pitchFamily="34" charset="-122"/>
+                <a:cs typeface="Calibri" pitchFamily="34" charset="-120"/>
+              </a:rPr>
+              <a:t>導入設備</a:t>
+            </a:r>
+            <a:endParaRPr lang="en-US" sz="1000" dirty="0"/>
+          </a:p>
+        </p:txBody>
+      </p:sp>
+      <p:sp>
+        <p:nvSpPr>
+          <p:cNvPr id="9" name="Text 7"/>
+          <p:cNvSpPr/>
+          <p:nvPr/>
+        </p:nvSpPr>
+        <p:spPr>
+          <a:xfrm>
+            <a:off x="914400" y="3794760"/>
+            <a:ext cx="2971800" cy="548640"/>
+          </a:xfrm>
+          <a:prstGeom prst="rect">
+            <a:avLst/>
+          </a:prstGeom>
+          <a:noFill/>
+          <a:ln/>
+        </p:spPr>
+        <p:txBody>
+          <a:bodyPr wrap="square" lIns="0" tIns="0" rIns="0" bIns="0" rtlCol="0" anchor="ctr"/>
+          <a:lstStyle/>
+          <a:p>
+            <a:pPr indent="0" marL="0">
+              <a:lnSpc>
+                <a:spcPts val="1500"/>
+              </a:lnSpc>
+              <a:buNone/>
+            </a:pPr>
+            <a:r>
+              <a:rPr lang="en-US" sz="1150" dirty="0">
+                <a:solidFill>
+                  <a:srgbClr val="24272E"/>
+                </a:solidFill>
+                <a:latin typeface="Calibri" pitchFamily="34" charset="0"/>
+                <a:ea typeface="Calibri" pitchFamily="34" charset="-122"/>
+                <a:cs typeface="Calibri" pitchFamily="34" charset="-120"/>
+              </a:rPr>
+              <a:t>太陽光発電・空調設備の入れ替え</a:t>
+            </a:r>
+            <a:endParaRPr lang="en-US" sz="1150" dirty="0"/>
+          </a:p>
+        </p:txBody>
+      </p:sp>
+      <p:sp>
+        <p:nvSpPr>
+          <p:cNvPr id="10" name="Shape 8"/>
+          <p:cNvSpPr/>
+          <p:nvPr/>
+        </p:nvSpPr>
+        <p:spPr>
+          <a:xfrm>
+            <a:off x="914400" y="4434840"/>
+            <a:ext cx="2971800" cy="0"/>
+          </a:xfrm>
+          <a:prstGeom prst="line">
+            <a:avLst/>
+          </a:prstGeom>
+          <a:noFill/>
+          <a:ln w="12700">
+            <a:solidFill>
+              <a:srgbClr val="CFE2D8"/>
+            </a:solidFill>
+            <a:prstDash val="solid"/>
+          </a:ln>
+        </p:spPr>
+      </p:sp>
+      <p:sp>
+        <p:nvSpPr>
+          <p:cNvPr id="11" name="Text 9"/>
+          <p:cNvSpPr/>
+          <p:nvPr/>
+        </p:nvSpPr>
+        <p:spPr>
+          <a:xfrm>
+            <a:off x="914400" y="4572000"/>
+            <a:ext cx="2971800" cy="1051560"/>
+          </a:xfrm>
+          <a:prstGeom prst="rect">
+            <a:avLst/>
+          </a:prstGeom>
+          <a:noFill/>
+          <a:ln/>
+        </p:spPr>
+        <p:txBody>
+          <a:bodyPr wrap="square" lIns="0" tIns="0" rIns="0" bIns="0" rtlCol="0" anchor="ctr"/>
+          <a:lstStyle/>
+          <a:p>
+            <a:pPr indent="0" marL="0">
+              <a:lnSpc>
+                <a:spcPts val="1800"/>
+              </a:lnSpc>
+              <a:buNone/>
+            </a:pPr>
+            <a:r>
+              <a:rPr lang="en-US" sz="1250" b="1" i="1" dirty="0">
+                <a:solidFill>
+                  <a:srgbClr val="1B4D3E"/>
+                </a:solidFill>
+                <a:latin typeface="Calibri" pitchFamily="34" charset="0"/>
+                <a:ea typeface="Calibri" pitchFamily="34" charset="-122"/>
+                <a:cs typeface="Calibri" pitchFamily="34" charset="-120"/>
+              </a:rPr>
+              <a:t>「意外と、申請していない</a:t>
+            </a:r>
+            <a:endParaRPr lang="en-US" sz="1250" dirty="0"/>
+          </a:p>
+          <a:p>
+            <a:pPr indent="0" marL="0">
+              <a:lnSpc>
+                <a:spcPts val="1800"/>
+              </a:lnSpc>
+              <a:buNone/>
+            </a:pPr>
+            <a:r>
+              <a:rPr lang="en-US" sz="1250" b="1" i="1" dirty="0">
+                <a:solidFill>
+                  <a:srgbClr val="1B4D3E"/>
+                </a:solidFill>
+                <a:latin typeface="Calibri" pitchFamily="34" charset="0"/>
+                <a:ea typeface="Calibri" pitchFamily="34" charset="-122"/>
+                <a:cs typeface="Calibri" pitchFamily="34" charset="-120"/>
+              </a:rPr>
+              <a:t>だけで使える制度は</a:t>
+            </a:r>
+            <a:endParaRPr lang="en-US" sz="1250" dirty="0"/>
+          </a:p>
+          <a:p>
+            <a:pPr indent="0" marL="0">
+              <a:lnSpc>
+                <a:spcPts val="1800"/>
+              </a:lnSpc>
+              <a:buNone/>
+            </a:pPr>
+            <a:r>
+              <a:rPr lang="en-US" sz="1250" b="1" i="1" dirty="0">
+                <a:solidFill>
+                  <a:srgbClr val="1B4D3E"/>
+                </a:solidFill>
+                <a:latin typeface="Calibri" pitchFamily="34" charset="0"/>
+                <a:ea typeface="Calibri" pitchFamily="34" charset="-122"/>
+                <a:cs typeface="Calibri" pitchFamily="34" charset="-120"/>
+              </a:rPr>
+              <a:t>いろいろあるものですね」</a:t>
+            </a:r>
+            <a:endParaRPr lang="en-US" sz="1250" dirty="0"/>
+          </a:p>
+        </p:txBody>
+      </p:sp>
+      <p:sp>
+        <p:nvSpPr>
+          <p:cNvPr id="12" name="Shape 10"/>
+          <p:cNvSpPr/>
+          <p:nvPr/>
+        </p:nvSpPr>
+        <p:spPr>
+          <a:xfrm>
+            <a:off x="4434840" y="1554480"/>
+            <a:ext cx="3520440" cy="4206240"/>
+          </a:xfrm>
+          <a:prstGeom prst="roundRect">
+            <a:avLst>
+              <a:gd name="adj" fmla="val 2078"/>
+            </a:avLst>
+          </a:prstGeom>
+          <a:solidFill>
+            <a:srgbClr val="F2F7F4"/>
+          </a:solidFill>
+          <a:ln/>
+        </p:spPr>
+      </p:sp>
+      <p:sp>
+        <p:nvSpPr>
+          <p:cNvPr id="13" name="Shape 11"/>
+          <p:cNvSpPr/>
+          <p:nvPr/>
+        </p:nvSpPr>
+        <p:spPr>
+          <a:xfrm>
+            <a:off x="4709160" y="1828800"/>
+            <a:ext cx="2971800" cy="640080"/>
+          </a:xfrm>
+          <a:prstGeom prst="roundRect">
+            <a:avLst>
+              <a:gd name="adj" fmla="val 8571"/>
+            </a:avLst>
           </a:prstGeom>
           <a:solidFill>
             <a:srgbClr val="1B4D3E"/>
@@ -10972,157 +11897,113 @@
           <a:ln/>
         </p:spPr>
       </p:sp>
-      <p:pic>
-        <p:nvPicPr>
-          <p:cNvPr id="5" name="Image 0" descr="/tmp/claude-0/-home-user-DM-/98b145ee-d85d-5913-a881-95f99ca0c0f7/scratchpad/josei-pptx/icons/search_FFFFFF.png">    </p:cNvPr>
-          <p:cNvPicPr>
-            <a:picLocks noChangeAspect="1"/>
-          </p:cNvPicPr>
-          <p:nvPr/>
-        </p:nvPicPr>
-        <p:blipFill>
-          <a:blip r:embed="rId1"/>
-          <a:stretch>
-            <a:fillRect/>
-          </a:stretch>
-        </p:blipFill>
-        <p:spPr>
-          <a:xfrm>
-            <a:off x="1244498" y="2364638"/>
-            <a:ext cx="665683" cy="665683"/>
-          </a:xfrm>
-          <a:prstGeom prst="rect">
-            <a:avLst/>
-          </a:prstGeom>
-        </p:spPr>
-      </p:pic>
-      <p:sp>
-        <p:nvSpPr>
-          <p:cNvPr id="6" name="Text 3"/>
-          <p:cNvSpPr/>
-          <p:nvPr/>
-        </p:nvSpPr>
-        <p:spPr>
-          <a:xfrm>
-            <a:off x="982980" y="2103120"/>
-            <a:ext cx="457200" cy="365760"/>
-          </a:xfrm>
-          <a:prstGeom prst="rect">
-            <a:avLst/>
-          </a:prstGeom>
-          <a:noFill/>
-          <a:ln/>
-        </p:spPr>
-        <p:txBody>
-          <a:bodyPr wrap="square" lIns="0" tIns="0" rIns="0" bIns="0" rtlCol="0" anchor="ctr"/>
-          <a:lstStyle/>
-          <a:p>
-            <a:pPr indent="0" marL="0">
-              <a:buNone/>
-            </a:pPr>
-            <a:r>
-              <a:rPr lang="en-US" sz="1100" b="1" dirty="0">
-                <a:solidFill>
-                  <a:srgbClr val="AFCABC"/>
+      <p:sp>
+        <p:nvSpPr>
+          <p:cNvPr id="14" name="Text 12"/>
+          <p:cNvSpPr/>
+          <p:nvPr/>
+        </p:nvSpPr>
+        <p:spPr>
+          <a:xfrm>
+            <a:off x="4709160" y="1828800"/>
+            <a:ext cx="2971800" cy="640080"/>
+          </a:xfrm>
+          <a:prstGeom prst="rect">
+            <a:avLst/>
+          </a:prstGeom>
+          <a:noFill/>
+          <a:ln/>
+        </p:spPr>
+        <p:txBody>
+          <a:bodyPr wrap="square" lIns="0" tIns="0" rIns="0" bIns="0" rtlCol="0" anchor="ctr"/>
+          <a:lstStyle/>
+          <a:p>
+            <a:pPr algn="ctr" indent="0" marL="0">
+              <a:buNone/>
+            </a:pPr>
+            <a:r>
+              <a:rPr lang="en-US" sz="1250" b="1" dirty="0">
+                <a:solidFill>
+                  <a:srgbClr val="FFFFFF"/>
                 </a:solidFill>
                 <a:latin typeface="Calibri" pitchFamily="34" charset="0"/>
                 <a:ea typeface="Calibri" pitchFamily="34" charset="-122"/>
                 <a:cs typeface="Calibri" pitchFamily="34" charset="-120"/>
               </a:rPr>
-              <a:t>1</a:t>
-            </a:r>
-            <a:endParaRPr lang="en-US" sz="1100" dirty="0"/>
-          </a:p>
-        </p:txBody>
-      </p:sp>
-      <p:sp>
-        <p:nvSpPr>
-          <p:cNvPr id="7" name="Text 4"/>
-          <p:cNvSpPr/>
-          <p:nvPr/>
-        </p:nvSpPr>
-        <p:spPr>
-          <a:xfrm>
-            <a:off x="640080" y="3566160"/>
-            <a:ext cx="1874520" cy="365760"/>
-          </a:xfrm>
-          <a:prstGeom prst="rect">
-            <a:avLst/>
-          </a:prstGeom>
-          <a:noFill/>
-          <a:ln/>
-        </p:spPr>
-        <p:txBody>
-          <a:bodyPr wrap="square" lIns="0" tIns="0" rIns="0" bIns="0" rtlCol="0" anchor="ctr"/>
-          <a:lstStyle/>
-          <a:p>
-            <a:pPr algn="ctr" indent="0" marL="0">
-              <a:buNone/>
-            </a:pPr>
-            <a:r>
-              <a:rPr lang="en-US" sz="1300" b="1" dirty="0">
-                <a:solidFill>
-                  <a:srgbClr val="1B4D3E"/>
-                </a:solidFill>
-                <a:latin typeface="Bookman Old Style" pitchFamily="34" charset="0"/>
-                <a:ea typeface="Bookman Old Style" pitchFamily="34" charset="-122"/>
-                <a:cs typeface="Bookman Old Style" pitchFamily="34" charset="-120"/>
-              </a:rPr>
-              <a:t>無料相談・AI診断</a:t>
-            </a:r>
-            <a:endParaRPr lang="en-US" sz="1300" dirty="0"/>
-          </a:p>
-        </p:txBody>
-      </p:sp>
-      <p:sp>
-        <p:nvSpPr>
-          <p:cNvPr id="8" name="Text 5"/>
-          <p:cNvSpPr/>
-          <p:nvPr/>
-        </p:nvSpPr>
-        <p:spPr>
-          <a:xfrm>
-            <a:off x="502920" y="3977640"/>
-            <a:ext cx="2148840" cy="1005840"/>
-          </a:xfrm>
-          <a:prstGeom prst="rect">
-            <a:avLst/>
-          </a:prstGeom>
-          <a:noFill/>
-          <a:ln/>
-        </p:spPr>
-        <p:txBody>
-          <a:bodyPr wrap="square" lIns="0" tIns="0" rIns="0" bIns="0" rtlCol="0" anchor="ctr"/>
-          <a:lstStyle/>
-          <a:p>
-            <a:pPr algn="ctr" indent="0" marL="0">
-              <a:lnSpc>
-                <a:spcPts val="1400"/>
-              </a:lnSpc>
-              <a:buNone/>
-            </a:pPr>
-            <a:r>
-              <a:rPr lang="en-US" sz="1050" dirty="0">
-                <a:solidFill>
-                  <a:srgbClr val="24272E"/>
+              <a:t>大阪府・製造業</a:t>
+            </a:r>
+            <a:endParaRPr lang="en-US" sz="1250" dirty="0"/>
+          </a:p>
+        </p:txBody>
+      </p:sp>
+      <p:sp>
+        <p:nvSpPr>
+          <p:cNvPr id="15" name="Text 13"/>
+          <p:cNvSpPr/>
+          <p:nvPr/>
+        </p:nvSpPr>
+        <p:spPr>
+          <a:xfrm>
+            <a:off x="4709160" y="2651760"/>
+            <a:ext cx="2971800" cy="274320"/>
+          </a:xfrm>
+          <a:prstGeom prst="rect">
+            <a:avLst/>
+          </a:prstGeom>
+          <a:noFill/>
+          <a:ln/>
+        </p:spPr>
+        <p:txBody>
+          <a:bodyPr wrap="square" lIns="0" tIns="0" rIns="0" bIns="0" rtlCol="0" anchor="ctr"/>
+          <a:lstStyle/>
+          <a:p>
+            <a:pPr indent="0" marL="0">
+              <a:buNone/>
+            </a:pPr>
+            <a:r>
+              <a:rPr lang="en-US" sz="1000" b="1" dirty="0">
+                <a:solidFill>
+                  <a:srgbClr val="F2A93B"/>
                 </a:solidFill>
                 <a:latin typeface="Calibri" pitchFamily="34" charset="0"/>
                 <a:ea typeface="Calibri" pitchFamily="34" charset="-122"/>
                 <a:cs typeface="Calibri" pitchFamily="34" charset="-120"/>
               </a:rPr>
-              <a:t>業種・設備・規模をヒアリングし</a:t>
-            </a:r>
-            <a:endParaRPr lang="en-US" sz="1050" dirty="0"/>
-          </a:p>
-          <a:p>
-            <a:pPr algn="ctr" indent="0" marL="0">
+              <a:t>課題</a:t>
+            </a:r>
+            <a:endParaRPr lang="en-US" sz="1000" dirty="0"/>
+          </a:p>
+        </p:txBody>
+      </p:sp>
+      <p:sp>
+        <p:nvSpPr>
+          <p:cNvPr id="16" name="Text 14"/>
+          <p:cNvSpPr/>
+          <p:nvPr/>
+        </p:nvSpPr>
+        <p:spPr>
+          <a:xfrm>
+            <a:off x="4709160" y="2926080"/>
+            <a:ext cx="2971800" cy="548640"/>
+          </a:xfrm>
+          <a:prstGeom prst="rect">
+            <a:avLst/>
+          </a:prstGeom>
+          <a:noFill/>
+          <a:ln/>
+        </p:spPr>
+        <p:txBody>
+          <a:bodyPr wrap="square" lIns="0" tIns="0" rIns="0" bIns="0" rtlCol="0" anchor="ctr"/>
+          <a:lstStyle/>
+          <a:p>
+            <a:pPr indent="0" marL="0">
               <a:lnSpc>
-                <a:spcPts val="1400"/>
+                <a:spcPts val="1500"/>
               </a:lnSpc>
               <a:buNone/>
             </a:pPr>
             <a:r>
-              <a:rPr lang="en-US" sz="1050" dirty="0">
+              <a:rPr lang="en-US" sz="1150" dirty="0">
                 <a:solidFill>
                   <a:srgbClr val="24272E"/>
                 </a:solidFill>
@@ -11130,45 +12011,235 @@
                 <a:ea typeface="Calibri" pitchFamily="34" charset="-122"/>
                 <a:cs typeface="Calibri" pitchFamily="34" charset="-120"/>
               </a:rPr>
-              <a:t>対象補助金をAIで無料診断</a:t>
-            </a:r>
-            <a:endParaRPr lang="en-US" sz="1050" dirty="0"/>
-          </a:p>
-        </p:txBody>
-      </p:sp>
-      <p:sp>
-        <p:nvSpPr>
-          <p:cNvPr id="9" name="Shape 6"/>
-          <p:cNvSpPr/>
-          <p:nvPr/>
-        </p:nvSpPr>
-        <p:spPr>
-          <a:xfrm rot="5400000">
-            <a:off x="2542032" y="2596896"/>
-            <a:ext cx="201168" cy="201168"/>
-          </a:xfrm>
-          <a:prstGeom prst="triangle">
-            <a:avLst/>
+              <a:t>工場の電気代の高さが課題</a:t>
+            </a:r>
+            <a:endParaRPr lang="en-US" sz="1150" dirty="0"/>
+          </a:p>
+        </p:txBody>
+      </p:sp>
+      <p:sp>
+        <p:nvSpPr>
+          <p:cNvPr id="17" name="Text 15"/>
+          <p:cNvSpPr/>
+          <p:nvPr/>
+        </p:nvSpPr>
+        <p:spPr>
+          <a:xfrm>
+            <a:off x="4709160" y="3520440"/>
+            <a:ext cx="2971800" cy="274320"/>
+          </a:xfrm>
+          <a:prstGeom prst="rect">
+            <a:avLst/>
+          </a:prstGeom>
+          <a:noFill/>
+          <a:ln/>
+        </p:spPr>
+        <p:txBody>
+          <a:bodyPr wrap="square" lIns="0" tIns="0" rIns="0" bIns="0" rtlCol="0" anchor="ctr"/>
+          <a:lstStyle/>
+          <a:p>
+            <a:pPr indent="0" marL="0">
+              <a:buNone/>
+            </a:pPr>
+            <a:r>
+              <a:rPr lang="en-US" sz="1000" b="1" dirty="0">
+                <a:solidFill>
+                  <a:srgbClr val="F2A93B"/>
+                </a:solidFill>
+                <a:latin typeface="Calibri" pitchFamily="34" charset="0"/>
+                <a:ea typeface="Calibri" pitchFamily="34" charset="-122"/>
+                <a:cs typeface="Calibri" pitchFamily="34" charset="-120"/>
+              </a:rPr>
+              <a:t>導入設備</a:t>
+            </a:r>
+            <a:endParaRPr lang="en-US" sz="1000" dirty="0"/>
+          </a:p>
+        </p:txBody>
+      </p:sp>
+      <p:sp>
+        <p:nvSpPr>
+          <p:cNvPr id="18" name="Text 16"/>
+          <p:cNvSpPr/>
+          <p:nvPr/>
+        </p:nvSpPr>
+        <p:spPr>
+          <a:xfrm>
+            <a:off x="4709160" y="3794760"/>
+            <a:ext cx="2971800" cy="548640"/>
+          </a:xfrm>
+          <a:prstGeom prst="rect">
+            <a:avLst/>
+          </a:prstGeom>
+          <a:noFill/>
+          <a:ln/>
+        </p:spPr>
+        <p:txBody>
+          <a:bodyPr wrap="square" lIns="0" tIns="0" rIns="0" bIns="0" rtlCol="0" anchor="ctr"/>
+          <a:lstStyle/>
+          <a:p>
+            <a:pPr indent="0" marL="0">
+              <a:lnSpc>
+                <a:spcPts val="1500"/>
+              </a:lnSpc>
+              <a:buNone/>
+            </a:pPr>
+            <a:r>
+              <a:rPr lang="en-US" sz="1150" dirty="0">
+                <a:solidFill>
+                  <a:srgbClr val="24272E"/>
+                </a:solidFill>
+                <a:latin typeface="Calibri" pitchFamily="34" charset="0"/>
+                <a:ea typeface="Calibri" pitchFamily="34" charset="-122"/>
+                <a:cs typeface="Calibri" pitchFamily="34" charset="-120"/>
+              </a:rPr>
+              <a:t>省エネ設備の導入（補助金活用）</a:t>
+            </a:r>
+            <a:endParaRPr lang="en-US" sz="1150" dirty="0"/>
+          </a:p>
+        </p:txBody>
+      </p:sp>
+      <p:sp>
+        <p:nvSpPr>
+          <p:cNvPr id="19" name="Shape 17"/>
+          <p:cNvSpPr/>
+          <p:nvPr/>
+        </p:nvSpPr>
+        <p:spPr>
+          <a:xfrm>
+            <a:off x="4709160" y="4434840"/>
+            <a:ext cx="2971800" cy="0"/>
+          </a:xfrm>
+          <a:prstGeom prst="line">
+            <a:avLst/>
+          </a:prstGeom>
+          <a:noFill/>
+          <a:ln w="12700">
+            <a:solidFill>
+              <a:srgbClr val="CFE2D8"/>
+            </a:solidFill>
+            <a:prstDash val="solid"/>
+          </a:ln>
+        </p:spPr>
+      </p:sp>
+      <p:sp>
+        <p:nvSpPr>
+          <p:cNvPr id="20" name="Text 18"/>
+          <p:cNvSpPr/>
+          <p:nvPr/>
+        </p:nvSpPr>
+        <p:spPr>
+          <a:xfrm>
+            <a:off x="4709160" y="4572000"/>
+            <a:ext cx="2971800" cy="1051560"/>
+          </a:xfrm>
+          <a:prstGeom prst="rect">
+            <a:avLst/>
+          </a:prstGeom>
+          <a:noFill/>
+          <a:ln/>
+        </p:spPr>
+        <p:txBody>
+          <a:bodyPr wrap="square" lIns="0" tIns="0" rIns="0" bIns="0" rtlCol="0" anchor="ctr"/>
+          <a:lstStyle/>
+          <a:p>
+            <a:pPr indent="0" marL="0">
+              <a:lnSpc>
+                <a:spcPts val="1800"/>
+              </a:lnSpc>
+              <a:buNone/>
+            </a:pPr>
+            <a:r>
+              <a:rPr lang="en-US" sz="1250" b="1" i="1" dirty="0">
+                <a:solidFill>
+                  <a:srgbClr val="1B4D3E"/>
+                </a:solidFill>
+                <a:latin typeface="Calibri" pitchFamily="34" charset="0"/>
+                <a:ea typeface="Calibri" pitchFamily="34" charset="-122"/>
+                <a:cs typeface="Calibri" pitchFamily="34" charset="-120"/>
+              </a:rPr>
+              <a:t>「電気代が半分ほどに</a:t>
+            </a:r>
+            <a:endParaRPr lang="en-US" sz="1250" dirty="0"/>
+          </a:p>
+          <a:p>
+            <a:pPr indent="0" marL="0">
+              <a:lnSpc>
+                <a:spcPts val="1800"/>
+              </a:lnSpc>
+              <a:buNone/>
+            </a:pPr>
+            <a:r>
+              <a:rPr lang="en-US" sz="1250" b="1" i="1" dirty="0">
+                <a:solidFill>
+                  <a:srgbClr val="1B4D3E"/>
+                </a:solidFill>
+                <a:latin typeface="Calibri" pitchFamily="34" charset="0"/>
+                <a:ea typeface="Calibri" pitchFamily="34" charset="-122"/>
+                <a:cs typeface="Calibri" pitchFamily="34" charset="-120"/>
+              </a:rPr>
+              <a:t>なり、本当に</a:t>
+            </a:r>
+            <a:endParaRPr lang="en-US" sz="1250" dirty="0"/>
+          </a:p>
+          <a:p>
+            <a:pPr indent="0" marL="0">
+              <a:lnSpc>
+                <a:spcPts val="1800"/>
+              </a:lnSpc>
+              <a:buNone/>
+            </a:pPr>
+            <a:r>
+              <a:rPr lang="en-US" sz="1250" b="1" i="1" dirty="0">
+                <a:solidFill>
+                  <a:srgbClr val="1B4D3E"/>
+                </a:solidFill>
+                <a:latin typeface="Calibri" pitchFamily="34" charset="0"/>
+                <a:ea typeface="Calibri" pitchFamily="34" charset="-122"/>
+                <a:cs typeface="Calibri" pitchFamily="34" charset="-120"/>
+              </a:rPr>
+              <a:t>助かりました」</a:t>
+            </a:r>
+            <a:endParaRPr lang="en-US" sz="1250" dirty="0"/>
+          </a:p>
+        </p:txBody>
+      </p:sp>
+      <p:sp>
+        <p:nvSpPr>
+          <p:cNvPr id="21" name="Shape 19"/>
+          <p:cNvSpPr/>
+          <p:nvPr/>
+        </p:nvSpPr>
+        <p:spPr>
+          <a:xfrm>
+            <a:off x="8229600" y="1554480"/>
+            <a:ext cx="3520440" cy="4206240"/>
+          </a:xfrm>
+          <a:prstGeom prst="roundRect">
+            <a:avLst>
+              <a:gd name="adj" fmla="val 2078"/>
+            </a:avLst>
           </a:prstGeom>
           <a:solidFill>
-            <a:srgbClr val="F2A93B"/>
+            <a:srgbClr val="F2F7F4"/>
           </a:solidFill>
           <a:ln/>
         </p:spPr>
       </p:sp>
       <p:sp>
         <p:nvSpPr>
-          <p:cNvPr id="10" name="Shape 7"/>
-          <p:cNvSpPr/>
-          <p:nvPr/>
-        </p:nvSpPr>
-        <p:spPr>
-          <a:xfrm>
-            <a:off x="3067812" y="2057400"/>
-            <a:ext cx="1280160" cy="1280160"/>
-          </a:xfrm>
-          <a:prstGeom prst="ellipse">
-            <a:avLst/>
+          <p:cNvPr id="22" name="Shape 20"/>
+          <p:cNvSpPr/>
+          <p:nvPr/>
+        </p:nvSpPr>
+        <p:spPr>
+          <a:xfrm>
+            <a:off x="8503920" y="1828800"/>
+            <a:ext cx="2971800" cy="640080"/>
+          </a:xfrm>
+          <a:prstGeom prst="roundRect">
+            <a:avLst>
+              <a:gd name="adj" fmla="val 8571"/>
+            </a:avLst>
           </a:prstGeom>
           <a:solidFill>
             <a:srgbClr val="1B4D3E"/>
@@ -11176,157 +12247,113 @@
           <a:ln/>
         </p:spPr>
       </p:sp>
-      <p:pic>
-        <p:nvPicPr>
-          <p:cNvPr id="11" name="Image 1" descr="/tmp/claude-0/-home-user-DM-/98b145ee-d85d-5913-a881-95f99ca0c0f7/scratchpad/josei-pptx/icons/clipboard_FFFFFF.png">    </p:cNvPr>
-          <p:cNvPicPr>
-            <a:picLocks noChangeAspect="1"/>
-          </p:cNvPicPr>
-          <p:nvPr/>
-        </p:nvPicPr>
-        <p:blipFill>
-          <a:blip r:embed="rId2"/>
-          <a:stretch>
-            <a:fillRect/>
-          </a:stretch>
-        </p:blipFill>
-        <p:spPr>
-          <a:xfrm>
-            <a:off x="3375050" y="2364638"/>
-            <a:ext cx="665683" cy="665683"/>
-          </a:xfrm>
-          <a:prstGeom prst="rect">
-            <a:avLst/>
-          </a:prstGeom>
-        </p:spPr>
-      </p:pic>
-      <p:sp>
-        <p:nvSpPr>
-          <p:cNvPr id="12" name="Text 8"/>
-          <p:cNvSpPr/>
-          <p:nvPr/>
-        </p:nvSpPr>
-        <p:spPr>
-          <a:xfrm>
-            <a:off x="3113532" y="2103120"/>
-            <a:ext cx="457200" cy="365760"/>
-          </a:xfrm>
-          <a:prstGeom prst="rect">
-            <a:avLst/>
-          </a:prstGeom>
-          <a:noFill/>
-          <a:ln/>
-        </p:spPr>
-        <p:txBody>
-          <a:bodyPr wrap="square" lIns="0" tIns="0" rIns="0" bIns="0" rtlCol="0" anchor="ctr"/>
-          <a:lstStyle/>
-          <a:p>
-            <a:pPr indent="0" marL="0">
-              <a:buNone/>
-            </a:pPr>
-            <a:r>
-              <a:rPr lang="en-US" sz="1100" b="1" dirty="0">
-                <a:solidFill>
-                  <a:srgbClr val="AFCABC"/>
+      <p:sp>
+        <p:nvSpPr>
+          <p:cNvPr id="23" name="Text 21"/>
+          <p:cNvSpPr/>
+          <p:nvPr/>
+        </p:nvSpPr>
+        <p:spPr>
+          <a:xfrm>
+            <a:off x="8503920" y="1828800"/>
+            <a:ext cx="2971800" cy="640080"/>
+          </a:xfrm>
+          <a:prstGeom prst="rect">
+            <a:avLst/>
+          </a:prstGeom>
+          <a:noFill/>
+          <a:ln/>
+        </p:spPr>
+        <p:txBody>
+          <a:bodyPr wrap="square" lIns="0" tIns="0" rIns="0" bIns="0" rtlCol="0" anchor="ctr"/>
+          <a:lstStyle/>
+          <a:p>
+            <a:pPr algn="ctr" indent="0" marL="0">
+              <a:buNone/>
+            </a:pPr>
+            <a:r>
+              <a:rPr lang="en-US" sz="1250" b="1" dirty="0">
+                <a:solidFill>
+                  <a:srgbClr val="FFFFFF"/>
                 </a:solidFill>
                 <a:latin typeface="Calibri" pitchFamily="34" charset="0"/>
                 <a:ea typeface="Calibri" pitchFamily="34" charset="-122"/>
                 <a:cs typeface="Calibri" pitchFamily="34" charset="-120"/>
               </a:rPr>
-              <a:t>2</a:t>
-            </a:r>
-            <a:endParaRPr lang="en-US" sz="1100" dirty="0"/>
-          </a:p>
-        </p:txBody>
-      </p:sp>
-      <p:sp>
-        <p:nvSpPr>
-          <p:cNvPr id="13" name="Text 9"/>
-          <p:cNvSpPr/>
-          <p:nvPr/>
-        </p:nvSpPr>
-        <p:spPr>
-          <a:xfrm>
-            <a:off x="2770632" y="3566160"/>
-            <a:ext cx="1874520" cy="365760"/>
-          </a:xfrm>
-          <a:prstGeom prst="rect">
-            <a:avLst/>
-          </a:prstGeom>
-          <a:noFill/>
-          <a:ln/>
-        </p:spPr>
-        <p:txBody>
-          <a:bodyPr wrap="square" lIns="0" tIns="0" rIns="0" bIns="0" rtlCol="0" anchor="ctr"/>
-          <a:lstStyle/>
-          <a:p>
-            <a:pPr algn="ctr" indent="0" marL="0">
-              <a:buNone/>
-            </a:pPr>
-            <a:r>
-              <a:rPr lang="en-US" sz="1300" b="1" dirty="0">
-                <a:solidFill>
-                  <a:srgbClr val="1B4D3E"/>
-                </a:solidFill>
-                <a:latin typeface="Bookman Old Style" pitchFamily="34" charset="0"/>
-                <a:ea typeface="Bookman Old Style" pitchFamily="34" charset="-122"/>
-                <a:cs typeface="Bookman Old Style" pitchFamily="34" charset="-120"/>
-              </a:rPr>
-              <a:t>制度の整理</a:t>
-            </a:r>
-            <a:endParaRPr lang="en-US" sz="1300" dirty="0"/>
-          </a:p>
-        </p:txBody>
-      </p:sp>
-      <p:sp>
-        <p:nvSpPr>
-          <p:cNvPr id="14" name="Text 10"/>
-          <p:cNvSpPr/>
-          <p:nvPr/>
-        </p:nvSpPr>
-        <p:spPr>
-          <a:xfrm>
-            <a:off x="2633472" y="3977640"/>
-            <a:ext cx="2148840" cy="1005840"/>
-          </a:xfrm>
-          <a:prstGeom prst="rect">
-            <a:avLst/>
-          </a:prstGeom>
-          <a:noFill/>
-          <a:ln/>
-        </p:spPr>
-        <p:txBody>
-          <a:bodyPr wrap="square" lIns="0" tIns="0" rIns="0" bIns="0" rtlCol="0" anchor="ctr"/>
-          <a:lstStyle/>
-          <a:p>
-            <a:pPr algn="ctr" indent="0" marL="0">
-              <a:lnSpc>
-                <a:spcPts val="1400"/>
-              </a:lnSpc>
-              <a:buNone/>
-            </a:pPr>
-            <a:r>
-              <a:rPr lang="en-US" sz="1050" dirty="0">
-                <a:solidFill>
-                  <a:srgbClr val="24272E"/>
+              <a:t>東京都・飲食店</a:t>
+            </a:r>
+            <a:endParaRPr lang="en-US" sz="1250" dirty="0"/>
+          </a:p>
+        </p:txBody>
+      </p:sp>
+      <p:sp>
+        <p:nvSpPr>
+          <p:cNvPr id="24" name="Text 22"/>
+          <p:cNvSpPr/>
+          <p:nvPr/>
+        </p:nvSpPr>
+        <p:spPr>
+          <a:xfrm>
+            <a:off x="8503920" y="2651760"/>
+            <a:ext cx="2971800" cy="274320"/>
+          </a:xfrm>
+          <a:prstGeom prst="rect">
+            <a:avLst/>
+          </a:prstGeom>
+          <a:noFill/>
+          <a:ln/>
+        </p:spPr>
+        <p:txBody>
+          <a:bodyPr wrap="square" lIns="0" tIns="0" rIns="0" bIns="0" rtlCol="0" anchor="ctr"/>
+          <a:lstStyle/>
+          <a:p>
+            <a:pPr indent="0" marL="0">
+              <a:buNone/>
+            </a:pPr>
+            <a:r>
+              <a:rPr lang="en-US" sz="1000" b="1" dirty="0">
+                <a:solidFill>
+                  <a:srgbClr val="F2A93B"/>
                 </a:solidFill>
                 <a:latin typeface="Calibri" pitchFamily="34" charset="0"/>
                 <a:ea typeface="Calibri" pitchFamily="34" charset="-122"/>
                 <a:cs typeface="Calibri" pitchFamily="34" charset="-120"/>
               </a:rPr>
-              <a:t>地域ごとの公募要領をもとに</a:t>
-            </a:r>
-            <a:endParaRPr lang="en-US" sz="1050" dirty="0"/>
-          </a:p>
-          <a:p>
-            <a:pPr algn="ctr" indent="0" marL="0">
+              <a:t>課題</a:t>
+            </a:r>
+            <a:endParaRPr lang="en-US" sz="1000" dirty="0"/>
+          </a:p>
+        </p:txBody>
+      </p:sp>
+      <p:sp>
+        <p:nvSpPr>
+          <p:cNvPr id="25" name="Text 23"/>
+          <p:cNvSpPr/>
+          <p:nvPr/>
+        </p:nvSpPr>
+        <p:spPr>
+          <a:xfrm>
+            <a:off x="8503920" y="2926080"/>
+            <a:ext cx="2971800" cy="548640"/>
+          </a:xfrm>
+          <a:prstGeom prst="rect">
+            <a:avLst/>
+          </a:prstGeom>
+          <a:noFill/>
+          <a:ln/>
+        </p:spPr>
+        <p:txBody>
+          <a:bodyPr wrap="square" lIns="0" tIns="0" rIns="0" bIns="0" rtlCol="0" anchor="ctr"/>
+          <a:lstStyle/>
+          <a:p>
+            <a:pPr indent="0" marL="0">
               <a:lnSpc>
-                <a:spcPts val="1400"/>
+                <a:spcPts val="1500"/>
               </a:lnSpc>
               <a:buNone/>
             </a:pPr>
             <a:r>
-              <a:rPr lang="en-US" sz="1050" dirty="0">
+              <a:rPr lang="en-US" sz="1150" dirty="0">
                 <a:solidFill>
                   <a:srgbClr val="24272E"/>
                 </a:solidFill>
@@ -11334,86 +12361,22 @@
                 <a:ea typeface="Calibri" pitchFamily="34" charset="-122"/>
                 <a:cs typeface="Calibri" pitchFamily="34" charset="-120"/>
               </a:rPr>
-              <a:t>使える制度を整理してご案内</a:t>
-            </a:r>
-            <a:endParaRPr lang="en-US" sz="1050" dirty="0"/>
-          </a:p>
-        </p:txBody>
-      </p:sp>
-      <p:sp>
-        <p:nvSpPr>
-          <p:cNvPr id="15" name="Shape 11"/>
-          <p:cNvSpPr/>
-          <p:nvPr/>
-        </p:nvSpPr>
-        <p:spPr>
-          <a:xfrm rot="5400000">
-            <a:off x="4672584" y="2596896"/>
-            <a:ext cx="201168" cy="201168"/>
-          </a:xfrm>
-          <a:prstGeom prst="triangle">
-            <a:avLst/>
-          </a:prstGeom>
-          <a:solidFill>
-            <a:srgbClr val="F2A93B"/>
-          </a:solidFill>
-          <a:ln/>
-        </p:spPr>
-      </p:sp>
-      <p:sp>
-        <p:nvSpPr>
-          <p:cNvPr id="16" name="Shape 12"/>
-          <p:cNvSpPr/>
-          <p:nvPr/>
-        </p:nvSpPr>
-        <p:spPr>
-          <a:xfrm>
-            <a:off x="5198364" y="2057400"/>
-            <a:ext cx="1280160" cy="1280160"/>
-          </a:xfrm>
-          <a:prstGeom prst="ellipse">
-            <a:avLst/>
-          </a:prstGeom>
-          <a:solidFill>
-            <a:srgbClr val="1B4D3E"/>
-          </a:solidFill>
-          <a:ln/>
-        </p:spPr>
-      </p:sp>
-      <p:pic>
-        <p:nvPicPr>
-          <p:cNvPr id="17" name="Image 2" descr="/tmp/claude-0/-home-user-DM-/98b145ee-d85d-5913-a881-95f99ca0c0f7/scratchpad/josei-pptx/icons/handshake_FFFFFF.png">    </p:cNvPr>
-          <p:cNvPicPr>
-            <a:picLocks noChangeAspect="1"/>
-          </p:cNvPicPr>
-          <p:nvPr/>
-        </p:nvPicPr>
-        <p:blipFill>
-          <a:blip r:embed="rId3"/>
-          <a:stretch>
-            <a:fillRect/>
-          </a:stretch>
-        </p:blipFill>
-        <p:spPr>
-          <a:xfrm>
-            <a:off x="5505602" y="2364638"/>
-            <a:ext cx="665683" cy="665683"/>
-          </a:xfrm>
-          <a:prstGeom prst="rect">
-            <a:avLst/>
-          </a:prstGeom>
-        </p:spPr>
-      </p:pic>
-      <p:sp>
-        <p:nvSpPr>
-          <p:cNvPr id="18" name="Text 13"/>
-          <p:cNvSpPr/>
-          <p:nvPr/>
-        </p:nvSpPr>
-        <p:spPr>
-          <a:xfrm>
-            <a:off x="5244084" y="2103120"/>
-            <a:ext cx="457200" cy="365760"/>
+              <a:t>太陽光導入の初期費用が不安</a:t>
+            </a:r>
+            <a:endParaRPr lang="en-US" sz="1150" dirty="0"/>
+          </a:p>
+        </p:txBody>
+      </p:sp>
+      <p:sp>
+        <p:nvSpPr>
+          <p:cNvPr id="26" name="Text 24"/>
+          <p:cNvSpPr/>
+          <p:nvPr/>
+        </p:nvSpPr>
+        <p:spPr>
+          <a:xfrm>
+            <a:off x="8503920" y="3520440"/>
+            <a:ext cx="2971800" cy="274320"/>
           </a:xfrm>
           <a:prstGeom prst="rect">
             <a:avLst/>
@@ -11429,88 +12392,49 @@
               <a:buNone/>
             </a:pPr>
             <a:r>
-              <a:rPr lang="en-US" sz="1100" b="1" dirty="0">
-                <a:solidFill>
-                  <a:srgbClr val="AFCABC"/>
+              <a:rPr lang="en-US" sz="1000" b="1" dirty="0">
+                <a:solidFill>
+                  <a:srgbClr val="F2A93B"/>
                 </a:solidFill>
                 <a:latin typeface="Calibri" pitchFamily="34" charset="0"/>
                 <a:ea typeface="Calibri" pitchFamily="34" charset="-122"/>
                 <a:cs typeface="Calibri" pitchFamily="34" charset="-120"/>
               </a:rPr>
-              <a:t>3</a:t>
-            </a:r>
-            <a:endParaRPr lang="en-US" sz="1100" dirty="0"/>
-          </a:p>
-        </p:txBody>
-      </p:sp>
-      <p:sp>
-        <p:nvSpPr>
-          <p:cNvPr id="19" name="Text 14"/>
-          <p:cNvSpPr/>
-          <p:nvPr/>
-        </p:nvSpPr>
-        <p:spPr>
-          <a:xfrm>
-            <a:off x="4901184" y="3566160"/>
-            <a:ext cx="1874520" cy="365760"/>
-          </a:xfrm>
-          <a:prstGeom prst="rect">
-            <a:avLst/>
-          </a:prstGeom>
-          <a:noFill/>
-          <a:ln/>
-        </p:spPr>
-        <p:txBody>
-          <a:bodyPr wrap="square" lIns="0" tIns="0" rIns="0" bIns="0" rtlCol="0" anchor="ctr"/>
-          <a:lstStyle/>
-          <a:p>
-            <a:pPr algn="ctr" indent="0" marL="0">
-              <a:buNone/>
-            </a:pPr>
-            <a:r>
-              <a:rPr lang="en-US" sz="1300" b="1" dirty="0">
-                <a:solidFill>
-                  <a:srgbClr val="1B4D3E"/>
-                </a:solidFill>
-                <a:latin typeface="Bookman Old Style" pitchFamily="34" charset="0"/>
-                <a:ea typeface="Bookman Old Style" pitchFamily="34" charset="-122"/>
-                <a:cs typeface="Bookman Old Style" pitchFamily="34" charset="-120"/>
-              </a:rPr>
-              <a:t>施工会社をご紹介</a:t>
-            </a:r>
-            <a:endParaRPr lang="en-US" sz="1300" dirty="0"/>
-          </a:p>
-        </p:txBody>
-      </p:sp>
-      <p:sp>
-        <p:nvSpPr>
-          <p:cNvPr id="20" name="Text 15"/>
-          <p:cNvSpPr/>
-          <p:nvPr/>
-        </p:nvSpPr>
-        <p:spPr>
-          <a:xfrm>
-            <a:off x="4764024" y="3977640"/>
-            <a:ext cx="2148840" cy="1005840"/>
-          </a:xfrm>
-          <a:prstGeom prst="rect">
-            <a:avLst/>
-          </a:prstGeom>
-          <a:noFill/>
-          <a:ln/>
-        </p:spPr>
-        <p:txBody>
-          <a:bodyPr wrap="square" lIns="0" tIns="0" rIns="0" bIns="0" rtlCol="0" anchor="ctr"/>
-          <a:lstStyle/>
-          <a:p>
-            <a:pPr algn="ctr" indent="0" marL="0">
+              <a:t>導入設備</a:t>
+            </a:r>
+            <a:endParaRPr lang="en-US" sz="1000" dirty="0"/>
+          </a:p>
+        </p:txBody>
+      </p:sp>
+      <p:sp>
+        <p:nvSpPr>
+          <p:cNvPr id="27" name="Text 25"/>
+          <p:cNvSpPr/>
+          <p:nvPr/>
+        </p:nvSpPr>
+        <p:spPr>
+          <a:xfrm>
+            <a:off x="8503920" y="3794760"/>
+            <a:ext cx="2971800" cy="548640"/>
+          </a:xfrm>
+          <a:prstGeom prst="rect">
+            <a:avLst/>
+          </a:prstGeom>
+          <a:noFill/>
+          <a:ln/>
+        </p:spPr>
+        <p:txBody>
+          <a:bodyPr wrap="square" lIns="0" tIns="0" rIns="0" bIns="0" rtlCol="0" anchor="ctr"/>
+          <a:lstStyle/>
+          <a:p>
+            <a:pPr indent="0" marL="0">
               <a:lnSpc>
-                <a:spcPts val="1400"/>
+                <a:spcPts val="1500"/>
               </a:lnSpc>
               <a:buNone/>
             </a:pPr>
             <a:r>
-              <a:rPr lang="en-US" sz="1050" dirty="0">
+              <a:rPr lang="en-US" sz="1150" dirty="0">
                 <a:solidFill>
                   <a:srgbClr val="24272E"/>
                 </a:solidFill>
@@ -11518,534 +12442,150 @@
                 <a:ea typeface="Calibri" pitchFamily="34" charset="-122"/>
                 <a:cs typeface="Calibri" pitchFamily="34" charset="-120"/>
               </a:rPr>
-              <a:t>実績のある地域の</a:t>
-            </a:r>
-            <a:endParaRPr lang="en-US" sz="1050" dirty="0"/>
-          </a:p>
-          <a:p>
-            <a:pPr algn="ctr" indent="0" marL="0">
+              <a:t>太陽光発電（クールネット東京の補助金）</a:t>
+            </a:r>
+            <a:endParaRPr lang="en-US" sz="1150" dirty="0"/>
+          </a:p>
+        </p:txBody>
+      </p:sp>
+      <p:sp>
+        <p:nvSpPr>
+          <p:cNvPr id="28" name="Shape 26"/>
+          <p:cNvSpPr/>
+          <p:nvPr/>
+        </p:nvSpPr>
+        <p:spPr>
+          <a:xfrm>
+            <a:off x="8503920" y="4434840"/>
+            <a:ext cx="2971800" cy="0"/>
+          </a:xfrm>
+          <a:prstGeom prst="line">
+            <a:avLst/>
+          </a:prstGeom>
+          <a:noFill/>
+          <a:ln w="12700">
+            <a:solidFill>
+              <a:srgbClr val="CFE2D8"/>
+            </a:solidFill>
+            <a:prstDash val="solid"/>
+          </a:ln>
+        </p:spPr>
+      </p:sp>
+      <p:sp>
+        <p:nvSpPr>
+          <p:cNvPr id="29" name="Text 27"/>
+          <p:cNvSpPr/>
+          <p:nvPr/>
+        </p:nvSpPr>
+        <p:spPr>
+          <a:xfrm>
+            <a:off x="8503920" y="4572000"/>
+            <a:ext cx="2971800" cy="1051560"/>
+          </a:xfrm>
+          <a:prstGeom prst="rect">
+            <a:avLst/>
+          </a:prstGeom>
+          <a:noFill/>
+          <a:ln/>
+        </p:spPr>
+        <p:txBody>
+          <a:bodyPr wrap="square" lIns="0" tIns="0" rIns="0" bIns="0" rtlCol="0" anchor="ctr"/>
+          <a:lstStyle/>
+          <a:p>
+            <a:pPr indent="0" marL="0">
               <a:lnSpc>
-                <a:spcPts val="1400"/>
+                <a:spcPts val="1800"/>
               </a:lnSpc>
               <a:buNone/>
             </a:pPr>
             <a:r>
-              <a:rPr lang="en-US" sz="1050" dirty="0">
-                <a:solidFill>
-                  <a:srgbClr val="24272E"/>
+              <a:rPr lang="en-US" sz="1250" b="1" i="1" dirty="0">
+                <a:solidFill>
+                  <a:srgbClr val="1B4D3E"/>
                 </a:solidFill>
                 <a:latin typeface="Calibri" pitchFamily="34" charset="0"/>
                 <a:ea typeface="Calibri" pitchFamily="34" charset="-122"/>
                 <a:cs typeface="Calibri" pitchFamily="34" charset="-120"/>
               </a:rPr>
-              <a:t>担当施工会社をお繋ぎ</a:t>
-            </a:r>
-            <a:endParaRPr lang="en-US" sz="1050" dirty="0"/>
-          </a:p>
-        </p:txBody>
-      </p:sp>
-      <p:sp>
-        <p:nvSpPr>
-          <p:cNvPr id="21" name="Shape 16"/>
-          <p:cNvSpPr/>
-          <p:nvPr/>
-        </p:nvSpPr>
-        <p:spPr>
-          <a:xfrm rot="5400000">
-            <a:off x="6803136" y="2596896"/>
-            <a:ext cx="201168" cy="201168"/>
-          </a:xfrm>
-          <a:prstGeom prst="triangle">
-            <a:avLst/>
-          </a:prstGeom>
-          <a:solidFill>
-            <a:srgbClr val="F2A93B"/>
-          </a:solidFill>
-          <a:ln/>
-        </p:spPr>
-      </p:sp>
-      <p:sp>
-        <p:nvSpPr>
-          <p:cNvPr id="22" name="Shape 17"/>
-          <p:cNvSpPr/>
-          <p:nvPr/>
-        </p:nvSpPr>
-        <p:spPr>
-          <a:xfrm>
-            <a:off x="7328916" y="2057400"/>
-            <a:ext cx="1280160" cy="1280160"/>
-          </a:xfrm>
-          <a:prstGeom prst="ellipse">
-            <a:avLst/>
-          </a:prstGeom>
-          <a:solidFill>
-            <a:srgbClr val="1B4D3E"/>
-          </a:solidFill>
-          <a:ln/>
-        </p:spPr>
-      </p:sp>
-      <p:pic>
-        <p:nvPicPr>
-          <p:cNvPr id="23" name="Image 3" descr="/tmp/claude-0/-home-user-DM-/98b145ee-d85d-5913-a881-95f99ca0c0f7/scratchpad/josei-pptx/icons/filesign_FFFFFF.png">    </p:cNvPr>
-          <p:cNvPicPr>
-            <a:picLocks noChangeAspect="1"/>
-          </p:cNvPicPr>
-          <p:nvPr/>
-        </p:nvPicPr>
-        <p:blipFill>
-          <a:blip r:embed="rId4"/>
-          <a:stretch>
-            <a:fillRect/>
-          </a:stretch>
-        </p:blipFill>
-        <p:spPr>
-          <a:xfrm>
-            <a:off x="7636154" y="2364638"/>
-            <a:ext cx="665683" cy="665683"/>
-          </a:xfrm>
-          <a:prstGeom prst="rect">
-            <a:avLst/>
-          </a:prstGeom>
-        </p:spPr>
-      </p:pic>
-      <p:sp>
-        <p:nvSpPr>
-          <p:cNvPr id="24" name="Text 18"/>
-          <p:cNvSpPr/>
-          <p:nvPr/>
-        </p:nvSpPr>
-        <p:spPr>
-          <a:xfrm>
-            <a:off x="7374636" y="2103120"/>
-            <a:ext cx="457200" cy="365760"/>
-          </a:xfrm>
-          <a:prstGeom prst="rect">
-            <a:avLst/>
-          </a:prstGeom>
-          <a:noFill/>
-          <a:ln/>
-        </p:spPr>
-        <p:txBody>
-          <a:bodyPr wrap="square" lIns="0" tIns="0" rIns="0" bIns="0" rtlCol="0" anchor="ctr"/>
-          <a:lstStyle/>
+              <a:t>「補助金を活用して</a:t>
+            </a:r>
+            <a:endParaRPr lang="en-US" sz="1250" dirty="0"/>
+          </a:p>
           <a:p>
             <a:pPr indent="0" marL="0">
-              <a:buNone/>
-            </a:pPr>
-            <a:r>
-              <a:rPr lang="en-US" sz="1100" b="1" dirty="0">
-                <a:solidFill>
-                  <a:srgbClr val="AFCABC"/>
+              <a:lnSpc>
+                <a:spcPts val="1800"/>
+              </a:lnSpc>
+              <a:buNone/>
+            </a:pPr>
+            <a:r>
+              <a:rPr lang="en-US" sz="1250" b="1" i="1" dirty="0">
+                <a:solidFill>
+                  <a:srgbClr val="1B4D3E"/>
                 </a:solidFill>
                 <a:latin typeface="Calibri" pitchFamily="34" charset="0"/>
                 <a:ea typeface="Calibri" pitchFamily="34" charset="-122"/>
                 <a:cs typeface="Calibri" pitchFamily="34" charset="-120"/>
               </a:rPr>
-              <a:t>4</a:t>
-            </a:r>
-            <a:endParaRPr lang="en-US" sz="1100" dirty="0"/>
-          </a:p>
-        </p:txBody>
-      </p:sp>
-      <p:sp>
-        <p:nvSpPr>
-          <p:cNvPr id="25" name="Text 19"/>
-          <p:cNvSpPr/>
-          <p:nvPr/>
-        </p:nvSpPr>
-        <p:spPr>
-          <a:xfrm>
-            <a:off x="7031736" y="3566160"/>
-            <a:ext cx="1874520" cy="365760"/>
-          </a:xfrm>
-          <a:prstGeom prst="rect">
-            <a:avLst/>
-          </a:prstGeom>
-          <a:noFill/>
-          <a:ln/>
-        </p:spPr>
-        <p:txBody>
-          <a:bodyPr wrap="square" lIns="0" tIns="0" rIns="0" bIns="0" rtlCol="0" anchor="ctr"/>
-          <a:lstStyle/>
-          <a:p>
-            <a:pPr algn="ctr" indent="0" marL="0">
-              <a:buNone/>
-            </a:pPr>
-            <a:r>
-              <a:rPr lang="en-US" sz="1300" b="1" dirty="0">
+              <a:t>実質ほぼ自己負担なく</a:t>
+            </a:r>
+            <a:endParaRPr lang="en-US" sz="1250" dirty="0"/>
+          </a:p>
+          <a:p>
+            <a:pPr indent="0" marL="0">
+              <a:lnSpc>
+                <a:spcPts val="1800"/>
+              </a:lnSpc>
+              <a:buNone/>
+            </a:pPr>
+            <a:r>
+              <a:rPr lang="en-US" sz="1250" b="1" i="1" dirty="0">
                 <a:solidFill>
                   <a:srgbClr val="1B4D3E"/>
-                </a:solidFill>
-                <a:latin typeface="Bookman Old Style" pitchFamily="34" charset="0"/>
-                <a:ea typeface="Bookman Old Style" pitchFamily="34" charset="-122"/>
-                <a:cs typeface="Bookman Old Style" pitchFamily="34" charset="-120"/>
-              </a:rPr>
-              <a:t>導入・申請サポート</a:t>
-            </a:r>
-            <a:endParaRPr lang="en-US" sz="1300" dirty="0"/>
-          </a:p>
-        </p:txBody>
-      </p:sp>
-      <p:sp>
-        <p:nvSpPr>
-          <p:cNvPr id="26" name="Text 20"/>
-          <p:cNvSpPr/>
-          <p:nvPr/>
-        </p:nvSpPr>
-        <p:spPr>
-          <a:xfrm>
-            <a:off x="6894576" y="3977640"/>
-            <a:ext cx="2148840" cy="1005840"/>
-          </a:xfrm>
-          <a:prstGeom prst="rect">
-            <a:avLst/>
-          </a:prstGeom>
-          <a:noFill/>
-          <a:ln/>
-        </p:spPr>
-        <p:txBody>
-          <a:bodyPr wrap="square" lIns="0" tIns="0" rIns="0" bIns="0" rtlCol="0" anchor="ctr"/>
-          <a:lstStyle/>
-          <a:p>
-            <a:pPr algn="ctr" indent="0" marL="0">
-              <a:lnSpc>
-                <a:spcPts val="1400"/>
-              </a:lnSpc>
-              <a:buNone/>
-            </a:pPr>
-            <a:r>
-              <a:rPr lang="en-US" sz="1050" dirty="0">
-                <a:solidFill>
-                  <a:srgbClr val="24272E"/>
                 </a:solidFill>
                 <a:latin typeface="Calibri" pitchFamily="34" charset="0"/>
                 <a:ea typeface="Calibri" pitchFamily="34" charset="-122"/>
                 <a:cs typeface="Calibri" pitchFamily="34" charset="-120"/>
               </a:rPr>
-              <a:t>補助金申請から設備導入まで</a:t>
-            </a:r>
-            <a:endParaRPr lang="en-US" sz="1050" dirty="0"/>
-          </a:p>
-          <a:p>
-            <a:pPr algn="ctr" indent="0" marL="0">
-              <a:lnSpc>
-                <a:spcPts val="1400"/>
-              </a:lnSpc>
-              <a:buNone/>
-            </a:pPr>
-            <a:r>
-              <a:rPr lang="en-US" sz="1050" dirty="0">
-                <a:solidFill>
-                  <a:srgbClr val="24272E"/>
+              <a:t>導入できました」</a:t>
+            </a:r>
+            <a:endParaRPr lang="en-US" sz="1250" dirty="0"/>
+          </a:p>
+        </p:txBody>
+      </p:sp>
+      <p:sp>
+        <p:nvSpPr>
+          <p:cNvPr id="30" name="Text 28"/>
+          <p:cNvSpPr/>
+          <p:nvPr/>
+        </p:nvSpPr>
+        <p:spPr>
+          <a:xfrm>
+            <a:off x="457200" y="6537960"/>
+            <a:ext cx="7315200" cy="274320"/>
+          </a:xfrm>
+          <a:prstGeom prst="rect">
+            <a:avLst/>
+          </a:prstGeom>
+          <a:noFill/>
+          <a:ln/>
+        </p:spPr>
+        <p:txBody>
+          <a:bodyPr wrap="square" lIns="0" tIns="0" rIns="0" bIns="0" rtlCol="0" anchor="ctr"/>
+          <a:lstStyle/>
+          <a:p>
+            <a:pPr indent="0" marL="0">
+              <a:buNone/>
+            </a:pPr>
+            <a:r>
+              <a:rPr lang="en-US" sz="900" dirty="0">
+                <a:solidFill>
+                  <a:srgbClr val="6B7280"/>
                 </a:solidFill>
                 <a:latin typeface="Calibri" pitchFamily="34" charset="0"/>
                 <a:ea typeface="Calibri" pitchFamily="34" charset="-122"/>
                 <a:cs typeface="Calibri" pitchFamily="34" charset="-120"/>
               </a:rPr>
-              <a:t>伴走支援</a:t>
-            </a:r>
-            <a:endParaRPr lang="en-US" sz="1050" dirty="0"/>
-          </a:p>
-        </p:txBody>
-      </p:sp>
-      <p:sp>
-        <p:nvSpPr>
-          <p:cNvPr id="27" name="Shape 21"/>
-          <p:cNvSpPr/>
-          <p:nvPr/>
-        </p:nvSpPr>
-        <p:spPr>
-          <a:xfrm rot="5400000">
-            <a:off x="8933688" y="2596896"/>
-            <a:ext cx="201168" cy="201168"/>
-          </a:xfrm>
-          <a:prstGeom prst="triangle">
-            <a:avLst/>
-          </a:prstGeom>
-          <a:solidFill>
-            <a:srgbClr val="F2A93B"/>
-          </a:solidFill>
-          <a:ln/>
-        </p:spPr>
-      </p:sp>
-      <p:sp>
-        <p:nvSpPr>
-          <p:cNvPr id="28" name="Shape 22"/>
-          <p:cNvSpPr/>
-          <p:nvPr/>
-        </p:nvSpPr>
-        <p:spPr>
-          <a:xfrm>
-            <a:off x="9459468" y="2057400"/>
-            <a:ext cx="1280160" cy="1280160"/>
-          </a:xfrm>
-          <a:prstGeom prst="ellipse">
-            <a:avLst/>
-          </a:prstGeom>
-          <a:solidFill>
-            <a:srgbClr val="F2A93B"/>
-          </a:solidFill>
-          <a:ln/>
-        </p:spPr>
-      </p:sp>
-      <p:pic>
-        <p:nvPicPr>
-          <p:cNvPr id="29" name="Image 4" descr="/tmp/claude-0/-home-user-DM-/98b145ee-d85d-5913-a881-95f99ca0c0f7/scratchpad/josei-pptx/icons/check_FFFFFF.png">    </p:cNvPr>
-          <p:cNvPicPr>
-            <a:picLocks noChangeAspect="1"/>
-          </p:cNvPicPr>
-          <p:nvPr/>
-        </p:nvPicPr>
-        <p:blipFill>
-          <a:blip r:embed="rId5"/>
-          <a:stretch>
-            <a:fillRect/>
-          </a:stretch>
-        </p:blipFill>
-        <p:spPr>
-          <a:xfrm>
-            <a:off x="9766706" y="2364638"/>
-            <a:ext cx="665683" cy="665683"/>
-          </a:xfrm>
-          <a:prstGeom prst="rect">
-            <a:avLst/>
-          </a:prstGeom>
-        </p:spPr>
-      </p:pic>
-      <p:sp>
-        <p:nvSpPr>
-          <p:cNvPr id="30" name="Text 23"/>
-          <p:cNvSpPr/>
-          <p:nvPr/>
-        </p:nvSpPr>
-        <p:spPr>
-          <a:xfrm>
-            <a:off x="9505188" y="2103120"/>
-            <a:ext cx="457200" cy="365760"/>
-          </a:xfrm>
-          <a:prstGeom prst="rect">
-            <a:avLst/>
-          </a:prstGeom>
-          <a:noFill/>
-          <a:ln/>
-        </p:spPr>
-        <p:txBody>
-          <a:bodyPr wrap="square" lIns="0" tIns="0" rIns="0" bIns="0" rtlCol="0" anchor="ctr"/>
-          <a:lstStyle/>
-          <a:p>
-            <a:pPr indent="0" marL="0">
-              <a:buNone/>
-            </a:pPr>
-            <a:r>
-              <a:rPr lang="en-US" sz="1100" b="1" dirty="0">
-                <a:solidFill>
-                  <a:srgbClr val="AFCABC"/>
-                </a:solidFill>
-                <a:latin typeface="Calibri" pitchFamily="34" charset="0"/>
-                <a:ea typeface="Calibri" pitchFamily="34" charset="-122"/>
-                <a:cs typeface="Calibri" pitchFamily="34" charset="-120"/>
-              </a:rPr>
-              <a:t>5</a:t>
-            </a:r>
-            <a:endParaRPr lang="en-US" sz="1100" dirty="0"/>
-          </a:p>
-        </p:txBody>
-      </p:sp>
-      <p:sp>
-        <p:nvSpPr>
-          <p:cNvPr id="31" name="Text 24"/>
-          <p:cNvSpPr/>
-          <p:nvPr/>
-        </p:nvSpPr>
-        <p:spPr>
-          <a:xfrm>
-            <a:off x="9162288" y="3566160"/>
-            <a:ext cx="1874520" cy="365760"/>
-          </a:xfrm>
-          <a:prstGeom prst="rect">
-            <a:avLst/>
-          </a:prstGeom>
-          <a:noFill/>
-          <a:ln/>
-        </p:spPr>
-        <p:txBody>
-          <a:bodyPr wrap="square" lIns="0" tIns="0" rIns="0" bIns="0" rtlCol="0" anchor="ctr"/>
-          <a:lstStyle/>
-          <a:p>
-            <a:pPr algn="ctr" indent="0" marL="0">
-              <a:buNone/>
-            </a:pPr>
-            <a:r>
-              <a:rPr lang="en-US" sz="1300" b="1" dirty="0">
-                <a:solidFill>
-                  <a:srgbClr val="1B4D3E"/>
-                </a:solidFill>
-                <a:latin typeface="Bookman Old Style" pitchFamily="34" charset="0"/>
-                <a:ea typeface="Bookman Old Style" pitchFamily="34" charset="-122"/>
-                <a:cs typeface="Bookman Old Style" pitchFamily="34" charset="-120"/>
-              </a:rPr>
-              <a:t>導入後フォロー</a:t>
-            </a:r>
-            <a:endParaRPr lang="en-US" sz="1300" dirty="0"/>
-          </a:p>
-        </p:txBody>
-      </p:sp>
-      <p:sp>
-        <p:nvSpPr>
-          <p:cNvPr id="32" name="Text 25"/>
-          <p:cNvSpPr/>
-          <p:nvPr/>
-        </p:nvSpPr>
-        <p:spPr>
-          <a:xfrm>
-            <a:off x="9025128" y="3977640"/>
-            <a:ext cx="2148840" cy="1005840"/>
-          </a:xfrm>
-          <a:prstGeom prst="rect">
-            <a:avLst/>
-          </a:prstGeom>
-          <a:noFill/>
-          <a:ln/>
-        </p:spPr>
-        <p:txBody>
-          <a:bodyPr wrap="square" lIns="0" tIns="0" rIns="0" bIns="0" rtlCol="0" anchor="ctr"/>
-          <a:lstStyle/>
-          <a:p>
-            <a:pPr algn="ctr" indent="0" marL="0">
-              <a:lnSpc>
-                <a:spcPts val="1400"/>
-              </a:lnSpc>
-              <a:buNone/>
-            </a:pPr>
-            <a:r>
-              <a:rPr lang="en-US" sz="1050" dirty="0">
-                <a:solidFill>
-                  <a:srgbClr val="24272E"/>
-                </a:solidFill>
-                <a:latin typeface="Calibri" pitchFamily="34" charset="0"/>
-                <a:ea typeface="Calibri" pitchFamily="34" charset="-122"/>
-                <a:cs typeface="Calibri" pitchFamily="34" charset="-120"/>
-              </a:rPr>
-              <a:t>交付後の実績報告等を</a:t>
-            </a:r>
-            <a:endParaRPr lang="en-US" sz="1050" dirty="0"/>
-          </a:p>
-          <a:p>
-            <a:pPr algn="ctr" indent="0" marL="0">
-              <a:lnSpc>
-                <a:spcPts val="1400"/>
-              </a:lnSpc>
-              <a:buNone/>
-            </a:pPr>
-            <a:r>
-              <a:rPr lang="en-US" sz="1050" dirty="0">
-                <a:solidFill>
-                  <a:srgbClr val="24272E"/>
-                </a:solidFill>
-                <a:latin typeface="Calibri" pitchFamily="34" charset="0"/>
-                <a:ea typeface="Calibri" pitchFamily="34" charset="-122"/>
-                <a:cs typeface="Calibri" pitchFamily="34" charset="-120"/>
-              </a:rPr>
-              <a:t>サポート</a:t>
-            </a:r>
-            <a:endParaRPr lang="en-US" sz="1050" dirty="0"/>
-          </a:p>
-        </p:txBody>
-      </p:sp>
-      <p:sp>
-        <p:nvSpPr>
-          <p:cNvPr id="33" name="Shape 26"/>
-          <p:cNvSpPr/>
-          <p:nvPr/>
-        </p:nvSpPr>
-        <p:spPr>
-          <a:xfrm>
-            <a:off x="640080" y="5212080"/>
-            <a:ext cx="10881360" cy="914400"/>
-          </a:xfrm>
-          <a:prstGeom prst="roundRect">
-            <a:avLst>
-              <a:gd name="adj" fmla="val 8000"/>
-            </a:avLst>
-          </a:prstGeom>
-          <a:solidFill>
-            <a:srgbClr val="F2F7F4"/>
-          </a:solidFill>
-          <a:ln/>
-        </p:spPr>
-      </p:sp>
-      <p:sp>
-        <p:nvSpPr>
-          <p:cNvPr id="34" name="Text 27"/>
-          <p:cNvSpPr/>
-          <p:nvPr/>
-        </p:nvSpPr>
-        <p:spPr>
-          <a:xfrm>
-            <a:off x="914400" y="5212080"/>
-            <a:ext cx="10332720" cy="914400"/>
-          </a:xfrm>
-          <a:prstGeom prst="rect">
-            <a:avLst/>
-          </a:prstGeom>
-          <a:noFill/>
-          <a:ln/>
-        </p:spPr>
-        <p:txBody>
-          <a:bodyPr wrap="square" lIns="0" tIns="0" rIns="0" bIns="0" rtlCol="0" anchor="ctr"/>
-          <a:lstStyle/>
-          <a:p>
-            <a:pPr indent="0" marL="0">
-              <a:buNone/>
-            </a:pPr>
-            <a:r>
-              <a:rPr lang="en-US" sz="1300" b="1" dirty="0">
-                <a:solidFill>
-                  <a:srgbClr val="1B4D3E"/>
-                </a:solidFill>
-                <a:latin typeface="Calibri" pitchFamily="34" charset="0"/>
-                <a:ea typeface="Calibri" pitchFamily="34" charset="-122"/>
-                <a:cs typeface="Calibri" pitchFamily="34" charset="-120"/>
-              </a:rPr>
-              <a:t>ご相談・AI診断は無料です。まずはお気軽にご相談ください。</a:t>
-            </a:r>
-            <a:endParaRPr lang="en-US" sz="1300" dirty="0"/>
-          </a:p>
-        </p:txBody>
-      </p:sp>
-      <p:sp>
-        <p:nvSpPr>
-          <p:cNvPr id="35" name="Text 28"/>
-          <p:cNvSpPr/>
-          <p:nvPr/>
-        </p:nvSpPr>
-        <p:spPr>
-          <a:xfrm>
-            <a:off x="457200" y="6537960"/>
-            <a:ext cx="7315200" cy="274320"/>
-          </a:xfrm>
-          <a:prstGeom prst="rect">
-            <a:avLst/>
-          </a:prstGeom>
-          <a:noFill/>
-          <a:ln/>
-        </p:spPr>
-        <p:txBody>
-          <a:bodyPr wrap="square" lIns="0" tIns="0" rIns="0" bIns="0" rtlCol="0" anchor="ctr"/>
-          <a:lstStyle/>
-          <a:p>
-            <a:pPr indent="0" marL="0">
-              <a:buNone/>
-            </a:pPr>
-            <a:r>
-              <a:rPr lang="en-US" sz="900" dirty="0">
-                <a:solidFill>
-                  <a:srgbClr val="6B7280"/>
-                </a:solidFill>
-                <a:latin typeface="Calibri" pitchFamily="34" charset="0"/>
-                <a:ea typeface="Calibri" pitchFamily="34" charset="-122"/>
-                <a:cs typeface="Calibri" pitchFamily="34" charset="-120"/>
-              </a:rPr>
               <a:t>一般社団法人 中小企業助成金支援協会　資料請求資料</a:t>
             </a:r>
             <a:endParaRPr lang="en-US" sz="900" dirty="0"/>
@@ -12054,7 +12594,7 @@
       </p:sp>
       <p:sp>
         <p:nvSpPr>
-          <p:cNvPr id="36" name="Text 29"/>
+          <p:cNvPr id="31" name="Text 29"/>
           <p:cNvSpPr/>
           <p:nvPr/>
         </p:nvSpPr>
@@ -12156,7 +12696,7 @@
                 <a:ea typeface="Bookman Old Style" pitchFamily="34" charset="-122"/>
                 <a:cs typeface="Bookman Old Style" pitchFamily="34" charset="-120"/>
               </a:rPr>
-              <a:t>ご利用にあたって</a:t>
+              <a:t>ご利用の流れ</a:t>
             </a:r>
             <a:endParaRPr lang="en-US" sz="2800" dirty="0"/>
           </a:p>
@@ -12195,7 +12735,7 @@
                 <a:ea typeface="Calibri" pitchFamily="34" charset="-122"/>
                 <a:cs typeface="Calibri" pitchFamily="34" charset="-120"/>
               </a:rPr>
-              <a:t>安心してご相談いただくために</a:t>
+              <a:t>無料相談から導入後のフォローまで、専門スタッフが一貫してサポートします</a:t>
             </a:r>
             <a:endParaRPr lang="en-US" sz="1300" dirty="0"/>
           </a:p>
@@ -12209,30 +12749,8 @@
         </p:nvSpPr>
         <p:spPr>
           <a:xfrm>
-            <a:off x="640080" y="1737360"/>
-            <a:ext cx="5074920" cy="1783080"/>
-          </a:xfrm>
-          <a:prstGeom prst="roundRect">
-            <a:avLst>
-              <a:gd name="adj" fmla="val 4103"/>
-            </a:avLst>
-          </a:prstGeom>
-          <a:solidFill>
-            <a:srgbClr val="F2F7F4"/>
-          </a:solidFill>
-          <a:ln/>
-        </p:spPr>
-      </p:sp>
-      <p:sp>
-        <p:nvSpPr>
-          <p:cNvPr id="5" name="Shape 3"/>
-          <p:cNvSpPr/>
-          <p:nvPr/>
-        </p:nvSpPr>
-        <p:spPr>
-          <a:xfrm>
-            <a:off x="982980" y="2240280"/>
-            <a:ext cx="777240" cy="777240"/>
+            <a:off x="937260" y="2057400"/>
+            <a:ext cx="1280160" cy="1280160"/>
           </a:xfrm>
           <a:prstGeom prst="ellipse">
             <a:avLst/>
@@ -12245,7 +12763,7 @@
       </p:sp>
       <p:pic>
         <p:nvPicPr>
-          <p:cNvPr id="6" name="Image 0" descr="/tmp/claude-0/-home-user-DM-/98b145ee-d85d-5913-a881-95f99ca0c0f7/scratchpad/josei-pptx/icons/search_FFFFFF.png">    </p:cNvPr>
+          <p:cNvPr id="5" name="Image 0" descr="/tmp/claude-0/-home-user-DM-/98b145ee-d85d-5913-a881-95f99ca0c0f7/scratchpad/josei-pptx/icons/search_FFFFFF.png">    </p:cNvPr>
           <p:cNvPicPr>
             <a:picLocks noChangeAspect="1"/>
           </p:cNvPicPr>
@@ -12259,8 +12777,8 @@
         </p:blipFill>
         <p:spPr>
           <a:xfrm>
-            <a:off x="1169518" y="2426818"/>
-            <a:ext cx="404165" cy="404165"/>
+            <a:off x="1244498" y="2364638"/>
+            <a:ext cx="665683" cy="665683"/>
           </a:xfrm>
           <a:prstGeom prst="rect">
             <a:avLst/>
@@ -12269,30 +12787,69 @@
       </p:pic>
       <p:sp>
         <p:nvSpPr>
+          <p:cNvPr id="6" name="Text 3"/>
+          <p:cNvSpPr/>
+          <p:nvPr/>
+        </p:nvSpPr>
+        <p:spPr>
+          <a:xfrm>
+            <a:off x="982980" y="2103120"/>
+            <a:ext cx="457200" cy="365760"/>
+          </a:xfrm>
+          <a:prstGeom prst="rect">
+            <a:avLst/>
+          </a:prstGeom>
+          <a:noFill/>
+          <a:ln/>
+        </p:spPr>
+        <p:txBody>
+          <a:bodyPr wrap="square" lIns="0" tIns="0" rIns="0" bIns="0" rtlCol="0" anchor="ctr"/>
+          <a:lstStyle/>
+          <a:p>
+            <a:pPr indent="0" marL="0">
+              <a:buNone/>
+            </a:pPr>
+            <a:r>
+              <a:rPr lang="en-US" sz="1100" b="1" dirty="0">
+                <a:solidFill>
+                  <a:srgbClr val="AFCABC"/>
+                </a:solidFill>
+                <a:latin typeface="Calibri" pitchFamily="34" charset="0"/>
+                <a:ea typeface="Calibri" pitchFamily="34" charset="-122"/>
+                <a:cs typeface="Calibri" pitchFamily="34" charset="-120"/>
+              </a:rPr>
+              <a:t>1</a:t>
+            </a:r>
+            <a:endParaRPr lang="en-US" sz="1100" dirty="0"/>
+          </a:p>
+        </p:txBody>
+      </p:sp>
+      <p:sp>
+        <p:nvSpPr>
           <p:cNvPr id="7" name="Text 4"/>
           <p:cNvSpPr/>
           <p:nvPr/>
         </p:nvSpPr>
         <p:spPr>
           <a:xfrm>
-            <a:off x="1920240" y="2011680"/>
-            <a:ext cx="3520440" cy="411480"/>
-          </a:xfrm>
-          <a:prstGeom prst="rect">
-            <a:avLst/>
-          </a:prstGeom>
-          <a:noFill/>
-          <a:ln/>
-        </p:spPr>
-        <p:txBody>
-          <a:bodyPr wrap="square" lIns="0" tIns="0" rIns="0" bIns="0" rtlCol="0" anchor="ctr"/>
-          <a:lstStyle/>
-          <a:p>
-            <a:pPr indent="0" marL="0">
-              <a:buNone/>
-            </a:pPr>
-            <a:r>
-              <a:rPr lang="en-US" sz="1450" b="1" dirty="0">
+            <a:off x="640080" y="3566160"/>
+            <a:ext cx="1874520" cy="365760"/>
+          </a:xfrm>
+          <a:prstGeom prst="rect">
+            <a:avLst/>
+          </a:prstGeom>
+          <a:noFill/>
+          <a:ln/>
+        </p:spPr>
+        <p:txBody>
+          <a:bodyPr wrap="square" lIns="0" tIns="0" rIns="0" bIns="0" rtlCol="0" anchor="ctr"/>
+          <a:lstStyle/>
+          <a:p>
+            <a:pPr algn="ctr" indent="0" marL="0">
+              <a:buNone/>
+            </a:pPr>
+            <a:r>
+              <a:rPr lang="en-US" sz="1300" b="1" dirty="0">
                 <a:solidFill>
                   <a:srgbClr val="1B4D3E"/>
                 </a:solidFill>
@@ -12300,9 +12857,9 @@
                 <a:ea typeface="Bookman Old Style" pitchFamily="34" charset="-122"/>
                 <a:cs typeface="Bookman Old Style" pitchFamily="34" charset="-120"/>
               </a:rPr>
-              <a:t>初回相談</a:t>
-            </a:r>
-            <a:endParaRPr lang="en-US" sz="1450" dirty="0"/>
+              <a:t>無料相談・AI診断</a:t>
+            </a:r>
+            <a:endParaRPr lang="en-US" sz="1300" dirty="0"/>
           </a:p>
         </p:txBody>
       </p:sp>
@@ -12314,27 +12871,27 @@
         </p:nvSpPr>
         <p:spPr>
           <a:xfrm>
-            <a:off x="1920240" y="2468880"/>
-            <a:ext cx="3520440" cy="822960"/>
-          </a:xfrm>
-          <a:prstGeom prst="rect">
-            <a:avLst/>
-          </a:prstGeom>
-          <a:noFill/>
-          <a:ln/>
-        </p:spPr>
-        <p:txBody>
-          <a:bodyPr wrap="square" lIns="0" tIns="0" rIns="0" bIns="0" rtlCol="0" anchor="ctr"/>
-          <a:lstStyle/>
-          <a:p>
-            <a:pPr indent="0" marL="0">
+            <a:off x="502920" y="3977640"/>
+            <a:ext cx="2148840" cy="1005840"/>
+          </a:xfrm>
+          <a:prstGeom prst="rect">
+            <a:avLst/>
+          </a:prstGeom>
+          <a:noFill/>
+          <a:ln/>
+        </p:spPr>
+        <p:txBody>
+          <a:bodyPr wrap="square" lIns="0" tIns="0" rIns="0" bIns="0" rtlCol="0" anchor="ctr"/>
+          <a:lstStyle/>
+          <a:p>
+            <a:pPr algn="ctr" indent="0" marL="0">
               <a:lnSpc>
-                <a:spcPts val="1600"/>
+                <a:spcPts val="1400"/>
               </a:lnSpc>
               <a:buNone/>
             </a:pPr>
             <a:r>
-              <a:rPr lang="en-US" sz="1300" b="1" dirty="0">
+              <a:rPr lang="en-US" sz="1050" dirty="0">
                 <a:solidFill>
                   <a:srgbClr val="24272E"/>
                 </a:solidFill>
@@ -12342,9 +12899,29 @@
                 <a:ea typeface="Calibri" pitchFamily="34" charset="-122"/>
                 <a:cs typeface="Calibri" pitchFamily="34" charset="-120"/>
               </a:rPr>
-              <a:t>無料</a:t>
-            </a:r>
-            <a:endParaRPr lang="en-US" sz="1300" dirty="0"/>
+              <a:t>業種・設備・規模をヒアリングし</a:t>
+            </a:r>
+            <a:endParaRPr lang="en-US" sz="1050" dirty="0"/>
+          </a:p>
+          <a:p>
+            <a:pPr algn="ctr" indent="0" marL="0">
+              <a:lnSpc>
+                <a:spcPts val="1400"/>
+              </a:lnSpc>
+              <a:buNone/>
+            </a:pPr>
+            <a:r>
+              <a:rPr lang="en-US" sz="1050" dirty="0">
+                <a:solidFill>
+                  <a:srgbClr val="24272E"/>
+                </a:solidFill>
+                <a:latin typeface="Calibri" pitchFamily="34" charset="0"/>
+                <a:ea typeface="Calibri" pitchFamily="34" charset="-122"/>
+                <a:cs typeface="Calibri" pitchFamily="34" charset="-120"/>
+              </a:rPr>
+              <a:t>対象補助金をAIで無料診断</a:t>
+            </a:r>
+            <a:endParaRPr lang="en-US" sz="1050" dirty="0"/>
           </a:p>
         </p:txBody>
       </p:sp>
@@ -12355,17 +12932,15 @@
           <p:nvPr/>
         </p:nvSpPr>
         <p:spPr>
-          <a:xfrm>
-            <a:off x="6080760" y="1737360"/>
-            <a:ext cx="5074920" cy="1783080"/>
-          </a:xfrm>
-          <a:prstGeom prst="roundRect">
-            <a:avLst>
-              <a:gd name="adj" fmla="val 4103"/>
-            </a:avLst>
+          <a:xfrm rot="5400000">
+            <a:off x="2542032" y="2596896"/>
+            <a:ext cx="201168" cy="201168"/>
+          </a:xfrm>
+          <a:prstGeom prst="triangle">
+            <a:avLst/>
           </a:prstGeom>
           <a:solidFill>
-            <a:srgbClr val="F2F7F4"/>
+            <a:srgbClr val="F2A93B"/>
           </a:solidFill>
           <a:ln/>
         </p:spPr>
@@ -12378,8 +12953,8 @@
         </p:nvSpPr>
         <p:spPr>
           <a:xfrm>
-            <a:off x="6423660" y="2240280"/>
-            <a:ext cx="777240" cy="777240"/>
+            <a:off x="3067812" y="2057400"/>
+            <a:ext cx="1280160" cy="1280160"/>
           </a:xfrm>
           <a:prstGeom prst="ellipse">
             <a:avLst/>
@@ -12392,7 +12967,7 @@
       </p:sp>
       <p:pic>
         <p:nvPicPr>
-          <p:cNvPr id="11" name="Image 1" descr="/tmp/claude-0/-home-user-DM-/98b145ee-d85d-5913-a881-95f99ca0c0f7/scratchpad/josei-pptx/icons/laptop_FFFFFF.png">    </p:cNvPr>
+          <p:cNvPr id="11" name="Image 1" descr="/tmp/claude-0/-home-user-DM-/98b145ee-d85d-5913-a881-95f99ca0c0f7/scratchpad/josei-pptx/icons/clipboard_FFFFFF.png">    </p:cNvPr>
           <p:cNvPicPr>
             <a:picLocks noChangeAspect="1"/>
           </p:cNvPicPr>
@@ -12406,8 +12981,8 @@
         </p:blipFill>
         <p:spPr>
           <a:xfrm>
-            <a:off x="6610198" y="2426818"/>
-            <a:ext cx="404165" cy="404165"/>
+            <a:off x="3375050" y="2364638"/>
+            <a:ext cx="665683" cy="665683"/>
           </a:xfrm>
           <a:prstGeom prst="rect">
             <a:avLst/>
@@ -12422,8 +12997,8 @@
         </p:nvSpPr>
         <p:spPr>
           <a:xfrm>
-            <a:off x="7360920" y="2011680"/>
-            <a:ext cx="3520440" cy="411480"/>
+            <a:off x="3113532" y="2103120"/>
+            <a:ext cx="457200" cy="365760"/>
           </a:xfrm>
           <a:prstGeom prst="rect">
             <a:avLst/>
@@ -12439,7 +13014,46 @@
               <a:buNone/>
             </a:pPr>
             <a:r>
-              <a:rPr lang="en-US" sz="1450" b="1" dirty="0">
+              <a:rPr lang="en-US" sz="1100" b="1" dirty="0">
+                <a:solidFill>
+                  <a:srgbClr val="AFCABC"/>
+                </a:solidFill>
+                <a:latin typeface="Calibri" pitchFamily="34" charset="0"/>
+                <a:ea typeface="Calibri" pitchFamily="34" charset="-122"/>
+                <a:cs typeface="Calibri" pitchFamily="34" charset="-120"/>
+              </a:rPr>
+              <a:t>2</a:t>
+            </a:r>
+            <a:endParaRPr lang="en-US" sz="1100" dirty="0"/>
+          </a:p>
+        </p:txBody>
+      </p:sp>
+      <p:sp>
+        <p:nvSpPr>
+          <p:cNvPr id="13" name="Text 9"/>
+          <p:cNvSpPr/>
+          <p:nvPr/>
+        </p:nvSpPr>
+        <p:spPr>
+          <a:xfrm>
+            <a:off x="2770632" y="3566160"/>
+            <a:ext cx="1874520" cy="365760"/>
+          </a:xfrm>
+          <a:prstGeom prst="rect">
+            <a:avLst/>
+          </a:prstGeom>
+          <a:noFill/>
+          <a:ln/>
+        </p:spPr>
+        <p:txBody>
+          <a:bodyPr wrap="square" lIns="0" tIns="0" rIns="0" bIns="0" rtlCol="0" anchor="ctr"/>
+          <a:lstStyle/>
+          <a:p>
+            <a:pPr algn="ctr" indent="0" marL="0">
+              <a:buNone/>
+            </a:pPr>
+            <a:r>
+              <a:rPr lang="en-US" sz="1300" b="1" dirty="0">
                 <a:solidFill>
                   <a:srgbClr val="1B4D3E"/>
                 </a:solidFill>
@@ -12447,41 +13061,41 @@
                 <a:ea typeface="Bookman Old Style" pitchFamily="34" charset="-122"/>
                 <a:cs typeface="Bookman Old Style" pitchFamily="34" charset="-120"/>
               </a:rPr>
-              <a:t>AI診断</a:t>
-            </a:r>
-            <a:endParaRPr lang="en-US" sz="1450" dirty="0"/>
-          </a:p>
-        </p:txBody>
-      </p:sp>
-      <p:sp>
-        <p:nvSpPr>
-          <p:cNvPr id="13" name="Text 9"/>
-          <p:cNvSpPr/>
-          <p:nvPr/>
-        </p:nvSpPr>
-        <p:spPr>
-          <a:xfrm>
-            <a:off x="7360920" y="2468880"/>
-            <a:ext cx="3520440" cy="822960"/>
-          </a:xfrm>
-          <a:prstGeom prst="rect">
-            <a:avLst/>
-          </a:prstGeom>
-          <a:noFill/>
-          <a:ln/>
-        </p:spPr>
-        <p:txBody>
-          <a:bodyPr wrap="square" lIns="0" tIns="0" rIns="0" bIns="0" rtlCol="0" anchor="ctr"/>
-          <a:lstStyle/>
-          <a:p>
-            <a:pPr indent="0" marL="0">
+              <a:t>制度の整理</a:t>
+            </a:r>
+            <a:endParaRPr lang="en-US" sz="1300" dirty="0"/>
+          </a:p>
+        </p:txBody>
+      </p:sp>
+      <p:sp>
+        <p:nvSpPr>
+          <p:cNvPr id="14" name="Text 10"/>
+          <p:cNvSpPr/>
+          <p:nvPr/>
+        </p:nvSpPr>
+        <p:spPr>
+          <a:xfrm>
+            <a:off x="2633472" y="3977640"/>
+            <a:ext cx="2148840" cy="1005840"/>
+          </a:xfrm>
+          <a:prstGeom prst="rect">
+            <a:avLst/>
+          </a:prstGeom>
+          <a:noFill/>
+          <a:ln/>
+        </p:spPr>
+        <p:txBody>
+          <a:bodyPr wrap="square" lIns="0" tIns="0" rIns="0" bIns="0" rtlCol="0" anchor="ctr"/>
+          <a:lstStyle/>
+          <a:p>
+            <a:pPr algn="ctr" indent="0" marL="0">
               <a:lnSpc>
-                <a:spcPts val="1600"/>
+                <a:spcPts val="1400"/>
               </a:lnSpc>
               <a:buNone/>
             </a:pPr>
             <a:r>
-              <a:rPr lang="en-US" sz="1300" b="1" dirty="0">
+              <a:rPr lang="en-US" sz="1050" dirty="0">
                 <a:solidFill>
                   <a:srgbClr val="24272E"/>
                 </a:solidFill>
@@ -12489,44 +13103,62 @@
                 <a:ea typeface="Calibri" pitchFamily="34" charset="-122"/>
                 <a:cs typeface="Calibri" pitchFamily="34" charset="-120"/>
               </a:rPr>
-              <a:t>無料</a:t>
-            </a:r>
-            <a:endParaRPr lang="en-US" sz="1300" dirty="0"/>
-          </a:p>
-        </p:txBody>
-      </p:sp>
-      <p:sp>
-        <p:nvSpPr>
-          <p:cNvPr id="14" name="Shape 10"/>
-          <p:cNvSpPr/>
-          <p:nvPr/>
-        </p:nvSpPr>
-        <p:spPr>
-          <a:xfrm>
-            <a:off x="640080" y="3794760"/>
-            <a:ext cx="5074920" cy="1783080"/>
-          </a:xfrm>
-          <a:prstGeom prst="roundRect">
-            <a:avLst>
-              <a:gd name="adj" fmla="val 4103"/>
-            </a:avLst>
+              <a:t>地域ごとの公募要領をもとに</a:t>
+            </a:r>
+            <a:endParaRPr lang="en-US" sz="1050" dirty="0"/>
+          </a:p>
+          <a:p>
+            <a:pPr algn="ctr" indent="0" marL="0">
+              <a:lnSpc>
+                <a:spcPts val="1400"/>
+              </a:lnSpc>
+              <a:buNone/>
+            </a:pPr>
+            <a:r>
+              <a:rPr lang="en-US" sz="1050" dirty="0">
+                <a:solidFill>
+                  <a:srgbClr val="24272E"/>
+                </a:solidFill>
+                <a:latin typeface="Calibri" pitchFamily="34" charset="0"/>
+                <a:ea typeface="Calibri" pitchFamily="34" charset="-122"/>
+                <a:cs typeface="Calibri" pitchFamily="34" charset="-120"/>
+              </a:rPr>
+              <a:t>使える制度を整理してご案内</a:t>
+            </a:r>
+            <a:endParaRPr lang="en-US" sz="1050" dirty="0"/>
+          </a:p>
+        </p:txBody>
+      </p:sp>
+      <p:sp>
+        <p:nvSpPr>
+          <p:cNvPr id="15" name="Shape 11"/>
+          <p:cNvSpPr/>
+          <p:nvPr/>
+        </p:nvSpPr>
+        <p:spPr>
+          <a:xfrm rot="5400000">
+            <a:off x="4672584" y="2596896"/>
+            <a:ext cx="201168" cy="201168"/>
+          </a:xfrm>
+          <a:prstGeom prst="triangle">
+            <a:avLst/>
           </a:prstGeom>
           <a:solidFill>
-            <a:srgbClr val="F2F7F4"/>
+            <a:srgbClr val="F2A93B"/>
           </a:solidFill>
           <a:ln/>
         </p:spPr>
       </p:sp>
       <p:sp>
         <p:nvSpPr>
-          <p:cNvPr id="15" name="Shape 11"/>
-          <p:cNvSpPr/>
-          <p:nvPr/>
-        </p:nvSpPr>
-        <p:spPr>
-          <a:xfrm>
-            <a:off x="982980" y="4297680"/>
-            <a:ext cx="777240" cy="777240"/>
+          <p:cNvPr id="16" name="Shape 12"/>
+          <p:cNvSpPr/>
+          <p:nvPr/>
+        </p:nvSpPr>
+        <p:spPr>
+          <a:xfrm>
+            <a:off x="5198364" y="2057400"/>
+            <a:ext cx="1280160" cy="1280160"/>
           </a:xfrm>
           <a:prstGeom prst="ellipse">
             <a:avLst/>
@@ -12539,7 +13171,7 @@
       </p:sp>
       <p:pic>
         <p:nvPicPr>
-          <p:cNvPr id="16" name="Image 2" descr="/tmp/claude-0/-home-user-DM-/98b145ee-d85d-5913-a881-95f99ca0c0f7/scratchpad/josei-pptx/icons/shield_FFFFFF.png">    </p:cNvPr>
+          <p:cNvPr id="17" name="Image 2" descr="/tmp/claude-0/-home-user-DM-/98b145ee-d85d-5913-a881-95f99ca0c0f7/scratchpad/josei-pptx/icons/handshake_FFFFFF.png">    </p:cNvPr>
           <p:cNvPicPr>
             <a:picLocks noChangeAspect="1"/>
           </p:cNvPicPr>
@@ -12553,8 +13185,8 @@
         </p:blipFill>
         <p:spPr>
           <a:xfrm>
-            <a:off x="1169518" y="4484218"/>
-            <a:ext cx="404165" cy="404165"/>
+            <a:off x="5505602" y="2364638"/>
+            <a:ext cx="665683" cy="665683"/>
           </a:xfrm>
           <a:prstGeom prst="rect">
             <a:avLst/>
@@ -12563,14 +13195,14 @@
       </p:pic>
       <p:sp>
         <p:nvSpPr>
-          <p:cNvPr id="17" name="Text 12"/>
-          <p:cNvSpPr/>
-          <p:nvPr/>
-        </p:nvSpPr>
-        <p:spPr>
-          <a:xfrm>
-            <a:off x="1920240" y="4069080"/>
-            <a:ext cx="3520440" cy="411480"/>
+          <p:cNvPr id="18" name="Text 13"/>
+          <p:cNvSpPr/>
+          <p:nvPr/>
+        </p:nvSpPr>
+        <p:spPr>
+          <a:xfrm>
+            <a:off x="5244084" y="2103120"/>
+            <a:ext cx="457200" cy="365760"/>
           </a:xfrm>
           <a:prstGeom prst="rect">
             <a:avLst/>
@@ -12586,7 +13218,46 @@
               <a:buNone/>
             </a:pPr>
             <a:r>
-              <a:rPr lang="en-US" sz="1450" b="1" dirty="0">
+              <a:rPr lang="en-US" sz="1100" b="1" dirty="0">
+                <a:solidFill>
+                  <a:srgbClr val="AFCABC"/>
+                </a:solidFill>
+                <a:latin typeface="Calibri" pitchFamily="34" charset="0"/>
+                <a:ea typeface="Calibri" pitchFamily="34" charset="-122"/>
+                <a:cs typeface="Calibri" pitchFamily="34" charset="-120"/>
+              </a:rPr>
+              <a:t>3</a:t>
+            </a:r>
+            <a:endParaRPr lang="en-US" sz="1100" dirty="0"/>
+          </a:p>
+        </p:txBody>
+      </p:sp>
+      <p:sp>
+        <p:nvSpPr>
+          <p:cNvPr id="19" name="Text 14"/>
+          <p:cNvSpPr/>
+          <p:nvPr/>
+        </p:nvSpPr>
+        <p:spPr>
+          <a:xfrm>
+            <a:off x="4901184" y="3566160"/>
+            <a:ext cx="1874520" cy="365760"/>
+          </a:xfrm>
+          <a:prstGeom prst="rect">
+            <a:avLst/>
+          </a:prstGeom>
+          <a:noFill/>
+          <a:ln/>
+        </p:spPr>
+        <p:txBody>
+          <a:bodyPr wrap="square" lIns="0" tIns="0" rIns="0" bIns="0" rtlCol="0" anchor="ctr"/>
+          <a:lstStyle/>
+          <a:p>
+            <a:pPr algn="ctr" indent="0" marL="0">
+              <a:buNone/>
+            </a:pPr>
+            <a:r>
+              <a:rPr lang="en-US" sz="1300" b="1" dirty="0">
                 <a:solidFill>
                   <a:srgbClr val="1B4D3E"/>
                 </a:solidFill>
@@ -12594,41 +13265,41 @@
                 <a:ea typeface="Bookman Old Style" pitchFamily="34" charset="-122"/>
                 <a:cs typeface="Bookman Old Style" pitchFamily="34" charset="-120"/>
               </a:rPr>
-              <a:t>勧誘方針</a:t>
-            </a:r>
-            <a:endParaRPr lang="en-US" sz="1450" dirty="0"/>
-          </a:p>
-        </p:txBody>
-      </p:sp>
-      <p:sp>
-        <p:nvSpPr>
-          <p:cNvPr id="18" name="Text 13"/>
-          <p:cNvSpPr/>
-          <p:nvPr/>
-        </p:nvSpPr>
-        <p:spPr>
-          <a:xfrm>
-            <a:off x="1920240" y="4526280"/>
-            <a:ext cx="3520440" cy="822960"/>
-          </a:xfrm>
-          <a:prstGeom prst="rect">
-            <a:avLst/>
-          </a:prstGeom>
-          <a:noFill/>
-          <a:ln/>
-        </p:spPr>
-        <p:txBody>
-          <a:bodyPr wrap="square" lIns="0" tIns="0" rIns="0" bIns="0" rtlCol="0" anchor="ctr"/>
-          <a:lstStyle/>
-          <a:p>
-            <a:pPr indent="0" marL="0">
+              <a:t>施工会社をご紹介</a:t>
+            </a:r>
+            <a:endParaRPr lang="en-US" sz="1300" dirty="0"/>
+          </a:p>
+        </p:txBody>
+      </p:sp>
+      <p:sp>
+        <p:nvSpPr>
+          <p:cNvPr id="20" name="Text 15"/>
+          <p:cNvSpPr/>
+          <p:nvPr/>
+        </p:nvSpPr>
+        <p:spPr>
+          <a:xfrm>
+            <a:off x="4764024" y="3977640"/>
+            <a:ext cx="2148840" cy="1005840"/>
+          </a:xfrm>
+          <a:prstGeom prst="rect">
+            <a:avLst/>
+          </a:prstGeom>
+          <a:noFill/>
+          <a:ln/>
+        </p:spPr>
+        <p:txBody>
+          <a:bodyPr wrap="square" lIns="0" tIns="0" rIns="0" bIns="0" rtlCol="0" anchor="ctr"/>
+          <a:lstStyle/>
+          <a:p>
+            <a:pPr algn="ctr" indent="0" marL="0">
               <a:lnSpc>
-                <a:spcPts val="1600"/>
+                <a:spcPts val="1400"/>
               </a:lnSpc>
               <a:buNone/>
             </a:pPr>
             <a:r>
-              <a:rPr lang="en-US" sz="1300" b="1" dirty="0">
+              <a:rPr lang="en-US" sz="1050" dirty="0">
                 <a:solidFill>
                   <a:srgbClr val="24272E"/>
                 </a:solidFill>
@@ -12636,44 +13307,62 @@
                 <a:ea typeface="Calibri" pitchFamily="34" charset="-122"/>
                 <a:cs typeface="Calibri" pitchFamily="34" charset="-120"/>
               </a:rPr>
-              <a:t>無理な勧誘は行いません</a:t>
-            </a:r>
-            <a:endParaRPr lang="en-US" sz="1300" dirty="0"/>
-          </a:p>
-        </p:txBody>
-      </p:sp>
-      <p:sp>
-        <p:nvSpPr>
-          <p:cNvPr id="19" name="Shape 14"/>
-          <p:cNvSpPr/>
-          <p:nvPr/>
-        </p:nvSpPr>
-        <p:spPr>
-          <a:xfrm>
-            <a:off x="6080760" y="3794760"/>
-            <a:ext cx="5074920" cy="1783080"/>
-          </a:xfrm>
-          <a:prstGeom prst="roundRect">
-            <a:avLst>
-              <a:gd name="adj" fmla="val 4103"/>
-            </a:avLst>
+              <a:t>実績のある地域の</a:t>
+            </a:r>
+            <a:endParaRPr lang="en-US" sz="1050" dirty="0"/>
+          </a:p>
+          <a:p>
+            <a:pPr algn="ctr" indent="0" marL="0">
+              <a:lnSpc>
+                <a:spcPts val="1400"/>
+              </a:lnSpc>
+              <a:buNone/>
+            </a:pPr>
+            <a:r>
+              <a:rPr lang="en-US" sz="1050" dirty="0">
+                <a:solidFill>
+                  <a:srgbClr val="24272E"/>
+                </a:solidFill>
+                <a:latin typeface="Calibri" pitchFamily="34" charset="0"/>
+                <a:ea typeface="Calibri" pitchFamily="34" charset="-122"/>
+                <a:cs typeface="Calibri" pitchFamily="34" charset="-120"/>
+              </a:rPr>
+              <a:t>担当施工会社をお繋ぎ</a:t>
+            </a:r>
+            <a:endParaRPr lang="en-US" sz="1050" dirty="0"/>
+          </a:p>
+        </p:txBody>
+      </p:sp>
+      <p:sp>
+        <p:nvSpPr>
+          <p:cNvPr id="21" name="Shape 16"/>
+          <p:cNvSpPr/>
+          <p:nvPr/>
+        </p:nvSpPr>
+        <p:spPr>
+          <a:xfrm rot="5400000">
+            <a:off x="6803136" y="2596896"/>
+            <a:ext cx="201168" cy="201168"/>
+          </a:xfrm>
+          <a:prstGeom prst="triangle">
+            <a:avLst/>
           </a:prstGeom>
           <a:solidFill>
-            <a:srgbClr val="F2F7F4"/>
+            <a:srgbClr val="F2A93B"/>
           </a:solidFill>
           <a:ln/>
         </p:spPr>
       </p:sp>
       <p:sp>
         <p:nvSpPr>
-          <p:cNvPr id="20" name="Shape 15"/>
-          <p:cNvSpPr/>
-          <p:nvPr/>
-        </p:nvSpPr>
-        <p:spPr>
-          <a:xfrm>
-            <a:off x="6423660" y="4297680"/>
-            <a:ext cx="777240" cy="777240"/>
+          <p:cNvPr id="22" name="Shape 17"/>
+          <p:cNvSpPr/>
+          <p:nvPr/>
+        </p:nvSpPr>
+        <p:spPr>
+          <a:xfrm>
+            <a:off x="7328916" y="2057400"/>
+            <a:ext cx="1280160" cy="1280160"/>
           </a:xfrm>
           <a:prstGeom prst="ellipse">
             <a:avLst/>
@@ -12686,7 +13375,7 @@
       </p:sp>
       <p:pic>
         <p:nvPicPr>
-          <p:cNvPr id="21" name="Image 3" descr="/tmp/claude-0/-home-user-DM-/98b145ee-d85d-5913-a881-95f99ca0c0f7/scratchpad/josei-pptx/icons/handshake_FFFFFF.png">    </p:cNvPr>
+          <p:cNvPr id="23" name="Image 3" descr="/tmp/claude-0/-home-user-DM-/98b145ee-d85d-5913-a881-95f99ca0c0f7/scratchpad/josei-pptx/icons/filesign_FFFFFF.png">    </p:cNvPr>
           <p:cNvPicPr>
             <a:picLocks noChangeAspect="1"/>
           </p:cNvPicPr>
@@ -12700,8 +13389,8 @@
         </p:blipFill>
         <p:spPr>
           <a:xfrm>
-            <a:off x="6610198" y="4484218"/>
-            <a:ext cx="404165" cy="404165"/>
+            <a:off x="7636154" y="2364638"/>
+            <a:ext cx="665683" cy="665683"/>
           </a:xfrm>
           <a:prstGeom prst="rect">
             <a:avLst/>
@@ -12710,14 +13399,14 @@
       </p:pic>
       <p:sp>
         <p:nvSpPr>
-          <p:cNvPr id="22" name="Text 16"/>
-          <p:cNvSpPr/>
-          <p:nvPr/>
-        </p:nvSpPr>
-        <p:spPr>
-          <a:xfrm>
-            <a:off x="7360920" y="4069080"/>
-            <a:ext cx="3520440" cy="411480"/>
+          <p:cNvPr id="24" name="Text 18"/>
+          <p:cNvSpPr/>
+          <p:nvPr/>
+        </p:nvSpPr>
+        <p:spPr>
+          <a:xfrm>
+            <a:off x="7374636" y="2103120"/>
+            <a:ext cx="457200" cy="365760"/>
           </a:xfrm>
           <a:prstGeom prst="rect">
             <a:avLst/>
@@ -12733,7 +13422,46 @@
               <a:buNone/>
             </a:pPr>
             <a:r>
-              <a:rPr lang="en-US" sz="1450" b="1" dirty="0">
+              <a:rPr lang="en-US" sz="1100" b="1" dirty="0">
+                <a:solidFill>
+                  <a:srgbClr val="AFCABC"/>
+                </a:solidFill>
+                <a:latin typeface="Calibri" pitchFamily="34" charset="0"/>
+                <a:ea typeface="Calibri" pitchFamily="34" charset="-122"/>
+                <a:cs typeface="Calibri" pitchFamily="34" charset="-120"/>
+              </a:rPr>
+              <a:t>4</a:t>
+            </a:r>
+            <a:endParaRPr lang="en-US" sz="1100" dirty="0"/>
+          </a:p>
+        </p:txBody>
+      </p:sp>
+      <p:sp>
+        <p:nvSpPr>
+          <p:cNvPr id="25" name="Text 19"/>
+          <p:cNvSpPr/>
+          <p:nvPr/>
+        </p:nvSpPr>
+        <p:spPr>
+          <a:xfrm>
+            <a:off x="7031736" y="3566160"/>
+            <a:ext cx="1874520" cy="365760"/>
+          </a:xfrm>
+          <a:prstGeom prst="rect">
+            <a:avLst/>
+          </a:prstGeom>
+          <a:noFill/>
+          <a:ln/>
+        </p:spPr>
+        <p:txBody>
+          <a:bodyPr wrap="square" lIns="0" tIns="0" rIns="0" bIns="0" rtlCol="0" anchor="ctr"/>
+          <a:lstStyle/>
+          <a:p>
+            <a:pPr algn="ctr" indent="0" marL="0">
+              <a:buNone/>
+            </a:pPr>
+            <a:r>
+              <a:rPr lang="en-US" sz="1300" b="1" dirty="0">
                 <a:solidFill>
                   <a:srgbClr val="1B4D3E"/>
                 </a:solidFill>
@@ -12741,41 +13469,41 @@
                 <a:ea typeface="Bookman Old Style" pitchFamily="34" charset="-122"/>
                 <a:cs typeface="Bookman Old Style" pitchFamily="34" charset="-120"/>
               </a:rPr>
-              <a:t>施工・工事費用</a:t>
-            </a:r>
-            <a:endParaRPr lang="en-US" sz="1450" dirty="0"/>
-          </a:p>
-        </p:txBody>
-      </p:sp>
-      <p:sp>
-        <p:nvSpPr>
-          <p:cNvPr id="23" name="Text 17"/>
-          <p:cNvSpPr/>
-          <p:nvPr/>
-        </p:nvSpPr>
-        <p:spPr>
-          <a:xfrm>
-            <a:off x="7360920" y="4526280"/>
-            <a:ext cx="3520440" cy="822960"/>
-          </a:xfrm>
-          <a:prstGeom prst="rect">
-            <a:avLst/>
-          </a:prstGeom>
-          <a:noFill/>
-          <a:ln/>
-        </p:spPr>
-        <p:txBody>
-          <a:bodyPr wrap="square" lIns="0" tIns="0" rIns="0" bIns="0" rtlCol="0" anchor="ctr"/>
-          <a:lstStyle/>
-          <a:p>
-            <a:pPr indent="0" marL="0">
+              <a:t>導入・申請サポート</a:t>
+            </a:r>
+            <a:endParaRPr lang="en-US" sz="1300" dirty="0"/>
+          </a:p>
+        </p:txBody>
+      </p:sp>
+      <p:sp>
+        <p:nvSpPr>
+          <p:cNvPr id="26" name="Text 20"/>
+          <p:cNvSpPr/>
+          <p:nvPr/>
+        </p:nvSpPr>
+        <p:spPr>
+          <a:xfrm>
+            <a:off x="6894576" y="3977640"/>
+            <a:ext cx="2148840" cy="1005840"/>
+          </a:xfrm>
+          <a:prstGeom prst="rect">
+            <a:avLst/>
+          </a:prstGeom>
+          <a:noFill/>
+          <a:ln/>
+        </p:spPr>
+        <p:txBody>
+          <a:bodyPr wrap="square" lIns="0" tIns="0" rIns="0" bIns="0" rtlCol="0" anchor="ctr"/>
+          <a:lstStyle/>
+          <a:p>
+            <a:pPr algn="ctr" indent="0" marL="0">
               <a:lnSpc>
-                <a:spcPts val="1600"/>
+                <a:spcPts val="1400"/>
               </a:lnSpc>
               <a:buNone/>
             </a:pPr>
             <a:r>
-              <a:rPr lang="en-US" sz="1300" b="1" dirty="0">
+              <a:rPr lang="en-US" sz="1050" dirty="0">
                 <a:solidFill>
                   <a:srgbClr val="24272E"/>
                 </a:solidFill>
@@ -12783,19 +13511,19 @@
                 <a:ea typeface="Calibri" pitchFamily="34" charset="-122"/>
                 <a:cs typeface="Calibri" pitchFamily="34" charset="-120"/>
               </a:rPr>
-              <a:t>ご紹介する地域の施工会社との</a:t>
-            </a:r>
-            <a:endParaRPr lang="en-US" sz="1300" dirty="0"/>
-          </a:p>
-          <a:p>
-            <a:pPr indent="0" marL="0">
+              <a:t>補助金申請から設備導入まで</a:t>
+            </a:r>
+            <a:endParaRPr lang="en-US" sz="1050" dirty="0"/>
+          </a:p>
+          <a:p>
+            <a:pPr algn="ctr" indent="0" marL="0">
               <a:lnSpc>
-                <a:spcPts val="1600"/>
+                <a:spcPts val="1400"/>
               </a:lnSpc>
               <a:buNone/>
             </a:pPr>
             <a:r>
-              <a:rPr lang="en-US" sz="1300" b="1" dirty="0">
+              <a:rPr lang="en-US" sz="1050" dirty="0">
                 <a:solidFill>
                   <a:srgbClr val="24272E"/>
                 </a:solidFill>
@@ -12803,22 +13531,86 @@
                 <a:ea typeface="Calibri" pitchFamily="34" charset="-122"/>
                 <a:cs typeface="Calibri" pitchFamily="34" charset="-120"/>
               </a:rPr>
-              <a:t>個別のお見積りによります</a:t>
-            </a:r>
-            <a:endParaRPr lang="en-US" sz="1300" dirty="0"/>
-          </a:p>
-        </p:txBody>
-      </p:sp>
-      <p:sp>
-        <p:nvSpPr>
-          <p:cNvPr id="24" name="Text 18"/>
-          <p:cNvSpPr/>
-          <p:nvPr/>
-        </p:nvSpPr>
-        <p:spPr>
-          <a:xfrm>
-            <a:off x="457200" y="6537960"/>
-            <a:ext cx="7315200" cy="274320"/>
+              <a:t>伴走支援</a:t>
+            </a:r>
+            <a:endParaRPr lang="en-US" sz="1050" dirty="0"/>
+          </a:p>
+        </p:txBody>
+      </p:sp>
+      <p:sp>
+        <p:nvSpPr>
+          <p:cNvPr id="27" name="Shape 21"/>
+          <p:cNvSpPr/>
+          <p:nvPr/>
+        </p:nvSpPr>
+        <p:spPr>
+          <a:xfrm rot="5400000">
+            <a:off x="8933688" y="2596896"/>
+            <a:ext cx="201168" cy="201168"/>
+          </a:xfrm>
+          <a:prstGeom prst="triangle">
+            <a:avLst/>
+          </a:prstGeom>
+          <a:solidFill>
+            <a:srgbClr val="F2A93B"/>
+          </a:solidFill>
+          <a:ln/>
+        </p:spPr>
+      </p:sp>
+      <p:sp>
+        <p:nvSpPr>
+          <p:cNvPr id="28" name="Shape 22"/>
+          <p:cNvSpPr/>
+          <p:nvPr/>
+        </p:nvSpPr>
+        <p:spPr>
+          <a:xfrm>
+            <a:off x="9459468" y="2057400"/>
+            <a:ext cx="1280160" cy="1280160"/>
+          </a:xfrm>
+          <a:prstGeom prst="ellipse">
+            <a:avLst/>
+          </a:prstGeom>
+          <a:solidFill>
+            <a:srgbClr val="F2A93B"/>
+          </a:solidFill>
+          <a:ln/>
+        </p:spPr>
+      </p:sp>
+      <p:pic>
+        <p:nvPicPr>
+          <p:cNvPr id="29" name="Image 4" descr="/tmp/claude-0/-home-user-DM-/98b145ee-d85d-5913-a881-95f99ca0c0f7/scratchpad/josei-pptx/icons/check_FFFFFF.png">    </p:cNvPr>
+          <p:cNvPicPr>
+            <a:picLocks noChangeAspect="1"/>
+          </p:cNvPicPr>
+          <p:nvPr/>
+        </p:nvPicPr>
+        <p:blipFill>
+          <a:blip r:embed="rId5"/>
+          <a:stretch>
+            <a:fillRect/>
+          </a:stretch>
+        </p:blipFill>
+        <p:spPr>
+          <a:xfrm>
+            <a:off x="9766706" y="2364638"/>
+            <a:ext cx="665683" cy="665683"/>
+          </a:xfrm>
+          <a:prstGeom prst="rect">
+            <a:avLst/>
+          </a:prstGeom>
+        </p:spPr>
+      </p:pic>
+      <p:sp>
+        <p:nvSpPr>
+          <p:cNvPr id="30" name="Text 23"/>
+          <p:cNvSpPr/>
+          <p:nvPr/>
+        </p:nvSpPr>
+        <p:spPr>
+          <a:xfrm>
+            <a:off x="9505188" y="2103120"/>
+            <a:ext cx="457200" cy="365760"/>
           </a:xfrm>
           <a:prstGeom prst="rect">
             <a:avLst/>
@@ -12834,14 +13626,215 @@
               <a:buNone/>
             </a:pPr>
             <a:r>
-              <a:rPr lang="en-US" sz="900" dirty="0">
-                <a:solidFill>
-                  <a:srgbClr val="6B7280"/>
+              <a:rPr lang="en-US" sz="1100" b="1" dirty="0">
+                <a:solidFill>
+                  <a:srgbClr val="AFCABC"/>
                 </a:solidFill>
                 <a:latin typeface="Calibri" pitchFamily="34" charset="0"/>
                 <a:ea typeface="Calibri" pitchFamily="34" charset="-122"/>
                 <a:cs typeface="Calibri" pitchFamily="34" charset="-120"/>
               </a:rPr>
+              <a:t>5</a:t>
+            </a:r>
+            <a:endParaRPr lang="en-US" sz="1100" dirty="0"/>
+          </a:p>
+        </p:txBody>
+      </p:sp>
+      <p:sp>
+        <p:nvSpPr>
+          <p:cNvPr id="31" name="Text 24"/>
+          <p:cNvSpPr/>
+          <p:nvPr/>
+        </p:nvSpPr>
+        <p:spPr>
+          <a:xfrm>
+            <a:off x="9162288" y="3566160"/>
+            <a:ext cx="1874520" cy="365760"/>
+          </a:xfrm>
+          <a:prstGeom prst="rect">
+            <a:avLst/>
+          </a:prstGeom>
+          <a:noFill/>
+          <a:ln/>
+        </p:spPr>
+        <p:txBody>
+          <a:bodyPr wrap="square" lIns="0" tIns="0" rIns="0" bIns="0" rtlCol="0" anchor="ctr"/>
+          <a:lstStyle/>
+          <a:p>
+            <a:pPr algn="ctr" indent="0" marL="0">
+              <a:buNone/>
+            </a:pPr>
+            <a:r>
+              <a:rPr lang="en-US" sz="1300" b="1" dirty="0">
+                <a:solidFill>
+                  <a:srgbClr val="1B4D3E"/>
+                </a:solidFill>
+                <a:latin typeface="Bookman Old Style" pitchFamily="34" charset="0"/>
+                <a:ea typeface="Bookman Old Style" pitchFamily="34" charset="-122"/>
+                <a:cs typeface="Bookman Old Style" pitchFamily="34" charset="-120"/>
+              </a:rPr>
+              <a:t>導入後フォロー</a:t>
+            </a:r>
+            <a:endParaRPr lang="en-US" sz="1300" dirty="0"/>
+          </a:p>
+        </p:txBody>
+      </p:sp>
+      <p:sp>
+        <p:nvSpPr>
+          <p:cNvPr id="32" name="Text 25"/>
+          <p:cNvSpPr/>
+          <p:nvPr/>
+        </p:nvSpPr>
+        <p:spPr>
+          <a:xfrm>
+            <a:off x="9025128" y="3977640"/>
+            <a:ext cx="2148840" cy="1005840"/>
+          </a:xfrm>
+          <a:prstGeom prst="rect">
+            <a:avLst/>
+          </a:prstGeom>
+          <a:noFill/>
+          <a:ln/>
+        </p:spPr>
+        <p:txBody>
+          <a:bodyPr wrap="square" lIns="0" tIns="0" rIns="0" bIns="0" rtlCol="0" anchor="ctr"/>
+          <a:lstStyle/>
+          <a:p>
+            <a:pPr algn="ctr" indent="0" marL="0">
+              <a:lnSpc>
+                <a:spcPts val="1400"/>
+              </a:lnSpc>
+              <a:buNone/>
+            </a:pPr>
+            <a:r>
+              <a:rPr lang="en-US" sz="1050" dirty="0">
+                <a:solidFill>
+                  <a:srgbClr val="24272E"/>
+                </a:solidFill>
+                <a:latin typeface="Calibri" pitchFamily="34" charset="0"/>
+                <a:ea typeface="Calibri" pitchFamily="34" charset="-122"/>
+                <a:cs typeface="Calibri" pitchFamily="34" charset="-120"/>
+              </a:rPr>
+              <a:t>交付後の実績報告等を</a:t>
+            </a:r>
+            <a:endParaRPr lang="en-US" sz="1050" dirty="0"/>
+          </a:p>
+          <a:p>
+            <a:pPr algn="ctr" indent="0" marL="0">
+              <a:lnSpc>
+                <a:spcPts val="1400"/>
+              </a:lnSpc>
+              <a:buNone/>
+            </a:pPr>
+            <a:r>
+              <a:rPr lang="en-US" sz="1050" dirty="0">
+                <a:solidFill>
+                  <a:srgbClr val="24272E"/>
+                </a:solidFill>
+                <a:latin typeface="Calibri" pitchFamily="34" charset="0"/>
+                <a:ea typeface="Calibri" pitchFamily="34" charset="-122"/>
+                <a:cs typeface="Calibri" pitchFamily="34" charset="-120"/>
+              </a:rPr>
+              <a:t>サポート</a:t>
+            </a:r>
+            <a:endParaRPr lang="en-US" sz="1050" dirty="0"/>
+          </a:p>
+        </p:txBody>
+      </p:sp>
+      <p:sp>
+        <p:nvSpPr>
+          <p:cNvPr id="33" name="Shape 26"/>
+          <p:cNvSpPr/>
+          <p:nvPr/>
+        </p:nvSpPr>
+        <p:spPr>
+          <a:xfrm>
+            <a:off x="640080" y="5212080"/>
+            <a:ext cx="10881360" cy="914400"/>
+          </a:xfrm>
+          <a:prstGeom prst="roundRect">
+            <a:avLst>
+              <a:gd name="adj" fmla="val 8000"/>
+            </a:avLst>
+          </a:prstGeom>
+          <a:solidFill>
+            <a:srgbClr val="F2F7F4"/>
+          </a:solidFill>
+          <a:ln/>
+        </p:spPr>
+      </p:sp>
+      <p:sp>
+        <p:nvSpPr>
+          <p:cNvPr id="34" name="Text 27"/>
+          <p:cNvSpPr/>
+          <p:nvPr/>
+        </p:nvSpPr>
+        <p:spPr>
+          <a:xfrm>
+            <a:off x="914400" y="5212080"/>
+            <a:ext cx="10332720" cy="914400"/>
+          </a:xfrm>
+          <a:prstGeom prst="rect">
+            <a:avLst/>
+          </a:prstGeom>
+          <a:noFill/>
+          <a:ln/>
+        </p:spPr>
+        <p:txBody>
+          <a:bodyPr wrap="square" lIns="0" tIns="0" rIns="0" bIns="0" rtlCol="0" anchor="ctr"/>
+          <a:lstStyle/>
+          <a:p>
+            <a:pPr indent="0" marL="0">
+              <a:buNone/>
+            </a:pPr>
+            <a:r>
+              <a:rPr lang="en-US" sz="1300" b="1" dirty="0">
+                <a:solidFill>
+                  <a:srgbClr val="1B4D3E"/>
+                </a:solidFill>
+                <a:latin typeface="Calibri" pitchFamily="34" charset="0"/>
+                <a:ea typeface="Calibri" pitchFamily="34" charset="-122"/>
+                <a:cs typeface="Calibri" pitchFamily="34" charset="-120"/>
+              </a:rPr>
+              <a:t>ご相談・AI診断は無料です。まずはお気軽にご相談ください。</a:t>
+            </a:r>
+            <a:endParaRPr lang="en-US" sz="1300" dirty="0"/>
+          </a:p>
+        </p:txBody>
+      </p:sp>
+      <p:sp>
+        <p:nvSpPr>
+          <p:cNvPr id="35" name="Text 28"/>
+          <p:cNvSpPr/>
+          <p:nvPr/>
+        </p:nvSpPr>
+        <p:spPr>
+          <a:xfrm>
+            <a:off x="457200" y="6537960"/>
+            <a:ext cx="7315200" cy="274320"/>
+          </a:xfrm>
+          <a:prstGeom prst="rect">
+            <a:avLst/>
+          </a:prstGeom>
+          <a:noFill/>
+          <a:ln/>
+        </p:spPr>
+        <p:txBody>
+          <a:bodyPr wrap="square" lIns="0" tIns="0" rIns="0" bIns="0" rtlCol="0" anchor="ctr"/>
+          <a:lstStyle/>
+          <a:p>
+            <a:pPr indent="0" marL="0">
+              <a:buNone/>
+            </a:pPr>
+            <a:r>
+              <a:rPr lang="en-US" sz="900" dirty="0">
+                <a:solidFill>
+                  <a:srgbClr val="6B7280"/>
+                </a:solidFill>
+                <a:latin typeface="Calibri" pitchFamily="34" charset="0"/>
+                <a:ea typeface="Calibri" pitchFamily="34" charset="-122"/>
+                <a:cs typeface="Calibri" pitchFamily="34" charset="-120"/>
+              </a:rPr>
               <a:t>一般社団法人 中小企業助成金支援協会　資料請求資料</a:t>
             </a:r>
             <a:endParaRPr lang="en-US" sz="900" dirty="0"/>
@@ -12850,7 +13843,7 @@
       </p:sp>
       <p:sp>
         <p:nvSpPr>
-          <p:cNvPr id="25" name="Text 19"/>
+          <p:cNvPr id="36" name="Text 29"/>
           <p:cNvSpPr/>
           <p:nvPr/>
         </p:nvSpPr>

--- a/docs/資料/中小企業助成金支援協会_資料請求資料.pptx
+++ b/docs/資料/中小企業助成金支援協会_資料請求資料.pptx
@@ -1990,7 +1990,7 @@
         </p:nvSpPr>
         <p:spPr>
           <a:xfrm>
-            <a:off x="640080" y="1234440"/>
+            <a:off x="640080" y="1188720"/>
             <a:ext cx="8503920" cy="2194560"/>
           </a:xfrm>
           <a:prstGeom prst="rect">
@@ -2038,7 +2038,7 @@
                 <a:ea typeface="Bookman Old Style" pitchFamily="34" charset="-122"/>
                 <a:cs typeface="Bookman Old Style" pitchFamily="34" charset="-120"/>
               </a:rPr>
-              <a:t>固定費圧縮の新常識。</a:t>
+              <a:t>「実質0円」という選択。</a:t>
             </a:r>
             <a:endParaRPr lang="en-US" sz="4000" dirty="0"/>
           </a:p>
@@ -2052,8 +2052,8 @@
         </p:nvSpPr>
         <p:spPr>
           <a:xfrm>
-            <a:off x="640080" y="3429000"/>
-            <a:ext cx="7863840" cy="822960"/>
+            <a:off x="640080" y="3383280"/>
+            <a:ext cx="8138160" cy="822960"/>
           </a:xfrm>
           <a:prstGeom prst="rect">
             <a:avLst/>
@@ -2067,12 +2067,12 @@
           <a:p>
             <a:pPr indent="0" marL="0">
               <a:lnSpc>
-                <a:spcPts val="2200"/>
+                <a:spcPts val="2100"/>
               </a:lnSpc>
               <a:buNone/>
             </a:pPr>
             <a:r>
-              <a:rPr lang="en-US" sz="1500" dirty="0">
+              <a:rPr lang="en-US" sz="1400" dirty="0">
                 <a:solidFill>
                   <a:srgbClr val="DCEEE3"/>
                 </a:solidFill>
@@ -2080,19 +2080,19 @@
                 <a:ea typeface="Calibri" pitchFamily="34" charset="-122"/>
                 <a:cs typeface="Calibri" pitchFamily="34" charset="-120"/>
               </a:rPr>
-              <a:t>電気代・設備導入にまつわる助成金・補助金を、中立な立場の専門家が</a:t>
-            </a:r>
-            <a:endParaRPr lang="en-US" sz="1500" dirty="0"/>
+              <a:t>電気代・設備投資の負担は、助成金・補助金でとことん軽くできます。</a:t>
+            </a:r>
+            <a:endParaRPr lang="en-US" sz="1400" dirty="0"/>
           </a:p>
           <a:p>
             <a:pPr indent="0" marL="0">
               <a:lnSpc>
-                <a:spcPts val="2200"/>
+                <a:spcPts val="2100"/>
               </a:lnSpc>
               <a:buNone/>
             </a:pPr>
             <a:r>
-              <a:rPr lang="en-US" sz="1500" dirty="0">
+              <a:rPr lang="en-US" sz="1400" dirty="0">
                 <a:solidFill>
                   <a:srgbClr val="DCEEE3"/>
                 </a:solidFill>
@@ -2100,9 +2100,9 @@
                 <a:ea typeface="Calibri" pitchFamily="34" charset="-122"/>
                 <a:cs typeface="Calibri" pitchFamily="34" charset="-120"/>
               </a:rPr>
-              <a:t>無料のAI診断でご案内します</a:t>
-            </a:r>
-            <a:endParaRPr lang="en-US" sz="1500" dirty="0"/>
+              <a:t>中立な立場の専門家が、無料のAI診断でご案内します。</a:t>
+            </a:r>
+            <a:endParaRPr lang="en-US" sz="1400" dirty="0"/>
           </a:p>
         </p:txBody>
       </p:sp>
@@ -2114,12 +2114,12 @@
         </p:nvSpPr>
         <p:spPr>
           <a:xfrm>
-            <a:off x="640080" y="4480560"/>
-            <a:ext cx="6035040" cy="1554480"/>
+            <a:off x="640080" y="4343400"/>
+            <a:ext cx="3931920" cy="1691640"/>
           </a:xfrm>
           <a:prstGeom prst="roundRect">
             <a:avLst>
-              <a:gd name="adj" fmla="val 5882"/>
+              <a:gd name="adj" fmla="val 5405"/>
             </a:avLst>
           </a:prstGeom>
           <a:solidFill>
@@ -2136,8 +2136,8 @@
         </p:nvSpPr>
         <p:spPr>
           <a:xfrm>
-            <a:off x="914400" y="4617720"/>
-            <a:ext cx="3200400" cy="365760"/>
+            <a:off x="868680" y="4507992"/>
+            <a:ext cx="3474720" cy="320040"/>
           </a:xfrm>
           <a:prstGeom prst="rect">
             <a:avLst/>
@@ -2153,7 +2153,7 @@
               <a:buNone/>
             </a:pPr>
             <a:r>
-              <a:rPr lang="en-US" sz="1200" dirty="0">
+              <a:rPr lang="en-US" sz="1150" dirty="0">
                 <a:solidFill>
                   <a:srgbClr val="DCEEE3"/>
                 </a:solidFill>
@@ -2163,7 +2163,7 @@
               </a:rPr>
               <a:t>電気代の実質負担を</a:t>
             </a:r>
-            <a:endParaRPr lang="en-US" sz="1200" dirty="0"/>
+            <a:endParaRPr lang="en-US" sz="1150" dirty="0"/>
           </a:p>
         </p:txBody>
       </p:sp>
@@ -2175,8 +2175,8 @@
         </p:nvSpPr>
         <p:spPr>
           <a:xfrm>
-            <a:off x="914400" y="4892040"/>
-            <a:ext cx="4114800" cy="868680"/>
+            <a:off x="868680" y="4800600"/>
+            <a:ext cx="3474720" cy="731520"/>
           </a:xfrm>
           <a:prstGeom prst="rect">
             <a:avLst/>
@@ -2192,7 +2192,7 @@
               <a:buNone/>
             </a:pPr>
             <a:r>
-              <a:rPr lang="en-US" sz="4600" b="1" dirty="0">
+              <a:rPr lang="en-US" sz="3800" b="1" dirty="0">
                 <a:solidFill>
                   <a:srgbClr val="F2A93B"/>
                 </a:solidFill>
@@ -2206,7 +2206,7 @@
               <a:buNone/>
             </a:pPr>
             <a:r>
-              <a:rPr lang="en-US" sz="2400" b="1" dirty="0">
+              <a:rPr lang="en-US" sz="2000" b="1" dirty="0">
                 <a:solidFill>
                   <a:srgbClr val="F2A93B"/>
                 </a:solidFill>
@@ -2220,7 +2220,7 @@
               <a:buNone/>
             </a:pPr>
             <a:r>
-              <a:rPr lang="en-US" sz="4600" b="1" dirty="0">
+              <a:rPr lang="en-US" sz="3800" b="1" dirty="0">
                 <a:solidFill>
                   <a:srgbClr val="F2A93B"/>
                 </a:solidFill>
@@ -2234,7 +2234,7 @@
               <a:buNone/>
             </a:pPr>
             <a:r>
-              <a:rPr lang="en-US" sz="2800" b="1" dirty="0">
+              <a:rPr lang="en-US" sz="2400" b="1" dirty="0">
                 <a:solidFill>
                   <a:srgbClr val="F2A93B"/>
                 </a:solidFill>
@@ -2244,7 +2244,7 @@
               </a:rPr>
               <a:t>%</a:t>
             </a:r>
-            <a:endParaRPr lang="en-US" sz="4600" dirty="0"/>
+            <a:endParaRPr lang="en-US" sz="3800" dirty="0"/>
           </a:p>
         </p:txBody>
       </p:sp>
@@ -2256,8 +2256,8 @@
         </p:nvSpPr>
         <p:spPr>
           <a:xfrm>
-            <a:off x="914400" y="5715000"/>
-            <a:ext cx="5486400" cy="274320"/>
+            <a:off x="868680" y="5550408"/>
+            <a:ext cx="3474720" cy="365760"/>
           </a:xfrm>
           <a:prstGeom prst="rect">
             <a:avLst/>
@@ -2273,30 +2273,52 @@
               <a:buNone/>
             </a:pPr>
             <a:r>
-              <a:rPr lang="en-US" sz="950" i="1" dirty="0">
-                <a:solidFill>
-                  <a:srgbClr val="AFCABC"/>
+              <a:rPr lang="en-US" sz="1200" b="1" dirty="0">
+                <a:solidFill>
+                  <a:srgbClr val="FFFFFF"/>
                 </a:solidFill>
                 <a:latin typeface="Calibri" pitchFamily="34" charset="0"/>
                 <a:ea typeface="Calibri" pitchFamily="34" charset="-122"/>
                 <a:cs typeface="Calibri" pitchFamily="34" charset="-120"/>
               </a:rPr>
-              <a:t>削減　※支援先の実績に基づく実際の削減額です</a:t>
-            </a:r>
-            <a:endParaRPr lang="en-US" sz="950" dirty="0"/>
-          </a:p>
-        </p:txBody>
-      </p:sp>
-      <p:sp>
-        <p:nvSpPr>
-          <p:cNvPr id="9" name="Text 7"/>
-          <p:cNvSpPr/>
-          <p:nvPr/>
-        </p:nvSpPr>
-        <p:spPr>
-          <a:xfrm>
-            <a:off x="640080" y="6355080"/>
-            <a:ext cx="8229600" cy="320040"/>
+              <a:t>削減</a:t>
+            </a:r>
+            <a:endParaRPr lang="en-US" sz="1200" dirty="0"/>
+          </a:p>
+        </p:txBody>
+      </p:sp>
+      <p:sp>
+        <p:nvSpPr>
+          <p:cNvPr id="9" name="Shape 7"/>
+          <p:cNvSpPr/>
+          <p:nvPr/>
+        </p:nvSpPr>
+        <p:spPr>
+          <a:xfrm>
+            <a:off x="4846320" y="4343400"/>
+            <a:ext cx="3931920" cy="1691640"/>
+          </a:xfrm>
+          <a:prstGeom prst="roundRect">
+            <a:avLst>
+              <a:gd name="adj" fmla="val 5405"/>
+            </a:avLst>
+          </a:prstGeom>
+          <a:solidFill>
+            <a:srgbClr val="F2A93B"/>
+          </a:solidFill>
+          <a:ln/>
+        </p:spPr>
+      </p:sp>
+      <p:sp>
+        <p:nvSpPr>
+          <p:cNvPr id="10" name="Text 8"/>
+          <p:cNvSpPr/>
+          <p:nvPr/>
+        </p:nvSpPr>
+        <p:spPr>
+          <a:xfrm>
+            <a:off x="5074920" y="4507992"/>
+            <a:ext cx="3474720" cy="320040"/>
           </a:xfrm>
           <a:prstGeom prst="rect">
             <a:avLst/>
@@ -2312,23 +2334,179 @@
               <a:buNone/>
             </a:pPr>
             <a:r>
-              <a:rPr lang="en-US" sz="1000" dirty="0">
-                <a:solidFill>
-                  <a:srgbClr val="8AA79A"/>
+              <a:rPr lang="en-US" sz="1150" dirty="0">
+                <a:solidFill>
+                  <a:srgbClr val="12362B"/>
                 </a:solidFill>
                 <a:latin typeface="Calibri" pitchFamily="34" charset="0"/>
                 <a:ea typeface="Calibri" pitchFamily="34" charset="-122"/>
                 <a:cs typeface="Calibri" pitchFamily="34" charset="-120"/>
               </a:rPr>
+              <a:t>設備投資の自己負担が</a:t>
+            </a:r>
+            <a:endParaRPr lang="en-US" sz="1150" dirty="0"/>
+          </a:p>
+        </p:txBody>
+      </p:sp>
+      <p:sp>
+        <p:nvSpPr>
+          <p:cNvPr id="11" name="Text 9"/>
+          <p:cNvSpPr/>
+          <p:nvPr/>
+        </p:nvSpPr>
+        <p:spPr>
+          <a:xfrm>
+            <a:off x="5074920" y="4800600"/>
+            <a:ext cx="3474720" cy="731520"/>
+          </a:xfrm>
+          <a:prstGeom prst="rect">
+            <a:avLst/>
+          </a:prstGeom>
+          <a:noFill/>
+          <a:ln/>
+        </p:spPr>
+        <p:txBody>
+          <a:bodyPr wrap="square" lIns="0" tIns="0" rIns="0" bIns="0" rtlCol="0" anchor="ctr"/>
+          <a:lstStyle/>
+          <a:p>
+            <a:pPr indent="0" marL="0">
+              <a:buNone/>
+            </a:pPr>
+            <a:r>
+              <a:rPr lang="en-US" sz="3400" b="1" dirty="0">
+                <a:solidFill>
+                  <a:srgbClr val="12362B"/>
+                </a:solidFill>
+                <a:latin typeface="Bookman Old Style" pitchFamily="34" charset="0"/>
+                <a:ea typeface="Bookman Old Style" pitchFamily="34" charset="-122"/>
+                <a:cs typeface="Bookman Old Style" pitchFamily="34" charset="-120"/>
+              </a:rPr>
+              <a:t>実質0円</a:t>
+            </a:r>
+            <a:endParaRPr lang="en-US" sz="3400" dirty="0"/>
+          </a:p>
+        </p:txBody>
+      </p:sp>
+      <p:sp>
+        <p:nvSpPr>
+          <p:cNvPr id="12" name="Text 10"/>
+          <p:cNvSpPr/>
+          <p:nvPr/>
+        </p:nvSpPr>
+        <p:spPr>
+          <a:xfrm>
+            <a:off x="5074920" y="5550408"/>
+            <a:ext cx="3474720" cy="365760"/>
+          </a:xfrm>
+          <a:prstGeom prst="rect">
+            <a:avLst/>
+          </a:prstGeom>
+          <a:noFill/>
+          <a:ln/>
+        </p:spPr>
+        <p:txBody>
+          <a:bodyPr wrap="square" lIns="0" tIns="0" rIns="0" bIns="0" rtlCol="0" anchor="ctr"/>
+          <a:lstStyle/>
+          <a:p>
+            <a:pPr indent="0" marL="0">
+              <a:buNone/>
+            </a:pPr>
+            <a:r>
+              <a:rPr lang="en-US" sz="1200" b="1" dirty="0">
+                <a:solidFill>
+                  <a:srgbClr val="12362B"/>
+                </a:solidFill>
+                <a:latin typeface="Calibri" pitchFamily="34" charset="0"/>
+                <a:ea typeface="Calibri" pitchFamily="34" charset="-122"/>
+                <a:cs typeface="Calibri" pitchFamily="34" charset="-120"/>
+              </a:rPr>
+              <a:t>になったケースも</a:t>
+            </a:r>
+            <a:endParaRPr lang="en-US" sz="1200" dirty="0"/>
+          </a:p>
+        </p:txBody>
+      </p:sp>
+      <p:sp>
+        <p:nvSpPr>
+          <p:cNvPr id="13" name="Text 11"/>
+          <p:cNvSpPr/>
+          <p:nvPr/>
+        </p:nvSpPr>
+        <p:spPr>
+          <a:xfrm>
+            <a:off x="640080" y="6144768"/>
+            <a:ext cx="8138160" cy="274320"/>
+          </a:xfrm>
+          <a:prstGeom prst="rect">
+            <a:avLst/>
+          </a:prstGeom>
+          <a:noFill/>
+          <a:ln/>
+        </p:spPr>
+        <p:txBody>
+          <a:bodyPr wrap="square" lIns="0" tIns="0" rIns="0" bIns="0" rtlCol="0" anchor="ctr"/>
+          <a:lstStyle/>
+          <a:p>
+            <a:pPr indent="0" marL="0">
+              <a:buNone/>
+            </a:pPr>
+            <a:r>
+              <a:rPr lang="en-US" sz="900" i="1" dirty="0">
+                <a:solidFill>
+                  <a:srgbClr val="AFCABC"/>
+                </a:solidFill>
+                <a:latin typeface="Calibri" pitchFamily="34" charset="0"/>
+                <a:ea typeface="Calibri" pitchFamily="34" charset="-122"/>
+                <a:cs typeface="Calibri" pitchFamily="34" charset="-120"/>
+              </a:rPr>
+              <a:t>※支援先の実績に基づく実際の数値です。金額・効果には個社差があります。</a:t>
+            </a:r>
+            <a:endParaRPr lang="en-US" sz="900" dirty="0"/>
+          </a:p>
+        </p:txBody>
+      </p:sp>
+      <p:sp>
+        <p:nvSpPr>
+          <p:cNvPr id="14" name="Text 12"/>
+          <p:cNvSpPr/>
+          <p:nvPr/>
+        </p:nvSpPr>
+        <p:spPr>
+          <a:xfrm>
+            <a:off x="640080" y="6446520"/>
+            <a:ext cx="8229600" cy="274320"/>
+          </a:xfrm>
+          <a:prstGeom prst="rect">
+            <a:avLst/>
+          </a:prstGeom>
+          <a:noFill/>
+          <a:ln/>
+        </p:spPr>
+        <p:txBody>
+          <a:bodyPr wrap="square" lIns="0" tIns="0" rIns="0" bIns="0" rtlCol="0" anchor="ctr"/>
+          <a:lstStyle/>
+          <a:p>
+            <a:pPr indent="0" marL="0">
+              <a:buNone/>
+            </a:pPr>
+            <a:r>
+              <a:rPr lang="en-US" sz="950" dirty="0">
+                <a:solidFill>
+                  <a:srgbClr val="8AA79A"/>
+                </a:solidFill>
+                <a:latin typeface="Calibri" pitchFamily="34" charset="0"/>
+                <a:ea typeface="Calibri" pitchFamily="34" charset="-122"/>
+                <a:cs typeface="Calibri" pitchFamily="34" charset="-120"/>
+              </a:rPr>
               <a:t>発行：一般社団法人 中小企業助成金支援協会　／　〔発行年月を記入〕</a:t>
             </a:r>
-            <a:endParaRPr lang="en-US" sz="1000" dirty="0"/>
-          </a:p>
-        </p:txBody>
-      </p:sp>
-      <p:sp>
-        <p:nvSpPr>
-          <p:cNvPr id="10" name="Shape 8"/>
+            <a:endParaRPr lang="en-US" sz="950" dirty="0"/>
+          </a:p>
+        </p:txBody>
+      </p:sp>
+      <p:sp>
+        <p:nvSpPr>
+          <p:cNvPr id="15" name="Shape 13"/>
           <p:cNvSpPr/>
           <p:nvPr/>
         </p:nvSpPr>
@@ -2348,7 +2526,7 @@
       </p:sp>
       <p:sp>
         <p:nvSpPr>
-          <p:cNvPr id="11" name="Shape 9"/>
+          <p:cNvPr id="16" name="Shape 14"/>
           <p:cNvSpPr/>
           <p:nvPr/>
         </p:nvSpPr>
@@ -2368,7 +2546,7 @@
       </p:sp>
       <p:pic>
         <p:nvPicPr>
-          <p:cNvPr id="12" name="Image 0" descr="/tmp/claude-0/-home-user-DM-/98b145ee-d85d-5913-a881-95f99ca0c0f7/scratchpad/josei-pptx/icons/coins_F2A93B.png">    </p:cNvPr>
+          <p:cNvPr id="17" name="Image 0" descr="/tmp/claude-0/-home-user-DM-/98b145ee-d85d-5913-a881-95f99ca0c0f7/scratchpad/josei-pptx/icons/coins_F2A93B.png">    </p:cNvPr>
           <p:cNvPicPr>
             <a:picLocks noChangeAspect="1"/>
           </p:cNvPicPr>
@@ -2392,7 +2570,7 @@
       </p:pic>
       <p:sp>
         <p:nvSpPr>
-          <p:cNvPr id="13" name="Shape 10"/>
+          <p:cNvPr id="18" name="Shape 15"/>
           <p:cNvSpPr/>
           <p:nvPr/>
         </p:nvSpPr>
@@ -2412,7 +2590,7 @@
       </p:sp>
       <p:pic>
         <p:nvPicPr>
-          <p:cNvPr id="14" name="Image 1" descr="/tmp/claude-0/-home-user-DM-/98b145ee-d85d-5913-a881-95f99ca0c0f7/scratchpad/josei-pptx/icons/yen_FFFFFF.png">    </p:cNvPr>
+          <p:cNvPr id="19" name="Image 1" descr="/tmp/claude-0/-home-user-DM-/98b145ee-d85d-5913-a881-95f99ca0c0f7/scratchpad/josei-pptx/icons/yen_FFFFFF.png">    </p:cNvPr>
           <p:cNvPicPr>
             <a:picLocks noChangeAspect="1"/>
           </p:cNvPicPr>
@@ -2436,7 +2614,7 @@
       </p:pic>
       <p:sp>
         <p:nvSpPr>
-          <p:cNvPr id="15" name="Shape 11"/>
+          <p:cNvPr id="20" name="Shape 16"/>
           <p:cNvSpPr/>
           <p:nvPr/>
         </p:nvSpPr>
@@ -2456,7 +2634,7 @@
       </p:sp>
       <p:pic>
         <p:nvPicPr>
-          <p:cNvPr id="16" name="Image 2" descr="/tmp/claude-0/-home-user-DM-/98b145ee-d85d-5913-a881-95f99ca0c0f7/scratchpad/josei-pptx/icons/filesign_F2A93B.png">    </p:cNvPr>
+          <p:cNvPr id="21" name="Image 2" descr="/tmp/claude-0/-home-user-DM-/98b145ee-d85d-5913-a881-95f99ca0c0f7/scratchpad/josei-pptx/icons/filesign_F2A93B.png">    </p:cNvPr>
           <p:cNvPicPr>
             <a:picLocks noChangeAspect="1"/>
           </p:cNvPicPr>
@@ -3623,7 +3801,7 @@
                 <a:ea typeface="Calibri" pitchFamily="34" charset="-122"/>
                 <a:cs typeface="Calibri" pitchFamily="34" charset="-120"/>
               </a:rPr>
-              <a:t>設備・規模やご紹介する施工会社により異なります。補助金活用で自己負担を抑えられる場合もございます。</a:t>
+              <a:t>設備・規模やご紹介する施工会社により異なります。補助金を組み合わせることで、自己負担が実質0円に近づいた支援実績もございます。</a:t>
             </a:r>
             <a:endParaRPr lang="en-US" sz="1200" dirty="0"/>
           </a:p>
@@ -7362,7 +7540,7 @@
                 <a:ea typeface="Calibri" pitchFamily="34" charset="-122"/>
                 <a:cs typeface="Calibri" pitchFamily="34" charset="-120"/>
               </a:rPr>
-              <a:t>電気代の負担が軽くなり、</a:t>
+              <a:t>電気代が軽くなり、設備投資も</a:t>
             </a:r>
             <a:endParaRPr lang="en-US" sz="1200" dirty="0"/>
           </a:p>
@@ -7382,7 +7560,7 @@
                 <a:ea typeface="Calibri" pitchFamily="34" charset="-122"/>
                 <a:cs typeface="Calibri" pitchFamily="34" charset="-120"/>
               </a:rPr>
-              <a:t>浮いた資金を次の一手に使える</a:t>
+              <a:t>実質0円で叶うケースも</a:t>
             </a:r>
             <a:endParaRPr lang="en-US" sz="1200" dirty="0"/>
           </a:p>
